--- a/book/slides/pptx/ch08-sorting.pptx
+++ b/book/slides/pptx/ch08-sorting.pptx
@@ -47,12 +47,112 @@
   </p:sldIdLst>
   <p:sldSz cx="12192000" cy="6858000"/>
   <p:notesSz cx="6858000" cy="9144000"/>
+  <p:defaultTextStyle>
+    <a:defPPr>
+      <a:defRPr lang="en-CN"/>
+    </a:defPPr>
+    <a:lvl1pPr marL="0" algn="l" defTabSz="914400" rtl="0" eaLnBrk="1" latinLnBrk="0" hangingPunct="1">
+      <a:defRPr sz="1800" kern="1200">
+        <a:solidFill>
+          <a:schemeClr val="tx1"/>
+        </a:solidFill>
+        <a:latin typeface="+mn-lt"/>
+        <a:ea typeface="+mn-ea"/>
+        <a:cs typeface="+mn-cs"/>
+      </a:defRPr>
+    </a:lvl1pPr>
+    <a:lvl2pPr marL="457200" algn="l" defTabSz="914400" rtl="0" eaLnBrk="1" latinLnBrk="0" hangingPunct="1">
+      <a:defRPr sz="1800" kern="1200">
+        <a:solidFill>
+          <a:schemeClr val="tx1"/>
+        </a:solidFill>
+        <a:latin typeface="+mn-lt"/>
+        <a:ea typeface="+mn-ea"/>
+        <a:cs typeface="+mn-cs"/>
+      </a:defRPr>
+    </a:lvl2pPr>
+    <a:lvl3pPr marL="914400" algn="l" defTabSz="914400" rtl="0" eaLnBrk="1" latinLnBrk="0" hangingPunct="1">
+      <a:defRPr sz="1800" kern="1200">
+        <a:solidFill>
+          <a:schemeClr val="tx1"/>
+        </a:solidFill>
+        <a:latin typeface="+mn-lt"/>
+        <a:ea typeface="+mn-ea"/>
+        <a:cs typeface="+mn-cs"/>
+      </a:defRPr>
+    </a:lvl3pPr>
+    <a:lvl4pPr marL="1371600" algn="l" defTabSz="914400" rtl="0" eaLnBrk="1" latinLnBrk="0" hangingPunct="1">
+      <a:defRPr sz="1800" kern="1200">
+        <a:solidFill>
+          <a:schemeClr val="tx1"/>
+        </a:solidFill>
+        <a:latin typeface="+mn-lt"/>
+        <a:ea typeface="+mn-ea"/>
+        <a:cs typeface="+mn-cs"/>
+      </a:defRPr>
+    </a:lvl4pPr>
+    <a:lvl5pPr marL="1828800" algn="l" defTabSz="914400" rtl="0" eaLnBrk="1" latinLnBrk="0" hangingPunct="1">
+      <a:defRPr sz="1800" kern="1200">
+        <a:solidFill>
+          <a:schemeClr val="tx1"/>
+        </a:solidFill>
+        <a:latin typeface="+mn-lt"/>
+        <a:ea typeface="+mn-ea"/>
+        <a:cs typeface="+mn-cs"/>
+      </a:defRPr>
+    </a:lvl5pPr>
+    <a:lvl6pPr marL="2286000" algn="l" defTabSz="914400" rtl="0" eaLnBrk="1" latinLnBrk="0" hangingPunct="1">
+      <a:defRPr sz="1800" kern="1200">
+        <a:solidFill>
+          <a:schemeClr val="tx1"/>
+        </a:solidFill>
+        <a:latin typeface="+mn-lt"/>
+        <a:ea typeface="+mn-ea"/>
+        <a:cs typeface="+mn-cs"/>
+      </a:defRPr>
+    </a:lvl6pPr>
+    <a:lvl7pPr marL="2743200" algn="l" defTabSz="914400" rtl="0" eaLnBrk="1" latinLnBrk="0" hangingPunct="1">
+      <a:defRPr sz="1800" kern="1200">
+        <a:solidFill>
+          <a:schemeClr val="tx1"/>
+        </a:solidFill>
+        <a:latin typeface="+mn-lt"/>
+        <a:ea typeface="+mn-ea"/>
+        <a:cs typeface="+mn-cs"/>
+      </a:defRPr>
+    </a:lvl7pPr>
+    <a:lvl8pPr marL="3200400" algn="l" defTabSz="914400" rtl="0" eaLnBrk="1" latinLnBrk="0" hangingPunct="1">
+      <a:defRPr sz="1800" kern="1200">
+        <a:solidFill>
+          <a:schemeClr val="tx1"/>
+        </a:solidFill>
+        <a:latin typeface="+mn-lt"/>
+        <a:ea typeface="+mn-ea"/>
+        <a:cs typeface="+mn-cs"/>
+      </a:defRPr>
+    </a:lvl8pPr>
+    <a:lvl9pPr marL="3657600" algn="l" defTabSz="914400" rtl="0" eaLnBrk="1" latinLnBrk="0" hangingPunct="1">
+      <a:defRPr sz="1800" kern="1200">
+        <a:solidFill>
+          <a:schemeClr val="tx1"/>
+        </a:solidFill>
+        <a:latin typeface="+mn-lt"/>
+        <a:ea typeface="+mn-ea"/>
+        <a:cs typeface="+mn-cs"/>
+      </a:defRPr>
+    </a:lvl9pPr>
+  </p:defaultTextStyle>
 </p:presentation>
 </file>
 
 <file path=ppt/notesMasters/notesMaster1.xml><?xml version="1.0" encoding="utf-8"?>
 <p:notesMaster xmlns:a="http://schemas.openxmlformats.org/drawingml/2006/main" xmlns:r="http://schemas.openxmlformats.org/officeDocument/2006/relationships" xmlns:p="http://schemas.openxmlformats.org/presentationml/2006/main">
   <p:cSld>
+    <p:bg>
+      <p:bgRef idx="1001">
+        <a:schemeClr val="bg1"/>
+      </p:bgRef>
+    </p:bg>
     <p:spTree>
       <p:nvGrpSpPr>
         <p:cNvPr id="1" name=""/>
@@ -70,10 +170,102 @@
     </p:spTree>
   </p:cSld>
   <p:clrMap bg1="lt1" tx1="dk1" bg2="lt2" tx2="dk2" accent1="accent1" accent2="accent2" accent3="accent3" accent4="accent4" accent5="accent5" accent6="accent6" hlink="hlink" folHlink="folHlink"/>
+  <p:notesStyle>
+    <a:lvl1pPr marL="0" algn="l" defTabSz="914400" rtl="0" eaLnBrk="1" latinLnBrk="0" hangingPunct="1">
+      <a:defRPr sz="1200" kern="1200">
+        <a:solidFill>
+          <a:schemeClr val="tx1"/>
+        </a:solidFill>
+        <a:latin typeface="+mn-lt"/>
+        <a:ea typeface="+mn-ea"/>
+        <a:cs typeface="+mn-cs"/>
+      </a:defRPr>
+    </a:lvl1pPr>
+    <a:lvl2pPr marL="457200" algn="l" defTabSz="914400" rtl="0" eaLnBrk="1" latinLnBrk="0" hangingPunct="1">
+      <a:defRPr sz="1200" kern="1200">
+        <a:solidFill>
+          <a:schemeClr val="tx1"/>
+        </a:solidFill>
+        <a:latin typeface="+mn-lt"/>
+        <a:ea typeface="+mn-ea"/>
+        <a:cs typeface="+mn-cs"/>
+      </a:defRPr>
+    </a:lvl2pPr>
+    <a:lvl3pPr marL="914400" algn="l" defTabSz="914400" rtl="0" eaLnBrk="1" latinLnBrk="0" hangingPunct="1">
+      <a:defRPr sz="1200" kern="1200">
+        <a:solidFill>
+          <a:schemeClr val="tx1"/>
+        </a:solidFill>
+        <a:latin typeface="+mn-lt"/>
+        <a:ea typeface="+mn-ea"/>
+        <a:cs typeface="+mn-cs"/>
+      </a:defRPr>
+    </a:lvl3pPr>
+    <a:lvl4pPr marL="1371600" algn="l" defTabSz="914400" rtl="0" eaLnBrk="1" latinLnBrk="0" hangingPunct="1">
+      <a:defRPr sz="1200" kern="1200">
+        <a:solidFill>
+          <a:schemeClr val="tx1"/>
+        </a:solidFill>
+        <a:latin typeface="+mn-lt"/>
+        <a:ea typeface="+mn-ea"/>
+        <a:cs typeface="+mn-cs"/>
+      </a:defRPr>
+    </a:lvl4pPr>
+    <a:lvl5pPr marL="1828800" algn="l" defTabSz="914400" rtl="0" eaLnBrk="1" latinLnBrk="0" hangingPunct="1">
+      <a:defRPr sz="1200" kern="1200">
+        <a:solidFill>
+          <a:schemeClr val="tx1"/>
+        </a:solidFill>
+        <a:latin typeface="+mn-lt"/>
+        <a:ea typeface="+mn-ea"/>
+        <a:cs typeface="+mn-cs"/>
+      </a:defRPr>
+    </a:lvl5pPr>
+    <a:lvl6pPr marL="2286000" algn="l" defTabSz="914400" rtl="0" eaLnBrk="1" latinLnBrk="0" hangingPunct="1">
+      <a:defRPr sz="1200" kern="1200">
+        <a:solidFill>
+          <a:schemeClr val="tx1"/>
+        </a:solidFill>
+        <a:latin typeface="+mn-lt"/>
+        <a:ea typeface="+mn-ea"/>
+        <a:cs typeface="+mn-cs"/>
+      </a:defRPr>
+    </a:lvl6pPr>
+    <a:lvl7pPr marL="2743200" algn="l" defTabSz="914400" rtl="0" eaLnBrk="1" latinLnBrk="0" hangingPunct="1">
+      <a:defRPr sz="1200" kern="1200">
+        <a:solidFill>
+          <a:schemeClr val="tx1"/>
+        </a:solidFill>
+        <a:latin typeface="+mn-lt"/>
+        <a:ea typeface="+mn-ea"/>
+        <a:cs typeface="+mn-cs"/>
+      </a:defRPr>
+    </a:lvl7pPr>
+    <a:lvl8pPr marL="3200400" algn="l" defTabSz="914400" rtl="0" eaLnBrk="1" latinLnBrk="0" hangingPunct="1">
+      <a:defRPr sz="1200" kern="1200">
+        <a:solidFill>
+          <a:schemeClr val="tx1"/>
+        </a:solidFill>
+        <a:latin typeface="+mn-lt"/>
+        <a:ea typeface="+mn-ea"/>
+        <a:cs typeface="+mn-cs"/>
+      </a:defRPr>
+    </a:lvl8pPr>
+    <a:lvl9pPr marL="3657600" algn="l" defTabSz="914400" rtl="0" eaLnBrk="1" latinLnBrk="0" hangingPunct="1">
+      <a:defRPr sz="1200" kern="1200">
+        <a:solidFill>
+          <a:schemeClr val="tx1"/>
+        </a:solidFill>
+        <a:latin typeface="+mn-lt"/>
+        <a:ea typeface="+mn-ea"/>
+        <a:cs typeface="+mn-cs"/>
+      </a:defRPr>
+    </a:lvl9pPr>
+  </p:notesStyle>
 </p:notesMaster>
 </file>
 
-<file path=ppt/notesSlides/notesSlide12.xml><?xml version="1.0" encoding="utf-8"?>
+<file path=ppt/notesSlides/notesSlide1.xml><?xml version="1.0" encoding="utf-8"?>
 <p:notes xmlns:a="http://schemas.openxmlformats.org/drawingml/2006/main" xmlns:r="http://schemas.openxmlformats.org/officeDocument/2006/relationships" xmlns:p="http://schemas.openxmlformats.org/presentationml/2006/main">
   <p:cSld>
     <p:spTree>
@@ -113,7 +305,7 @@
           <a:bodyPr/>
           <a:lstStyle/>
           <a:p>
-            <a:pPr marL="0" indent="0" lvl="0">
+            <a:pPr marL="0" lvl="0" indent="0">
               <a:lnSpc>
                 <a:spcPct val="100000"/>
               </a:lnSpc>
@@ -128,11 +320,11 @@
                 <a:ea typeface="Noto Sans CJK SC"/>
                 <a:cs typeface="Segoe UI"/>
               </a:rPr>
-              <a:t>分割（partition）是全部难点。这里用的是最直白的写法：</a:t>
-            </a:r>
-          </a:p>
-          <a:p>
-            <a:pPr marL="0" indent="0" lvl="0">
+              <a:t>举个例子：先按成绩排，再按班级用稳定排序排，结果就是「班级内按成绩」。</a:t>
+            </a:r>
+          </a:p>
+          <a:p>
+            <a:pPr marL="0" lvl="0" indent="0">
               <a:lnSpc>
                 <a:spcPct val="100000"/>
               </a:lnSpc>
@@ -147,390 +339,16 @@
                 <a:ea typeface="Noto Sans CJK SC"/>
                 <a:cs typeface="Segoe UI"/>
               </a:rPr>
-              <a:t>boundary 左边全是小于轴值的，扫一遍把小的换过去，最后把轴值换到分界点。</a:t>
-            </a:r>
-          </a:p>
-          <a:p>
-            <a:pPr marL="0" indent="0" lvl="0">
-              <a:lnSpc>
-                <a:spcPct val="100000"/>
-              </a:lnSpc>
-              <a:buNone/>
-            </a:pPr>
-            <a:r>
-              <a:rPr lang="zh-CN" sz="1200" dirty="0">
-                <a:solidFill>
-                  <a:srgbClr val="1A1A18"/>
-                </a:solidFill>
-                <a:latin typeface="Segoe UI"/>
-                <a:ea typeface="Noto Sans CJK SC"/>
-                <a:cs typeface="Segoe UI"/>
-              </a:rPr>
-              <a:t>平均 O(n log n)，最坏 O(n^2)——输入已经有序而轴值取末尾时，</a:t>
-            </a:r>
-          </a:p>
-          <a:p>
-            <a:pPr marL="0" indent="0" lvl="0">
-              <a:lnSpc>
-                <a:spcPct val="100000"/>
-              </a:lnSpc>
-              <a:buNone/>
-            </a:pPr>
-            <a:r>
-              <a:rPr lang="zh-CN" sz="1200" dirty="0">
-                <a:solidFill>
-                  <a:srgbClr val="1A1A18"/>
-                </a:solidFill>
-                <a:latin typeface="Segoe UI"/>
-                <a:ea typeface="Noto Sans CJK SC"/>
-                <a:cs typeface="Segoe UI"/>
-              </a:rPr>
-              <a:t>每次只分出一个元素，递归深度 n。</a:t>
+              <a:t>用不稳定的排序做这件事就得不到想要的结果。</a:t>
             </a:r>
           </a:p>
         </p:txBody>
       </p:sp>
     </p:spTree>
   </p:cSld>
-</p:notes>
-</file>
-
-<file path=ppt/notesSlides/notesSlide15.xml><?xml version="1.0" encoding="utf-8"?>
-<p:notes xmlns:a="http://schemas.openxmlformats.org/drawingml/2006/main" xmlns:r="http://schemas.openxmlformats.org/officeDocument/2006/relationships" xmlns:p="http://schemas.openxmlformats.org/presentationml/2006/main">
-  <p:cSld>
-    <p:spTree>
-      <p:nvGrpSpPr>
-        <p:cNvPr id="1" name=""/>
-        <p:cNvGrpSpPr/>
-        <p:nvPr/>
-      </p:nvGrpSpPr>
-      <p:grpSpPr>
-        <a:xfrm>
-          <a:off x="0" y="0"/>
-          <a:ext cx="0" cy="0"/>
-          <a:chOff x="0" y="0"/>
-          <a:chExt cx="0" cy="0"/>
-        </a:xfrm>
-      </p:grpSpPr>
-      <p:sp>
-        <p:nvSpPr>
-          <p:cNvPr id="2" name="备注"/>
-          <p:cNvSpPr>
-            <a:spLocks noGrp="1"/>
-          </p:cNvSpPr>
-          <p:nvPr>
-            <p:ph type="body" idx="1"/>
-          </p:nvPr>
-        </p:nvSpPr>
-        <p:spPr>
-          <a:xfrm>
-            <a:off x="457200" y="3886200"/>
-            <a:ext cx="5943600" cy="4400550"/>
-          </a:xfrm>
-          <a:prstGeom prst="rect">
-            <a:avLst/>
-          </a:prstGeom>
-        </p:spPr>
-        <p:txBody>
-          <a:bodyPr/>
-          <a:lstStyle/>
-          <a:p>
-            <a:pPr marL="0" indent="0" lvl="0">
-              <a:lnSpc>
-                <a:spcPct val="100000"/>
-              </a:lnSpc>
-              <a:buNone/>
-            </a:pPr>
-            <a:r>
-              <a:rPr lang="zh-CN" sz="1200" dirty="0">
-                <a:solidFill>
-                  <a:srgbClr val="1A1A18"/>
-                </a:solidFill>
-                <a:latin typeface="Segoe UI"/>
-                <a:ea typeface="Noto Sans CJK SC"/>
-                <a:cs typeface="Segoe UI"/>
-              </a:rPr>
-              <a:t>分治的另一种切法：快排是「先分好再递归」，归并是「先递归再合并」。</a:t>
-            </a:r>
-          </a:p>
-          <a:p>
-            <a:pPr marL="0" indent="0" lvl="0">
-              <a:lnSpc>
-                <a:spcPct val="100000"/>
-              </a:lnSpc>
-              <a:buNone/>
-            </a:pPr>
-            <a:r>
-              <a:rPr lang="zh-CN" sz="1200" dirty="0">
-                <a:solidFill>
-                  <a:srgbClr val="1A1A18"/>
-                </a:solidFill>
-                <a:latin typeface="Segoe UI"/>
-                <a:ea typeface="Noto Sans CJK SC"/>
-                <a:cs typeface="Segoe UI"/>
-              </a:rPr>
-              <a:t>归并的两个特点：</a:t>
-            </a:r>
-          </a:p>
-          <a:p>
-            <a:pPr marL="0" indent="0" lvl="0">
-              <a:lnSpc>
-                <a:spcPct val="100000"/>
-              </a:lnSpc>
-              <a:buNone/>
-            </a:pPr>
-            <a:r>
-              <a:rPr lang="zh-CN" sz="1200" dirty="0">
-                <a:solidFill>
-                  <a:srgbClr val="1A1A18"/>
-                </a:solidFill>
-                <a:latin typeface="Segoe UI"/>
-                <a:ea typeface="Noto Sans CJK SC"/>
-                <a:cs typeface="Segoe UI"/>
-              </a:rPr>
-              <a:t>1. 稳定（合并时相等取左边的）；</a:t>
-            </a:r>
-          </a:p>
-          <a:p>
-            <a:pPr marL="0" indent="0" lvl="0">
-              <a:lnSpc>
-                <a:spcPct val="100000"/>
-              </a:lnSpc>
-              <a:buNone/>
-            </a:pPr>
-            <a:r>
-              <a:rPr lang="zh-CN" sz="1200" dirty="0">
-                <a:solidFill>
-                  <a:srgbClr val="1A1A18"/>
-                </a:solidFill>
-                <a:latin typeface="Segoe UI"/>
-                <a:ea typeface="Noto Sans CJK SC"/>
-                <a:cs typeface="Segoe UI"/>
-              </a:rPr>
-              <a:t>2. 最坏也是 O(n log n)，没有快排那种退化。</a:t>
-            </a:r>
-          </a:p>
-          <a:p>
-            <a:pPr marL="0" indent="0" lvl="0">
-              <a:lnSpc>
-                <a:spcPct val="100000"/>
-              </a:lnSpc>
-              <a:buNone/>
-            </a:pPr>
-            <a:r>
-              <a:rPr lang="zh-CN" sz="1200" dirty="0">
-                <a:solidFill>
-                  <a:srgbClr val="1A1A18"/>
-                </a:solidFill>
-                <a:latin typeface="Segoe UI"/>
-                <a:ea typeface="Noto Sans CJK SC"/>
-                <a:cs typeface="Segoe UI"/>
-              </a:rPr>
-              <a:t>代价是需要 O(n) 的额外空间——这是它不如快排流行的主要原因。</a:t>
-            </a:r>
-          </a:p>
-          <a:p>
-            <a:pPr marL="0" indent="0" lvl="0">
-              <a:lnSpc>
-                <a:spcPct val="100000"/>
-              </a:lnSpc>
-              <a:buNone/>
-            </a:pPr>
-            <a:r>
-              <a:rPr lang="zh-CN" sz="1200" dirty="0">
-                <a:solidFill>
-                  <a:srgbClr val="1A1A18"/>
-                </a:solidFill>
-                <a:latin typeface="Segoe UI"/>
-                <a:ea typeface="Noto Sans CJK SC"/>
-                <a:cs typeface="Segoe UI"/>
-              </a:rPr>
-              <a:t>归并还有一个别处没有的好处：它天然适合外排序，因为只需要顺序读写。</a:t>
-            </a:r>
-          </a:p>
-          <a:p>
-            <a:pPr marL="0" indent="0" lvl="0">
-              <a:lnSpc>
-                <a:spcPct val="100000"/>
-              </a:lnSpc>
-              <a:buNone/>
-            </a:pPr>
-            <a:r>
-              <a:rPr lang="zh-CN" sz="1200" dirty="0">
-                <a:solidFill>
-                  <a:srgbClr val="1A1A18"/>
-                </a:solidFill>
-                <a:latin typeface="Segoe UI"/>
-                <a:ea typeface="Noto Sans CJK SC"/>
-                <a:cs typeface="Segoe UI"/>
-              </a:rPr>
-              <a:t>第 9 章全靠它。</a:t>
-            </a:r>
-          </a:p>
-        </p:txBody>
-      </p:sp>
-    </p:spTree>
-  </p:cSld>
-</p:notes>
-</file>
-
-<file path=ppt/notesSlides/notesSlide19.xml><?xml version="1.0" encoding="utf-8"?>
-<p:notes xmlns:a="http://schemas.openxmlformats.org/drawingml/2006/main" xmlns:r="http://schemas.openxmlformats.org/officeDocument/2006/relationships" xmlns:p="http://schemas.openxmlformats.org/presentationml/2006/main">
-  <p:cSld>
-    <p:spTree>
-      <p:nvGrpSpPr>
-        <p:cNvPr id="1" name=""/>
-        <p:cNvGrpSpPr/>
-        <p:nvPr/>
-      </p:nvGrpSpPr>
-      <p:grpSpPr>
-        <a:xfrm>
-          <a:off x="0" y="0"/>
-          <a:ext cx="0" cy="0"/>
-          <a:chOff x="0" y="0"/>
-          <a:chExt cx="0" cy="0"/>
-        </a:xfrm>
-      </p:grpSpPr>
-      <p:sp>
-        <p:nvSpPr>
-          <p:cNvPr id="2" name="备注"/>
-          <p:cNvSpPr>
-            <a:spLocks noGrp="1"/>
-          </p:cNvSpPr>
-          <p:nvPr>
-            <p:ph type="body" idx="1"/>
-          </p:nvPr>
-        </p:nvSpPr>
-        <p:spPr>
-          <a:xfrm>
-            <a:off x="457200" y="3886200"/>
-            <a:ext cx="5943600" cy="4400550"/>
-          </a:xfrm>
-          <a:prstGeom prst="rect">
-            <a:avLst/>
-          </a:prstGeom>
-        </p:spPr>
-        <p:txBody>
-          <a:bodyPr/>
-          <a:lstStyle/>
-          <a:p>
-            <a:pPr marL="0" indent="0" lvl="0">
-              <a:lnSpc>
-                <a:spcPct val="100000"/>
-              </a:lnSpc>
-              <a:buNone/>
-            </a:pPr>
-            <a:r>
-              <a:rPr lang="zh-CN" sz="1200" dirty="0">
-                <a:solidFill>
-                  <a:srgbClr val="1A1A18"/>
-                </a:solidFill>
-                <a:latin typeface="Segoe UI"/>
-                <a:ea typeface="Noto Sans CJK SC"/>
-                <a:cs typeface="Segoe UI"/>
-              </a:rPr>
-              <a:t>桶式排序：关键码范围有限时，开一排桶，直接扔进去，O(n + r)。</a:t>
-            </a:r>
-          </a:p>
-          <a:p>
-            <a:pPr marL="0" indent="0" lvl="0">
-              <a:lnSpc>
-                <a:spcPct val="100000"/>
-              </a:lnSpc>
-              <a:buNone/>
-            </a:pPr>
-            <a:r>
-              <a:rPr lang="zh-CN" sz="1200" dirty="0">
-                <a:solidFill>
-                  <a:srgbClr val="1A1A18"/>
-                </a:solidFill>
-                <a:latin typeface="Segoe UI"/>
-                <a:ea typeface="Noto Sans CJK SC"/>
-                <a:cs typeface="Segoe UI"/>
-              </a:rPr>
-              <a:t>基数排序：把关键码按位拆开，从低位到高位依次做桶式排序。</a:t>
-            </a:r>
-          </a:p>
-          <a:p>
-            <a:pPr marL="0" indent="0" lvl="0">
-              <a:lnSpc>
-                <a:spcPct val="100000"/>
-              </a:lnSpc>
-              <a:buNone/>
-            </a:pPr>
-            <a:r>
-              <a:rPr lang="zh-CN" sz="1200" dirty="0">
-                <a:solidFill>
-                  <a:srgbClr val="1A1A18"/>
-                </a:solidFill>
-                <a:latin typeface="Segoe UI"/>
-                <a:ea typeface="Noto Sans CJK SC"/>
-                <a:cs typeface="Segoe UI"/>
-              </a:rPr>
-              <a:t>d 位、每位 r 个值时是 O(d(n + r))。</a:t>
-            </a:r>
-          </a:p>
-          <a:p>
-            <a:pPr marL="0" indent="0" lvl="0">
-              <a:lnSpc>
-                <a:spcPct val="100000"/>
-              </a:lnSpc>
-              <a:buNone/>
-            </a:pPr>
-            <a:r>
-              <a:rPr lang="zh-CN" sz="1200" dirty="0">
-                <a:solidFill>
-                  <a:srgbClr val="1A1A18"/>
-                </a:solidFill>
-                <a:latin typeface="Segoe UI"/>
-                <a:ea typeface="Noto Sans CJK SC"/>
-                <a:cs typeface="Segoe UI"/>
-              </a:rPr>
-              <a:t>为什么必须从低位开始？因为每一轮的桶式排序必须是稳定的，</a:t>
-            </a:r>
-          </a:p>
-          <a:p>
-            <a:pPr marL="0" indent="0" lvl="0">
-              <a:lnSpc>
-                <a:spcPct val="100000"/>
-              </a:lnSpc>
-              <a:buNone/>
-            </a:pPr>
-            <a:r>
-              <a:rPr lang="zh-CN" sz="1200" dirty="0">
-                <a:solidFill>
-                  <a:srgbClr val="1A1A18"/>
-                </a:solidFill>
-                <a:latin typeface="Segoe UI"/>
-                <a:ea typeface="Noto Sans CJK SC"/>
-                <a:cs typeface="Segoe UI"/>
-              </a:rPr>
-              <a:t>低位的结果才能被高位的排序保留下来。反过来做会把低位的功夫全废掉。</a:t>
-            </a:r>
-          </a:p>
-          <a:p>
-            <a:pPr marL="0" indent="0" lvl="0">
-              <a:lnSpc>
-                <a:spcPct val="100000"/>
-              </a:lnSpc>
-              <a:buNone/>
-            </a:pPr>
-            <a:r>
-              <a:rPr lang="zh-CN" sz="1200" dirty="0">
-                <a:solidFill>
-                  <a:srgbClr val="1A1A18"/>
-                </a:solidFill>
-                <a:latin typeface="Segoe UI"/>
-                <a:ea typeface="Noto Sans CJK SC"/>
-                <a:cs typeface="Segoe UI"/>
-              </a:rPr>
-              <a:t>这一点值得当场问学生。</a:t>
-            </a:r>
-          </a:p>
-        </p:txBody>
-      </p:sp>
-    </p:spTree>
-  </p:cSld>
+  <p:clrMapOvr>
+    <a:masterClrMapping/>
+  </p:clrMapOvr>
 </p:notes>
 </file>
 
@@ -574,7 +392,7 @@
           <a:bodyPr/>
           <a:lstStyle/>
           <a:p>
-            <a:pPr marL="0" indent="0" lvl="0">
+            <a:pPr marL="0" lvl="0" indent="0">
               <a:lnSpc>
                 <a:spcPct val="100000"/>
               </a:lnSpc>
@@ -589,11 +407,11 @@
                 <a:ea typeface="Noto Sans CJK SC"/>
                 <a:cs typeface="Segoe UI"/>
               </a:rPr>
-              <a:t>举个例子：先按成绩排，再按班级用稳定排序排，结果就是「班级内按成绩」。</a:t>
-            </a:r>
-          </a:p>
-          <a:p>
-            <a:pPr marL="0" indent="0" lvl="0">
+              <a:t>形象说法：像整理手里的扑克牌，抓一张就往左边已经排好的那段里插。</a:t>
+            </a:r>
+          </a:p>
+          <a:p>
+            <a:pPr marL="0" lvl="0" indent="0">
               <a:lnSpc>
                 <a:spcPct val="100000"/>
               </a:lnSpc>
@@ -608,13 +426,141 @@
                 <a:ea typeface="Noto Sans CJK SC"/>
                 <a:cs typeface="Segoe UI"/>
               </a:rPr>
-              <a:t>用不稳定的排序做这件事就得不到想要的结果。</a:t>
+              <a:t>最好情况：输入已有序，每张牌比一次就位，O(n)。</a:t>
+            </a:r>
+          </a:p>
+          <a:p>
+            <a:pPr marL="0" lvl="0" indent="0">
+              <a:lnSpc>
+                <a:spcPct val="100000"/>
+              </a:lnSpc>
+              <a:buNone/>
+            </a:pPr>
+            <a:r>
+              <a:rPr lang="zh-CN" sz="1200" dirty="0">
+                <a:solidFill>
+                  <a:srgbClr val="1A1A18"/>
+                </a:solidFill>
+                <a:latin typeface="Segoe UI"/>
+                <a:ea typeface="Noto Sans CJK SC"/>
+                <a:cs typeface="Segoe UI"/>
+              </a:rPr>
+              <a:t>最坏情况：输入逆序，第 i 张要比 i 次，O(n^2)。</a:t>
+            </a:r>
+          </a:p>
+          <a:p>
+            <a:pPr marL="0" lvl="0" indent="0">
+              <a:lnSpc>
+                <a:spcPct val="100000"/>
+              </a:lnSpc>
+              <a:buNone/>
+            </a:pPr>
+            <a:r>
+              <a:rPr lang="zh-CN" sz="1200" dirty="0">
+                <a:solidFill>
+                  <a:srgbClr val="1A1A18"/>
+                </a:solidFill>
+                <a:latin typeface="Segoe UI"/>
+                <a:ea typeface="Noto Sans CJK SC"/>
+                <a:cs typeface="Segoe UI"/>
+              </a:rPr>
+              <a:t>所以说「插入排序是 O(n^2)」对，说「是 Θ(n^2)」就错了。</a:t>
             </a:r>
           </a:p>
         </p:txBody>
       </p:sp>
     </p:spTree>
   </p:cSld>
+  <p:clrMapOvr>
+    <a:masterClrMapping/>
+  </p:clrMapOvr>
+</p:notes>
+</file>
+
+<file path=ppt/notesSlides/notesSlide3.xml><?xml version="1.0" encoding="utf-8"?>
+<p:notes xmlns:a="http://schemas.openxmlformats.org/drawingml/2006/main" xmlns:r="http://schemas.openxmlformats.org/officeDocument/2006/relationships" xmlns:p="http://schemas.openxmlformats.org/presentationml/2006/main">
+  <p:cSld>
+    <p:spTree>
+      <p:nvGrpSpPr>
+        <p:cNvPr id="1" name=""/>
+        <p:cNvGrpSpPr/>
+        <p:nvPr/>
+      </p:nvGrpSpPr>
+      <p:grpSpPr>
+        <a:xfrm>
+          <a:off x="0" y="0"/>
+          <a:ext cx="0" cy="0"/>
+          <a:chOff x="0" y="0"/>
+          <a:chExt cx="0" cy="0"/>
+        </a:xfrm>
+      </p:grpSpPr>
+      <p:sp>
+        <p:nvSpPr>
+          <p:cNvPr id="2" name="备注"/>
+          <p:cNvSpPr>
+            <a:spLocks noGrp="1"/>
+          </p:cNvSpPr>
+          <p:nvPr>
+            <p:ph type="body" idx="1"/>
+          </p:nvPr>
+        </p:nvSpPr>
+        <p:spPr>
+          <a:xfrm>
+            <a:off x="457200" y="3886200"/>
+            <a:ext cx="5943600" cy="4400550"/>
+          </a:xfrm>
+          <a:prstGeom prst="rect">
+            <a:avLst/>
+          </a:prstGeom>
+        </p:spPr>
+        <p:txBody>
+          <a:bodyPr/>
+          <a:lstStyle/>
+          <a:p>
+            <a:pPr marL="0" lvl="0" indent="0">
+              <a:lnSpc>
+                <a:spcPct val="100000"/>
+              </a:lnSpc>
+              <a:buNone/>
+            </a:pPr>
+            <a:r>
+              <a:rPr lang="zh-CN" sz="1200" dirty="0">
+                <a:solidFill>
+                  <a:srgbClr val="1A1A18"/>
+                </a:solidFill>
+                <a:latin typeface="Segoe UI"/>
+                <a:ea typeface="Noto Sans CJK SC"/>
+                <a:cs typeface="Segoe UI"/>
+              </a:rPr>
+              <a:t>这是第 1 章「渐进分析不是全部」的一个实例，可以回头指一下。</a:t>
+            </a:r>
+          </a:p>
+          <a:p>
+            <a:pPr marL="0" lvl="0" indent="0">
+              <a:lnSpc>
+                <a:spcPct val="100000"/>
+              </a:lnSpc>
+              <a:buNone/>
+            </a:pPr>
+            <a:r>
+              <a:rPr lang="zh-CN" sz="1200" dirty="0">
+                <a:solidFill>
+                  <a:srgbClr val="1A1A18"/>
+                </a:solidFill>
+                <a:latin typeface="Segoe UI"/>
+                <a:ea typeface="Noto Sans CJK SC"/>
+                <a:cs typeface="Segoe UI"/>
+              </a:rPr>
+              <a:t>标准库的 sort 内部就是这么做的（introsort：快排 + 堆排 + 插入排序）。</a:t>
+            </a:r>
+          </a:p>
+        </p:txBody>
+      </p:sp>
+    </p:spTree>
+  </p:cSld>
+  <p:clrMapOvr>
+    <a:masterClrMapping/>
+  </p:clrMapOvr>
 </p:notes>
 </file>
 
@@ -658,7 +604,7 @@
           <a:bodyPr/>
           <a:lstStyle/>
           <a:p>
-            <a:pPr marL="0" indent="0" lvl="0">
+            <a:pPr marL="0" lvl="0" indent="0">
               <a:lnSpc>
                 <a:spcPct val="100000"/>
               </a:lnSpc>
@@ -673,11 +619,11 @@
                 <a:ea typeface="Noto Sans CJK SC"/>
                 <a:cs typeface="Segoe UI"/>
               </a:rPr>
-              <a:t>形象说法：像整理手里的扑克牌，抓一张就往左边已经排好的那段里插。</a:t>
-            </a:r>
-          </a:p>
-          <a:p>
-            <a:pPr marL="0" indent="0" lvl="0">
+              <a:t>两步：先把整个数组建成最大堆，再反复「把根和末尾交换、堆长度减一、下沉」。</a:t>
+            </a:r>
+          </a:p>
+          <a:p>
+            <a:pPr marL="0" lvl="0" indent="0">
               <a:lnSpc>
                 <a:spcPct val="100000"/>
               </a:lnSpc>
@@ -692,11 +638,11 @@
                 <a:ea typeface="Noto Sans CJK SC"/>
                 <a:cs typeface="Segoe UI"/>
               </a:rPr>
-              <a:t>最好情况：输入已有序，每张牌比一次就位，O(n)。</a:t>
-            </a:r>
-          </a:p>
-          <a:p>
-            <a:pPr marL="0" indent="0" lvl="0">
+              <a:t>关键点：建堆是 O(n)（第 5 章证过），所以总代价 O(n log n) 里那个 log n</a:t>
+            </a:r>
+          </a:p>
+          <a:p>
+            <a:pPr marL="0" lvl="0" indent="0">
               <a:lnSpc>
                 <a:spcPct val="100000"/>
               </a:lnSpc>
@@ -711,11 +657,11 @@
                 <a:ea typeface="Noto Sans CJK SC"/>
                 <a:cs typeface="Segoe UI"/>
               </a:rPr>
-              <a:t>最坏情况：输入逆序，第 i 张要比 i 次，O(n^2)。</a:t>
-            </a:r>
-          </a:p>
-          <a:p>
-            <a:pPr marL="0" indent="0" lvl="0">
+              <a:t>全部来自后面 n 次取最大值。</a:t>
+            </a:r>
+          </a:p>
+          <a:p>
+            <a:pPr marL="0" lvl="0" indent="0">
               <a:lnSpc>
                 <a:spcPct val="100000"/>
               </a:lnSpc>
@@ -730,13 +676,35 @@
                 <a:ea typeface="Noto Sans CJK SC"/>
                 <a:cs typeface="Segoe UI"/>
               </a:rPr>
-              <a:t>所以说「插入排序是 O(n^2)」对，说「是 Θ(n^2)」就错了。</a:t>
+              <a:t>优点：就地、最坏也是 O(n log n)。缺点：不稳定，而且缓存局部性差</a:t>
+            </a:r>
+          </a:p>
+          <a:p>
+            <a:pPr marL="0" lvl="0" indent="0">
+              <a:lnSpc>
+                <a:spcPct val="100000"/>
+              </a:lnSpc>
+              <a:buNone/>
+            </a:pPr>
+            <a:r>
+              <a:rPr lang="zh-CN" sz="1200" dirty="0">
+                <a:solidFill>
+                  <a:srgbClr val="1A1A18"/>
+                </a:solidFill>
+                <a:latin typeface="Segoe UI"/>
+                <a:ea typeface="Noto Sans CJK SC"/>
+                <a:cs typeface="Segoe UI"/>
+              </a:rPr>
+              <a:t>（下标跳来跳去），实际常数往往比快排大。</a:t>
             </a:r>
           </a:p>
         </p:txBody>
       </p:sp>
     </p:spTree>
   </p:cSld>
+  <p:clrMapOvr>
+    <a:masterClrMapping/>
+  </p:clrMapOvr>
 </p:notes>
 </file>
 
@@ -780,7 +748,7 @@
           <a:bodyPr/>
           <a:lstStyle/>
           <a:p>
-            <a:pPr marL="0" indent="0" lvl="0">
+            <a:pPr marL="0" lvl="0" indent="0">
               <a:lnSpc>
                 <a:spcPct val="100000"/>
               </a:lnSpc>
@@ -795,11 +763,11 @@
                 <a:ea typeface="Noto Sans CJK SC"/>
                 <a:cs typeface="Segoe UI"/>
               </a:rPr>
-              <a:t>这是第 1 章「渐进分析不是全部」的一个实例，可以回头指一下。</a:t>
-            </a:r>
-          </a:p>
-          <a:p>
-            <a:pPr marL="0" indent="0" lvl="0">
+              <a:t>分割（partition）是全部难点。这里用的是最直白的写法：</a:t>
+            </a:r>
+          </a:p>
+          <a:p>
+            <a:pPr marL="0" lvl="0" indent="0">
               <a:lnSpc>
                 <a:spcPct val="100000"/>
               </a:lnSpc>
@@ -814,17 +782,58 @@
                 <a:ea typeface="Noto Sans CJK SC"/>
                 <a:cs typeface="Segoe UI"/>
               </a:rPr>
-              <a:t>标准库的 sort 内部就是这么做的（introsort：快排 + 堆排 + 插入排序）。</a:t>
+              <a:t>boundary 左边全是小于轴值的，扫一遍把小的换过去，最后把轴值换到分界点。</a:t>
+            </a:r>
+          </a:p>
+          <a:p>
+            <a:pPr marL="0" lvl="0" indent="0">
+              <a:lnSpc>
+                <a:spcPct val="100000"/>
+              </a:lnSpc>
+              <a:buNone/>
+            </a:pPr>
+            <a:r>
+              <a:rPr lang="zh-CN" sz="1200" dirty="0">
+                <a:solidFill>
+                  <a:srgbClr val="1A1A18"/>
+                </a:solidFill>
+                <a:latin typeface="Segoe UI"/>
+                <a:ea typeface="Noto Sans CJK SC"/>
+                <a:cs typeface="Segoe UI"/>
+              </a:rPr>
+              <a:t>平均 O(n log n)，最坏 O(n^2)——输入已经有序而轴值取末尾时，</a:t>
+            </a:r>
+          </a:p>
+          <a:p>
+            <a:pPr marL="0" lvl="0" indent="0">
+              <a:lnSpc>
+                <a:spcPct val="100000"/>
+              </a:lnSpc>
+              <a:buNone/>
+            </a:pPr>
+            <a:r>
+              <a:rPr lang="zh-CN" sz="1200" dirty="0">
+                <a:solidFill>
+                  <a:srgbClr val="1A1A18"/>
+                </a:solidFill>
+                <a:latin typeface="Segoe UI"/>
+                <a:ea typeface="Noto Sans CJK SC"/>
+                <a:cs typeface="Segoe UI"/>
+              </a:rPr>
+              <a:t>每次只分出一个元素，递归深度 n。</a:t>
             </a:r>
           </a:p>
         </p:txBody>
       </p:sp>
     </p:spTree>
   </p:cSld>
+  <p:clrMapOvr>
+    <a:masterClrMapping/>
+  </p:clrMapOvr>
 </p:notes>
 </file>
 
-<file path=ppt/notesSlides/notesSlide9.xml><?xml version="1.0" encoding="utf-8"?>
+<file path=ppt/notesSlides/notesSlide6.xml><?xml version="1.0" encoding="utf-8"?>
 <p:notes xmlns:a="http://schemas.openxmlformats.org/drawingml/2006/main" xmlns:r="http://schemas.openxmlformats.org/officeDocument/2006/relationships" xmlns:p="http://schemas.openxmlformats.org/presentationml/2006/main">
   <p:cSld>
     <p:spTree>
@@ -864,7 +873,7 @@
           <a:bodyPr/>
           <a:lstStyle/>
           <a:p>
-            <a:pPr marL="0" indent="0" lvl="0">
+            <a:pPr marL="0" lvl="0" indent="0">
               <a:lnSpc>
                 <a:spcPct val="100000"/>
               </a:lnSpc>
@@ -879,11 +888,11 @@
                 <a:ea typeface="Noto Sans CJK SC"/>
                 <a:cs typeface="Segoe UI"/>
               </a:rPr>
-              <a:t>两步：先把整个数组建成最大堆，再反复「把根和末尾交换、堆长度减一、下沉」。</a:t>
-            </a:r>
-          </a:p>
-          <a:p>
-            <a:pPr marL="0" indent="0" lvl="0">
+              <a:t>分治的另一种切法：快排是「先分好再递归」，归并是「先递归再合并」。</a:t>
+            </a:r>
+          </a:p>
+          <a:p>
+            <a:pPr marL="0" lvl="0" indent="0">
               <a:lnSpc>
                 <a:spcPct val="100000"/>
               </a:lnSpc>
@@ -898,11 +907,11 @@
                 <a:ea typeface="Noto Sans CJK SC"/>
                 <a:cs typeface="Segoe UI"/>
               </a:rPr>
-              <a:t>关键点：建堆是 O(n)（第 5 章证过），所以总代价 O(n log n) 里那个 log n</a:t>
-            </a:r>
-          </a:p>
-          <a:p>
-            <a:pPr marL="0" indent="0" lvl="0">
+              <a:t>归并的两个特点：</a:t>
+            </a:r>
+          </a:p>
+          <a:p>
+            <a:pPr marL="0" lvl="0" indent="0">
               <a:lnSpc>
                 <a:spcPct val="100000"/>
               </a:lnSpc>
@@ -917,11 +926,11 @@
                 <a:ea typeface="Noto Sans CJK SC"/>
                 <a:cs typeface="Segoe UI"/>
               </a:rPr>
-              <a:t>全部来自后面 n 次取最大值。</a:t>
-            </a:r>
-          </a:p>
-          <a:p>
-            <a:pPr marL="0" indent="0" lvl="0">
+              <a:t>1. 稳定（合并时相等取左边的）；</a:t>
+            </a:r>
+          </a:p>
+          <a:p>
+            <a:pPr marL="0" lvl="0" indent="0">
               <a:lnSpc>
                 <a:spcPct val="100000"/>
               </a:lnSpc>
@@ -936,11 +945,11 @@
                 <a:ea typeface="Noto Sans CJK SC"/>
                 <a:cs typeface="Segoe UI"/>
               </a:rPr>
-              <a:t>优点：就地、最坏也是 O(n log n)。缺点：不稳定，而且缓存局部性差</a:t>
-            </a:r>
-          </a:p>
-          <a:p>
-            <a:pPr marL="0" indent="0" lvl="0">
+              <a:t>2. 最坏也是 O(n log n)，没有快排那种退化。</a:t>
+            </a:r>
+          </a:p>
+          <a:p>
+            <a:pPr marL="0" lvl="0" indent="0">
               <a:lnSpc>
                 <a:spcPct val="100000"/>
               </a:lnSpc>
@@ -955,13 +964,217 @@
                 <a:ea typeface="Noto Sans CJK SC"/>
                 <a:cs typeface="Segoe UI"/>
               </a:rPr>
-              <a:t>（下标跳来跳去），实际常数往往比快排大。</a:t>
+              <a:t>代价是需要 O(n) 的额外空间——这是它不如快排流行的主要原因。</a:t>
+            </a:r>
+          </a:p>
+          <a:p>
+            <a:pPr marL="0" lvl="0" indent="0">
+              <a:lnSpc>
+                <a:spcPct val="100000"/>
+              </a:lnSpc>
+              <a:buNone/>
+            </a:pPr>
+            <a:r>
+              <a:rPr lang="zh-CN" sz="1200" dirty="0">
+                <a:solidFill>
+                  <a:srgbClr val="1A1A18"/>
+                </a:solidFill>
+                <a:latin typeface="Segoe UI"/>
+                <a:ea typeface="Noto Sans CJK SC"/>
+                <a:cs typeface="Segoe UI"/>
+              </a:rPr>
+              <a:t>归并还有一个别处没有的好处：它天然适合外排序，因为只需要顺序读写。</a:t>
+            </a:r>
+          </a:p>
+          <a:p>
+            <a:pPr marL="0" lvl="0" indent="0">
+              <a:lnSpc>
+                <a:spcPct val="100000"/>
+              </a:lnSpc>
+              <a:buNone/>
+            </a:pPr>
+            <a:r>
+              <a:rPr lang="zh-CN" sz="1200" dirty="0">
+                <a:solidFill>
+                  <a:srgbClr val="1A1A18"/>
+                </a:solidFill>
+                <a:latin typeface="Segoe UI"/>
+                <a:ea typeface="Noto Sans CJK SC"/>
+                <a:cs typeface="Segoe UI"/>
+              </a:rPr>
+              <a:t>第 9 章全靠它。</a:t>
             </a:r>
           </a:p>
         </p:txBody>
       </p:sp>
     </p:spTree>
   </p:cSld>
+  <p:clrMapOvr>
+    <a:masterClrMapping/>
+  </p:clrMapOvr>
+</p:notes>
+</file>
+
+<file path=ppt/notesSlides/notesSlide7.xml><?xml version="1.0" encoding="utf-8"?>
+<p:notes xmlns:a="http://schemas.openxmlformats.org/drawingml/2006/main" xmlns:r="http://schemas.openxmlformats.org/officeDocument/2006/relationships" xmlns:p="http://schemas.openxmlformats.org/presentationml/2006/main">
+  <p:cSld>
+    <p:spTree>
+      <p:nvGrpSpPr>
+        <p:cNvPr id="1" name=""/>
+        <p:cNvGrpSpPr/>
+        <p:nvPr/>
+      </p:nvGrpSpPr>
+      <p:grpSpPr>
+        <a:xfrm>
+          <a:off x="0" y="0"/>
+          <a:ext cx="0" cy="0"/>
+          <a:chOff x="0" y="0"/>
+          <a:chExt cx="0" cy="0"/>
+        </a:xfrm>
+      </p:grpSpPr>
+      <p:sp>
+        <p:nvSpPr>
+          <p:cNvPr id="2" name="备注"/>
+          <p:cNvSpPr>
+            <a:spLocks noGrp="1"/>
+          </p:cNvSpPr>
+          <p:nvPr>
+            <p:ph type="body" idx="1"/>
+          </p:nvPr>
+        </p:nvSpPr>
+        <p:spPr>
+          <a:xfrm>
+            <a:off x="457200" y="3886200"/>
+            <a:ext cx="5943600" cy="4400550"/>
+          </a:xfrm>
+          <a:prstGeom prst="rect">
+            <a:avLst/>
+          </a:prstGeom>
+        </p:spPr>
+        <p:txBody>
+          <a:bodyPr/>
+          <a:lstStyle/>
+          <a:p>
+            <a:pPr marL="0" lvl="0" indent="0">
+              <a:lnSpc>
+                <a:spcPct val="100000"/>
+              </a:lnSpc>
+              <a:buNone/>
+            </a:pPr>
+            <a:r>
+              <a:rPr lang="zh-CN" sz="1200" dirty="0">
+                <a:solidFill>
+                  <a:srgbClr val="1A1A18"/>
+                </a:solidFill>
+                <a:latin typeface="Segoe UI"/>
+                <a:ea typeface="Noto Sans CJK SC"/>
+                <a:cs typeface="Segoe UI"/>
+              </a:rPr>
+              <a:t>桶式排序：关键码范围有限时，开一排桶，直接扔进去，O(n + r)。</a:t>
+            </a:r>
+          </a:p>
+          <a:p>
+            <a:pPr marL="0" lvl="0" indent="0">
+              <a:lnSpc>
+                <a:spcPct val="100000"/>
+              </a:lnSpc>
+              <a:buNone/>
+            </a:pPr>
+            <a:r>
+              <a:rPr lang="zh-CN" sz="1200" dirty="0">
+                <a:solidFill>
+                  <a:srgbClr val="1A1A18"/>
+                </a:solidFill>
+                <a:latin typeface="Segoe UI"/>
+                <a:ea typeface="Noto Sans CJK SC"/>
+                <a:cs typeface="Segoe UI"/>
+              </a:rPr>
+              <a:t>基数排序：把关键码按位拆开，从低位到高位依次做桶式排序。</a:t>
+            </a:r>
+          </a:p>
+          <a:p>
+            <a:pPr marL="0" lvl="0" indent="0">
+              <a:lnSpc>
+                <a:spcPct val="100000"/>
+              </a:lnSpc>
+              <a:buNone/>
+            </a:pPr>
+            <a:r>
+              <a:rPr lang="zh-CN" sz="1200" dirty="0">
+                <a:solidFill>
+                  <a:srgbClr val="1A1A18"/>
+                </a:solidFill>
+                <a:latin typeface="Segoe UI"/>
+                <a:ea typeface="Noto Sans CJK SC"/>
+                <a:cs typeface="Segoe UI"/>
+              </a:rPr>
+              <a:t>d 位、每位 r 个值时是 O(d(n + r))。</a:t>
+            </a:r>
+          </a:p>
+          <a:p>
+            <a:pPr marL="0" lvl="0" indent="0">
+              <a:lnSpc>
+                <a:spcPct val="100000"/>
+              </a:lnSpc>
+              <a:buNone/>
+            </a:pPr>
+            <a:r>
+              <a:rPr lang="zh-CN" sz="1200" dirty="0">
+                <a:solidFill>
+                  <a:srgbClr val="1A1A18"/>
+                </a:solidFill>
+                <a:latin typeface="Segoe UI"/>
+                <a:ea typeface="Noto Sans CJK SC"/>
+                <a:cs typeface="Segoe UI"/>
+              </a:rPr>
+              <a:t>为什么必须从低位开始？因为每一轮的桶式排序必须是稳定的，</a:t>
+            </a:r>
+          </a:p>
+          <a:p>
+            <a:pPr marL="0" lvl="0" indent="0">
+              <a:lnSpc>
+                <a:spcPct val="100000"/>
+              </a:lnSpc>
+              <a:buNone/>
+            </a:pPr>
+            <a:r>
+              <a:rPr lang="zh-CN" sz="1200" dirty="0">
+                <a:solidFill>
+                  <a:srgbClr val="1A1A18"/>
+                </a:solidFill>
+                <a:latin typeface="Segoe UI"/>
+                <a:ea typeface="Noto Sans CJK SC"/>
+                <a:cs typeface="Segoe UI"/>
+              </a:rPr>
+              <a:t>低位的结果才能被高位的排序保留下来。反过来做会把低位的功夫全废掉。</a:t>
+            </a:r>
+          </a:p>
+          <a:p>
+            <a:pPr marL="0" lvl="0" indent="0">
+              <a:lnSpc>
+                <a:spcPct val="100000"/>
+              </a:lnSpc>
+              <a:buNone/>
+            </a:pPr>
+            <a:r>
+              <a:rPr lang="zh-CN" sz="1200" dirty="0">
+                <a:solidFill>
+                  <a:srgbClr val="1A1A18"/>
+                </a:solidFill>
+                <a:latin typeface="Segoe UI"/>
+                <a:ea typeface="Noto Sans CJK SC"/>
+                <a:cs typeface="Segoe UI"/>
+              </a:rPr>
+              <a:t>这一点值得当场问学生。</a:t>
+            </a:r>
+          </a:p>
+        </p:txBody>
+      </p:sp>
+    </p:spTree>
+  </p:cSld>
+  <p:clrMapOvr>
+    <a:masterClrMapping/>
+  </p:clrMapOvr>
 </p:notes>
 </file>
 
@@ -984,12 +1197,20 @@
       </p:grpSpPr>
     </p:spTree>
   </p:cSld>
+  <p:clrMapOvr>
+    <a:masterClrMapping/>
+  </p:clrMapOvr>
 </p:sldLayout>
 </file>
 
 <file path=ppt/slideMasters/slideMaster1.xml><?xml version="1.0" encoding="utf-8"?>
 <p:sldMaster xmlns:a="http://schemas.openxmlformats.org/drawingml/2006/main" xmlns:r="http://schemas.openxmlformats.org/officeDocument/2006/relationships" xmlns:p="http://schemas.openxmlformats.org/presentationml/2006/main">
   <p:cSld>
+    <p:bg>
+      <p:bgRef idx="1001">
+        <a:schemeClr val="bg1"/>
+      </p:bgRef>
+    </p:bg>
     <p:spTree>
       <p:nvGrpSpPr>
         <p:cNvPr id="1" name=""/>
@@ -1010,6 +1231,286 @@
   <p:sldLayoutIdLst>
     <p:sldLayoutId id="2147483649" r:id="rId1"/>
   </p:sldLayoutIdLst>
+  <p:txStyles>
+    <p:titleStyle>
+      <a:lvl1pPr algn="l" defTabSz="914400" rtl="0" eaLnBrk="1" latinLnBrk="0" hangingPunct="1">
+        <a:lnSpc>
+          <a:spcPct val="90000"/>
+        </a:lnSpc>
+        <a:spcBef>
+          <a:spcPct val="0"/>
+        </a:spcBef>
+        <a:buNone/>
+        <a:defRPr sz="4400" kern="1200">
+          <a:solidFill>
+            <a:schemeClr val="tx1"/>
+          </a:solidFill>
+          <a:latin typeface="+mj-lt"/>
+          <a:ea typeface="+mj-ea"/>
+          <a:cs typeface="+mj-cs"/>
+        </a:defRPr>
+      </a:lvl1pPr>
+    </p:titleStyle>
+    <p:bodyStyle>
+      <a:lvl1pPr marL="228600" indent="-228600" algn="l" defTabSz="914400" rtl="0" eaLnBrk="1" latinLnBrk="0" hangingPunct="1">
+        <a:lnSpc>
+          <a:spcPct val="90000"/>
+        </a:lnSpc>
+        <a:spcBef>
+          <a:spcPts val="1000"/>
+        </a:spcBef>
+        <a:buFont typeface="Arial" panose="020B0604020202020204" pitchFamily="34" charset="0"/>
+        <a:buChar char="•"/>
+        <a:defRPr sz="2800" kern="1200">
+          <a:solidFill>
+            <a:schemeClr val="tx1"/>
+          </a:solidFill>
+          <a:latin typeface="+mn-lt"/>
+          <a:ea typeface="+mn-ea"/>
+          <a:cs typeface="+mn-cs"/>
+        </a:defRPr>
+      </a:lvl1pPr>
+      <a:lvl2pPr marL="685800" indent="-228600" algn="l" defTabSz="914400" rtl="0" eaLnBrk="1" latinLnBrk="0" hangingPunct="1">
+        <a:lnSpc>
+          <a:spcPct val="90000"/>
+        </a:lnSpc>
+        <a:spcBef>
+          <a:spcPts val="500"/>
+        </a:spcBef>
+        <a:buFont typeface="Arial" panose="020B0604020202020204" pitchFamily="34" charset="0"/>
+        <a:buChar char="•"/>
+        <a:defRPr sz="2400" kern="1200">
+          <a:solidFill>
+            <a:schemeClr val="tx1"/>
+          </a:solidFill>
+          <a:latin typeface="+mn-lt"/>
+          <a:ea typeface="+mn-ea"/>
+          <a:cs typeface="+mn-cs"/>
+        </a:defRPr>
+      </a:lvl2pPr>
+      <a:lvl3pPr marL="1143000" indent="-228600" algn="l" defTabSz="914400" rtl="0" eaLnBrk="1" latinLnBrk="0" hangingPunct="1">
+        <a:lnSpc>
+          <a:spcPct val="90000"/>
+        </a:lnSpc>
+        <a:spcBef>
+          <a:spcPts val="500"/>
+        </a:spcBef>
+        <a:buFont typeface="Arial" panose="020B0604020202020204" pitchFamily="34" charset="0"/>
+        <a:buChar char="•"/>
+        <a:defRPr sz="2000" kern="1200">
+          <a:solidFill>
+            <a:schemeClr val="tx1"/>
+          </a:solidFill>
+          <a:latin typeface="+mn-lt"/>
+          <a:ea typeface="+mn-ea"/>
+          <a:cs typeface="+mn-cs"/>
+        </a:defRPr>
+      </a:lvl3pPr>
+      <a:lvl4pPr marL="1600200" indent="-228600" algn="l" defTabSz="914400" rtl="0" eaLnBrk="1" latinLnBrk="0" hangingPunct="1">
+        <a:lnSpc>
+          <a:spcPct val="90000"/>
+        </a:lnSpc>
+        <a:spcBef>
+          <a:spcPts val="500"/>
+        </a:spcBef>
+        <a:buFont typeface="Arial" panose="020B0604020202020204" pitchFamily="34" charset="0"/>
+        <a:buChar char="•"/>
+        <a:defRPr sz="1800" kern="1200">
+          <a:solidFill>
+            <a:schemeClr val="tx1"/>
+          </a:solidFill>
+          <a:latin typeface="+mn-lt"/>
+          <a:ea typeface="+mn-ea"/>
+          <a:cs typeface="+mn-cs"/>
+        </a:defRPr>
+      </a:lvl4pPr>
+      <a:lvl5pPr marL="2057400" indent="-228600" algn="l" defTabSz="914400" rtl="0" eaLnBrk="1" latinLnBrk="0" hangingPunct="1">
+        <a:lnSpc>
+          <a:spcPct val="90000"/>
+        </a:lnSpc>
+        <a:spcBef>
+          <a:spcPts val="500"/>
+        </a:spcBef>
+        <a:buFont typeface="Arial" panose="020B0604020202020204" pitchFamily="34" charset="0"/>
+        <a:buChar char="•"/>
+        <a:defRPr sz="1800" kern="1200">
+          <a:solidFill>
+            <a:schemeClr val="tx1"/>
+          </a:solidFill>
+          <a:latin typeface="+mn-lt"/>
+          <a:ea typeface="+mn-ea"/>
+          <a:cs typeface="+mn-cs"/>
+        </a:defRPr>
+      </a:lvl5pPr>
+      <a:lvl6pPr marL="2514600" indent="-228600" algn="l" defTabSz="914400" rtl="0" eaLnBrk="1" latinLnBrk="0" hangingPunct="1">
+        <a:lnSpc>
+          <a:spcPct val="90000"/>
+        </a:lnSpc>
+        <a:spcBef>
+          <a:spcPts val="500"/>
+        </a:spcBef>
+        <a:buFont typeface="Arial" panose="020B0604020202020204" pitchFamily="34" charset="0"/>
+        <a:buChar char="•"/>
+        <a:defRPr sz="1800" kern="1200">
+          <a:solidFill>
+            <a:schemeClr val="tx1"/>
+          </a:solidFill>
+          <a:latin typeface="+mn-lt"/>
+          <a:ea typeface="+mn-ea"/>
+          <a:cs typeface="+mn-cs"/>
+        </a:defRPr>
+      </a:lvl6pPr>
+      <a:lvl7pPr marL="2971800" indent="-228600" algn="l" defTabSz="914400" rtl="0" eaLnBrk="1" latinLnBrk="0" hangingPunct="1">
+        <a:lnSpc>
+          <a:spcPct val="90000"/>
+        </a:lnSpc>
+        <a:spcBef>
+          <a:spcPts val="500"/>
+        </a:spcBef>
+        <a:buFont typeface="Arial" panose="020B0604020202020204" pitchFamily="34" charset="0"/>
+        <a:buChar char="•"/>
+        <a:defRPr sz="1800" kern="1200">
+          <a:solidFill>
+            <a:schemeClr val="tx1"/>
+          </a:solidFill>
+          <a:latin typeface="+mn-lt"/>
+          <a:ea typeface="+mn-ea"/>
+          <a:cs typeface="+mn-cs"/>
+        </a:defRPr>
+      </a:lvl7pPr>
+      <a:lvl8pPr marL="3429000" indent="-228600" algn="l" defTabSz="914400" rtl="0" eaLnBrk="1" latinLnBrk="0" hangingPunct="1">
+        <a:lnSpc>
+          <a:spcPct val="90000"/>
+        </a:lnSpc>
+        <a:spcBef>
+          <a:spcPts val="500"/>
+        </a:spcBef>
+        <a:buFont typeface="Arial" panose="020B0604020202020204" pitchFamily="34" charset="0"/>
+        <a:buChar char="•"/>
+        <a:defRPr sz="1800" kern="1200">
+          <a:solidFill>
+            <a:schemeClr val="tx1"/>
+          </a:solidFill>
+          <a:latin typeface="+mn-lt"/>
+          <a:ea typeface="+mn-ea"/>
+          <a:cs typeface="+mn-cs"/>
+        </a:defRPr>
+      </a:lvl8pPr>
+      <a:lvl9pPr marL="3886200" indent="-228600" algn="l" defTabSz="914400" rtl="0" eaLnBrk="1" latinLnBrk="0" hangingPunct="1">
+        <a:lnSpc>
+          <a:spcPct val="90000"/>
+        </a:lnSpc>
+        <a:spcBef>
+          <a:spcPts val="500"/>
+        </a:spcBef>
+        <a:buFont typeface="Arial" panose="020B0604020202020204" pitchFamily="34" charset="0"/>
+        <a:buChar char="•"/>
+        <a:defRPr sz="1800" kern="1200">
+          <a:solidFill>
+            <a:schemeClr val="tx1"/>
+          </a:solidFill>
+          <a:latin typeface="+mn-lt"/>
+          <a:ea typeface="+mn-ea"/>
+          <a:cs typeface="+mn-cs"/>
+        </a:defRPr>
+      </a:lvl9pPr>
+    </p:bodyStyle>
+    <p:otherStyle>
+      <a:defPPr>
+        <a:defRPr lang="en-CN"/>
+      </a:defPPr>
+      <a:lvl1pPr marL="0" algn="l" defTabSz="914400" rtl="0" eaLnBrk="1" latinLnBrk="0" hangingPunct="1">
+        <a:defRPr sz="1800" kern="1200">
+          <a:solidFill>
+            <a:schemeClr val="tx1"/>
+          </a:solidFill>
+          <a:latin typeface="+mn-lt"/>
+          <a:ea typeface="+mn-ea"/>
+          <a:cs typeface="+mn-cs"/>
+        </a:defRPr>
+      </a:lvl1pPr>
+      <a:lvl2pPr marL="457200" algn="l" defTabSz="914400" rtl="0" eaLnBrk="1" latinLnBrk="0" hangingPunct="1">
+        <a:defRPr sz="1800" kern="1200">
+          <a:solidFill>
+            <a:schemeClr val="tx1"/>
+          </a:solidFill>
+          <a:latin typeface="+mn-lt"/>
+          <a:ea typeface="+mn-ea"/>
+          <a:cs typeface="+mn-cs"/>
+        </a:defRPr>
+      </a:lvl2pPr>
+      <a:lvl3pPr marL="914400" algn="l" defTabSz="914400" rtl="0" eaLnBrk="1" latinLnBrk="0" hangingPunct="1">
+        <a:defRPr sz="1800" kern="1200">
+          <a:solidFill>
+            <a:schemeClr val="tx1"/>
+          </a:solidFill>
+          <a:latin typeface="+mn-lt"/>
+          <a:ea typeface="+mn-ea"/>
+          <a:cs typeface="+mn-cs"/>
+        </a:defRPr>
+      </a:lvl3pPr>
+      <a:lvl4pPr marL="1371600" algn="l" defTabSz="914400" rtl="0" eaLnBrk="1" latinLnBrk="0" hangingPunct="1">
+        <a:defRPr sz="1800" kern="1200">
+          <a:solidFill>
+            <a:schemeClr val="tx1"/>
+          </a:solidFill>
+          <a:latin typeface="+mn-lt"/>
+          <a:ea typeface="+mn-ea"/>
+          <a:cs typeface="+mn-cs"/>
+        </a:defRPr>
+      </a:lvl4pPr>
+      <a:lvl5pPr marL="1828800" algn="l" defTabSz="914400" rtl="0" eaLnBrk="1" latinLnBrk="0" hangingPunct="1">
+        <a:defRPr sz="1800" kern="1200">
+          <a:solidFill>
+            <a:schemeClr val="tx1"/>
+          </a:solidFill>
+          <a:latin typeface="+mn-lt"/>
+          <a:ea typeface="+mn-ea"/>
+          <a:cs typeface="+mn-cs"/>
+        </a:defRPr>
+      </a:lvl5pPr>
+      <a:lvl6pPr marL="2286000" algn="l" defTabSz="914400" rtl="0" eaLnBrk="1" latinLnBrk="0" hangingPunct="1">
+        <a:defRPr sz="1800" kern="1200">
+          <a:solidFill>
+            <a:schemeClr val="tx1"/>
+          </a:solidFill>
+          <a:latin typeface="+mn-lt"/>
+          <a:ea typeface="+mn-ea"/>
+          <a:cs typeface="+mn-cs"/>
+        </a:defRPr>
+      </a:lvl6pPr>
+      <a:lvl7pPr marL="2743200" algn="l" defTabSz="914400" rtl="0" eaLnBrk="1" latinLnBrk="0" hangingPunct="1">
+        <a:defRPr sz="1800" kern="1200">
+          <a:solidFill>
+            <a:schemeClr val="tx1"/>
+          </a:solidFill>
+          <a:latin typeface="+mn-lt"/>
+          <a:ea typeface="+mn-ea"/>
+          <a:cs typeface="+mn-cs"/>
+        </a:defRPr>
+      </a:lvl7pPr>
+      <a:lvl8pPr marL="3200400" algn="l" defTabSz="914400" rtl="0" eaLnBrk="1" latinLnBrk="0" hangingPunct="1">
+        <a:defRPr sz="1800" kern="1200">
+          <a:solidFill>
+            <a:schemeClr val="tx1"/>
+          </a:solidFill>
+          <a:latin typeface="+mn-lt"/>
+          <a:ea typeface="+mn-ea"/>
+          <a:cs typeface="+mn-cs"/>
+        </a:defRPr>
+      </a:lvl8pPr>
+      <a:lvl9pPr marL="3657600" algn="l" defTabSz="914400" rtl="0" eaLnBrk="1" latinLnBrk="0" hangingPunct="1">
+        <a:defRPr sz="1800" kern="1200">
+          <a:solidFill>
+            <a:schemeClr val="tx1"/>
+          </a:solidFill>
+          <a:latin typeface="+mn-lt"/>
+          <a:ea typeface="+mn-ea"/>
+          <a:cs typeface="+mn-cs"/>
+        </a:defRPr>
+      </a:lvl9pPr>
+    </p:otherStyle>
+  </p:txStyles>
 </p:sldMaster>
 </file>
 
@@ -1052,14 +1553,14 @@
           </a:bodyPr>
           <a:lstStyle/>
           <a:p>
-            <a:pPr marL="0" indent="0" lvl="0" algn="ctr">
-              <a:lnSpc>
-                <a:spcPct val="100000"/>
-              </a:lnSpc>
-              <a:buNone/>
-            </a:pPr>
-            <a:r>
-              <a:rPr lang="zh-CN" sz="4000" dirty="0" b="1">
+            <a:pPr marL="0" lvl="0" indent="0" algn="ctr">
+              <a:lnSpc>
+                <a:spcPct val="100000"/>
+              </a:lnSpc>
+              <a:buNone/>
+            </a:pPr>
+            <a:r>
+              <a:rPr lang="zh-CN" sz="4000" b="1" dirty="0">
                 <a:solidFill>
                   <a:srgbClr val="1A1A18"/>
                 </a:solidFill>
@@ -1096,7 +1597,9 @@
         <p:txBody>
           <a:bodyPr/>
           <a:lstStyle/>
-          <a:p/>
+          <a:p>
+            <a:endParaRPr/>
+          </a:p>
         </p:txBody>
       </p:sp>
       <p:sp>
@@ -1121,7 +1624,7 @@
           </a:bodyPr>
           <a:lstStyle/>
           <a:p>
-            <a:pPr marL="0" indent="0" lvl="0" algn="ctr">
+            <a:pPr marL="0" lvl="0" indent="0" algn="ctr">
               <a:lnSpc>
                 <a:spcPct val="100000"/>
               </a:lnSpc>
@@ -1163,14 +1666,14 @@
           </a:bodyPr>
           <a:lstStyle/>
           <a:p>
-            <a:pPr marL="0" indent="0" lvl="0">
-              <a:lnSpc>
-                <a:spcPct val="100000"/>
-              </a:lnSpc>
-              <a:buNone/>
-            </a:pPr>
-            <a:r>
-              <a:rPr lang="zh-CN" sz="1800" dirty="0" b="1">
+            <a:pPr marL="0" lvl="0" indent="0">
+              <a:lnSpc>
+                <a:spcPct val="100000"/>
+              </a:lnSpc>
+              <a:buNone/>
+            </a:pPr>
+            <a:r>
+              <a:rPr lang="zh-CN" sz="1800" b="1" dirty="0">
                 <a:solidFill>
                   <a:srgbClr val="8A4B2A"/>
                 </a:solidFill>
@@ -1205,7 +1708,7 @@
           </a:bodyPr>
           <a:lstStyle/>
           <a:p>
-            <a:pPr marL="270000" indent="-230000" lvl="0">
+            <a:pPr marL="270000" lvl="0" indent="-230000">
               <a:lnSpc>
                 <a:spcPct val="100000"/>
               </a:lnSpc>
@@ -1231,7 +1734,7 @@
             </a:r>
           </a:p>
           <a:p>
-            <a:pPr marL="270000" indent="-230000" lvl="0">
+            <a:pPr marL="270000" lvl="0" indent="-230000">
               <a:lnSpc>
                 <a:spcPct val="100000"/>
               </a:lnSpc>
@@ -1256,7 +1759,7 @@
               <a:t>选择类：直接选择、</a:t>
             </a:r>
             <a:r>
-              <a:rPr lang="zh-CN" sz="1800" dirty="0" b="1">
+              <a:rPr lang="zh-CN" sz="1800" b="1" dirty="0">
                 <a:solidFill>
                   <a:srgbClr val="8A4B2A"/>
                 </a:solidFill>
@@ -1268,7 +1771,7 @@
             </a:r>
           </a:p>
           <a:p>
-            <a:pPr marL="270000" indent="-230000" lvl="0">
+            <a:pPr marL="270000" lvl="0" indent="-230000">
               <a:lnSpc>
                 <a:spcPct val="100000"/>
               </a:lnSpc>
@@ -1293,7 +1796,7 @@
               <a:t>交换类：冒泡、</a:t>
             </a:r>
             <a:r>
-              <a:rPr lang="zh-CN" sz="1800" dirty="0" b="1">
+              <a:rPr lang="zh-CN" sz="1800" b="1" dirty="0">
                 <a:solidFill>
                   <a:srgbClr val="8A4B2A"/>
                 </a:solidFill>
@@ -1305,7 +1808,7 @@
             </a:r>
           </a:p>
           <a:p>
-            <a:pPr marL="270000" indent="-230000" lvl="0">
+            <a:pPr marL="270000" lvl="0" indent="-230000">
               <a:lnSpc>
                 <a:spcPct val="100000"/>
               </a:lnSpc>
@@ -1331,7 +1834,7 @@
             </a:r>
           </a:p>
           <a:p>
-            <a:pPr marL="270000" indent="-230000" lvl="0">
+            <a:pPr marL="270000" lvl="0" indent="-230000">
               <a:lnSpc>
                 <a:spcPct val="100000"/>
               </a:lnSpc>
@@ -1380,7 +1883,7 @@
           </a:bodyPr>
           <a:lstStyle/>
           <a:p>
-            <a:pPr marL="0" indent="0" lvl="0">
+            <a:pPr marL="0" lvl="0" indent="0">
               <a:lnSpc>
                 <a:spcPct val="100000"/>
               </a:lnSpc>
@@ -1398,7 +1901,7 @@
               <a:t>一条主线：</a:t>
             </a:r>
             <a:r>
-              <a:rPr lang="zh-CN" sz="1800" dirty="0" b="1">
+              <a:rPr lang="zh-CN" sz="1800" b="1" dirty="0">
                 <a:solidFill>
                   <a:srgbClr val="8A4B2A"/>
                 </a:solidFill>
@@ -1409,7 +1912,7 @@
               <a:t>代价从 </a:t>
             </a:r>
             <a:r>
-              <a:rPr lang="zh-CN" sz="1800" dirty="0" b="1" i="1">
+              <a:rPr lang="zh-CN" sz="1800" b="1" i="1" dirty="0">
                 <a:solidFill>
                   <a:srgbClr val="8A4B2A"/>
                 </a:solidFill>
@@ -1420,7 +1923,7 @@
               <a:t>O(n²)</a:t>
             </a:r>
             <a:r>
-              <a:rPr lang="zh-CN" sz="1800" dirty="0" b="1">
+              <a:rPr lang="zh-CN" sz="1800" b="1" dirty="0">
                 <a:solidFill>
                   <a:srgbClr val="8A4B2A"/>
                 </a:solidFill>
@@ -1431,7 +1934,7 @@
               <a:t> 到 </a:t>
             </a:r>
             <a:r>
-              <a:rPr lang="zh-CN" sz="1800" dirty="0" b="1" i="1">
+              <a:rPr lang="zh-CN" sz="1800" b="1" i="1" dirty="0">
                 <a:solidFill>
                   <a:srgbClr val="8A4B2A"/>
                 </a:solidFill>
@@ -1442,7 +1945,7 @@
               <a:t>O(n log n)</a:t>
             </a:r>
             <a:r>
-              <a:rPr lang="zh-CN" sz="1800" dirty="0" b="1">
+              <a:rPr lang="zh-CN" sz="1800" b="1" dirty="0">
                 <a:solidFill>
                   <a:srgbClr val="8A4B2A"/>
                 </a:solidFill>
@@ -1477,7 +1980,7 @@
           </a:bodyPr>
           <a:lstStyle/>
           <a:p>
-            <a:pPr marL="0" indent="0" lvl="0">
+            <a:pPr marL="0" lvl="0" indent="0">
               <a:lnSpc>
                 <a:spcPct val="100000"/>
               </a:lnSpc>
@@ -1519,7 +2022,7 @@
           </a:bodyPr>
           <a:lstStyle/>
           <a:p>
-            <a:pPr marL="0" indent="0" lvl="0" algn="r">
+            <a:pPr marL="0" lvl="0" indent="0" algn="r">
               <a:lnSpc>
                 <a:spcPct val="100000"/>
               </a:lnSpc>
@@ -1541,6 +2044,9 @@
       </p:sp>
     </p:spTree>
   </p:cSld>
+  <p:clrMapOvr>
+    <a:masterClrMapping/>
+  </p:clrMapOvr>
 </p:sld>
 </file>
 
@@ -1583,14 +2089,14 @@
           </a:bodyPr>
           <a:lstStyle/>
           <a:p>
-            <a:pPr marL="0" indent="0" lvl="0">
-              <a:lnSpc>
-                <a:spcPct val="100000"/>
-              </a:lnSpc>
-              <a:buNone/>
-            </a:pPr>
-            <a:r>
-              <a:rPr lang="zh-CN" sz="3200" dirty="0" b="1">
+            <a:pPr marL="0" lvl="0" indent="0">
+              <a:lnSpc>
+                <a:spcPct val="100000"/>
+              </a:lnSpc>
+              <a:buNone/>
+            </a:pPr>
+            <a:r>
+              <a:rPr lang="zh-CN" sz="3200" b="1" dirty="0">
                 <a:solidFill>
                   <a:srgbClr val="1A1A18"/>
                 </a:solidFill>
@@ -1627,7 +2133,9 @@
         <p:txBody>
           <a:bodyPr/>
           <a:lstStyle/>
-          <a:p/>
+          <a:p>
+            <a:endParaRPr/>
+          </a:p>
         </p:txBody>
       </p:sp>
       <p:sp>
@@ -1652,7 +2160,7 @@
           </a:bodyPr>
           <a:lstStyle/>
           <a:p>
-            <a:pPr marL="0" indent="0" lvl="0">
+            <a:pPr marL="0" lvl="0" indent="0">
               <a:lnSpc>
                 <a:spcPct val="100000"/>
               </a:lnSpc>
@@ -1703,7 +2211,7 @@
           </a:bodyPr>
           <a:lstStyle/>
           <a:p>
-            <a:pPr marL="0" indent="0" lvl="0">
+            <a:pPr marL="0" lvl="0" indent="0">
               <a:lnSpc>
                 <a:spcPct val="104000"/>
               </a:lnSpc>
@@ -1722,7 +2230,7 @@
             </a:r>
           </a:p>
           <a:p>
-            <a:pPr marL="0" indent="0" lvl="0">
+            <a:pPr marL="0" lvl="0" indent="0">
               <a:lnSpc>
                 <a:spcPct val="104000"/>
               </a:lnSpc>
@@ -1741,7 +2249,7 @@
             </a:r>
           </a:p>
           <a:p>
-            <a:pPr marL="0" indent="0" lvl="0">
+            <a:pPr marL="0" lvl="0" indent="0">
               <a:lnSpc>
                 <a:spcPct val="104000"/>
               </a:lnSpc>
@@ -1783,7 +2291,7 @@
           </a:bodyPr>
           <a:lstStyle/>
           <a:p>
-            <a:pPr marL="270000" indent="-230000" lvl="0">
+            <a:pPr marL="270000" lvl="0" indent="-230000">
               <a:lnSpc>
                 <a:spcPct val="100000"/>
               </a:lnSpc>
@@ -1809,7 +2317,7 @@
             </a:r>
           </a:p>
           <a:p>
-            <a:pPr marL="270000" indent="-230000" lvl="0">
+            <a:pPr marL="270000" lvl="0" indent="-230000">
               <a:lnSpc>
                 <a:spcPct val="100000"/>
               </a:lnSpc>
@@ -1834,7 +2342,7 @@
               <a:t>一趟没有交换即可提前结束：已有序时 </a:t>
             </a:r>
             <a:r>
-              <a:rPr lang="zh-CN" sz="2340" dirty="0" i="1">
+              <a:rPr lang="zh-CN" sz="2340" i="1" dirty="0">
                 <a:solidFill>
                   <a:srgbClr val="1A1A18"/>
                 </a:solidFill>
@@ -1846,7 +2354,7 @@
             </a:r>
           </a:p>
           <a:p>
-            <a:pPr marL="270000" indent="-230000" lvl="0">
+            <a:pPr marL="270000" lvl="0" indent="-230000">
               <a:lnSpc>
                 <a:spcPct val="100000"/>
               </a:lnSpc>
@@ -1871,7 +2379,7 @@
               <a:t>逆序时仍需 </a:t>
             </a:r>
             <a:r>
-              <a:rPr lang="zh-CN" sz="2340" dirty="0" i="1">
+              <a:rPr lang="zh-CN" sz="2340" i="1" dirty="0">
                 <a:solidFill>
                   <a:srgbClr val="1A1A18"/>
                 </a:solidFill>
@@ -1917,7 +2425,7 @@
           </a:bodyPr>
           <a:lstStyle/>
           <a:p>
-            <a:pPr marL="0" indent="0" lvl="0">
+            <a:pPr marL="0" lvl="0" indent="0">
               <a:lnSpc>
                 <a:spcPct val="100000"/>
               </a:lnSpc>
@@ -1959,7 +2467,7 @@
           </a:bodyPr>
           <a:lstStyle/>
           <a:p>
-            <a:pPr marL="0" indent="0" lvl="0">
+            <a:pPr marL="0" lvl="0" indent="0">
               <a:lnSpc>
                 <a:spcPct val="100000"/>
               </a:lnSpc>
@@ -2001,7 +2509,7 @@
           </a:bodyPr>
           <a:lstStyle/>
           <a:p>
-            <a:pPr marL="0" indent="0" lvl="0" algn="r">
+            <a:pPr marL="0" lvl="0" indent="0" algn="r">
               <a:lnSpc>
                 <a:spcPct val="100000"/>
               </a:lnSpc>
@@ -2023,6 +2531,9 @@
       </p:sp>
     </p:spTree>
   </p:cSld>
+  <p:clrMapOvr>
+    <a:masterClrMapping/>
+  </p:clrMapOvr>
 </p:sld>
 </file>
 
@@ -2065,14 +2576,14 @@
           </a:bodyPr>
           <a:lstStyle/>
           <a:p>
-            <a:pPr marL="0" indent="0" lvl="0">
-              <a:lnSpc>
-                <a:spcPct val="100000"/>
-              </a:lnSpc>
-              <a:buNone/>
-            </a:pPr>
-            <a:r>
-              <a:rPr lang="zh-CN" sz="3200" dirty="0" b="1">
+            <a:pPr marL="0" lvl="0" indent="0">
+              <a:lnSpc>
+                <a:spcPct val="100000"/>
+              </a:lnSpc>
+              <a:buNone/>
+            </a:pPr>
+            <a:r>
+              <a:rPr lang="zh-CN" sz="3200" b="1" dirty="0">
                 <a:solidFill>
                   <a:srgbClr val="1A1A18"/>
                 </a:solidFill>
@@ -2109,7 +2620,9 @@
         <p:txBody>
           <a:bodyPr/>
           <a:lstStyle/>
-          <a:p/>
+          <a:p>
+            <a:endParaRPr/>
+          </a:p>
         </p:txBody>
       </p:sp>
       <p:pic>
@@ -2121,7 +2634,7 @@
           <p:nvPr/>
         </p:nvPicPr>
         <p:blipFill>
-          <a:blip r:embed="rId100"/>
+          <a:blip r:embed="rId2"/>
           <a:stretch>
             <a:fillRect/>
           </a:stretch>
@@ -2158,7 +2671,7 @@
           </a:bodyPr>
           <a:lstStyle/>
           <a:p>
-            <a:pPr marL="0" indent="0" lvl="0" algn="ctr">
+            <a:pPr marL="0" lvl="0" indent="0" algn="ctr">
               <a:lnSpc>
                 <a:spcPct val="100000"/>
               </a:lnSpc>
@@ -2200,7 +2713,7 @@
           </a:bodyPr>
           <a:lstStyle/>
           <a:p>
-            <a:pPr marL="0" indent="0" lvl="0">
+            <a:pPr marL="0" lvl="0" indent="0">
               <a:lnSpc>
                 <a:spcPct val="100000"/>
               </a:lnSpc>
@@ -2218,7 +2731,7 @@
               <a:t>选一个</a:t>
             </a:r>
             <a:r>
-              <a:rPr lang="zh-CN" sz="1476" dirty="0" b="1">
+              <a:rPr lang="zh-CN" sz="1476" b="1" dirty="0">
                 <a:solidFill>
                   <a:srgbClr val="8A4B2A"/>
                 </a:solidFill>
@@ -2264,7 +2777,7 @@
           </a:bodyPr>
           <a:lstStyle/>
           <a:p>
-            <a:pPr marL="0" indent="0" lvl="0">
+            <a:pPr marL="0" lvl="0" indent="0">
               <a:lnSpc>
                 <a:spcPct val="100000"/>
               </a:lnSpc>
@@ -2306,7 +2819,7 @@
           </a:bodyPr>
           <a:lstStyle/>
           <a:p>
-            <a:pPr marL="0" indent="0" lvl="0" algn="r">
+            <a:pPr marL="0" lvl="0" indent="0" algn="r">
               <a:lnSpc>
                 <a:spcPct val="100000"/>
               </a:lnSpc>
@@ -2328,6 +2841,9 @@
       </p:sp>
     </p:spTree>
   </p:cSld>
+  <p:clrMapOvr>
+    <a:masterClrMapping/>
+  </p:clrMapOvr>
 </p:sld>
 </file>
 
@@ -2370,14 +2886,14 @@
           </a:bodyPr>
           <a:lstStyle/>
           <a:p>
-            <a:pPr marL="0" indent="0" lvl="0">
-              <a:lnSpc>
-                <a:spcPct val="100000"/>
-              </a:lnSpc>
-              <a:buNone/>
-            </a:pPr>
-            <a:r>
-              <a:rPr lang="zh-CN" sz="3200" dirty="0" b="1">
+            <a:pPr marL="0" lvl="0" indent="0">
+              <a:lnSpc>
+                <a:spcPct val="100000"/>
+              </a:lnSpc>
+              <a:buNone/>
+            </a:pPr>
+            <a:r>
+              <a:rPr lang="zh-CN" sz="3200" b="1" dirty="0">
                 <a:solidFill>
                   <a:srgbClr val="1A1A18"/>
                 </a:solidFill>
@@ -2414,7 +2930,9 @@
         <p:txBody>
           <a:bodyPr/>
           <a:lstStyle/>
-          <a:p/>
+          <a:p>
+            <a:endParaRPr/>
+          </a:p>
         </p:txBody>
       </p:sp>
       <p:sp>
@@ -2448,7 +2966,7 @@
           </a:bodyPr>
           <a:lstStyle/>
           <a:p>
-            <a:pPr marL="0" indent="0" lvl="0">
+            <a:pPr marL="0" lvl="0" indent="0">
               <a:lnSpc>
                 <a:spcPct val="100000"/>
               </a:lnSpc>
@@ -2467,7 +2985,7 @@
             </a:r>
           </a:p>
           <a:p>
-            <a:pPr marL="0" indent="0" lvl="0">
+            <a:pPr marL="0" lvl="0" indent="0">
               <a:lnSpc>
                 <a:spcPct val="104000"/>
               </a:lnSpc>
@@ -2585,7 +3103,7 @@
             </a:r>
           </a:p>
           <a:p>
-            <a:pPr marL="0" indent="0" lvl="0">
+            <a:pPr marL="0" lvl="0" indent="0">
               <a:lnSpc>
                 <a:spcPct val="104000"/>
               </a:lnSpc>
@@ -2670,7 +3188,7 @@
             </a:r>
           </a:p>
           <a:p>
-            <a:pPr marL="0" indent="0" lvl="0">
+            <a:pPr marL="0" lvl="0" indent="0">
               <a:lnSpc>
                 <a:spcPct val="104000"/>
               </a:lnSpc>
@@ -2711,7 +3229,7 @@
             </a:r>
           </a:p>
           <a:p>
-            <a:pPr marL="0" indent="0" lvl="0">
+            <a:pPr marL="0" lvl="0" indent="0">
               <a:lnSpc>
                 <a:spcPct val="104000"/>
               </a:lnSpc>
@@ -2796,7 +3314,7 @@
             </a:r>
           </a:p>
           <a:p>
-            <a:pPr marL="0" indent="0" lvl="0">
+            <a:pPr marL="0" lvl="0" indent="0">
               <a:lnSpc>
                 <a:spcPct val="104000"/>
               </a:lnSpc>
@@ -2837,7 +3355,7 @@
             </a:r>
           </a:p>
           <a:p>
-            <a:pPr marL="0" indent="0" lvl="0">
+            <a:pPr marL="0" lvl="0" indent="0">
               <a:lnSpc>
                 <a:spcPct val="104000"/>
               </a:lnSpc>
@@ -2878,7 +3396,7 @@
             </a:r>
           </a:p>
           <a:p>
-            <a:pPr marL="0" indent="0" lvl="0">
+            <a:pPr marL="0" lvl="0" indent="0">
               <a:lnSpc>
                 <a:spcPct val="104000"/>
               </a:lnSpc>
@@ -2897,7 +3415,7 @@
             </a:r>
           </a:p>
           <a:p>
-            <a:pPr marL="0" indent="0" lvl="0">
+            <a:pPr marL="0" lvl="0" indent="0">
               <a:lnSpc>
                 <a:spcPct val="104000"/>
               </a:lnSpc>
@@ -2916,7 +3434,7 @@
             </a:r>
           </a:p>
           <a:p>
-            <a:pPr marL="0" indent="0" lvl="0">
+            <a:pPr marL="0" lvl="0" indent="0">
               <a:lnSpc>
                 <a:spcPct val="104000"/>
               </a:lnSpc>
@@ -2935,7 +3453,7 @@
             </a:r>
           </a:p>
           <a:p>
-            <a:pPr marL="0" indent="0" lvl="0">
+            <a:pPr marL="0" lvl="0" indent="0">
               <a:lnSpc>
                 <a:spcPct val="104000"/>
               </a:lnSpc>
@@ -2954,7 +3472,7 @@
             </a:r>
           </a:p>
           <a:p>
-            <a:pPr marL="0" indent="0" lvl="0">
+            <a:pPr marL="0" lvl="0" indent="0">
               <a:lnSpc>
                 <a:spcPct val="104000"/>
               </a:lnSpc>
@@ -2995,7 +3513,7 @@
             </a:r>
           </a:p>
           <a:p>
-            <a:pPr marL="0" indent="0" lvl="0">
+            <a:pPr marL="0" lvl="0" indent="0">
               <a:lnSpc>
                 <a:spcPct val="104000"/>
               </a:lnSpc>
@@ -3036,7 +3554,7 @@
             </a:r>
           </a:p>
           <a:p>
-            <a:pPr marL="0" indent="0" lvl="0">
+            <a:pPr marL="0" lvl="0" indent="0">
               <a:lnSpc>
                 <a:spcPct val="104000"/>
               </a:lnSpc>
@@ -3077,7 +3595,7 @@
             </a:r>
           </a:p>
           <a:p>
-            <a:pPr marL="0" indent="0" lvl="0">
+            <a:pPr marL="0" lvl="0" indent="0">
               <a:lnSpc>
                 <a:spcPct val="104000"/>
               </a:lnSpc>
@@ -3096,7 +3614,7 @@
             </a:r>
           </a:p>
           <a:p>
-            <a:pPr marL="0" indent="0" lvl="0">
+            <a:pPr marL="0" lvl="0" indent="0">
               <a:lnSpc>
                 <a:spcPct val="104000"/>
               </a:lnSpc>
@@ -3115,7 +3633,7 @@
             </a:r>
           </a:p>
           <a:p>
-            <a:pPr marL="0" indent="0" lvl="0">
+            <a:pPr marL="0" lvl="0" indent="0">
               <a:lnSpc>
                 <a:spcPct val="104000"/>
               </a:lnSpc>
@@ -3233,7 +3751,7 @@
             </a:r>
           </a:p>
           <a:p>
-            <a:pPr marL="0" indent="0" lvl="0">
+            <a:pPr marL="0" lvl="0" indent="0">
               <a:lnSpc>
                 <a:spcPct val="104000"/>
               </a:lnSpc>
@@ -3318,7 +3836,7 @@
             </a:r>
           </a:p>
           <a:p>
-            <a:pPr marL="0" indent="0" lvl="0">
+            <a:pPr marL="0" lvl="0" indent="0">
               <a:lnSpc>
                 <a:spcPct val="104000"/>
               </a:lnSpc>
@@ -3381,7 +3899,7 @@
             </a:r>
           </a:p>
           <a:p>
-            <a:pPr marL="0" indent="0" lvl="0">
+            <a:pPr marL="0" lvl="0" indent="0">
               <a:lnSpc>
                 <a:spcPct val="104000"/>
               </a:lnSpc>
@@ -3400,7 +3918,7 @@
             </a:r>
           </a:p>
           <a:p>
-            <a:pPr marL="0" indent="0" lvl="0">
+            <a:pPr marL="0" lvl="0" indent="0">
               <a:lnSpc>
                 <a:spcPct val="104000"/>
               </a:lnSpc>
@@ -3441,7 +3959,7 @@
             </a:r>
           </a:p>
           <a:p>
-            <a:pPr marL="0" indent="0" lvl="0">
+            <a:pPr marL="0" lvl="0" indent="0">
               <a:lnSpc>
                 <a:spcPct val="104000"/>
               </a:lnSpc>
@@ -3460,7 +3978,7 @@
             </a:r>
           </a:p>
           <a:p>
-            <a:pPr marL="0" indent="0" lvl="0">
+            <a:pPr marL="0" lvl="0" indent="0">
               <a:lnSpc>
                 <a:spcPct val="104000"/>
               </a:lnSpc>
@@ -3479,7 +3997,7 @@
             </a:r>
           </a:p>
           <a:p>
-            <a:pPr marL="0" indent="0" lvl="0">
+            <a:pPr marL="0" lvl="0" indent="0">
               <a:lnSpc>
                 <a:spcPct val="104000"/>
               </a:lnSpc>
@@ -3498,7 +4016,7 @@
             </a:r>
           </a:p>
           <a:p>
-            <a:pPr marL="0" indent="0" lvl="0">
+            <a:pPr marL="0" lvl="0" indent="0">
               <a:lnSpc>
                 <a:spcPct val="104000"/>
               </a:lnSpc>
@@ -3617,7 +4135,7 @@
           </a:bodyPr>
           <a:lstStyle/>
           <a:p>
-            <a:pPr marL="0" indent="0" lvl="0">
+            <a:pPr marL="0" lvl="0" indent="0">
               <a:lnSpc>
                 <a:spcPct val="100000"/>
               </a:lnSpc>
@@ -3659,7 +4177,7 @@
           </a:bodyPr>
           <a:lstStyle/>
           <a:p>
-            <a:pPr marL="0" indent="0" lvl="0" algn="r">
+            <a:pPr marL="0" lvl="0" indent="0" algn="r">
               <a:lnSpc>
                 <a:spcPct val="100000"/>
               </a:lnSpc>
@@ -3681,6 +4199,9 @@
       </p:sp>
     </p:spTree>
   </p:cSld>
+  <p:clrMapOvr>
+    <a:masterClrMapping/>
+  </p:clrMapOvr>
 </p:sld>
 </file>
 
@@ -3723,14 +4244,14 @@
           </a:bodyPr>
           <a:lstStyle/>
           <a:p>
-            <a:pPr marL="0" indent="0" lvl="0">
-              <a:lnSpc>
-                <a:spcPct val="100000"/>
-              </a:lnSpc>
-              <a:buNone/>
-            </a:pPr>
-            <a:r>
-              <a:rPr lang="zh-CN" sz="3200" dirty="0" b="1">
+            <a:pPr marL="0" lvl="0" indent="0">
+              <a:lnSpc>
+                <a:spcPct val="100000"/>
+              </a:lnSpc>
+              <a:buNone/>
+            </a:pPr>
+            <a:r>
+              <a:rPr lang="zh-CN" sz="3200" b="1" dirty="0">
                 <a:solidFill>
                   <a:srgbClr val="1A1A18"/>
                 </a:solidFill>
@@ -3767,7 +4288,9 @@
         <p:txBody>
           <a:bodyPr/>
           <a:lstStyle/>
-          <a:p/>
+          <a:p>
+            <a:endParaRPr/>
+          </a:p>
         </p:txBody>
       </p:sp>
       <p:graphicFrame>
@@ -3787,8 +4310,20 @@
             <a:tbl>
               <a:tblPr firstRow="1"/>
               <a:tblGrid>
-                <a:gridCol w="4505169"/>
-                <a:gridCol w="6552975"/>
+                <a:gridCol w="4505169">
+                  <a:extLst>
+                    <a:ext uri="{9D8B030D-6E8A-4147-A177-3AD203B41FA5}">
+                      <a16:colId xmlns:a16="http://schemas.microsoft.com/office/drawing/2014/main" val="20000"/>
+                    </a:ext>
+                  </a:extLst>
+                </a:gridCol>
+                <a:gridCol w="6552975">
+                  <a:extLst>
+                    <a:ext uri="{9D8B030D-6E8A-4147-A177-3AD203B41FA5}">
+                      <a16:colId xmlns:a16="http://schemas.microsoft.com/office/drawing/2014/main" val="20001"/>
+                    </a:ext>
+                  </a:extLst>
+                </a:gridCol>
               </a:tblGrid>
               <a:tr h="380504">
                 <a:tc>
@@ -3796,14 +4331,14 @@
                     <a:bodyPr/>
                     <a:lstStyle/>
                     <a:p>
-                      <a:pPr marL="0" indent="0" lvl="0">
+                      <a:pPr marL="0" lvl="0" indent="0">
                         <a:lnSpc>
                           <a:spcPct val="100000"/>
                         </a:lnSpc>
                         <a:buNone/>
                       </a:pPr>
                       <a:r>
-                        <a:rPr lang="zh-CN" sz="1755" dirty="0" b="1">
+                        <a:rPr lang="zh-CN" sz="1755" b="1" dirty="0">
                           <a:solidFill>
                             <a:srgbClr val="1A1A18"/>
                           </a:solidFill>
@@ -3846,14 +4381,14 @@
                     <a:bodyPr/>
                     <a:lstStyle/>
                     <a:p>
-                      <a:pPr marL="0" indent="0" lvl="0">
+                      <a:pPr marL="0" lvl="0" indent="0">
                         <a:lnSpc>
                           <a:spcPct val="100000"/>
                         </a:lnSpc>
                         <a:buNone/>
                       </a:pPr>
                       <a:r>
-                        <a:rPr lang="zh-CN" sz="1755" dirty="0" b="1">
+                        <a:rPr lang="zh-CN" sz="1755" b="1" dirty="0">
                           <a:solidFill>
                             <a:srgbClr val="1A1A18"/>
                           </a:solidFill>
@@ -3891,6 +4426,11 @@
                     </a:solidFill>
                   </a:tcPr>
                 </a:tc>
+                <a:extLst>
+                  <a:ext uri="{0D108BD9-81ED-4DB2-BD59-A6C34878D82A}">
+                    <a16:rowId xmlns:a16="http://schemas.microsoft.com/office/drawing/2014/main" val="10000"/>
+                  </a:ext>
+                </a:extLst>
               </a:tr>
               <a:tr h="380504">
                 <a:tc>
@@ -3898,7 +4438,7 @@
                     <a:bodyPr/>
                     <a:lstStyle/>
                     <a:p>
-                      <a:pPr marL="0" indent="0" lvl="0">
+                      <a:pPr marL="0" lvl="0" indent="0">
                         <a:lnSpc>
                           <a:spcPct val="100000"/>
                         </a:lnSpc>
@@ -3948,7 +4488,7 @@
                     <a:bodyPr/>
                     <a:lstStyle/>
                     <a:p>
-                      <a:pPr marL="0" indent="0" lvl="0">
+                      <a:pPr marL="0" lvl="0" indent="0">
                         <a:lnSpc>
                           <a:spcPct val="100000"/>
                         </a:lnSpc>
@@ -3993,6 +4533,11 @@
                     </a:solidFill>
                   </a:tcPr>
                 </a:tc>
+                <a:extLst>
+                  <a:ext uri="{0D108BD9-81ED-4DB2-BD59-A6C34878D82A}">
+                    <a16:rowId xmlns:a16="http://schemas.microsoft.com/office/drawing/2014/main" val="10001"/>
+                  </a:ext>
+                </a:extLst>
               </a:tr>
               <a:tr h="380504">
                 <a:tc>
@@ -4000,7 +4545,7 @@
                     <a:bodyPr/>
                     <a:lstStyle/>
                     <a:p>
-                      <a:pPr marL="0" indent="0" lvl="0">
+                      <a:pPr marL="0" lvl="0" indent="0">
                         <a:lnSpc>
                           <a:spcPct val="100000"/>
                         </a:lnSpc>
@@ -4050,7 +4595,7 @@
                     <a:bodyPr/>
                     <a:lstStyle/>
                     <a:p>
-                      <a:pPr marL="0" indent="0" lvl="0">
+                      <a:pPr marL="0" lvl="0" indent="0">
                         <a:lnSpc>
                           <a:spcPct val="100000"/>
                         </a:lnSpc>
@@ -4095,6 +4640,11 @@
                     </a:solidFill>
                   </a:tcPr>
                 </a:tc>
+                <a:extLst>
+                  <a:ext uri="{0D108BD9-81ED-4DB2-BD59-A6C34878D82A}">
+                    <a16:rowId xmlns:a16="http://schemas.microsoft.com/office/drawing/2014/main" val="10002"/>
+                  </a:ext>
+                </a:extLst>
               </a:tr>
               <a:tr h="380504">
                 <a:tc>
@@ -4102,7 +4652,7 @@
                     <a:bodyPr/>
                     <a:lstStyle/>
                     <a:p>
-                      <a:pPr marL="0" indent="0" lvl="0">
+                      <a:pPr marL="0" lvl="0" indent="0">
                         <a:lnSpc>
                           <a:spcPct val="100000"/>
                         </a:lnSpc>
@@ -4152,7 +4702,7 @@
                     <a:bodyPr/>
                     <a:lstStyle/>
                     <a:p>
-                      <a:pPr marL="0" indent="0" lvl="0">
+                      <a:pPr marL="0" lvl="0" indent="0">
                         <a:lnSpc>
                           <a:spcPct val="100000"/>
                         </a:lnSpc>
@@ -4197,6 +4747,11 @@
                     </a:solidFill>
                   </a:tcPr>
                 </a:tc>
+                <a:extLst>
+                  <a:ext uri="{0D108BD9-81ED-4DB2-BD59-A6C34878D82A}">
+                    <a16:rowId xmlns:a16="http://schemas.microsoft.com/office/drawing/2014/main" val="10003"/>
+                  </a:ext>
+                </a:extLst>
               </a:tr>
               <a:tr h="380504">
                 <a:tc>
@@ -4204,7 +4759,7 @@
                     <a:bodyPr/>
                     <a:lstStyle/>
                     <a:p>
-                      <a:pPr marL="0" indent="0" lvl="0">
+                      <a:pPr marL="0" lvl="0" indent="0">
                         <a:lnSpc>
                           <a:spcPct val="100000"/>
                         </a:lnSpc>
@@ -4222,7 +4777,7 @@
                         <a:t>递归改成对</a:t>
                       </a:r>
                       <a:r>
-                        <a:rPr lang="zh-CN" sz="1755" dirty="0" b="1">
+                        <a:rPr lang="zh-CN" sz="1755" b="1" dirty="0">
                           <a:solidFill>
                             <a:srgbClr val="8A4B2A"/>
                           </a:solidFill>
@@ -4276,7 +4831,7 @@
                     <a:bodyPr/>
                     <a:lstStyle/>
                     <a:p>
-                      <a:pPr marL="0" indent="0" lvl="0">
+                      <a:pPr marL="0" lvl="0" indent="0">
                         <a:lnSpc>
                           <a:spcPct val="100000"/>
                         </a:lnSpc>
@@ -4294,7 +4849,7 @@
                         <a:t>栈深度降到 </a:t>
                       </a:r>
                       <a:r>
-                        <a:rPr lang="zh-CN" sz="1755" dirty="0" i="1">
+                        <a:rPr lang="zh-CN" sz="1755" i="1" dirty="0">
                           <a:solidFill>
                             <a:srgbClr val="1A1A18"/>
                           </a:solidFill>
@@ -4332,6 +4887,11 @@
                     </a:solidFill>
                   </a:tcPr>
                 </a:tc>
+                <a:extLst>
+                  <a:ext uri="{0D108BD9-81ED-4DB2-BD59-A6C34878D82A}">
+                    <a16:rowId xmlns:a16="http://schemas.microsoft.com/office/drawing/2014/main" val="10004"/>
+                  </a:ext>
+                </a:extLst>
               </a:tr>
             </a:tbl>
           </a:graphicData>
@@ -4359,14 +4919,14 @@
           </a:bodyPr>
           <a:lstStyle/>
           <a:p>
-            <a:pPr marL="0" indent="0" lvl="0">
-              <a:lnSpc>
-                <a:spcPct val="100000"/>
-              </a:lnSpc>
-              <a:buNone/>
-            </a:pPr>
-            <a:r>
-              <a:rPr lang="zh-CN" sz="2340" dirty="0" b="1">
+            <a:pPr marL="0" lvl="0" indent="0">
+              <a:lnSpc>
+                <a:spcPct val="100000"/>
+              </a:lnSpc>
+              <a:buNone/>
+            </a:pPr>
+            <a:r>
+              <a:rPr lang="zh-CN" sz="2340" b="1" dirty="0">
                 <a:solidFill>
                   <a:srgbClr val="8A4B2A"/>
                 </a:solidFill>
@@ -4388,7 +4948,7 @@
               <a:t>：不做的话，最坏情况下递归深度是 </a:t>
             </a:r>
             <a:r>
-              <a:rPr lang="zh-CN" sz="2340" dirty="0" i="1">
+              <a:rPr lang="zh-CN" sz="2340" i="1" dirty="0">
                 <a:solidFill>
                   <a:srgbClr val="1A1A18"/>
                 </a:solidFill>
@@ -4434,7 +4994,7 @@
           </a:bodyPr>
           <a:lstStyle/>
           <a:p>
-            <a:pPr marL="0" indent="0" lvl="0">
+            <a:pPr marL="0" lvl="0" indent="0">
               <a:lnSpc>
                 <a:spcPct val="100000"/>
               </a:lnSpc>
@@ -4476,7 +5036,7 @@
           </a:bodyPr>
           <a:lstStyle/>
           <a:p>
-            <a:pPr marL="0" indent="0" lvl="0" algn="r">
+            <a:pPr marL="0" lvl="0" indent="0" algn="r">
               <a:lnSpc>
                 <a:spcPct val="100000"/>
               </a:lnSpc>
@@ -4498,6 +5058,9 @@
       </p:sp>
     </p:spTree>
   </p:cSld>
+  <p:clrMapOvr>
+    <a:masterClrMapping/>
+  </p:clrMapOvr>
 </p:sld>
 </file>
 
@@ -4540,14 +5103,14 @@
           </a:bodyPr>
           <a:lstStyle/>
           <a:p>
-            <a:pPr marL="0" indent="0" lvl="0">
-              <a:lnSpc>
-                <a:spcPct val="100000"/>
-              </a:lnSpc>
-              <a:buNone/>
-            </a:pPr>
-            <a:r>
-              <a:rPr lang="zh-CN" sz="3200" dirty="0" b="1">
+            <a:pPr marL="0" lvl="0" indent="0">
+              <a:lnSpc>
+                <a:spcPct val="100000"/>
+              </a:lnSpc>
+              <a:buNone/>
+            </a:pPr>
+            <a:r>
+              <a:rPr lang="zh-CN" sz="3200" b="1" dirty="0">
                 <a:solidFill>
                   <a:srgbClr val="1A1A18"/>
                 </a:solidFill>
@@ -4584,7 +5147,9 @@
         <p:txBody>
           <a:bodyPr/>
           <a:lstStyle/>
-          <a:p/>
+          <a:p>
+            <a:endParaRPr/>
+          </a:p>
         </p:txBody>
       </p:sp>
       <p:pic>
@@ -4596,7 +5161,7 @@
           <p:nvPr/>
         </p:nvPicPr>
         <p:blipFill>
-          <a:blip r:embed="rId100"/>
+          <a:blip r:embed="rId2"/>
           <a:stretch>
             <a:fillRect/>
           </a:stretch>
@@ -4633,7 +5198,7 @@
           </a:bodyPr>
           <a:lstStyle/>
           <a:p>
-            <a:pPr marL="0" indent="0" lvl="0" algn="ctr">
+            <a:pPr marL="0" lvl="0" indent="0" algn="ctr">
               <a:lnSpc>
                 <a:spcPct val="100000"/>
               </a:lnSpc>
@@ -4675,7 +5240,7 @@
           </a:bodyPr>
           <a:lstStyle/>
           <a:p>
-            <a:pPr marL="0" indent="0" lvl="0">
+            <a:pPr marL="0" lvl="0" indent="0">
               <a:lnSpc>
                 <a:spcPct val="100000"/>
               </a:lnSpc>
@@ -4717,7 +5282,7 @@
           </a:bodyPr>
           <a:lstStyle/>
           <a:p>
-            <a:pPr marL="0" indent="0" lvl="0" algn="r">
+            <a:pPr marL="0" lvl="0" indent="0" algn="r">
               <a:lnSpc>
                 <a:spcPct val="100000"/>
               </a:lnSpc>
@@ -4739,6 +5304,9 @@
       </p:sp>
     </p:spTree>
   </p:cSld>
+  <p:clrMapOvr>
+    <a:masterClrMapping/>
+  </p:clrMapOvr>
 </p:sld>
 </file>
 
@@ -4781,14 +5349,14 @@
           </a:bodyPr>
           <a:lstStyle/>
           <a:p>
-            <a:pPr marL="0" indent="0" lvl="0">
-              <a:lnSpc>
-                <a:spcPct val="100000"/>
-              </a:lnSpc>
-              <a:buNone/>
-            </a:pPr>
-            <a:r>
-              <a:rPr lang="zh-CN" sz="3200" dirty="0" b="1">
+            <a:pPr marL="0" lvl="0" indent="0">
+              <a:lnSpc>
+                <a:spcPct val="100000"/>
+              </a:lnSpc>
+              <a:buNone/>
+            </a:pPr>
+            <a:r>
+              <a:rPr lang="zh-CN" sz="3200" b="1" dirty="0">
                 <a:solidFill>
                   <a:srgbClr val="1A1A18"/>
                 </a:solidFill>
@@ -4825,7 +5393,9 @@
         <p:txBody>
           <a:bodyPr/>
           <a:lstStyle/>
-          <a:p/>
+          <a:p>
+            <a:endParaRPr/>
+          </a:p>
         </p:txBody>
       </p:sp>
       <p:sp>
@@ -4859,7 +5429,7 @@
           </a:bodyPr>
           <a:lstStyle/>
           <a:p>
-            <a:pPr marL="0" indent="0" lvl="0">
+            <a:pPr marL="0" lvl="0" indent="0">
               <a:lnSpc>
                 <a:spcPct val="100000"/>
               </a:lnSpc>
@@ -4878,7 +5448,7 @@
             </a:r>
           </a:p>
           <a:p>
-            <a:pPr marL="0" indent="0" lvl="0">
+            <a:pPr marL="0" lvl="0" indent="0">
               <a:lnSpc>
                 <a:spcPct val="104000"/>
               </a:lnSpc>
@@ -4974,7 +5544,7 @@
             </a:r>
           </a:p>
           <a:p>
-            <a:pPr marL="0" indent="0" lvl="0">
+            <a:pPr marL="0" lvl="0" indent="0">
               <a:lnSpc>
                 <a:spcPct val="104000"/>
               </a:lnSpc>
@@ -5059,7 +5629,7 @@
             </a:r>
           </a:p>
           <a:p>
-            <a:pPr marL="0" indent="0" lvl="0">
+            <a:pPr marL="0" lvl="0" indent="0">
               <a:lnSpc>
                 <a:spcPct val="104000"/>
               </a:lnSpc>
@@ -5100,7 +5670,7 @@
             </a:r>
           </a:p>
           <a:p>
-            <a:pPr marL="0" indent="0" lvl="0">
+            <a:pPr marL="0" lvl="0" indent="0">
               <a:lnSpc>
                 <a:spcPct val="104000"/>
               </a:lnSpc>
@@ -5141,7 +5711,7 @@
             </a:r>
           </a:p>
           <a:p>
-            <a:pPr marL="0" indent="0" lvl="0">
+            <a:pPr marL="0" lvl="0" indent="0">
               <a:lnSpc>
                 <a:spcPct val="104000"/>
               </a:lnSpc>
@@ -5182,7 +5752,7 @@
             </a:r>
           </a:p>
           <a:p>
-            <a:pPr marL="0" indent="0" lvl="0">
+            <a:pPr marL="0" lvl="0" indent="0">
               <a:lnSpc>
                 <a:spcPct val="104000"/>
               </a:lnSpc>
@@ -5223,7 +5793,7 @@
             </a:r>
           </a:p>
           <a:p>
-            <a:pPr marL="0" indent="0" lvl="0">
+            <a:pPr marL="0" lvl="0" indent="0">
               <a:lnSpc>
                 <a:spcPct val="104000"/>
               </a:lnSpc>
@@ -5242,7 +5812,7 @@
             </a:r>
           </a:p>
           <a:p>
-            <a:pPr marL="0" indent="0" lvl="0">
+            <a:pPr marL="0" lvl="0" indent="0">
               <a:lnSpc>
                 <a:spcPct val="104000"/>
               </a:lnSpc>
@@ -5261,7 +5831,7 @@
             </a:r>
           </a:p>
           <a:p>
-            <a:pPr marL="0" indent="0" lvl="0">
+            <a:pPr marL="0" lvl="0" indent="0">
               <a:lnSpc>
                 <a:spcPct val="104000"/>
               </a:lnSpc>
@@ -5302,7 +5872,7 @@
             </a:r>
           </a:p>
           <a:p>
-            <a:pPr marL="0" indent="0" lvl="0">
+            <a:pPr marL="0" lvl="0" indent="0">
               <a:lnSpc>
                 <a:spcPct val="104000"/>
               </a:lnSpc>
@@ -5343,7 +5913,7 @@
             </a:r>
           </a:p>
           <a:p>
-            <a:pPr marL="0" indent="0" lvl="0">
+            <a:pPr marL="0" lvl="0" indent="0">
               <a:lnSpc>
                 <a:spcPct val="104000"/>
               </a:lnSpc>
@@ -5406,7 +5976,7 @@
             </a:r>
           </a:p>
           <a:p>
-            <a:pPr marL="0" indent="0" lvl="0">
+            <a:pPr marL="0" lvl="0" indent="0">
               <a:lnSpc>
                 <a:spcPct val="104000"/>
               </a:lnSpc>
@@ -5425,7 +5995,7 @@
             </a:r>
           </a:p>
           <a:p>
-            <a:pPr marL="0" indent="0" lvl="0">
+            <a:pPr marL="0" lvl="0" indent="0">
               <a:lnSpc>
                 <a:spcPct val="104000"/>
               </a:lnSpc>
@@ -5444,7 +6014,7 @@
             </a:r>
           </a:p>
           <a:p>
-            <a:pPr marL="0" indent="0" lvl="0">
+            <a:pPr marL="0" lvl="0" indent="0">
               <a:lnSpc>
                 <a:spcPct val="104000"/>
               </a:lnSpc>
@@ -5540,7 +6110,7 @@
             </a:r>
           </a:p>
           <a:p>
-            <a:pPr marL="0" indent="0" lvl="0">
+            <a:pPr marL="0" lvl="0" indent="0">
               <a:lnSpc>
                 <a:spcPct val="104000"/>
               </a:lnSpc>
@@ -5603,7 +6173,7 @@
             </a:r>
           </a:p>
           <a:p>
-            <a:pPr marL="0" indent="0" lvl="0">
+            <a:pPr marL="0" lvl="0" indent="0">
               <a:lnSpc>
                 <a:spcPct val="104000"/>
               </a:lnSpc>
@@ -5688,7 +6258,7 @@
             </a:r>
           </a:p>
           <a:p>
-            <a:pPr marL="0" indent="0" lvl="0">
+            <a:pPr marL="0" lvl="0" indent="0">
               <a:lnSpc>
                 <a:spcPct val="104000"/>
               </a:lnSpc>
@@ -5773,7 +6343,7 @@
             </a:r>
           </a:p>
           <a:p>
-            <a:pPr marL="0" indent="0" lvl="0">
+            <a:pPr marL="0" lvl="0" indent="0">
               <a:lnSpc>
                 <a:spcPct val="104000"/>
               </a:lnSpc>
@@ -5792,7 +6362,7 @@
             </a:r>
           </a:p>
           <a:p>
-            <a:pPr marL="0" indent="0" lvl="0">
+            <a:pPr marL="0" lvl="0" indent="0">
               <a:lnSpc>
                 <a:spcPct val="104000"/>
               </a:lnSpc>
@@ -5811,7 +6381,7 @@
             </a:r>
           </a:p>
           <a:p>
-            <a:pPr marL="0" indent="0" lvl="0">
+            <a:pPr marL="0" lvl="0" indent="0">
               <a:lnSpc>
                 <a:spcPct val="104000"/>
               </a:lnSpc>
@@ -5830,7 +6400,7 @@
             </a:r>
           </a:p>
           <a:p>
-            <a:pPr marL="0" indent="0" lvl="0">
+            <a:pPr marL="0" lvl="0" indent="0">
               <a:lnSpc>
                 <a:spcPct val="104000"/>
               </a:lnSpc>
@@ -5849,7 +6419,7 @@
             </a:r>
           </a:p>
           <a:p>
-            <a:pPr marL="0" indent="0" lvl="0">
+            <a:pPr marL="0" lvl="0" indent="0">
               <a:lnSpc>
                 <a:spcPct val="104000"/>
               </a:lnSpc>
@@ -5868,7 +6438,7 @@
             </a:r>
           </a:p>
           <a:p>
-            <a:pPr marL="0" indent="0" lvl="0">
+            <a:pPr marL="0" lvl="0" indent="0">
               <a:lnSpc>
                 <a:spcPct val="104000"/>
               </a:lnSpc>
@@ -5887,7 +6457,7 @@
             </a:r>
           </a:p>
           <a:p>
-            <a:pPr marL="0" indent="0" lvl="0">
+            <a:pPr marL="0" lvl="0" indent="0">
               <a:lnSpc>
                 <a:spcPct val="104000"/>
               </a:lnSpc>
@@ -5961,7 +6531,7 @@
             </a:r>
           </a:p>
           <a:p>
-            <a:pPr marL="0" indent="0" lvl="0">
+            <a:pPr marL="0" lvl="0" indent="0">
               <a:lnSpc>
                 <a:spcPct val="104000"/>
               </a:lnSpc>
@@ -6002,7 +6572,7 @@
             </a:r>
           </a:p>
           <a:p>
-            <a:pPr marL="0" indent="0" lvl="0">
+            <a:pPr marL="0" lvl="0" indent="0">
               <a:lnSpc>
                 <a:spcPct val="104000"/>
               </a:lnSpc>
@@ -6043,7 +6613,7 @@
             </a:r>
           </a:p>
           <a:p>
-            <a:pPr marL="0" indent="0" lvl="0">
+            <a:pPr marL="0" lvl="0" indent="0">
               <a:lnSpc>
                 <a:spcPct val="104000"/>
               </a:lnSpc>
@@ -6085,7 +6655,7 @@
           </a:bodyPr>
           <a:lstStyle/>
           <a:p>
-            <a:pPr marL="0" indent="0" lvl="0">
+            <a:pPr marL="0" lvl="0" indent="0">
               <a:lnSpc>
                 <a:spcPct val="100000"/>
               </a:lnSpc>
@@ -6127,7 +6697,7 @@
           </a:bodyPr>
           <a:lstStyle/>
           <a:p>
-            <a:pPr marL="0" indent="0" lvl="0" algn="r">
+            <a:pPr marL="0" lvl="0" indent="0" algn="r">
               <a:lnSpc>
                 <a:spcPct val="100000"/>
               </a:lnSpc>
@@ -6149,6 +6719,9 @@
       </p:sp>
     </p:spTree>
   </p:cSld>
+  <p:clrMapOvr>
+    <a:masterClrMapping/>
+  </p:clrMapOvr>
 </p:sld>
 </file>
 
@@ -6191,14 +6764,14 @@
           </a:bodyPr>
           <a:lstStyle/>
           <a:p>
-            <a:pPr marL="0" indent="0" lvl="0">
-              <a:lnSpc>
-                <a:spcPct val="100000"/>
-              </a:lnSpc>
-              <a:buNone/>
-            </a:pPr>
-            <a:r>
-              <a:rPr lang="zh-CN" sz="3200" dirty="0" b="1">
+            <a:pPr marL="0" lvl="0" indent="0">
+              <a:lnSpc>
+                <a:spcPct val="100000"/>
+              </a:lnSpc>
+              <a:buNone/>
+            </a:pPr>
+            <a:r>
+              <a:rPr lang="zh-CN" sz="3200" b="1" dirty="0">
                 <a:solidFill>
                   <a:srgbClr val="1A1A18"/>
                 </a:solidFill>
@@ -6235,7 +6808,9 @@
         <p:txBody>
           <a:bodyPr/>
           <a:lstStyle/>
-          <a:p/>
+          <a:p>
+            <a:endParaRPr/>
+          </a:p>
         </p:txBody>
       </p:sp>
       <p:sp>
@@ -6260,14 +6835,14 @@
           </a:bodyPr>
           <a:lstStyle/>
           <a:p>
-            <a:pPr marL="0" indent="0" lvl="0">
-              <a:lnSpc>
-                <a:spcPct val="100000"/>
-              </a:lnSpc>
-              <a:buNone/>
-            </a:pPr>
-            <a:r>
-              <a:rPr lang="zh-CN" sz="2340" dirty="0" b="1">
+            <a:pPr marL="0" lvl="0" indent="0">
+              <a:lnSpc>
+                <a:spcPct val="100000"/>
+              </a:lnSpc>
+              <a:buNone/>
+            </a:pPr>
+            <a:r>
+              <a:rPr lang="zh-CN" sz="2340" b="1" dirty="0">
                 <a:solidFill>
                   <a:srgbClr val="8A4B2A"/>
                 </a:solidFill>
@@ -6278,7 +6853,7 @@
               <a:t>比较排序的下界是 </a:t>
             </a:r>
             <a:r>
-              <a:rPr lang="zh-CN" sz="2340" dirty="0" b="1" i="1">
+              <a:rPr lang="zh-CN" sz="2340" b="1" i="1" dirty="0">
                 <a:solidFill>
                   <a:srgbClr val="8A4B2A"/>
                 </a:solidFill>
@@ -6326,7 +6901,9 @@
         <p:txBody>
           <a:bodyPr/>
           <a:lstStyle/>
-          <a:p/>
+          <a:p>
+            <a:endParaRPr/>
+          </a:p>
         </p:txBody>
       </p:sp>
       <p:sp>
@@ -6351,7 +6928,7 @@
           </a:bodyPr>
           <a:lstStyle/>
           <a:p>
-            <a:pPr marL="0" indent="0" lvl="0">
+            <a:pPr marL="0" lvl="0" indent="0">
               <a:lnSpc>
                 <a:spcPct val="100000"/>
               </a:lnSpc>
@@ -6369,7 +6946,7 @@
               <a:t>n 个元素有 </a:t>
             </a:r>
             <a:r>
-              <a:rPr lang="zh-CN" sz="2145" dirty="0" i="1">
+              <a:rPr lang="zh-CN" sz="2145" i="1" dirty="0">
                 <a:solidFill>
                   <a:srgbClr val="6B6B66"/>
                 </a:solidFill>
@@ -6391,7 +6968,7 @@
               <a:t> 种排列，每次比较至多把可能性减半， 所以至少要 </a:t>
             </a:r>
             <a:r>
-              <a:rPr lang="zh-CN" sz="2145" dirty="0" i="1">
+              <a:rPr lang="zh-CN" sz="2145" i="1" dirty="0">
                 <a:solidFill>
                   <a:srgbClr val="6B6B66"/>
                 </a:solidFill>
@@ -6437,7 +7014,7 @@
           </a:bodyPr>
           <a:lstStyle/>
           <a:p>
-            <a:pPr marL="0" indent="0" lvl="0">
+            <a:pPr marL="0" lvl="0" indent="0">
               <a:lnSpc>
                 <a:spcPct val="100000"/>
               </a:lnSpc>
@@ -6455,7 +7032,7 @@
               <a:t>想更快，就只能</a:t>
             </a:r>
             <a:r>
-              <a:rPr lang="zh-CN" sz="2340" dirty="0" b="1">
+              <a:rPr lang="zh-CN" sz="2340" b="1" dirty="0">
                 <a:solidFill>
                   <a:srgbClr val="8A4B2A"/>
                 </a:solidFill>
@@ -6501,7 +7078,7 @@
           </a:bodyPr>
           <a:lstStyle/>
           <a:p>
-            <a:pPr marL="0" indent="0" lvl="0">
+            <a:pPr marL="0" lvl="0" indent="0">
               <a:lnSpc>
                 <a:spcPct val="100000"/>
               </a:lnSpc>
@@ -6543,7 +7120,7 @@
           </a:bodyPr>
           <a:lstStyle/>
           <a:p>
-            <a:pPr marL="0" indent="0" lvl="0" algn="r">
+            <a:pPr marL="0" lvl="0" indent="0" algn="r">
               <a:lnSpc>
                 <a:spcPct val="100000"/>
               </a:lnSpc>
@@ -6565,6 +7142,9 @@
       </p:sp>
     </p:spTree>
   </p:cSld>
+  <p:clrMapOvr>
+    <a:masterClrMapping/>
+  </p:clrMapOvr>
 </p:sld>
 </file>
 
@@ -6607,14 +7187,14 @@
           </a:bodyPr>
           <a:lstStyle/>
           <a:p>
-            <a:pPr marL="0" indent="0" lvl="0">
-              <a:lnSpc>
-                <a:spcPct val="100000"/>
-              </a:lnSpc>
-              <a:buNone/>
-            </a:pPr>
-            <a:r>
-              <a:rPr lang="zh-CN" sz="3200" dirty="0" b="1">
+            <a:pPr marL="0" lvl="0" indent="0">
+              <a:lnSpc>
+                <a:spcPct val="100000"/>
+              </a:lnSpc>
+              <a:buNone/>
+            </a:pPr>
+            <a:r>
+              <a:rPr lang="zh-CN" sz="3200" b="1" dirty="0">
                 <a:solidFill>
                   <a:srgbClr val="1A1A18"/>
                 </a:solidFill>
@@ -6651,7 +7231,9 @@
         <p:txBody>
           <a:bodyPr/>
           <a:lstStyle/>
-          <a:p/>
+          <a:p>
+            <a:endParaRPr/>
+          </a:p>
         </p:txBody>
       </p:sp>
       <p:sp>
@@ -6676,7 +7258,7 @@
           </a:bodyPr>
           <a:lstStyle/>
           <a:p>
-            <a:pPr marL="0" indent="0" lvl="0">
+            <a:pPr marL="0" lvl="0" indent="0">
               <a:lnSpc>
                 <a:spcPct val="100000"/>
               </a:lnSpc>
@@ -6749,7 +7331,7 @@
           </a:bodyPr>
           <a:lstStyle/>
           <a:p>
-            <a:pPr marL="0" indent="0" lvl="0">
+            <a:pPr marL="0" lvl="0" indent="0">
               <a:lnSpc>
                 <a:spcPct val="104000"/>
               </a:lnSpc>
@@ -6768,7 +7350,7 @@
             </a:r>
           </a:p>
           <a:p>
-            <a:pPr marL="0" indent="0" lvl="0">
+            <a:pPr marL="0" lvl="0" indent="0">
               <a:lnSpc>
                 <a:spcPct val="104000"/>
               </a:lnSpc>
@@ -6787,7 +7369,7 @@
             </a:r>
           </a:p>
           <a:p>
-            <a:pPr marL="0" indent="0" lvl="0">
+            <a:pPr marL="0" lvl="0" indent="0">
               <a:lnSpc>
                 <a:spcPct val="104000"/>
               </a:lnSpc>
@@ -6829,7 +7411,7 @@
           </a:bodyPr>
           <a:lstStyle/>
           <a:p>
-            <a:pPr marL="0" indent="0" lvl="0">
+            <a:pPr marL="0" lvl="0" indent="0">
               <a:lnSpc>
                 <a:spcPct val="100000"/>
               </a:lnSpc>
@@ -6847,7 +7429,7 @@
               <a:t>时间 </a:t>
             </a:r>
             <a:r>
-              <a:rPr lang="zh-CN" sz="2340" dirty="0" i="1">
+              <a:rPr lang="zh-CN" sz="2340" i="1" dirty="0">
                 <a:solidFill>
                   <a:srgbClr val="1A1A18"/>
                 </a:solidFill>
@@ -6869,7 +7451,7 @@
               <a:t>，空间 </a:t>
             </a:r>
             <a:r>
-              <a:rPr lang="zh-CN" sz="2340" dirty="0" i="1">
+              <a:rPr lang="zh-CN" sz="2340" i="1" dirty="0">
                 <a:solidFill>
                   <a:srgbClr val="1A1A18"/>
                 </a:solidFill>
@@ -6915,7 +7497,7 @@
           </a:bodyPr>
           <a:lstStyle/>
           <a:p>
-            <a:pPr marL="0" indent="0" lvl="0">
+            <a:pPr marL="0" lvl="0" indent="0">
               <a:lnSpc>
                 <a:spcPct val="100000"/>
               </a:lnSpc>
@@ -6957,7 +7539,7 @@
           </a:bodyPr>
           <a:lstStyle/>
           <a:p>
-            <a:pPr marL="0" indent="0" lvl="0">
+            <a:pPr marL="0" lvl="0" indent="0">
               <a:lnSpc>
                 <a:spcPct val="100000"/>
               </a:lnSpc>
@@ -6999,7 +7581,7 @@
           </a:bodyPr>
           <a:lstStyle/>
           <a:p>
-            <a:pPr marL="0" indent="0" lvl="0" algn="r">
+            <a:pPr marL="0" lvl="0" indent="0" algn="r">
               <a:lnSpc>
                 <a:spcPct val="100000"/>
               </a:lnSpc>
@@ -7021,6 +7603,9 @@
       </p:sp>
     </p:spTree>
   </p:cSld>
+  <p:clrMapOvr>
+    <a:masterClrMapping/>
+  </p:clrMapOvr>
 </p:sld>
 </file>
 
@@ -7063,14 +7648,14 @@
           </a:bodyPr>
           <a:lstStyle/>
           <a:p>
-            <a:pPr marL="0" indent="0" lvl="0">
-              <a:lnSpc>
-                <a:spcPct val="100000"/>
-              </a:lnSpc>
-              <a:buNone/>
-            </a:pPr>
-            <a:r>
-              <a:rPr lang="zh-CN" sz="3200" dirty="0" b="1">
+            <a:pPr marL="0" lvl="0" indent="0">
+              <a:lnSpc>
+                <a:spcPct val="100000"/>
+              </a:lnSpc>
+              <a:buNone/>
+            </a:pPr>
+            <a:r>
+              <a:rPr lang="zh-CN" sz="3200" b="1" dirty="0">
                 <a:solidFill>
                   <a:srgbClr val="1A1A18"/>
                 </a:solidFill>
@@ -7107,7 +7692,9 @@
         <p:txBody>
           <a:bodyPr/>
           <a:lstStyle/>
-          <a:p/>
+          <a:p>
+            <a:endParaRPr/>
+          </a:p>
         </p:txBody>
       </p:sp>
       <p:pic>
@@ -7119,7 +7706,7 @@
           <p:nvPr/>
         </p:nvPicPr>
         <p:blipFill>
-          <a:blip r:embed="rId100"/>
+          <a:blip r:embed="rId2"/>
           <a:stretch>
             <a:fillRect/>
           </a:stretch>
@@ -7156,7 +7743,7 @@
           </a:bodyPr>
           <a:lstStyle/>
           <a:p>
-            <a:pPr marL="0" indent="0" lvl="0" algn="ctr">
+            <a:pPr marL="0" lvl="0" indent="0" algn="ctr">
               <a:lnSpc>
                 <a:spcPct val="100000"/>
               </a:lnSpc>
@@ -7198,7 +7785,7 @@
           </a:bodyPr>
           <a:lstStyle/>
           <a:p>
-            <a:pPr marL="0" indent="0" lvl="0">
+            <a:pPr marL="0" lvl="0" indent="0">
               <a:lnSpc>
                 <a:spcPct val="100000"/>
               </a:lnSpc>
@@ -7240,7 +7827,7 @@
           </a:bodyPr>
           <a:lstStyle/>
           <a:p>
-            <a:pPr marL="0" indent="0" lvl="0" algn="r">
+            <a:pPr marL="0" lvl="0" indent="0" algn="r">
               <a:lnSpc>
                 <a:spcPct val="100000"/>
               </a:lnSpc>
@@ -7262,6 +7849,9 @@
       </p:sp>
     </p:spTree>
   </p:cSld>
+  <p:clrMapOvr>
+    <a:masterClrMapping/>
+  </p:clrMapOvr>
 </p:sld>
 </file>
 
@@ -7304,14 +7894,14 @@
           </a:bodyPr>
           <a:lstStyle/>
           <a:p>
-            <a:pPr marL="0" indent="0" lvl="0">
-              <a:lnSpc>
-                <a:spcPct val="100000"/>
-              </a:lnSpc>
-              <a:buNone/>
-            </a:pPr>
-            <a:r>
-              <a:rPr lang="zh-CN" sz="3200" dirty="0" b="1">
+            <a:pPr marL="0" lvl="0" indent="0">
+              <a:lnSpc>
+                <a:spcPct val="100000"/>
+              </a:lnSpc>
+              <a:buNone/>
+            </a:pPr>
+            <a:r>
+              <a:rPr lang="zh-CN" sz="3200" b="1" dirty="0">
                 <a:solidFill>
                   <a:srgbClr val="1A1A18"/>
                 </a:solidFill>
@@ -7348,7 +7938,9 @@
         <p:txBody>
           <a:bodyPr/>
           <a:lstStyle/>
-          <a:p/>
+          <a:p>
+            <a:endParaRPr/>
+          </a:p>
         </p:txBody>
       </p:sp>
       <p:sp>
@@ -7382,7 +7974,7 @@
           </a:bodyPr>
           <a:lstStyle/>
           <a:p>
-            <a:pPr marL="0" indent="0" lvl="0">
+            <a:pPr marL="0" lvl="0" indent="0">
               <a:lnSpc>
                 <a:spcPct val="100000"/>
               </a:lnSpc>
@@ -7401,7 +7993,7 @@
             </a:r>
           </a:p>
           <a:p>
-            <a:pPr marL="0" indent="0" lvl="0">
+            <a:pPr marL="0" lvl="0" indent="0">
               <a:lnSpc>
                 <a:spcPct val="104000"/>
               </a:lnSpc>
@@ -7420,7 +8012,7 @@
             </a:r>
           </a:p>
           <a:p>
-            <a:pPr marL="0" indent="0" lvl="0">
+            <a:pPr marL="0" lvl="0" indent="0">
               <a:lnSpc>
                 <a:spcPct val="104000"/>
               </a:lnSpc>
@@ -7494,7 +8086,7 @@
             </a:r>
           </a:p>
           <a:p>
-            <a:pPr marL="0" indent="0" lvl="0">
+            <a:pPr marL="0" lvl="0" indent="0">
               <a:lnSpc>
                 <a:spcPct val="104000"/>
               </a:lnSpc>
@@ -7535,7 +8127,7 @@
             </a:r>
           </a:p>
           <a:p>
-            <a:pPr marL="0" indent="0" lvl="0">
+            <a:pPr marL="0" lvl="0" indent="0">
               <a:lnSpc>
                 <a:spcPct val="104000"/>
               </a:lnSpc>
@@ -7664,7 +8256,7 @@
             </a:r>
           </a:p>
           <a:p>
-            <a:pPr marL="0" indent="0" lvl="0">
+            <a:pPr marL="0" lvl="0" indent="0">
               <a:lnSpc>
                 <a:spcPct val="104000"/>
               </a:lnSpc>
@@ -7727,7 +8319,7 @@
             </a:r>
           </a:p>
           <a:p>
-            <a:pPr marL="0" indent="0" lvl="0">
+            <a:pPr marL="0" lvl="0" indent="0">
               <a:lnSpc>
                 <a:spcPct val="104000"/>
               </a:lnSpc>
@@ -7790,7 +8382,7 @@
             </a:r>
           </a:p>
           <a:p>
-            <a:pPr marL="0" indent="0" lvl="0">
+            <a:pPr marL="0" lvl="0" indent="0">
               <a:lnSpc>
                 <a:spcPct val="104000"/>
               </a:lnSpc>
@@ -7897,7 +8489,7 @@
             </a:r>
           </a:p>
           <a:p>
-            <a:pPr marL="0" indent="0" lvl="0">
+            <a:pPr marL="0" lvl="0" indent="0">
               <a:lnSpc>
                 <a:spcPct val="104000"/>
               </a:lnSpc>
@@ -7938,7 +8530,7 @@
             </a:r>
           </a:p>
           <a:p>
-            <a:pPr marL="0" indent="0" lvl="0">
+            <a:pPr marL="0" lvl="0" indent="0">
               <a:lnSpc>
                 <a:spcPct val="104000"/>
               </a:lnSpc>
@@ -7957,7 +8549,7 @@
             </a:r>
           </a:p>
           <a:p>
-            <a:pPr marL="0" indent="0" lvl="0">
+            <a:pPr marL="0" lvl="0" indent="0">
               <a:lnSpc>
                 <a:spcPct val="104000"/>
               </a:lnSpc>
@@ -8020,7 +8612,7 @@
             </a:r>
           </a:p>
           <a:p>
-            <a:pPr marL="0" indent="0" lvl="0">
+            <a:pPr marL="0" lvl="0" indent="0">
               <a:lnSpc>
                 <a:spcPct val="104000"/>
               </a:lnSpc>
@@ -8127,7 +8719,7 @@
             </a:r>
           </a:p>
           <a:p>
-            <a:pPr marL="0" indent="0" lvl="0">
+            <a:pPr marL="0" lvl="0" indent="0">
               <a:lnSpc>
                 <a:spcPct val="104000"/>
               </a:lnSpc>
@@ -8190,7 +8782,7 @@
             </a:r>
           </a:p>
           <a:p>
-            <a:pPr marL="0" indent="0" lvl="0">
+            <a:pPr marL="0" lvl="0" indent="0">
               <a:lnSpc>
                 <a:spcPct val="104000"/>
               </a:lnSpc>
@@ -8297,7 +8889,7 @@
             </a:r>
           </a:p>
           <a:p>
-            <a:pPr marL="0" indent="0" lvl="0">
+            <a:pPr marL="0" lvl="0" indent="0">
               <a:lnSpc>
                 <a:spcPct val="104000"/>
               </a:lnSpc>
@@ -8338,7 +8930,7 @@
             </a:r>
           </a:p>
           <a:p>
-            <a:pPr marL="0" indent="0" lvl="0">
+            <a:pPr marL="0" lvl="0" indent="0">
               <a:lnSpc>
                 <a:spcPct val="104000"/>
               </a:lnSpc>
@@ -8357,7 +8949,7 @@
             </a:r>
           </a:p>
           <a:p>
-            <a:pPr marL="0" indent="0" lvl="0">
+            <a:pPr marL="0" lvl="0" indent="0">
               <a:lnSpc>
                 <a:spcPct val="104000"/>
               </a:lnSpc>
@@ -8376,7 +8968,7 @@
             </a:r>
           </a:p>
           <a:p>
-            <a:pPr marL="0" indent="0" lvl="0">
+            <a:pPr marL="0" lvl="0" indent="0">
               <a:lnSpc>
                 <a:spcPct val="104000"/>
               </a:lnSpc>
@@ -8395,7 +8987,7 @@
             </a:r>
           </a:p>
           <a:p>
-            <a:pPr marL="0" indent="0" lvl="0">
+            <a:pPr marL="0" lvl="0" indent="0">
               <a:lnSpc>
                 <a:spcPct val="104000"/>
               </a:lnSpc>
@@ -8437,7 +9029,7 @@
           </a:bodyPr>
           <a:lstStyle/>
           <a:p>
-            <a:pPr marL="0" indent="0" lvl="0">
+            <a:pPr marL="0" lvl="0" indent="0">
               <a:lnSpc>
                 <a:spcPct val="100000"/>
               </a:lnSpc>
@@ -8479,7 +9071,7 @@
           </a:bodyPr>
           <a:lstStyle/>
           <a:p>
-            <a:pPr marL="0" indent="0" lvl="0" algn="r">
+            <a:pPr marL="0" lvl="0" indent="0" algn="r">
               <a:lnSpc>
                 <a:spcPct val="100000"/>
               </a:lnSpc>
@@ -8501,6 +9093,9 @@
       </p:sp>
     </p:spTree>
   </p:cSld>
+  <p:clrMapOvr>
+    <a:masterClrMapping/>
+  </p:clrMapOvr>
 </p:sld>
 </file>
 
@@ -8543,14 +9138,14 @@
           </a:bodyPr>
           <a:lstStyle/>
           <a:p>
-            <a:pPr marL="0" indent="0" lvl="0">
-              <a:lnSpc>
-                <a:spcPct val="100000"/>
-              </a:lnSpc>
-              <a:buNone/>
-            </a:pPr>
-            <a:r>
-              <a:rPr lang="zh-CN" sz="3200" dirty="0" b="1">
+            <a:pPr marL="0" lvl="0" indent="0">
+              <a:lnSpc>
+                <a:spcPct val="100000"/>
+              </a:lnSpc>
+              <a:buNone/>
+            </a:pPr>
+            <a:r>
+              <a:rPr lang="zh-CN" sz="3200" b="1" dirty="0">
                 <a:solidFill>
                   <a:srgbClr val="1A1A18"/>
                 </a:solidFill>
@@ -8587,7 +9182,9 @@
         <p:txBody>
           <a:bodyPr/>
           <a:lstStyle/>
-          <a:p/>
+          <a:p>
+            <a:endParaRPr/>
+          </a:p>
         </p:txBody>
       </p:sp>
       <p:sp>
@@ -8612,7 +9209,7 @@
           </a:bodyPr>
           <a:lstStyle/>
           <a:p>
-            <a:pPr marL="270000" indent="-230000" lvl="0">
+            <a:pPr marL="270000" lvl="0" indent="-230000">
               <a:lnSpc>
                 <a:spcPct val="100000"/>
               </a:lnSpc>
@@ -8626,7 +9223,7 @@
               <a:buChar char="●"/>
             </a:pPr>
             <a:r>
-              <a:rPr lang="zh-CN" sz="2340" dirty="0" b="1">
+              <a:rPr lang="zh-CN" sz="2340" b="1" dirty="0">
                 <a:solidFill>
                   <a:srgbClr val="8A4B2A"/>
                 </a:solidFill>
@@ -8649,7 +9246,7 @@
             </a:r>
           </a:p>
           <a:p>
-            <a:pPr marL="270000" indent="-230000" lvl="0">
+            <a:pPr marL="270000" lvl="0" indent="-230000">
               <a:lnSpc>
                 <a:spcPct val="100000"/>
               </a:lnSpc>
@@ -8663,7 +9260,7 @@
               <a:buChar char="●"/>
             </a:pPr>
             <a:r>
-              <a:rPr lang="zh-CN" sz="2340" dirty="0" b="1">
+              <a:rPr lang="zh-CN" sz="2340" b="1" dirty="0">
                 <a:solidFill>
                   <a:srgbClr val="8A4B2A"/>
                 </a:solidFill>
@@ -8685,7 +9282,7 @@
               <a:t>：额外空间 </a:t>
             </a:r>
             <a:r>
-              <a:rPr lang="zh-CN" sz="2340" dirty="0" i="1">
+              <a:rPr lang="zh-CN" sz="2340" i="1" dirty="0">
                 <a:solidFill>
                   <a:srgbClr val="1A1A18"/>
                 </a:solidFill>
@@ -8697,7 +9294,7 @@
             </a:r>
           </a:p>
           <a:p>
-            <a:pPr marL="270000" indent="-230000" lvl="0">
+            <a:pPr marL="270000" lvl="0" indent="-230000">
               <a:lnSpc>
                 <a:spcPct val="100000"/>
               </a:lnSpc>
@@ -8711,7 +9308,7 @@
               <a:buChar char="●"/>
             </a:pPr>
             <a:r>
-              <a:rPr lang="zh-CN" sz="2340" dirty="0" b="1">
+              <a:rPr lang="zh-CN" sz="2340" b="1" dirty="0">
                 <a:solidFill>
                   <a:srgbClr val="8A4B2A"/>
                 </a:solidFill>
@@ -8757,14 +9354,14 @@
           </a:bodyPr>
           <a:lstStyle/>
           <a:p>
-            <a:pPr marL="0" indent="0" lvl="0">
-              <a:lnSpc>
-                <a:spcPct val="100000"/>
-              </a:lnSpc>
-              <a:buNone/>
-            </a:pPr>
-            <a:r>
-              <a:rPr lang="zh-CN" sz="2340" dirty="0" b="1">
+            <a:pPr marL="0" lvl="0" indent="0">
+              <a:lnSpc>
+                <a:spcPct val="100000"/>
+              </a:lnSpc>
+              <a:buNone/>
+            </a:pPr>
+            <a:r>
+              <a:rPr lang="zh-CN" sz="2340" b="1" dirty="0">
                 <a:solidFill>
                   <a:srgbClr val="8A4B2A"/>
                 </a:solidFill>
@@ -8786,7 +9383,7 @@
               <a:t>：按多个字段排序时， 先排次要字段、再用</a:t>
             </a:r>
             <a:r>
-              <a:rPr lang="zh-CN" sz="2340" dirty="0" b="1">
+              <a:rPr lang="zh-CN" sz="2340" b="1" dirty="0">
                 <a:solidFill>
                   <a:srgbClr val="8A4B2A"/>
                 </a:solidFill>
@@ -8832,7 +9429,7 @@
           </a:bodyPr>
           <a:lstStyle/>
           <a:p>
-            <a:pPr marL="0" indent="0" lvl="0">
+            <a:pPr marL="0" lvl="0" indent="0">
               <a:lnSpc>
                 <a:spcPct val="100000"/>
               </a:lnSpc>
@@ -8874,7 +9471,7 @@
           </a:bodyPr>
           <a:lstStyle/>
           <a:p>
-            <a:pPr marL="0" indent="0" lvl="0" algn="r">
+            <a:pPr marL="0" lvl="0" indent="0" algn="r">
               <a:lnSpc>
                 <a:spcPct val="100000"/>
               </a:lnSpc>
@@ -8896,6 +9493,9 @@
       </p:sp>
     </p:spTree>
   </p:cSld>
+  <p:clrMapOvr>
+    <a:masterClrMapping/>
+  </p:clrMapOvr>
 </p:sld>
 </file>
 
@@ -8938,14 +9538,14 @@
           </a:bodyPr>
           <a:lstStyle/>
           <a:p>
-            <a:pPr marL="0" indent="0" lvl="0">
-              <a:lnSpc>
-                <a:spcPct val="100000"/>
-              </a:lnSpc>
-              <a:buNone/>
-            </a:pPr>
-            <a:r>
-              <a:rPr lang="zh-CN" sz="3200" dirty="0" b="1">
+            <a:pPr marL="0" lvl="0" indent="0">
+              <a:lnSpc>
+                <a:spcPct val="100000"/>
+              </a:lnSpc>
+              <a:buNone/>
+            </a:pPr>
+            <a:r>
+              <a:rPr lang="zh-CN" sz="3200" b="1" dirty="0">
                 <a:solidFill>
                   <a:srgbClr val="1A1A18"/>
                 </a:solidFill>
@@ -8982,7 +9582,9 @@
         <p:txBody>
           <a:bodyPr/>
           <a:lstStyle/>
-          <a:p/>
+          <a:p>
+            <a:endParaRPr/>
+          </a:p>
         </p:txBody>
       </p:sp>
       <p:sp>
@@ -9007,7 +9609,7 @@
           </a:bodyPr>
           <a:lstStyle/>
           <a:p>
-            <a:pPr marL="0" indent="0" lvl="0">
+            <a:pPr marL="0" lvl="0" indent="0">
               <a:lnSpc>
                 <a:spcPct val="100000"/>
               </a:lnSpc>
@@ -9080,7 +9682,7 @@
           </a:bodyPr>
           <a:lstStyle/>
           <a:p>
-            <a:pPr marL="0" indent="0" lvl="0">
+            <a:pPr marL="0" lvl="0" indent="0">
               <a:lnSpc>
                 <a:spcPct val="104000"/>
               </a:lnSpc>
@@ -9099,7 +9701,7 @@
             </a:r>
           </a:p>
           <a:p>
-            <a:pPr marL="0" indent="0" lvl="0">
+            <a:pPr marL="0" lvl="0" indent="0">
               <a:lnSpc>
                 <a:spcPct val="104000"/>
               </a:lnSpc>
@@ -9118,7 +9720,7 @@
             </a:r>
           </a:p>
           <a:p>
-            <a:pPr marL="0" indent="0" lvl="0">
+            <a:pPr marL="0" lvl="0" indent="0">
               <a:lnSpc>
                 <a:spcPct val="104000"/>
               </a:lnSpc>
@@ -9160,7 +9762,7 @@
           </a:bodyPr>
           <a:lstStyle/>
           <a:p>
-            <a:pPr marL="0" indent="0" lvl="0">
+            <a:pPr marL="0" lvl="0" indent="0">
               <a:lnSpc>
                 <a:spcPct val="100000"/>
               </a:lnSpc>
@@ -9202,7 +9804,7 @@
           </a:bodyPr>
           <a:lstStyle/>
           <a:p>
-            <a:pPr marL="270000" indent="-230000" lvl="0">
+            <a:pPr marL="270000" lvl="0" indent="-230000">
               <a:lnSpc>
                 <a:spcPct val="100000"/>
               </a:lnSpc>
@@ -9228,7 +9830,7 @@
             </a:r>
           </a:p>
           <a:p>
-            <a:pPr marL="270000" indent="-230000" lvl="0">
+            <a:pPr marL="270000" lvl="0" indent="-230000">
               <a:lnSpc>
                 <a:spcPct val="100000"/>
               </a:lnSpc>
@@ -9254,7 +9856,7 @@
             </a:r>
           </a:p>
           <a:p>
-            <a:pPr marL="270000" indent="-230000" lvl="0">
+            <a:pPr marL="270000" lvl="0" indent="-230000">
               <a:lnSpc>
                 <a:spcPct val="100000"/>
               </a:lnSpc>
@@ -9303,7 +9905,7 @@
           </a:bodyPr>
           <a:lstStyle/>
           <a:p>
-            <a:pPr marL="0" indent="0" lvl="0">
+            <a:pPr marL="0" lvl="0" indent="0">
               <a:lnSpc>
                 <a:spcPct val="100000"/>
               </a:lnSpc>
@@ -9345,7 +9947,7 @@
           </a:bodyPr>
           <a:lstStyle/>
           <a:p>
-            <a:pPr marL="0" indent="0" lvl="0" algn="r">
+            <a:pPr marL="0" lvl="0" indent="0" algn="r">
               <a:lnSpc>
                 <a:spcPct val="100000"/>
               </a:lnSpc>
@@ -9367,6 +9969,9 @@
       </p:sp>
     </p:spTree>
   </p:cSld>
+  <p:clrMapOvr>
+    <a:masterClrMapping/>
+  </p:clrMapOvr>
 </p:sld>
 </file>
 
@@ -9409,14 +10014,14 @@
           </a:bodyPr>
           <a:lstStyle/>
           <a:p>
-            <a:pPr marL="0" indent="0" lvl="0">
-              <a:lnSpc>
-                <a:spcPct val="100000"/>
-              </a:lnSpc>
-              <a:buNone/>
-            </a:pPr>
-            <a:r>
-              <a:rPr lang="zh-CN" sz="3200" dirty="0" b="1">
+            <a:pPr marL="0" lvl="0" indent="0">
+              <a:lnSpc>
+                <a:spcPct val="100000"/>
+              </a:lnSpc>
+              <a:buNone/>
+            </a:pPr>
+            <a:r>
+              <a:rPr lang="zh-CN" sz="3200" b="1" dirty="0">
                 <a:solidFill>
                   <a:srgbClr val="1A1A18"/>
                 </a:solidFill>
@@ -9453,7 +10058,9 @@
         <p:txBody>
           <a:bodyPr/>
           <a:lstStyle/>
-          <a:p/>
+          <a:p>
+            <a:endParaRPr/>
+          </a:p>
         </p:txBody>
       </p:sp>
       <p:graphicFrame>
@@ -9473,11 +10080,41 @@
             <a:tbl>
               <a:tblPr firstRow="1"/>
               <a:tblGrid>
-                <a:gridCol w="1789343"/>
-                <a:gridCol w="2791376"/>
-                <a:gridCol w="2684015"/>
-                <a:gridCol w="2451400"/>
-                <a:gridCol w="1342010"/>
+                <a:gridCol w="1789343">
+                  <a:extLst>
+                    <a:ext uri="{9D8B030D-6E8A-4147-A177-3AD203B41FA5}">
+                      <a16:colId xmlns:a16="http://schemas.microsoft.com/office/drawing/2014/main" val="20000"/>
+                    </a:ext>
+                  </a:extLst>
+                </a:gridCol>
+                <a:gridCol w="2791376">
+                  <a:extLst>
+                    <a:ext uri="{9D8B030D-6E8A-4147-A177-3AD203B41FA5}">
+                      <a16:colId xmlns:a16="http://schemas.microsoft.com/office/drawing/2014/main" val="20001"/>
+                    </a:ext>
+                  </a:extLst>
+                </a:gridCol>
+                <a:gridCol w="2684015">
+                  <a:extLst>
+                    <a:ext uri="{9D8B030D-6E8A-4147-A177-3AD203B41FA5}">
+                      <a16:colId xmlns:a16="http://schemas.microsoft.com/office/drawing/2014/main" val="20002"/>
+                    </a:ext>
+                  </a:extLst>
+                </a:gridCol>
+                <a:gridCol w="2451400">
+                  <a:extLst>
+                    <a:ext uri="{9D8B030D-6E8A-4147-A177-3AD203B41FA5}">
+                      <a16:colId xmlns:a16="http://schemas.microsoft.com/office/drawing/2014/main" val="20003"/>
+                    </a:ext>
+                  </a:extLst>
+                </a:gridCol>
+                <a:gridCol w="1342010">
+                  <a:extLst>
+                    <a:ext uri="{9D8B030D-6E8A-4147-A177-3AD203B41FA5}">
+                      <a16:colId xmlns:a16="http://schemas.microsoft.com/office/drawing/2014/main" val="20004"/>
+                    </a:ext>
+                  </a:extLst>
+                </a:gridCol>
               </a:tblGrid>
               <a:tr h="380504">
                 <a:tc>
@@ -9485,14 +10122,14 @@
                     <a:bodyPr/>
                     <a:lstStyle/>
                     <a:p>
-                      <a:pPr marL="0" indent="0" lvl="0">
+                      <a:pPr marL="0" lvl="0" indent="0">
                         <a:lnSpc>
                           <a:spcPct val="100000"/>
                         </a:lnSpc>
                         <a:buNone/>
                       </a:pPr>
                       <a:r>
-                        <a:rPr lang="zh-CN" sz="1755" dirty="0" b="1">
+                        <a:rPr lang="zh-CN" sz="1755" b="1" dirty="0">
                           <a:solidFill>
                             <a:srgbClr val="1A1A18"/>
                           </a:solidFill>
@@ -9535,14 +10172,14 @@
                     <a:bodyPr/>
                     <a:lstStyle/>
                     <a:p>
-                      <a:pPr marL="0" indent="0" lvl="0">
+                      <a:pPr marL="0" lvl="0" indent="0">
                         <a:lnSpc>
                           <a:spcPct val="100000"/>
                         </a:lnSpc>
                         <a:buNone/>
                       </a:pPr>
                       <a:r>
-                        <a:rPr lang="zh-CN" sz="1755" dirty="0" b="1">
+                        <a:rPr lang="zh-CN" sz="1755" b="1" dirty="0">
                           <a:solidFill>
                             <a:srgbClr val="1A1A18"/>
                           </a:solidFill>
@@ -9585,14 +10222,14 @@
                     <a:bodyPr/>
                     <a:lstStyle/>
                     <a:p>
-                      <a:pPr marL="0" indent="0" lvl="0">
+                      <a:pPr marL="0" lvl="0" indent="0">
                         <a:lnSpc>
                           <a:spcPct val="100000"/>
                         </a:lnSpc>
                         <a:buNone/>
                       </a:pPr>
                       <a:r>
-                        <a:rPr lang="zh-CN" sz="1755" dirty="0" b="1">
+                        <a:rPr lang="zh-CN" sz="1755" b="1" dirty="0">
                           <a:solidFill>
                             <a:srgbClr val="1A1A18"/>
                           </a:solidFill>
@@ -9635,14 +10272,14 @@
                     <a:bodyPr/>
                     <a:lstStyle/>
                     <a:p>
-                      <a:pPr marL="0" indent="0" lvl="0">
+                      <a:pPr marL="0" lvl="0" indent="0">
                         <a:lnSpc>
                           <a:spcPct val="100000"/>
                         </a:lnSpc>
                         <a:buNone/>
                       </a:pPr>
                       <a:r>
-                        <a:rPr lang="zh-CN" sz="1755" dirty="0" b="1">
+                        <a:rPr lang="zh-CN" sz="1755" b="1" dirty="0">
                           <a:solidFill>
                             <a:srgbClr val="1A1A18"/>
                           </a:solidFill>
@@ -9685,14 +10322,14 @@
                     <a:bodyPr/>
                     <a:lstStyle/>
                     <a:p>
-                      <a:pPr marL="0" indent="0" lvl="0">
+                      <a:pPr marL="0" lvl="0" indent="0">
                         <a:lnSpc>
                           <a:spcPct val="100000"/>
                         </a:lnSpc>
                         <a:buNone/>
                       </a:pPr>
                       <a:r>
-                        <a:rPr lang="zh-CN" sz="1755" dirty="0" b="1">
+                        <a:rPr lang="zh-CN" sz="1755" b="1" dirty="0">
                           <a:solidFill>
                             <a:srgbClr val="1A1A18"/>
                           </a:solidFill>
@@ -9730,6 +10367,11 @@
                     </a:solidFill>
                   </a:tcPr>
                 </a:tc>
+                <a:extLst>
+                  <a:ext uri="{0D108BD9-81ED-4DB2-BD59-A6C34878D82A}">
+                    <a16:rowId xmlns:a16="http://schemas.microsoft.com/office/drawing/2014/main" val="10000"/>
+                  </a:ext>
+                </a:extLst>
               </a:tr>
               <a:tr h="380504">
                 <a:tc>
@@ -9737,7 +10379,7 @@
                     <a:bodyPr/>
                     <a:lstStyle/>
                     <a:p>
-                      <a:pPr marL="0" indent="0" lvl="0">
+                      <a:pPr marL="0" lvl="0" indent="0">
                         <a:lnSpc>
                           <a:spcPct val="100000"/>
                         </a:lnSpc>
@@ -9787,14 +10429,14 @@
                     <a:bodyPr/>
                     <a:lstStyle/>
                     <a:p>
-                      <a:pPr marL="0" indent="0" lvl="0">
+                      <a:pPr marL="0" lvl="0" indent="0">
                         <a:lnSpc>
                           <a:spcPct val="100000"/>
                         </a:lnSpc>
                         <a:buNone/>
                       </a:pPr>
                       <a:r>
-                        <a:rPr lang="zh-CN" sz="1755" dirty="0" i="1">
+                        <a:rPr lang="zh-CN" sz="1755" i="1" dirty="0">
                           <a:solidFill>
                             <a:srgbClr val="1A1A18"/>
                           </a:solidFill>
@@ -9837,14 +10479,14 @@
                     <a:bodyPr/>
                     <a:lstStyle/>
                     <a:p>
-                      <a:pPr marL="0" indent="0" lvl="0">
+                      <a:pPr marL="0" lvl="0" indent="0">
                         <a:lnSpc>
                           <a:spcPct val="100000"/>
                         </a:lnSpc>
                         <a:buNone/>
                       </a:pPr>
                       <a:r>
-                        <a:rPr lang="zh-CN" sz="1755" dirty="0" i="1">
+                        <a:rPr lang="zh-CN" sz="1755" i="1" dirty="0">
                           <a:solidFill>
                             <a:srgbClr val="1A1A18"/>
                           </a:solidFill>
@@ -9887,14 +10529,14 @@
                     <a:bodyPr/>
                     <a:lstStyle/>
                     <a:p>
-                      <a:pPr marL="0" indent="0" lvl="0">
+                      <a:pPr marL="0" lvl="0" indent="0">
                         <a:lnSpc>
                           <a:spcPct val="100000"/>
                         </a:lnSpc>
                         <a:buNone/>
                       </a:pPr>
                       <a:r>
-                        <a:rPr lang="zh-CN" sz="1755" dirty="0" i="1">
+                        <a:rPr lang="zh-CN" sz="1755" i="1" dirty="0">
                           <a:solidFill>
                             <a:srgbClr val="1A1A18"/>
                           </a:solidFill>
@@ -9937,7 +10579,7 @@
                     <a:bodyPr/>
                     <a:lstStyle/>
                     <a:p>
-                      <a:pPr marL="0" indent="0" lvl="0">
+                      <a:pPr marL="0" lvl="0" indent="0">
                         <a:lnSpc>
                           <a:spcPct val="100000"/>
                         </a:lnSpc>
@@ -9982,6 +10624,11 @@
                     </a:solidFill>
                   </a:tcPr>
                 </a:tc>
+                <a:extLst>
+                  <a:ext uri="{0D108BD9-81ED-4DB2-BD59-A6C34878D82A}">
+                    <a16:rowId xmlns:a16="http://schemas.microsoft.com/office/drawing/2014/main" val="10001"/>
+                  </a:ext>
+                </a:extLst>
               </a:tr>
               <a:tr h="380504">
                 <a:tc>
@@ -9989,7 +10636,7 @@
                     <a:bodyPr/>
                     <a:lstStyle/>
                     <a:p>
-                      <a:pPr marL="0" indent="0" lvl="0">
+                      <a:pPr marL="0" lvl="0" indent="0">
                         <a:lnSpc>
                           <a:spcPct val="100000"/>
                         </a:lnSpc>
@@ -10039,14 +10686,14 @@
                     <a:bodyPr/>
                     <a:lstStyle/>
                     <a:p>
-                      <a:pPr marL="0" indent="0" lvl="0">
+                      <a:pPr marL="0" lvl="0" indent="0">
                         <a:lnSpc>
                           <a:spcPct val="100000"/>
                         </a:lnSpc>
                         <a:buNone/>
                       </a:pPr>
                       <a:r>
-                        <a:rPr lang="zh-CN" sz="1755" dirty="0" i="1">
+                        <a:rPr lang="zh-CN" sz="1755" i="1" dirty="0">
                           <a:solidFill>
                             <a:srgbClr val="1A1A18"/>
                           </a:solidFill>
@@ -10089,7 +10736,7 @@
                     <a:bodyPr/>
                     <a:lstStyle/>
                     <a:p>
-                      <a:pPr marL="0" indent="0" lvl="0">
+                      <a:pPr marL="0" lvl="0" indent="0">
                         <a:lnSpc>
                           <a:spcPct val="100000"/>
                         </a:lnSpc>
@@ -10139,14 +10786,14 @@
                     <a:bodyPr/>
                     <a:lstStyle/>
                     <a:p>
-                      <a:pPr marL="0" indent="0" lvl="0">
+                      <a:pPr marL="0" lvl="0" indent="0">
                         <a:lnSpc>
                           <a:spcPct val="100000"/>
                         </a:lnSpc>
                         <a:buNone/>
                       </a:pPr>
                       <a:r>
-                        <a:rPr lang="zh-CN" sz="1755" dirty="0" i="1">
+                        <a:rPr lang="zh-CN" sz="1755" i="1" dirty="0">
                           <a:solidFill>
                             <a:srgbClr val="1A1A18"/>
                           </a:solidFill>
@@ -10189,7 +10836,7 @@
                     <a:bodyPr/>
                     <a:lstStyle/>
                     <a:p>
-                      <a:pPr marL="0" indent="0" lvl="0">
+                      <a:pPr marL="0" lvl="0" indent="0">
                         <a:lnSpc>
                           <a:spcPct val="100000"/>
                         </a:lnSpc>
@@ -10234,6 +10881,11 @@
                     </a:solidFill>
                   </a:tcPr>
                 </a:tc>
+                <a:extLst>
+                  <a:ext uri="{0D108BD9-81ED-4DB2-BD59-A6C34878D82A}">
+                    <a16:rowId xmlns:a16="http://schemas.microsoft.com/office/drawing/2014/main" val="10002"/>
+                  </a:ext>
+                </a:extLst>
               </a:tr>
               <a:tr h="380504">
                 <a:tc>
@@ -10241,7 +10893,7 @@
                     <a:bodyPr/>
                     <a:lstStyle/>
                     <a:p>
-                      <a:pPr marL="0" indent="0" lvl="0">
+                      <a:pPr marL="0" lvl="0" indent="0">
                         <a:lnSpc>
                           <a:spcPct val="100000"/>
                         </a:lnSpc>
@@ -10291,14 +10943,14 @@
                     <a:bodyPr/>
                     <a:lstStyle/>
                     <a:p>
-                      <a:pPr marL="0" indent="0" lvl="0">
+                      <a:pPr marL="0" lvl="0" indent="0">
                         <a:lnSpc>
                           <a:spcPct val="100000"/>
                         </a:lnSpc>
                         <a:buNone/>
                       </a:pPr>
                       <a:r>
-                        <a:rPr lang="zh-CN" sz="1755" dirty="0" i="1">
+                        <a:rPr lang="zh-CN" sz="1755" i="1" dirty="0">
                           <a:solidFill>
                             <a:srgbClr val="1A1A18"/>
                           </a:solidFill>
@@ -10341,14 +10993,14 @@
                     <a:bodyPr/>
                     <a:lstStyle/>
                     <a:p>
-                      <a:pPr marL="0" indent="0" lvl="0">
+                      <a:pPr marL="0" lvl="0" indent="0">
                         <a:lnSpc>
                           <a:spcPct val="100000"/>
                         </a:lnSpc>
                         <a:buNone/>
                       </a:pPr>
                       <a:r>
-                        <a:rPr lang="zh-CN" sz="1755" dirty="0" i="1">
+                        <a:rPr lang="zh-CN" sz="1755" i="1" dirty="0">
                           <a:solidFill>
                             <a:srgbClr val="1A1A18"/>
                           </a:solidFill>
@@ -10391,14 +11043,14 @@
                     <a:bodyPr/>
                     <a:lstStyle/>
                     <a:p>
-                      <a:pPr marL="0" indent="0" lvl="0">
+                      <a:pPr marL="0" lvl="0" indent="0">
                         <a:lnSpc>
                           <a:spcPct val="100000"/>
                         </a:lnSpc>
                         <a:buNone/>
                       </a:pPr>
                       <a:r>
-                        <a:rPr lang="zh-CN" sz="1755" dirty="0" i="1">
+                        <a:rPr lang="zh-CN" sz="1755" i="1" dirty="0">
                           <a:solidFill>
                             <a:srgbClr val="1A1A18"/>
                           </a:solidFill>
@@ -10441,7 +11093,7 @@
                     <a:bodyPr/>
                     <a:lstStyle/>
                     <a:p>
-                      <a:pPr marL="0" indent="0" lvl="0">
+                      <a:pPr marL="0" lvl="0" indent="0">
                         <a:lnSpc>
                           <a:spcPct val="100000"/>
                         </a:lnSpc>
@@ -10486,6 +11138,11 @@
                     </a:solidFill>
                   </a:tcPr>
                 </a:tc>
+                <a:extLst>
+                  <a:ext uri="{0D108BD9-81ED-4DB2-BD59-A6C34878D82A}">
+                    <a16:rowId xmlns:a16="http://schemas.microsoft.com/office/drawing/2014/main" val="10003"/>
+                  </a:ext>
+                </a:extLst>
               </a:tr>
               <a:tr h="380504">
                 <a:tc>
@@ -10493,7 +11150,7 @@
                     <a:bodyPr/>
                     <a:lstStyle/>
                     <a:p>
-                      <a:pPr marL="0" indent="0" lvl="0">
+                      <a:pPr marL="0" lvl="0" indent="0">
                         <a:lnSpc>
                           <a:spcPct val="100000"/>
                         </a:lnSpc>
@@ -10543,14 +11200,14 @@
                     <a:bodyPr/>
                     <a:lstStyle/>
                     <a:p>
-                      <a:pPr marL="0" indent="0" lvl="0">
+                      <a:pPr marL="0" lvl="0" indent="0">
                         <a:lnSpc>
                           <a:spcPct val="100000"/>
                         </a:lnSpc>
                         <a:buNone/>
                       </a:pPr>
                       <a:r>
-                        <a:rPr lang="zh-CN" sz="1755" dirty="0" i="1">
+                        <a:rPr lang="zh-CN" sz="1755" i="1" dirty="0">
                           <a:solidFill>
                             <a:srgbClr val="1A1A18"/>
                           </a:solidFill>
@@ -10593,14 +11250,14 @@
                     <a:bodyPr/>
                     <a:lstStyle/>
                     <a:p>
-                      <a:pPr marL="0" indent="0" lvl="0">
+                      <a:pPr marL="0" lvl="0" indent="0">
                         <a:lnSpc>
                           <a:spcPct val="100000"/>
                         </a:lnSpc>
                         <a:buNone/>
                       </a:pPr>
                       <a:r>
-                        <a:rPr lang="zh-CN" sz="1755" dirty="0" i="1">
+                        <a:rPr lang="zh-CN" sz="1755" i="1" dirty="0">
                           <a:solidFill>
                             <a:srgbClr val="1A1A18"/>
                           </a:solidFill>
@@ -10643,14 +11300,14 @@
                     <a:bodyPr/>
                     <a:lstStyle/>
                     <a:p>
-                      <a:pPr marL="0" indent="0" lvl="0">
+                      <a:pPr marL="0" lvl="0" indent="0">
                         <a:lnSpc>
                           <a:spcPct val="100000"/>
                         </a:lnSpc>
                         <a:buNone/>
                       </a:pPr>
                       <a:r>
-                        <a:rPr lang="zh-CN" sz="1755" dirty="0" i="1">
+                        <a:rPr lang="zh-CN" sz="1755" i="1" dirty="0">
                           <a:solidFill>
                             <a:srgbClr val="1A1A18"/>
                           </a:solidFill>
@@ -10693,7 +11350,7 @@
                     <a:bodyPr/>
                     <a:lstStyle/>
                     <a:p>
-                      <a:pPr marL="0" indent="0" lvl="0">
+                      <a:pPr marL="0" lvl="0" indent="0">
                         <a:lnSpc>
                           <a:spcPct val="100000"/>
                         </a:lnSpc>
@@ -10738,6 +11395,11 @@
                     </a:solidFill>
                   </a:tcPr>
                 </a:tc>
+                <a:extLst>
+                  <a:ext uri="{0D108BD9-81ED-4DB2-BD59-A6C34878D82A}">
+                    <a16:rowId xmlns:a16="http://schemas.microsoft.com/office/drawing/2014/main" val="10004"/>
+                  </a:ext>
+                </a:extLst>
               </a:tr>
               <a:tr h="380504">
                 <a:tc>
@@ -10745,7 +11407,7 @@
                     <a:bodyPr/>
                     <a:lstStyle/>
                     <a:p>
-                      <a:pPr marL="0" indent="0" lvl="0">
+                      <a:pPr marL="0" lvl="0" indent="0">
                         <a:lnSpc>
                           <a:spcPct val="100000"/>
                         </a:lnSpc>
@@ -10795,14 +11457,14 @@
                     <a:bodyPr/>
                     <a:lstStyle/>
                     <a:p>
-                      <a:pPr marL="0" indent="0" lvl="0">
+                      <a:pPr marL="0" lvl="0" indent="0">
                         <a:lnSpc>
                           <a:spcPct val="100000"/>
                         </a:lnSpc>
                         <a:buNone/>
                       </a:pPr>
                       <a:r>
-                        <a:rPr lang="zh-CN" sz="1755" dirty="0" i="1">
+                        <a:rPr lang="zh-CN" sz="1755" i="1" dirty="0">
                           <a:solidFill>
                             <a:srgbClr val="1A1A18"/>
                           </a:solidFill>
@@ -10845,14 +11507,14 @@
                     <a:bodyPr/>
                     <a:lstStyle/>
                     <a:p>
-                      <a:pPr marL="0" indent="0" lvl="0">
+                      <a:pPr marL="0" lvl="0" indent="0">
                         <a:lnSpc>
                           <a:spcPct val="100000"/>
                         </a:lnSpc>
                         <a:buNone/>
                       </a:pPr>
                       <a:r>
-                        <a:rPr lang="zh-CN" sz="1755" dirty="0" i="1">
+                        <a:rPr lang="zh-CN" sz="1755" i="1" dirty="0">
                           <a:solidFill>
                             <a:srgbClr val="1A1A18"/>
                           </a:solidFill>
@@ -10895,14 +11557,14 @@
                     <a:bodyPr/>
                     <a:lstStyle/>
                     <a:p>
-                      <a:pPr marL="0" indent="0" lvl="0">
+                      <a:pPr marL="0" lvl="0" indent="0">
                         <a:lnSpc>
                           <a:spcPct val="100000"/>
                         </a:lnSpc>
                         <a:buNone/>
                       </a:pPr>
                       <a:r>
-                        <a:rPr lang="zh-CN" sz="1755" dirty="0" i="1">
+                        <a:rPr lang="zh-CN" sz="1755" i="1" dirty="0">
                           <a:solidFill>
                             <a:srgbClr val="1A1A18"/>
                           </a:solidFill>
@@ -10945,7 +11607,7 @@
                     <a:bodyPr/>
                     <a:lstStyle/>
                     <a:p>
-                      <a:pPr marL="0" indent="0" lvl="0">
+                      <a:pPr marL="0" lvl="0" indent="0">
                         <a:lnSpc>
                           <a:spcPct val="100000"/>
                         </a:lnSpc>
@@ -10990,6 +11652,11 @@
                     </a:solidFill>
                   </a:tcPr>
                 </a:tc>
+                <a:extLst>
+                  <a:ext uri="{0D108BD9-81ED-4DB2-BD59-A6C34878D82A}">
+                    <a16:rowId xmlns:a16="http://schemas.microsoft.com/office/drawing/2014/main" val="10005"/>
+                  </a:ext>
+                </a:extLst>
               </a:tr>
               <a:tr h="380504">
                 <a:tc>
@@ -10997,7 +11664,7 @@
                     <a:bodyPr/>
                     <a:lstStyle/>
                     <a:p>
-                      <a:pPr marL="0" indent="0" lvl="0">
+                      <a:pPr marL="0" lvl="0" indent="0">
                         <a:lnSpc>
                           <a:spcPct val="100000"/>
                         </a:lnSpc>
@@ -11047,14 +11714,14 @@
                     <a:bodyPr/>
                     <a:lstStyle/>
                     <a:p>
-                      <a:pPr marL="0" indent="0" lvl="0">
+                      <a:pPr marL="0" lvl="0" indent="0">
                         <a:lnSpc>
                           <a:spcPct val="100000"/>
                         </a:lnSpc>
                         <a:buNone/>
                       </a:pPr>
                       <a:r>
-                        <a:rPr lang="zh-CN" sz="1755" dirty="0" i="1">
+                        <a:rPr lang="zh-CN" sz="1755" i="1" dirty="0">
                           <a:solidFill>
                             <a:srgbClr val="1A1A18"/>
                           </a:solidFill>
@@ -11097,14 +11764,14 @@
                     <a:bodyPr/>
                     <a:lstStyle/>
                     <a:p>
-                      <a:pPr marL="0" indent="0" lvl="0">
+                      <a:pPr marL="0" lvl="0" indent="0">
                         <a:lnSpc>
                           <a:spcPct val="100000"/>
                         </a:lnSpc>
                         <a:buNone/>
                       </a:pPr>
                       <a:r>
-                        <a:rPr lang="zh-CN" sz="1755" dirty="0" i="1">
+                        <a:rPr lang="zh-CN" sz="1755" i="1" dirty="0">
                           <a:solidFill>
                             <a:srgbClr val="1A1A18"/>
                           </a:solidFill>
@@ -11147,14 +11814,14 @@
                     <a:bodyPr/>
                     <a:lstStyle/>
                     <a:p>
-                      <a:pPr marL="0" indent="0" lvl="0">
+                      <a:pPr marL="0" lvl="0" indent="0">
                         <a:lnSpc>
                           <a:spcPct val="100000"/>
                         </a:lnSpc>
                         <a:buNone/>
                       </a:pPr>
                       <a:r>
-                        <a:rPr lang="zh-CN" sz="1755" dirty="0" i="1">
+                        <a:rPr lang="zh-CN" sz="1755" i="1" dirty="0">
                           <a:solidFill>
                             <a:srgbClr val="1A1A18"/>
                           </a:solidFill>
@@ -11197,14 +11864,14 @@
                     <a:bodyPr/>
                     <a:lstStyle/>
                     <a:p>
-                      <a:pPr marL="0" indent="0" lvl="0">
+                      <a:pPr marL="0" lvl="0" indent="0">
                         <a:lnSpc>
                           <a:spcPct val="100000"/>
                         </a:lnSpc>
                         <a:buNone/>
                       </a:pPr>
                       <a:r>
-                        <a:rPr lang="zh-CN" sz="1755" dirty="0" b="1">
+                        <a:rPr lang="zh-CN" sz="1755" b="1" dirty="0">
                           <a:solidFill>
                             <a:srgbClr val="8A4B2A"/>
                           </a:solidFill>
@@ -11242,6 +11909,11 @@
                     </a:solidFill>
                   </a:tcPr>
                 </a:tc>
+                <a:extLst>
+                  <a:ext uri="{0D108BD9-81ED-4DB2-BD59-A6C34878D82A}">
+                    <a16:rowId xmlns:a16="http://schemas.microsoft.com/office/drawing/2014/main" val="10006"/>
+                  </a:ext>
+                </a:extLst>
               </a:tr>
               <a:tr h="380504">
                 <a:tc>
@@ -11249,7 +11921,7 @@
                     <a:bodyPr/>
                     <a:lstStyle/>
                     <a:p>
-                      <a:pPr marL="0" indent="0" lvl="0">
+                      <a:pPr marL="0" lvl="0" indent="0">
                         <a:lnSpc>
                           <a:spcPct val="100000"/>
                         </a:lnSpc>
@@ -11299,14 +11971,14 @@
                     <a:bodyPr/>
                     <a:lstStyle/>
                     <a:p>
-                      <a:pPr marL="0" indent="0" lvl="0">
+                      <a:pPr marL="0" lvl="0" indent="0">
                         <a:lnSpc>
                           <a:spcPct val="100000"/>
                         </a:lnSpc>
                         <a:buNone/>
                       </a:pPr>
                       <a:r>
-                        <a:rPr lang="zh-CN" sz="1755" dirty="0" i="1">
+                        <a:rPr lang="zh-CN" sz="1755" i="1" dirty="0">
                           <a:solidFill>
                             <a:srgbClr val="1A1A18"/>
                           </a:solidFill>
@@ -11349,14 +12021,14 @@
                     <a:bodyPr/>
                     <a:lstStyle/>
                     <a:p>
-                      <a:pPr marL="0" indent="0" lvl="0">
+                      <a:pPr marL="0" lvl="0" indent="0">
                         <a:lnSpc>
                           <a:spcPct val="100000"/>
                         </a:lnSpc>
                         <a:buNone/>
                       </a:pPr>
                       <a:r>
-                        <a:rPr lang="zh-CN" sz="1755" dirty="0" i="1">
+                        <a:rPr lang="zh-CN" sz="1755" i="1" dirty="0">
                           <a:solidFill>
                             <a:srgbClr val="1A1A18"/>
                           </a:solidFill>
@@ -11399,14 +12071,14 @@
                     <a:bodyPr/>
                     <a:lstStyle/>
                     <a:p>
-                      <a:pPr marL="0" indent="0" lvl="0">
+                      <a:pPr marL="0" lvl="0" indent="0">
                         <a:lnSpc>
                           <a:spcPct val="100000"/>
                         </a:lnSpc>
                         <a:buNone/>
                       </a:pPr>
                       <a:r>
-                        <a:rPr lang="zh-CN" sz="1755" dirty="0" i="1">
+                        <a:rPr lang="zh-CN" sz="1755" i="1" dirty="0">
                           <a:solidFill>
                             <a:srgbClr val="1A1A18"/>
                           </a:solidFill>
@@ -11449,14 +12121,14 @@
                     <a:bodyPr/>
                     <a:lstStyle/>
                     <a:p>
-                      <a:pPr marL="0" indent="0" lvl="0">
+                      <a:pPr marL="0" lvl="0" indent="0">
                         <a:lnSpc>
                           <a:spcPct val="100000"/>
                         </a:lnSpc>
                         <a:buNone/>
                       </a:pPr>
                       <a:r>
-                        <a:rPr lang="zh-CN" sz="1755" dirty="0" b="1">
+                        <a:rPr lang="zh-CN" sz="1755" b="1" dirty="0">
                           <a:solidFill>
                             <a:srgbClr val="8A4B2A"/>
                           </a:solidFill>
@@ -11494,6 +12166,11 @@
                     </a:solidFill>
                   </a:tcPr>
                 </a:tc>
+                <a:extLst>
+                  <a:ext uri="{0D108BD9-81ED-4DB2-BD59-A6C34878D82A}">
+                    <a16:rowId xmlns:a16="http://schemas.microsoft.com/office/drawing/2014/main" val="10007"/>
+                  </a:ext>
+                </a:extLst>
               </a:tr>
             </a:tbl>
           </a:graphicData>
@@ -11521,7 +12198,7 @@
           </a:bodyPr>
           <a:lstStyle/>
           <a:p>
-            <a:pPr marL="0" indent="0" lvl="0">
+            <a:pPr marL="0" lvl="0" indent="0">
               <a:lnSpc>
                 <a:spcPct val="100000"/>
               </a:lnSpc>
@@ -11563,7 +12240,7 @@
           </a:bodyPr>
           <a:lstStyle/>
           <a:p>
-            <a:pPr marL="0" indent="0" lvl="0" algn="r">
+            <a:pPr marL="0" lvl="0" indent="0" algn="r">
               <a:lnSpc>
                 <a:spcPct val="100000"/>
               </a:lnSpc>
@@ -11585,6 +12262,9 @@
       </p:sp>
     </p:spTree>
   </p:cSld>
+  <p:clrMapOvr>
+    <a:masterClrMapping/>
+  </p:clrMapOvr>
 </p:sld>
 </file>
 
@@ -11627,14 +12307,14 @@
           </a:bodyPr>
           <a:lstStyle/>
           <a:p>
-            <a:pPr marL="0" indent="0" lvl="0">
-              <a:lnSpc>
-                <a:spcPct val="100000"/>
-              </a:lnSpc>
-              <a:buNone/>
-            </a:pPr>
-            <a:r>
-              <a:rPr lang="zh-CN" sz="3200" dirty="0" b="1">
+            <a:pPr marL="0" lvl="0" indent="0">
+              <a:lnSpc>
+                <a:spcPct val="100000"/>
+              </a:lnSpc>
+              <a:buNone/>
+            </a:pPr>
+            <a:r>
+              <a:rPr lang="zh-CN" sz="3200" b="1" dirty="0">
                 <a:solidFill>
                   <a:srgbClr val="1A1A18"/>
                 </a:solidFill>
@@ -11671,7 +12351,9 @@
         <p:txBody>
           <a:bodyPr/>
           <a:lstStyle/>
-          <a:p/>
+          <a:p>
+            <a:endParaRPr/>
+          </a:p>
         </p:txBody>
       </p:sp>
       <p:sp>
@@ -11696,7 +12378,7 @@
           </a:bodyPr>
           <a:lstStyle/>
           <a:p>
-            <a:pPr marL="0" indent="0" lvl="0">
+            <a:pPr marL="0" lvl="0" indent="0">
               <a:lnSpc>
                 <a:spcPct val="100000"/>
               </a:lnSpc>
@@ -11755,9 +12437,27 @@
             <a:tbl>
               <a:tblPr firstRow="1"/>
               <a:tblGrid>
-                <a:gridCol w="4008994"/>
-                <a:gridCol w="3340829"/>
-                <a:gridCol w="3708321"/>
+                <a:gridCol w="4008994">
+                  <a:extLst>
+                    <a:ext uri="{9D8B030D-6E8A-4147-A177-3AD203B41FA5}">
+                      <a16:colId xmlns:a16="http://schemas.microsoft.com/office/drawing/2014/main" val="20000"/>
+                    </a:ext>
+                  </a:extLst>
+                </a:gridCol>
+                <a:gridCol w="3340829">
+                  <a:extLst>
+                    <a:ext uri="{9D8B030D-6E8A-4147-A177-3AD203B41FA5}">
+                      <a16:colId xmlns:a16="http://schemas.microsoft.com/office/drawing/2014/main" val="20001"/>
+                    </a:ext>
+                  </a:extLst>
+                </a:gridCol>
+                <a:gridCol w="3708321">
+                  <a:extLst>
+                    <a:ext uri="{9D8B030D-6E8A-4147-A177-3AD203B41FA5}">
+                      <a16:colId xmlns:a16="http://schemas.microsoft.com/office/drawing/2014/main" val="20002"/>
+                    </a:ext>
+                  </a:extLst>
+                </a:gridCol>
               </a:tblGrid>
               <a:tr h="380504">
                 <a:tc>
@@ -11765,14 +12465,14 @@
                     <a:bodyPr/>
                     <a:lstStyle/>
                     <a:p>
-                      <a:pPr marL="0" indent="0" lvl="0">
+                      <a:pPr marL="0" lvl="0" indent="0">
                         <a:lnSpc>
                           <a:spcPct val="100000"/>
                         </a:lnSpc>
                         <a:buNone/>
                       </a:pPr>
                       <a:r>
-                        <a:rPr lang="zh-CN" sz="1755" dirty="0" b="1">
+                        <a:rPr lang="zh-CN" sz="1755" b="1" dirty="0">
                           <a:solidFill>
                             <a:srgbClr val="1A1A18"/>
                           </a:solidFill>
@@ -11815,14 +12515,14 @@
                     <a:bodyPr/>
                     <a:lstStyle/>
                     <a:p>
-                      <a:pPr marL="0" indent="0" lvl="0">
+                      <a:pPr marL="0" lvl="0" indent="0">
                         <a:lnSpc>
                           <a:spcPct val="100000"/>
                         </a:lnSpc>
                         <a:buNone/>
                       </a:pPr>
                       <a:r>
-                        <a:rPr lang="zh-CN" sz="1755" dirty="0" b="1">
+                        <a:rPr lang="zh-CN" sz="1755" b="1" dirty="0">
                           <a:solidFill>
                             <a:srgbClr val="1A1A18"/>
                           </a:solidFill>
@@ -11865,14 +12565,14 @@
                     <a:bodyPr/>
                     <a:lstStyle/>
                     <a:p>
-                      <a:pPr marL="0" indent="0" lvl="0" algn="r">
+                      <a:pPr marL="0" lvl="0" indent="0" algn="r">
                         <a:lnSpc>
                           <a:spcPct val="100000"/>
                         </a:lnSpc>
                         <a:buNone/>
                       </a:pPr>
                       <a:r>
-                        <a:rPr lang="zh-CN" sz="1755" dirty="0" b="1">
+                        <a:rPr lang="zh-CN" sz="1755" b="1" dirty="0">
                           <a:solidFill>
                             <a:srgbClr val="1A1A18"/>
                           </a:solidFill>
@@ -11910,6 +12610,11 @@
                     </a:solidFill>
                   </a:tcPr>
                 </a:tc>
+                <a:extLst>
+                  <a:ext uri="{0D108BD9-81ED-4DB2-BD59-A6C34878D82A}">
+                    <a16:rowId xmlns:a16="http://schemas.microsoft.com/office/drawing/2014/main" val="10000"/>
+                  </a:ext>
+                </a:extLst>
               </a:tr>
               <a:tr h="380504">
                 <a:tc>
@@ -11917,7 +12622,7 @@
                     <a:bodyPr/>
                     <a:lstStyle/>
                     <a:p>
-                      <a:pPr marL="0" indent="0" lvl="0">
+                      <a:pPr marL="0" lvl="0" indent="0">
                         <a:lnSpc>
                           <a:spcPct val="100000"/>
                         </a:lnSpc>
@@ -11967,7 +12672,7 @@
                     <a:bodyPr/>
                     <a:lstStyle/>
                     <a:p>
-                      <a:pPr marL="0" indent="0" lvl="0">
+                      <a:pPr marL="0" lvl="0" indent="0">
                         <a:lnSpc>
                           <a:spcPct val="100000"/>
                         </a:lnSpc>
@@ -12017,7 +12722,7 @@
                     <a:bodyPr/>
                     <a:lstStyle/>
                     <a:p>
-                      <a:pPr marL="0" indent="0" lvl="0" algn="r">
+                      <a:pPr marL="0" lvl="0" indent="0" algn="r">
                         <a:lnSpc>
                           <a:spcPct val="100000"/>
                         </a:lnSpc>
@@ -12062,6 +12767,11 @@
                     </a:solidFill>
                   </a:tcPr>
                 </a:tc>
+                <a:extLst>
+                  <a:ext uri="{0D108BD9-81ED-4DB2-BD59-A6C34878D82A}">
+                    <a16:rowId xmlns:a16="http://schemas.microsoft.com/office/drawing/2014/main" val="10001"/>
+                  </a:ext>
+                </a:extLst>
               </a:tr>
               <a:tr h="380504">
                 <a:tc>
@@ -12069,7 +12779,7 @@
                     <a:bodyPr/>
                     <a:lstStyle/>
                     <a:p>
-                      <a:pPr marL="0" indent="0" lvl="0">
+                      <a:pPr marL="0" lvl="0" indent="0">
                         <a:lnSpc>
                           <a:spcPct val="100000"/>
                         </a:lnSpc>
@@ -12119,7 +12829,7 @@
                     <a:bodyPr/>
                     <a:lstStyle/>
                     <a:p>
-                      <a:pPr marL="0" indent="0" lvl="0">
+                      <a:pPr marL="0" lvl="0" indent="0">
                         <a:lnSpc>
                           <a:spcPct val="100000"/>
                         </a:lnSpc>
@@ -12169,7 +12879,7 @@
                     <a:bodyPr/>
                     <a:lstStyle/>
                     <a:p>
-                      <a:pPr marL="0" indent="0" lvl="0" algn="r">
+                      <a:pPr marL="0" lvl="0" indent="0" algn="r">
                         <a:lnSpc>
                           <a:spcPct val="100000"/>
                         </a:lnSpc>
@@ -12214,6 +12924,11 @@
                     </a:solidFill>
                   </a:tcPr>
                 </a:tc>
+                <a:extLst>
+                  <a:ext uri="{0D108BD9-81ED-4DB2-BD59-A6C34878D82A}">
+                    <a16:rowId xmlns:a16="http://schemas.microsoft.com/office/drawing/2014/main" val="10002"/>
+                  </a:ext>
+                </a:extLst>
               </a:tr>
               <a:tr h="380504">
                 <a:tc>
@@ -12221,7 +12936,7 @@
                     <a:bodyPr/>
                     <a:lstStyle/>
                     <a:p>
-                      <a:pPr marL="0" indent="0" lvl="0">
+                      <a:pPr marL="0" lvl="0" indent="0">
                         <a:lnSpc>
                           <a:spcPct val="100000"/>
                         </a:lnSpc>
@@ -12271,7 +12986,7 @@
                     <a:bodyPr/>
                     <a:lstStyle/>
                     <a:p>
-                      <a:pPr marL="0" indent="0" lvl="0">
+                      <a:pPr marL="0" lvl="0" indent="0">
                         <a:lnSpc>
                           <a:spcPct val="100000"/>
                         </a:lnSpc>
@@ -12321,7 +13036,7 @@
                     <a:bodyPr/>
                     <a:lstStyle/>
                     <a:p>
-                      <a:pPr marL="0" indent="0" lvl="0" algn="r">
+                      <a:pPr marL="0" lvl="0" indent="0" algn="r">
                         <a:lnSpc>
                           <a:spcPct val="100000"/>
                         </a:lnSpc>
@@ -12366,6 +13081,11 @@
                     </a:solidFill>
                   </a:tcPr>
                 </a:tc>
+                <a:extLst>
+                  <a:ext uri="{0D108BD9-81ED-4DB2-BD59-A6C34878D82A}">
+                    <a16:rowId xmlns:a16="http://schemas.microsoft.com/office/drawing/2014/main" val="10003"/>
+                  </a:ext>
+                </a:extLst>
               </a:tr>
               <a:tr h="380504">
                 <a:tc>
@@ -12373,7 +13093,7 @@
                     <a:bodyPr/>
                     <a:lstStyle/>
                     <a:p>
-                      <a:pPr marL="0" indent="0" lvl="0">
+                      <a:pPr marL="0" lvl="0" indent="0">
                         <a:lnSpc>
                           <a:spcPct val="100000"/>
                         </a:lnSpc>
@@ -12423,7 +13143,7 @@
                     <a:bodyPr/>
                     <a:lstStyle/>
                     <a:p>
-                      <a:pPr marL="0" indent="0" lvl="0">
+                      <a:pPr marL="0" lvl="0" indent="0">
                         <a:lnSpc>
                           <a:spcPct val="100000"/>
                         </a:lnSpc>
@@ -12473,7 +13193,7 @@
                     <a:bodyPr/>
                     <a:lstStyle/>
                     <a:p>
-                      <a:pPr marL="0" indent="0" lvl="0" algn="r">
+                      <a:pPr marL="0" lvl="0" indent="0" algn="r">
                         <a:lnSpc>
                           <a:spcPct val="100000"/>
                         </a:lnSpc>
@@ -12518,6 +13238,11 @@
                     </a:solidFill>
                   </a:tcPr>
                 </a:tc>
+                <a:extLst>
+                  <a:ext uri="{0D108BD9-81ED-4DB2-BD59-A6C34878D82A}">
+                    <a16:rowId xmlns:a16="http://schemas.microsoft.com/office/drawing/2014/main" val="10004"/>
+                  </a:ext>
+                </a:extLst>
               </a:tr>
             </a:tbl>
           </a:graphicData>
@@ -12545,7 +13270,7 @@
           </a:bodyPr>
           <a:lstStyle/>
           <a:p>
-            <a:pPr marL="0" indent="0" lvl="0">
+            <a:pPr marL="0" lvl="0" indent="0">
               <a:lnSpc>
                 <a:spcPct val="100000"/>
               </a:lnSpc>
@@ -12563,7 +13288,7 @@
               <a:t>同为 </a:t>
             </a:r>
             <a:r>
-              <a:rPr lang="zh-CN" sz="2340" dirty="0" i="1">
+              <a:rPr lang="zh-CN" sz="2340" i="1" dirty="0">
                 <a:solidFill>
                   <a:srgbClr val="1A1A18"/>
                 </a:solidFill>
@@ -12609,7 +13334,7 @@
           </a:bodyPr>
           <a:lstStyle/>
           <a:p>
-            <a:pPr marL="0" indent="0" lvl="0">
+            <a:pPr marL="0" lvl="0" indent="0">
               <a:lnSpc>
                 <a:spcPct val="100000"/>
               </a:lnSpc>
@@ -12651,7 +13376,7 @@
           </a:bodyPr>
           <a:lstStyle/>
           <a:p>
-            <a:pPr marL="0" indent="0" lvl="0">
+            <a:pPr marL="0" lvl="0" indent="0">
               <a:lnSpc>
                 <a:spcPct val="100000"/>
               </a:lnSpc>
@@ -12693,7 +13418,7 @@
           </a:bodyPr>
           <a:lstStyle/>
           <a:p>
-            <a:pPr marL="0" indent="0" lvl="0" algn="r">
+            <a:pPr marL="0" lvl="0" indent="0" algn="r">
               <a:lnSpc>
                 <a:spcPct val="100000"/>
               </a:lnSpc>
@@ -12715,6 +13440,9 @@
       </p:sp>
     </p:spTree>
   </p:cSld>
+  <p:clrMapOvr>
+    <a:masterClrMapping/>
+  </p:clrMapOvr>
 </p:sld>
 </file>
 
@@ -12757,14 +13485,14 @@
           </a:bodyPr>
           <a:lstStyle/>
           <a:p>
-            <a:pPr marL="0" indent="0" lvl="0">
-              <a:lnSpc>
-                <a:spcPct val="100000"/>
-              </a:lnSpc>
-              <a:buNone/>
-            </a:pPr>
-            <a:r>
-              <a:rPr lang="zh-CN" sz="3200" dirty="0" b="1">
+            <a:pPr marL="0" lvl="0" indent="0">
+              <a:lnSpc>
+                <a:spcPct val="100000"/>
+              </a:lnSpc>
+              <a:buNone/>
+            </a:pPr>
+            <a:r>
+              <a:rPr lang="zh-CN" sz="3200" b="1" dirty="0">
                 <a:solidFill>
                   <a:srgbClr val="1A1A18"/>
                 </a:solidFill>
@@ -12801,7 +13529,9 @@
         <p:txBody>
           <a:bodyPr/>
           <a:lstStyle/>
-          <a:p/>
+          <a:p>
+            <a:endParaRPr/>
+          </a:p>
         </p:txBody>
       </p:sp>
       <p:pic>
@@ -12813,7 +13543,7 @@
           <p:nvPr/>
         </p:nvPicPr>
         <p:blipFill>
-          <a:blip r:embed="rId100"/>
+          <a:blip r:embed="rId2"/>
           <a:stretch>
             <a:fillRect/>
           </a:stretch>
@@ -12850,7 +13580,7 @@
           </a:bodyPr>
           <a:lstStyle/>
           <a:p>
-            <a:pPr marL="0" indent="0" lvl="0" algn="ctr">
+            <a:pPr marL="0" lvl="0" indent="0" algn="ctr">
               <a:lnSpc>
                 <a:spcPct val="100000"/>
               </a:lnSpc>
@@ -12892,7 +13622,7 @@
           </a:bodyPr>
           <a:lstStyle/>
           <a:p>
-            <a:pPr marL="0" indent="0" lvl="0">
+            <a:pPr marL="0" lvl="0" indent="0">
               <a:lnSpc>
                 <a:spcPct val="100000"/>
               </a:lnSpc>
@@ -12934,7 +13664,7 @@
           </a:bodyPr>
           <a:lstStyle/>
           <a:p>
-            <a:pPr marL="0" indent="0" lvl="0" algn="r">
+            <a:pPr marL="0" lvl="0" indent="0" algn="r">
               <a:lnSpc>
                 <a:spcPct val="100000"/>
               </a:lnSpc>
@@ -12956,6 +13686,9 @@
       </p:sp>
     </p:spTree>
   </p:cSld>
+  <p:clrMapOvr>
+    <a:masterClrMapping/>
+  </p:clrMapOvr>
 </p:sld>
 </file>
 
@@ -12998,14 +13731,14 @@
           </a:bodyPr>
           <a:lstStyle/>
           <a:p>
-            <a:pPr marL="0" indent="0" lvl="0">
-              <a:lnSpc>
-                <a:spcPct val="100000"/>
-              </a:lnSpc>
-              <a:buNone/>
-            </a:pPr>
-            <a:r>
-              <a:rPr lang="zh-CN" sz="3200" dirty="0" b="1">
+            <a:pPr marL="0" lvl="0" indent="0">
+              <a:lnSpc>
+                <a:spcPct val="100000"/>
+              </a:lnSpc>
+              <a:buNone/>
+            </a:pPr>
+            <a:r>
+              <a:rPr lang="zh-CN" sz="3200" b="1" dirty="0">
                 <a:solidFill>
                   <a:srgbClr val="1A1A18"/>
                 </a:solidFill>
@@ -13042,7 +13775,9 @@
         <p:txBody>
           <a:bodyPr/>
           <a:lstStyle/>
-          <a:p/>
+          <a:p>
+            <a:endParaRPr/>
+          </a:p>
         </p:txBody>
       </p:sp>
       <p:sp>
@@ -13067,14 +13802,14 @@
           </a:bodyPr>
           <a:lstStyle/>
           <a:p>
-            <a:pPr marL="0" indent="0" lvl="0">
-              <a:lnSpc>
-                <a:spcPct val="100000"/>
-              </a:lnSpc>
-              <a:buNone/>
-            </a:pPr>
-            <a:r>
-              <a:rPr lang="zh-CN" sz="2340" dirty="0" i="1">
+            <a:pPr marL="0" lvl="0" indent="0">
+              <a:lnSpc>
+                <a:spcPct val="100000"/>
+              </a:lnSpc>
+              <a:buNone/>
+            </a:pPr>
+            <a:r>
+              <a:rPr lang="zh-CN" sz="2340" i="1" dirty="0">
                 <a:solidFill>
                   <a:srgbClr val="1A1A18"/>
                 </a:solidFill>
@@ -13096,7 +13831,7 @@
               <a:t> 个互异元素有 </a:t>
             </a:r>
             <a:r>
-              <a:rPr lang="zh-CN" sz="2340" dirty="0" i="1">
+              <a:rPr lang="zh-CN" sz="2340" i="1" dirty="0">
                 <a:solidFill>
                   <a:srgbClr val="1A1A18"/>
                 </a:solidFill>
@@ -13142,7 +13877,7 @@
           </a:bodyPr>
           <a:lstStyle/>
           <a:p>
-            <a:pPr marL="0" indent="0" lvl="0">
+            <a:pPr marL="0" lvl="0" indent="0">
               <a:lnSpc>
                 <a:spcPct val="100000"/>
               </a:lnSpc>
@@ -13160,7 +13895,7 @@
               <a:t>判定树至少有 </a:t>
             </a:r>
             <a:r>
-              <a:rPr lang="zh-CN" sz="2340" dirty="0" i="1">
+              <a:rPr lang="zh-CN" sz="2340" i="1" dirty="0">
                 <a:solidFill>
                   <a:srgbClr val="1A1A18"/>
                 </a:solidFill>
@@ -13206,14 +13941,14 @@
           </a:bodyPr>
           <a:lstStyle/>
           <a:p>
-            <a:pPr marL="0" indent="0" lvl="0" algn="ctr">
-              <a:lnSpc>
-                <a:spcPct val="100000"/>
-              </a:lnSpc>
-              <a:buNone/>
-            </a:pPr>
-            <a:r>
-              <a:rPr lang="zh-CN" sz="2600" dirty="0" i="1">
+            <a:pPr marL="0" lvl="0" indent="0" algn="ctr">
+              <a:lnSpc>
+                <a:spcPct val="100000"/>
+              </a:lnSpc>
+              <a:buNone/>
+            </a:pPr>
+            <a:r>
+              <a:rPr lang="zh-CN" sz="2600" i="1" dirty="0">
                 <a:solidFill>
                   <a:srgbClr val="1A1A18"/>
                 </a:solidFill>
@@ -13248,7 +13983,7 @@
           </a:bodyPr>
           <a:lstStyle/>
           <a:p>
-            <a:pPr marL="0" indent="0" lvl="0">
+            <a:pPr marL="0" lvl="0" indent="0">
               <a:lnSpc>
                 <a:spcPct val="100000"/>
               </a:lnSpc>
@@ -13266,7 +14001,7 @@
               <a:t>这限制的是</a:t>
             </a:r>
             <a:r>
-              <a:rPr lang="zh-CN" sz="2340" dirty="0" b="1">
+              <a:rPr lang="zh-CN" sz="2340" b="1" dirty="0">
                 <a:solidFill>
                   <a:srgbClr val="8A4B2A"/>
                 </a:solidFill>
@@ -13288,7 +14023,7 @@
               <a:t>的排序。桶式与基数利用关键码结构， 不在这个模型里，所以能达到 </a:t>
             </a:r>
             <a:r>
-              <a:rPr lang="zh-CN" sz="2340" dirty="0" i="1">
+              <a:rPr lang="zh-CN" sz="2340" i="1" dirty="0">
                 <a:solidFill>
                   <a:srgbClr val="1A1A18"/>
                 </a:solidFill>
@@ -13310,7 +14045,7 @@
               <a:t> 或 </a:t>
             </a:r>
             <a:r>
-              <a:rPr lang="zh-CN" sz="2340" dirty="0" i="1">
+              <a:rPr lang="zh-CN" sz="2340" i="1" dirty="0">
                 <a:solidFill>
                   <a:srgbClr val="1A1A18"/>
                 </a:solidFill>
@@ -13356,7 +14091,7 @@
           </a:bodyPr>
           <a:lstStyle/>
           <a:p>
-            <a:pPr marL="0" indent="0" lvl="0">
+            <a:pPr marL="0" lvl="0" indent="0">
               <a:lnSpc>
                 <a:spcPct val="100000"/>
               </a:lnSpc>
@@ -13398,7 +14133,7 @@
           </a:bodyPr>
           <a:lstStyle/>
           <a:p>
-            <a:pPr marL="0" indent="0" lvl="0" algn="r">
+            <a:pPr marL="0" lvl="0" indent="0" algn="r">
               <a:lnSpc>
                 <a:spcPct val="100000"/>
               </a:lnSpc>
@@ -13420,6 +14155,9 @@
       </p:sp>
     </p:spTree>
   </p:cSld>
+  <p:clrMapOvr>
+    <a:masterClrMapping/>
+  </p:clrMapOvr>
 </p:sld>
 </file>
 
@@ -13462,14 +14200,14 @@
           </a:bodyPr>
           <a:lstStyle/>
           <a:p>
-            <a:pPr marL="0" indent="0" lvl="0">
-              <a:lnSpc>
-                <a:spcPct val="100000"/>
-              </a:lnSpc>
-              <a:buNone/>
-            </a:pPr>
-            <a:r>
-              <a:rPr lang="zh-CN" sz="3200" dirty="0" b="1">
+            <a:pPr marL="0" lvl="0" indent="0">
+              <a:lnSpc>
+                <a:spcPct val="100000"/>
+              </a:lnSpc>
+              <a:buNone/>
+            </a:pPr>
+            <a:r>
+              <a:rPr lang="zh-CN" sz="3200" b="1" dirty="0">
                 <a:solidFill>
                   <a:srgbClr val="1A1A18"/>
                 </a:solidFill>
@@ -13506,7 +14244,9 @@
         <p:txBody>
           <a:bodyPr/>
           <a:lstStyle/>
-          <a:p/>
+          <a:p>
+            <a:endParaRPr/>
+          </a:p>
         </p:txBody>
       </p:sp>
       <p:sp>
@@ -13531,7 +14271,7 @@
           </a:bodyPr>
           <a:lstStyle/>
           <a:p>
-            <a:pPr marL="270000" indent="-230000" lvl="0">
+            <a:pPr marL="270000" lvl="0" indent="-230000">
               <a:lnSpc>
                 <a:spcPct val="100000"/>
               </a:lnSpc>
@@ -13545,7 +14285,7 @@
               <a:buChar char="●"/>
             </a:pPr>
             <a:r>
-              <a:rPr lang="zh-CN" sz="2340" dirty="0" b="1">
+              <a:rPr lang="zh-CN" sz="2340" b="1" dirty="0">
                 <a:solidFill>
                   <a:srgbClr val="8A4B2A"/>
                 </a:solidFill>
@@ -13568,7 +14308,7 @@
             </a:r>
           </a:p>
           <a:p>
-            <a:pPr marL="270000" indent="-230000" lvl="0">
+            <a:pPr marL="270000" lvl="0" indent="-230000">
               <a:lnSpc>
                 <a:spcPct val="100000"/>
               </a:lnSpc>
@@ -13582,7 +14322,7 @@
               <a:buChar char="●"/>
             </a:pPr>
             <a:r>
-              <a:rPr lang="zh-CN" sz="2340" dirty="0" b="1">
+              <a:rPr lang="zh-CN" sz="2340" b="1" dirty="0">
                 <a:solidFill>
                   <a:srgbClr val="8A4B2A"/>
                 </a:solidFill>
@@ -13605,7 +14345,7 @@
             </a:r>
           </a:p>
           <a:p>
-            <a:pPr marL="270000" indent="-230000" lvl="0">
+            <a:pPr marL="270000" lvl="0" indent="-230000">
               <a:lnSpc>
                 <a:spcPct val="100000"/>
               </a:lnSpc>
@@ -13619,7 +14359,7 @@
               <a:buChar char="●"/>
             </a:pPr>
             <a:r>
-              <a:rPr lang="zh-CN" sz="2340" dirty="0" b="1">
+              <a:rPr lang="zh-CN" sz="2340" b="1" dirty="0">
                 <a:solidFill>
                   <a:srgbClr val="8A4B2A"/>
                 </a:solidFill>
@@ -13642,7 +14382,7 @@
             </a:r>
           </a:p>
           <a:p>
-            <a:pPr marL="270000" indent="-230000" lvl="0">
+            <a:pPr marL="270000" lvl="0" indent="-230000">
               <a:lnSpc>
                 <a:spcPct val="100000"/>
               </a:lnSpc>
@@ -13656,7 +14396,7 @@
               <a:buChar char="●"/>
             </a:pPr>
             <a:r>
-              <a:rPr lang="zh-CN" sz="2340" dirty="0" b="1">
+              <a:rPr lang="zh-CN" sz="2340" b="1" dirty="0">
                 <a:solidFill>
                   <a:srgbClr val="8A4B2A"/>
                 </a:solidFill>
@@ -13679,7 +14419,7 @@
             </a:r>
           </a:p>
           <a:p>
-            <a:pPr marL="270000" indent="-230000" lvl="0">
+            <a:pPr marL="270000" lvl="0" indent="-230000">
               <a:lnSpc>
                 <a:spcPct val="100000"/>
               </a:lnSpc>
@@ -13693,7 +14433,7 @@
               <a:buChar char="●"/>
             </a:pPr>
             <a:r>
-              <a:rPr lang="zh-CN" sz="2340" dirty="0" b="1">
+              <a:rPr lang="zh-CN" sz="2340" b="1" dirty="0">
                 <a:solidFill>
                   <a:srgbClr val="8A4B2A"/>
                 </a:solidFill>
@@ -13716,7 +14456,7 @@
             </a:r>
           </a:p>
           <a:p>
-            <a:pPr marL="270000" indent="-230000" lvl="0">
+            <a:pPr marL="270000" lvl="0" indent="-230000">
               <a:lnSpc>
                 <a:spcPct val="100000"/>
               </a:lnSpc>
@@ -13730,7 +14470,7 @@
               <a:buChar char="●"/>
             </a:pPr>
             <a:r>
-              <a:rPr lang="zh-CN" sz="2340" dirty="0" b="1">
+              <a:rPr lang="zh-CN" sz="2340" b="1" dirty="0">
                 <a:solidFill>
                   <a:srgbClr val="8A4B2A"/>
                 </a:solidFill>
@@ -13776,14 +14516,14 @@
           </a:bodyPr>
           <a:lstStyle/>
           <a:p>
-            <a:pPr marL="0" indent="0" lvl="0">
-              <a:lnSpc>
-                <a:spcPct val="100000"/>
-              </a:lnSpc>
-              <a:buNone/>
-            </a:pPr>
-            <a:r>
-              <a:rPr lang="zh-CN" sz="2340" dirty="0" b="1">
+            <a:pPr marL="0" lvl="0" indent="0">
+              <a:lnSpc>
+                <a:spcPct val="100000"/>
+              </a:lnSpc>
+              <a:buNone/>
+            </a:pPr>
+            <a:r>
+              <a:rPr lang="zh-CN" sz="2340" b="1" dirty="0">
                 <a:solidFill>
                   <a:srgbClr val="8A4B2A"/>
                 </a:solidFill>
@@ -13829,7 +14569,7 @@
           </a:bodyPr>
           <a:lstStyle/>
           <a:p>
-            <a:pPr marL="0" indent="0" lvl="0">
+            <a:pPr marL="0" lvl="0" indent="0">
               <a:lnSpc>
                 <a:spcPct val="100000"/>
               </a:lnSpc>
@@ -13871,7 +14611,7 @@
           </a:bodyPr>
           <a:lstStyle/>
           <a:p>
-            <a:pPr marL="0" indent="0" lvl="0" algn="r">
+            <a:pPr marL="0" lvl="0" indent="0" algn="r">
               <a:lnSpc>
                 <a:spcPct val="100000"/>
               </a:lnSpc>
@@ -13893,6 +14633,9 @@
       </p:sp>
     </p:spTree>
   </p:cSld>
+  <p:clrMapOvr>
+    <a:masterClrMapping/>
+  </p:clrMapOvr>
 </p:sld>
 </file>
 
@@ -13935,14 +14678,14 @@
           </a:bodyPr>
           <a:lstStyle/>
           <a:p>
-            <a:pPr marL="0" indent="0" lvl="0">
-              <a:lnSpc>
-                <a:spcPct val="100000"/>
-              </a:lnSpc>
-              <a:buNone/>
-            </a:pPr>
-            <a:r>
-              <a:rPr lang="zh-CN" sz="3200" dirty="0" b="1">
+            <a:pPr marL="0" lvl="0" indent="0">
+              <a:lnSpc>
+                <a:spcPct val="100000"/>
+              </a:lnSpc>
+              <a:buNone/>
+            </a:pPr>
+            <a:r>
+              <a:rPr lang="zh-CN" sz="3200" b="1" dirty="0">
                 <a:solidFill>
                   <a:srgbClr val="1A1A18"/>
                 </a:solidFill>
@@ -13979,7 +14722,9 @@
         <p:txBody>
           <a:bodyPr/>
           <a:lstStyle/>
-          <a:p/>
+          <a:p>
+            <a:endParaRPr/>
+          </a:p>
         </p:txBody>
       </p:sp>
       <p:sp>
@@ -14004,7 +14749,7 @@
           </a:bodyPr>
           <a:lstStyle/>
           <a:p>
-            <a:pPr marL="0" indent="0" lvl="0">
+            <a:pPr marL="0" lvl="0" indent="0">
               <a:lnSpc>
                 <a:spcPct val="100000"/>
               </a:lnSpc>
@@ -14046,7 +14791,7 @@
           </a:bodyPr>
           <a:lstStyle/>
           <a:p>
-            <a:pPr marL="0" indent="0" lvl="0">
+            <a:pPr marL="0" lvl="0" indent="0">
               <a:lnSpc>
                 <a:spcPct val="100000"/>
               </a:lnSpc>
@@ -14088,7 +14833,7 @@
           </a:bodyPr>
           <a:lstStyle/>
           <a:p>
-            <a:pPr marL="0" indent="0" lvl="0" algn="r">
+            <a:pPr marL="0" lvl="0" indent="0" algn="r">
               <a:lnSpc>
                 <a:spcPct val="100000"/>
               </a:lnSpc>
@@ -14110,6 +14855,9 @@
       </p:sp>
     </p:spTree>
   </p:cSld>
+  <p:clrMapOvr>
+    <a:masterClrMapping/>
+  </p:clrMapOvr>
 </p:sld>
 </file>
 
@@ -14152,14 +14900,14 @@
           </a:bodyPr>
           <a:lstStyle/>
           <a:p>
-            <a:pPr marL="0" indent="0" lvl="0">
-              <a:lnSpc>
-                <a:spcPct val="100000"/>
-              </a:lnSpc>
-              <a:buNone/>
-            </a:pPr>
-            <a:r>
-              <a:rPr lang="zh-CN" sz="3200" dirty="0" b="1">
+            <a:pPr marL="0" lvl="0" indent="0">
+              <a:lnSpc>
+                <a:spcPct val="100000"/>
+              </a:lnSpc>
+              <a:buNone/>
+            </a:pPr>
+            <a:r>
+              <a:rPr lang="zh-CN" sz="3200" b="1" dirty="0">
                 <a:solidFill>
                   <a:srgbClr val="1A1A18"/>
                 </a:solidFill>
@@ -14196,7 +14944,9 @@
         <p:txBody>
           <a:bodyPr/>
           <a:lstStyle/>
-          <a:p/>
+          <a:p>
+            <a:endParaRPr/>
+          </a:p>
         </p:txBody>
       </p:sp>
       <p:sp>
@@ -14221,7 +14971,7 @@
           </a:bodyPr>
           <a:lstStyle/>
           <a:p>
-            <a:pPr marL="0" indent="0" lvl="0">
+            <a:pPr marL="0" lvl="0" indent="0">
               <a:lnSpc>
                 <a:spcPct val="100000"/>
               </a:lnSpc>
@@ -14285,7 +15035,7 @@
           </a:bodyPr>
           <a:lstStyle/>
           <a:p>
-            <a:pPr marL="0" indent="0" lvl="0">
+            <a:pPr marL="0" lvl="0" indent="0">
               <a:lnSpc>
                 <a:spcPct val="100000"/>
               </a:lnSpc>
@@ -14327,7 +15077,7 @@
           </a:bodyPr>
           <a:lstStyle/>
           <a:p>
-            <a:pPr marL="0" indent="0" lvl="0" algn="r">
+            <a:pPr marL="0" lvl="0" indent="0" algn="r">
               <a:lnSpc>
                 <a:spcPct val="100000"/>
               </a:lnSpc>
@@ -14349,6 +15099,9 @@
       </p:sp>
     </p:spTree>
   </p:cSld>
+  <p:clrMapOvr>
+    <a:masterClrMapping/>
+  </p:clrMapOvr>
 </p:sld>
 </file>
 
@@ -14391,14 +15144,14 @@
           </a:bodyPr>
           <a:lstStyle/>
           <a:p>
-            <a:pPr marL="0" indent="0" lvl="0">
-              <a:lnSpc>
-                <a:spcPct val="100000"/>
-              </a:lnSpc>
-              <a:buNone/>
-            </a:pPr>
-            <a:r>
-              <a:rPr lang="zh-CN" sz="3200" dirty="0" b="1">
+            <a:pPr marL="0" lvl="0" indent="0">
+              <a:lnSpc>
+                <a:spcPct val="100000"/>
+              </a:lnSpc>
+              <a:buNone/>
+            </a:pPr>
+            <a:r>
+              <a:rPr lang="zh-CN" sz="3200" b="1" dirty="0">
                 <a:solidFill>
                   <a:srgbClr val="1A1A18"/>
                 </a:solidFill>
@@ -14435,7 +15188,9 @@
         <p:txBody>
           <a:bodyPr/>
           <a:lstStyle/>
-          <a:p/>
+          <a:p>
+            <a:endParaRPr/>
+          </a:p>
         </p:txBody>
       </p:sp>
       <p:sp>
@@ -14460,7 +15215,7 @@
           </a:bodyPr>
           <a:lstStyle/>
           <a:p>
-            <a:pPr marL="0" indent="0" lvl="0">
+            <a:pPr marL="0" lvl="0" indent="0">
               <a:lnSpc>
                 <a:spcPct val="100000"/>
               </a:lnSpc>
@@ -14524,7 +15279,7 @@
           </a:bodyPr>
           <a:lstStyle/>
           <a:p>
-            <a:pPr marL="0" indent="0" lvl="0">
+            <a:pPr marL="0" lvl="0" indent="0">
               <a:lnSpc>
                 <a:spcPct val="100000"/>
               </a:lnSpc>
@@ -14566,7 +15321,7 @@
           </a:bodyPr>
           <a:lstStyle/>
           <a:p>
-            <a:pPr marL="0" indent="0" lvl="0" algn="r">
+            <a:pPr marL="0" lvl="0" indent="0" algn="r">
               <a:lnSpc>
                 <a:spcPct val="100000"/>
               </a:lnSpc>
@@ -14588,6 +15343,9 @@
       </p:sp>
     </p:spTree>
   </p:cSld>
+  <p:clrMapOvr>
+    <a:masterClrMapping/>
+  </p:clrMapOvr>
 </p:sld>
 </file>
 
@@ -14630,14 +15388,14 @@
           </a:bodyPr>
           <a:lstStyle/>
           <a:p>
-            <a:pPr marL="0" indent="0" lvl="0">
-              <a:lnSpc>
-                <a:spcPct val="100000"/>
-              </a:lnSpc>
-              <a:buNone/>
-            </a:pPr>
-            <a:r>
-              <a:rPr lang="zh-CN" sz="3200" dirty="0" b="1">
+            <a:pPr marL="0" lvl="0" indent="0">
+              <a:lnSpc>
+                <a:spcPct val="100000"/>
+              </a:lnSpc>
+              <a:buNone/>
+            </a:pPr>
+            <a:r>
+              <a:rPr lang="zh-CN" sz="3200" b="1" dirty="0">
                 <a:solidFill>
                   <a:srgbClr val="1A1A18"/>
                 </a:solidFill>
@@ -14674,7 +15432,9 @@
         <p:txBody>
           <a:bodyPr/>
           <a:lstStyle/>
-          <a:p/>
+          <a:p>
+            <a:endParaRPr/>
+          </a:p>
         </p:txBody>
       </p:sp>
       <p:sp>
@@ -14699,7 +15459,7 @@
           </a:bodyPr>
           <a:lstStyle/>
           <a:p>
-            <a:pPr marL="270000" indent="-230000" lvl="0">
+            <a:pPr marL="270000" lvl="0" indent="-230000">
               <a:lnSpc>
                 <a:spcPct val="100000"/>
               </a:lnSpc>
@@ -14725,7 +15485,7 @@
             </a:r>
           </a:p>
           <a:p>
-            <a:pPr marL="270000" indent="-230000" lvl="0">
+            <a:pPr marL="270000" lvl="0" indent="-230000">
               <a:lnSpc>
                 <a:spcPct val="100000"/>
               </a:lnSpc>
@@ -14751,7 +15511,7 @@
             </a:r>
           </a:p>
           <a:p>
-            <a:pPr marL="270000" indent="-230000" lvl="0">
+            <a:pPr marL="270000" lvl="0" indent="-230000">
               <a:lnSpc>
                 <a:spcPct val="100000"/>
               </a:lnSpc>
@@ -14777,7 +15537,7 @@
             </a:r>
           </a:p>
           <a:p>
-            <a:pPr marL="270000" indent="-230000" lvl="0">
+            <a:pPr marL="270000" lvl="0" indent="-230000">
               <a:lnSpc>
                 <a:spcPct val="100000"/>
               </a:lnSpc>
@@ -14826,7 +15586,7 @@
           </a:bodyPr>
           <a:lstStyle/>
           <a:p>
-            <a:pPr marL="0" indent="0" lvl="0">
+            <a:pPr marL="0" lvl="0" indent="0">
               <a:lnSpc>
                 <a:spcPct val="100000"/>
               </a:lnSpc>
@@ -14868,7 +15628,7 @@
           </a:bodyPr>
           <a:lstStyle/>
           <a:p>
-            <a:pPr marL="0" indent="0" lvl="0" algn="r">
+            <a:pPr marL="0" lvl="0" indent="0" algn="r">
               <a:lnSpc>
                 <a:spcPct val="100000"/>
               </a:lnSpc>
@@ -14890,6 +15650,9 @@
       </p:sp>
     </p:spTree>
   </p:cSld>
+  <p:clrMapOvr>
+    <a:masterClrMapping/>
+  </p:clrMapOvr>
 </p:sld>
 </file>
 
@@ -14932,14 +15695,14 @@
           </a:bodyPr>
           <a:lstStyle/>
           <a:p>
-            <a:pPr marL="0" indent="0" lvl="0">
-              <a:lnSpc>
-                <a:spcPct val="100000"/>
-              </a:lnSpc>
-              <a:buNone/>
-            </a:pPr>
-            <a:r>
-              <a:rPr lang="zh-CN" sz="3200" dirty="0" b="1">
+            <a:pPr marL="0" lvl="0" indent="0">
+              <a:lnSpc>
+                <a:spcPct val="100000"/>
+              </a:lnSpc>
+              <a:buNone/>
+            </a:pPr>
+            <a:r>
+              <a:rPr lang="zh-CN" sz="3200" b="1" dirty="0">
                 <a:solidFill>
                   <a:srgbClr val="1A1A18"/>
                 </a:solidFill>
@@ -14976,7 +15739,9 @@
         <p:txBody>
           <a:bodyPr/>
           <a:lstStyle/>
-          <a:p/>
+          <a:p>
+            <a:endParaRPr/>
+          </a:p>
         </p:txBody>
       </p:sp>
       <p:pic>
@@ -14988,7 +15753,7 @@
           <p:nvPr/>
         </p:nvPicPr>
         <p:blipFill>
-          <a:blip r:embed="rId100"/>
+          <a:blip r:embed="rId2"/>
           <a:stretch>
             <a:fillRect/>
           </a:stretch>
@@ -15025,7 +15790,7 @@
           </a:bodyPr>
           <a:lstStyle/>
           <a:p>
-            <a:pPr marL="0" indent="0" lvl="0" algn="ctr">
+            <a:pPr marL="0" lvl="0" indent="0" algn="ctr">
               <a:lnSpc>
                 <a:spcPct val="100000"/>
               </a:lnSpc>
@@ -15067,7 +15832,7 @@
           </a:bodyPr>
           <a:lstStyle/>
           <a:p>
-            <a:pPr marL="0" indent="0" lvl="0">
+            <a:pPr marL="0" lvl="0" indent="0">
               <a:lnSpc>
                 <a:spcPct val="100000"/>
               </a:lnSpc>
@@ -15109,7 +15874,7 @@
           </a:bodyPr>
           <a:lstStyle/>
           <a:p>
-            <a:pPr marL="0" indent="0" lvl="0" algn="r">
+            <a:pPr marL="0" lvl="0" indent="0" algn="r">
               <a:lnSpc>
                 <a:spcPct val="100000"/>
               </a:lnSpc>
@@ -15131,6 +15896,9 @@
       </p:sp>
     </p:spTree>
   </p:cSld>
+  <p:clrMapOvr>
+    <a:masterClrMapping/>
+  </p:clrMapOvr>
 </p:sld>
 </file>
 
@@ -15173,14 +15941,14 @@
           </a:bodyPr>
           <a:lstStyle/>
           <a:p>
-            <a:pPr marL="0" indent="0" lvl="0">
-              <a:lnSpc>
-                <a:spcPct val="100000"/>
-              </a:lnSpc>
-              <a:buNone/>
-            </a:pPr>
-            <a:r>
-              <a:rPr lang="zh-CN" sz="3200" dirty="0" b="1">
+            <a:pPr marL="0" lvl="0" indent="0">
+              <a:lnSpc>
+                <a:spcPct val="100000"/>
+              </a:lnSpc>
+              <a:buNone/>
+            </a:pPr>
+            <a:r>
+              <a:rPr lang="zh-CN" sz="3200" b="1" dirty="0">
                 <a:solidFill>
                   <a:srgbClr val="1A1A18"/>
                 </a:solidFill>
@@ -15217,7 +15985,9 @@
         <p:txBody>
           <a:bodyPr/>
           <a:lstStyle/>
-          <a:p/>
+          <a:p>
+            <a:endParaRPr/>
+          </a:p>
         </p:txBody>
       </p:sp>
       <p:sp>
@@ -15242,7 +16012,7 @@
           </a:bodyPr>
           <a:lstStyle/>
           <a:p>
-            <a:pPr marL="270000" indent="-230000" lvl="0">
+            <a:pPr marL="270000" lvl="0" indent="-230000">
               <a:lnSpc>
                 <a:spcPct val="100000"/>
               </a:lnSpc>
@@ -15268,7 +16038,7 @@
             </a:r>
           </a:p>
           <a:p>
-            <a:pPr marL="270000" indent="-230000" lvl="0">
+            <a:pPr marL="270000" lvl="0" indent="-230000">
               <a:lnSpc>
                 <a:spcPct val="100000"/>
               </a:lnSpc>
@@ -15294,7 +16064,7 @@
             </a:r>
           </a:p>
           <a:p>
-            <a:pPr marL="270000" indent="-230000" lvl="0">
+            <a:pPr marL="270000" lvl="0" indent="-230000">
               <a:lnSpc>
                 <a:spcPct val="100000"/>
               </a:lnSpc>
@@ -15320,7 +16090,7 @@
             </a:r>
           </a:p>
           <a:p>
-            <a:pPr marL="270000" indent="-230000" lvl="0">
+            <a:pPr marL="270000" lvl="0" indent="-230000">
               <a:lnSpc>
                 <a:spcPct val="100000"/>
               </a:lnSpc>
@@ -15369,7 +16139,7 @@
           </a:bodyPr>
           <a:lstStyle/>
           <a:p>
-            <a:pPr marL="0" indent="0" lvl="0">
+            <a:pPr marL="0" lvl="0" indent="0">
               <a:lnSpc>
                 <a:spcPct val="100000"/>
               </a:lnSpc>
@@ -15411,7 +16181,7 @@
           </a:bodyPr>
           <a:lstStyle/>
           <a:p>
-            <a:pPr marL="0" indent="0" lvl="0" algn="r">
+            <a:pPr marL="0" lvl="0" indent="0" algn="r">
               <a:lnSpc>
                 <a:spcPct val="100000"/>
               </a:lnSpc>
@@ -15433,6 +16203,9 @@
       </p:sp>
     </p:spTree>
   </p:cSld>
+  <p:clrMapOvr>
+    <a:masterClrMapping/>
+  </p:clrMapOvr>
 </p:sld>
 </file>
 
@@ -15475,14 +16248,14 @@
           </a:bodyPr>
           <a:lstStyle/>
           <a:p>
-            <a:pPr marL="0" indent="0" lvl="0">
-              <a:lnSpc>
-                <a:spcPct val="100000"/>
-              </a:lnSpc>
-              <a:buNone/>
-            </a:pPr>
-            <a:r>
-              <a:rPr lang="zh-CN" sz="3200" dirty="0" b="1">
+            <a:pPr marL="0" lvl="0" indent="0">
+              <a:lnSpc>
+                <a:spcPct val="100000"/>
+              </a:lnSpc>
+              <a:buNone/>
+            </a:pPr>
+            <a:r>
+              <a:rPr lang="zh-CN" sz="3200" b="1" dirty="0">
                 <a:solidFill>
                   <a:srgbClr val="1A1A18"/>
                 </a:solidFill>
@@ -15519,7 +16292,9 @@
         <p:txBody>
           <a:bodyPr/>
           <a:lstStyle/>
-          <a:p/>
+          <a:p>
+            <a:endParaRPr/>
+          </a:p>
         </p:txBody>
       </p:sp>
       <p:sp>
@@ -15544,7 +16319,7 @@
           </a:bodyPr>
           <a:lstStyle/>
           <a:p>
-            <a:pPr marL="0" indent="0" lvl="0">
+            <a:pPr marL="0" lvl="0" indent="0">
               <a:lnSpc>
                 <a:spcPct val="100000"/>
               </a:lnSpc>
@@ -15718,7 +16493,7 @@
           </a:bodyPr>
           <a:lstStyle/>
           <a:p>
-            <a:pPr marL="0" indent="0" lvl="0">
+            <a:pPr marL="0" lvl="0" indent="0">
               <a:lnSpc>
                 <a:spcPct val="100000"/>
               </a:lnSpc>
@@ -15760,7 +16535,7 @@
           </a:bodyPr>
           <a:lstStyle/>
           <a:p>
-            <a:pPr marL="0" indent="0" lvl="0" algn="r">
+            <a:pPr marL="0" lvl="0" indent="0" algn="r">
               <a:lnSpc>
                 <a:spcPct val="100000"/>
               </a:lnSpc>
@@ -15782,6 +16557,9 @@
       </p:sp>
     </p:spTree>
   </p:cSld>
+  <p:clrMapOvr>
+    <a:masterClrMapping/>
+  </p:clrMapOvr>
 </p:sld>
 </file>
 
@@ -15824,14 +16602,14 @@
           </a:bodyPr>
           <a:lstStyle/>
           <a:p>
-            <a:pPr marL="0" indent="0" lvl="0">
-              <a:lnSpc>
-                <a:spcPct val="100000"/>
-              </a:lnSpc>
-              <a:buNone/>
-            </a:pPr>
-            <a:r>
-              <a:rPr lang="zh-CN" sz="3200" dirty="0" b="1">
+            <a:pPr marL="0" lvl="0" indent="0">
+              <a:lnSpc>
+                <a:spcPct val="100000"/>
+              </a:lnSpc>
+              <a:buNone/>
+            </a:pPr>
+            <a:r>
+              <a:rPr lang="zh-CN" sz="3200" b="1" dirty="0">
                 <a:solidFill>
                   <a:srgbClr val="1A1A18"/>
                 </a:solidFill>
@@ -15868,7 +16646,9 @@
         <p:txBody>
           <a:bodyPr/>
           <a:lstStyle/>
-          <a:p/>
+          <a:p>
+            <a:endParaRPr/>
+          </a:p>
         </p:txBody>
       </p:sp>
       <p:sp>
@@ -15893,7 +16673,7 @@
           </a:bodyPr>
           <a:lstStyle/>
           <a:p>
-            <a:pPr marL="0" indent="0" lvl="0">
+            <a:pPr marL="0" lvl="0" indent="0">
               <a:lnSpc>
                 <a:spcPct val="100000"/>
               </a:lnSpc>
@@ -15935,7 +16715,7 @@
           </a:bodyPr>
           <a:lstStyle/>
           <a:p>
-            <a:pPr marL="0" indent="0" lvl="0">
+            <a:pPr marL="0" lvl="0" indent="0">
               <a:lnSpc>
                 <a:spcPct val="100000"/>
               </a:lnSpc>
@@ -15977,7 +16757,7 @@
           </a:bodyPr>
           <a:lstStyle/>
           <a:p>
-            <a:pPr marL="0" indent="0" lvl="0" algn="r">
+            <a:pPr marL="0" lvl="0" indent="0" algn="r">
               <a:lnSpc>
                 <a:spcPct val="100000"/>
               </a:lnSpc>
@@ -15999,6 +16779,9 @@
       </p:sp>
     </p:spTree>
   </p:cSld>
+  <p:clrMapOvr>
+    <a:masterClrMapping/>
+  </p:clrMapOvr>
 </p:sld>
 </file>
 
@@ -16041,14 +16824,14 @@
           </a:bodyPr>
           <a:lstStyle/>
           <a:p>
-            <a:pPr marL="0" indent="0" lvl="0">
-              <a:lnSpc>
-                <a:spcPct val="100000"/>
-              </a:lnSpc>
-              <a:buNone/>
-            </a:pPr>
-            <a:r>
-              <a:rPr lang="zh-CN" sz="3200" dirty="0" b="1">
+            <a:pPr marL="0" lvl="0" indent="0">
+              <a:lnSpc>
+                <a:spcPct val="100000"/>
+              </a:lnSpc>
+              <a:buNone/>
+            </a:pPr>
+            <a:r>
+              <a:rPr lang="zh-CN" sz="3200" b="1" dirty="0">
                 <a:solidFill>
                   <a:srgbClr val="1A1A18"/>
                 </a:solidFill>
@@ -16085,7 +16868,9 @@
         <p:txBody>
           <a:bodyPr/>
           <a:lstStyle/>
-          <a:p/>
+          <a:p>
+            <a:endParaRPr/>
+          </a:p>
         </p:txBody>
       </p:sp>
       <p:sp>
@@ -16110,7 +16895,7 @@
           </a:bodyPr>
           <a:lstStyle/>
           <a:p>
-            <a:pPr marL="0" indent="0" lvl="0">
+            <a:pPr marL="0" lvl="0" indent="0">
               <a:lnSpc>
                 <a:spcPct val="100000"/>
               </a:lnSpc>
@@ -16152,7 +16937,7 @@
           </a:bodyPr>
           <a:lstStyle/>
           <a:p>
-            <a:pPr marL="0" indent="0" lvl="0">
+            <a:pPr marL="0" lvl="0" indent="0">
               <a:lnSpc>
                 <a:spcPct val="100000"/>
               </a:lnSpc>
@@ -16194,7 +16979,7 @@
           </a:bodyPr>
           <a:lstStyle/>
           <a:p>
-            <a:pPr marL="0" indent="0" lvl="0" algn="r">
+            <a:pPr marL="0" lvl="0" indent="0" algn="r">
               <a:lnSpc>
                 <a:spcPct val="100000"/>
               </a:lnSpc>
@@ -16216,6 +17001,9 @@
       </p:sp>
     </p:spTree>
   </p:cSld>
+  <p:clrMapOvr>
+    <a:masterClrMapping/>
+  </p:clrMapOvr>
 </p:sld>
 </file>
 
@@ -16258,14 +17046,14 @@
           </a:bodyPr>
           <a:lstStyle/>
           <a:p>
-            <a:pPr marL="0" indent="0" lvl="0">
-              <a:lnSpc>
-                <a:spcPct val="100000"/>
-              </a:lnSpc>
-              <a:buNone/>
-            </a:pPr>
-            <a:r>
-              <a:rPr lang="zh-CN" sz="3200" dirty="0" b="1">
+            <a:pPr marL="0" lvl="0" indent="0">
+              <a:lnSpc>
+                <a:spcPct val="100000"/>
+              </a:lnSpc>
+              <a:buNone/>
+            </a:pPr>
+            <a:r>
+              <a:rPr lang="zh-CN" sz="3200" b="1" dirty="0">
                 <a:solidFill>
                   <a:srgbClr val="1A1A18"/>
                 </a:solidFill>
@@ -16302,7 +17090,9 @@
         <p:txBody>
           <a:bodyPr/>
           <a:lstStyle/>
-          <a:p/>
+          <a:p>
+            <a:endParaRPr/>
+          </a:p>
         </p:txBody>
       </p:sp>
       <p:sp>
@@ -16327,7 +17117,7 @@
           </a:bodyPr>
           <a:lstStyle/>
           <a:p>
-            <a:pPr marL="0" indent="0" lvl="0">
+            <a:pPr marL="0" lvl="0" indent="0">
               <a:lnSpc>
                 <a:spcPct val="100000"/>
               </a:lnSpc>
@@ -16378,7 +17168,7 @@
           </a:bodyPr>
           <a:lstStyle/>
           <a:p>
-            <a:pPr marL="0" indent="0" lvl="0">
+            <a:pPr marL="0" lvl="0" indent="0">
               <a:lnSpc>
                 <a:spcPct val="100000"/>
               </a:lnSpc>
@@ -16397,7 +17187,7 @@
             </a:r>
           </a:p>
           <a:p>
-            <a:pPr marL="0" indent="0" lvl="0">
+            <a:pPr marL="0" lvl="0" indent="0">
               <a:lnSpc>
                 <a:spcPct val="104000"/>
               </a:lnSpc>
@@ -16416,7 +17206,7 @@
             </a:r>
           </a:p>
           <a:p>
-            <a:pPr marL="0" indent="0" lvl="0">
+            <a:pPr marL="0" lvl="0" indent="0">
               <a:lnSpc>
                 <a:spcPct val="104000"/>
               </a:lnSpc>
@@ -16512,7 +17302,7 @@
             </a:r>
           </a:p>
           <a:p>
-            <a:pPr marL="0" indent="0" lvl="0">
+            <a:pPr marL="0" lvl="0" indent="0">
               <a:lnSpc>
                 <a:spcPct val="104000"/>
               </a:lnSpc>
@@ -16641,7 +17431,7 @@
             </a:r>
           </a:p>
           <a:p>
-            <a:pPr marL="0" indent="0" lvl="0">
+            <a:pPr marL="0" lvl="0" indent="0">
               <a:lnSpc>
                 <a:spcPct val="104000"/>
               </a:lnSpc>
@@ -16660,7 +17450,7 @@
             </a:r>
           </a:p>
           <a:p>
-            <a:pPr marL="0" indent="0" lvl="0">
+            <a:pPr marL="0" lvl="0" indent="0">
               <a:lnSpc>
                 <a:spcPct val="104000"/>
               </a:lnSpc>
@@ -16679,7 +17469,7 @@
             </a:r>
           </a:p>
           <a:p>
-            <a:pPr marL="0" indent="0" lvl="0">
+            <a:pPr marL="0" lvl="0" indent="0">
               <a:lnSpc>
                 <a:spcPct val="104000"/>
               </a:lnSpc>
@@ -16709,7 +17499,7 @@
             </a:r>
           </a:p>
           <a:p>
-            <a:pPr marL="0" indent="0" lvl="0">
+            <a:pPr marL="0" lvl="0" indent="0">
               <a:lnSpc>
                 <a:spcPct val="104000"/>
               </a:lnSpc>
@@ -16739,7 +17529,7 @@
             </a:r>
           </a:p>
           <a:p>
-            <a:pPr marL="0" indent="0" lvl="0">
+            <a:pPr marL="0" lvl="0" indent="0">
               <a:lnSpc>
                 <a:spcPct val="104000"/>
               </a:lnSpc>
@@ -16769,7 +17559,7 @@
             </a:r>
           </a:p>
           <a:p>
-            <a:pPr marL="0" indent="0" lvl="0">
+            <a:pPr marL="0" lvl="0" indent="0">
               <a:lnSpc>
                 <a:spcPct val="104000"/>
               </a:lnSpc>
@@ -16876,7 +17666,7 @@
             </a:r>
           </a:p>
           <a:p>
-            <a:pPr marL="0" indent="0" lvl="0">
+            <a:pPr marL="0" lvl="0" indent="0">
               <a:lnSpc>
                 <a:spcPct val="104000"/>
               </a:lnSpc>
@@ -16917,7 +17707,7 @@
             </a:r>
           </a:p>
           <a:p>
-            <a:pPr marL="0" indent="0" lvl="0">
+            <a:pPr marL="0" lvl="0" indent="0">
               <a:lnSpc>
                 <a:spcPct val="104000"/>
               </a:lnSpc>
@@ -16947,7 +17737,7 @@
             </a:r>
           </a:p>
           <a:p>
-            <a:pPr marL="0" indent="0" lvl="0">
+            <a:pPr marL="0" lvl="0" indent="0">
               <a:lnSpc>
                 <a:spcPct val="104000"/>
               </a:lnSpc>
@@ -16989,7 +17779,7 @@
           </a:bodyPr>
           <a:lstStyle/>
           <a:p>
-            <a:pPr marL="0" indent="0" lvl="0">
+            <a:pPr marL="0" lvl="0" indent="0">
               <a:lnSpc>
                 <a:spcPct val="100000"/>
               </a:lnSpc>
@@ -17031,7 +17821,7 @@
           </a:bodyPr>
           <a:lstStyle/>
           <a:p>
-            <a:pPr marL="0" indent="0" lvl="0" algn="r">
+            <a:pPr marL="0" lvl="0" indent="0" algn="r">
               <a:lnSpc>
                 <a:spcPct val="100000"/>
               </a:lnSpc>
@@ -17053,6 +17843,9 @@
       </p:sp>
     </p:spTree>
   </p:cSld>
+  <p:clrMapOvr>
+    <a:masterClrMapping/>
+  </p:clrMapOvr>
 </p:sld>
 </file>
 
@@ -17095,14 +17888,14 @@
           </a:bodyPr>
           <a:lstStyle/>
           <a:p>
-            <a:pPr marL="0" indent="0" lvl="0">
-              <a:lnSpc>
-                <a:spcPct val="100000"/>
-              </a:lnSpc>
-              <a:buNone/>
-            </a:pPr>
-            <a:r>
-              <a:rPr lang="zh-CN" sz="3200" dirty="0" b="1">
+            <a:pPr marL="0" lvl="0" indent="0">
+              <a:lnSpc>
+                <a:spcPct val="100000"/>
+              </a:lnSpc>
+              <a:buNone/>
+            </a:pPr>
+            <a:r>
+              <a:rPr lang="zh-CN" sz="3200" b="1" dirty="0">
                 <a:solidFill>
                   <a:srgbClr val="1A1A18"/>
                 </a:solidFill>
@@ -17139,7 +17932,9 @@
         <p:txBody>
           <a:bodyPr/>
           <a:lstStyle/>
-          <a:p/>
+          <a:p>
+            <a:endParaRPr/>
+          </a:p>
         </p:txBody>
       </p:sp>
       <p:sp>
@@ -17164,7 +17959,7 @@
           </a:bodyPr>
           <a:lstStyle/>
           <a:p>
-            <a:pPr marL="270000" indent="-230000" lvl="0">
+            <a:pPr marL="270000" lvl="0" indent="-230000">
               <a:lnSpc>
                 <a:spcPct val="100000"/>
               </a:lnSpc>
@@ -17189,7 +17984,7 @@
               <a:t>稳定性在</a:t>
             </a:r>
             <a:r>
-              <a:rPr lang="zh-CN" sz="2340" dirty="0" b="1">
+              <a:rPr lang="zh-CN" sz="2340" b="1" dirty="0">
                 <a:solidFill>
                   <a:srgbClr val="8A4B2A"/>
                 </a:solidFill>
@@ -17212,7 +18007,7 @@
             </a:r>
           </a:p>
           <a:p>
-            <a:pPr marL="270000" indent="-230000" lvl="0">
+            <a:pPr marL="270000" lvl="0" indent="-230000">
               <a:lnSpc>
                 <a:spcPct val="100000"/>
               </a:lnSpc>
@@ -17237,7 +18032,7 @@
               <a:t>插入排序对近乎有序的输入是 </a:t>
             </a:r>
             <a:r>
-              <a:rPr lang="zh-CN" sz="2340" dirty="0" i="1">
+              <a:rPr lang="zh-CN" sz="2340" i="1" dirty="0">
                 <a:solidFill>
                   <a:srgbClr val="1A1A18"/>
                 </a:solidFill>
@@ -17260,7 +18055,7 @@
             </a:r>
           </a:p>
           <a:p>
-            <a:pPr marL="270000" indent="-230000" lvl="0">
+            <a:pPr marL="270000" lvl="0" indent="-230000">
               <a:lnSpc>
                 <a:spcPct val="100000"/>
               </a:lnSpc>
@@ -17285,7 +18080,7 @@
               <a:t>堆排序靠第 5 章的堆；</a:t>
             </a:r>
             <a:r>
-              <a:rPr lang="zh-CN" sz="2340" dirty="0" b="1">
+              <a:rPr lang="zh-CN" sz="2340" b="1" dirty="0">
                 <a:solidFill>
                   <a:srgbClr val="8A4B2A"/>
                 </a:solidFill>
@@ -17296,7 +18091,7 @@
               <a:t>建堆 </a:t>
             </a:r>
             <a:r>
-              <a:rPr lang="zh-CN" sz="2340" dirty="0" b="1" i="1">
+              <a:rPr lang="zh-CN" sz="2340" b="1" i="1" dirty="0">
                 <a:solidFill>
                   <a:srgbClr val="8A4B2A"/>
                 </a:solidFill>
@@ -17318,7 +18113,7 @@
               <a:t>，总代价里的 </a:t>
             </a:r>
             <a:r>
-              <a:rPr lang="zh-CN" sz="2340" dirty="0" i="1">
+              <a:rPr lang="zh-CN" sz="2340" i="1" dirty="0">
                 <a:solidFill>
                   <a:srgbClr val="1A1A18"/>
                 </a:solidFill>
@@ -17341,7 +18136,7 @@
             </a:r>
           </a:p>
           <a:p>
-            <a:pPr marL="270000" indent="-230000" lvl="0">
+            <a:pPr marL="270000" lvl="0" indent="-230000">
               <a:lnSpc>
                 <a:spcPct val="100000"/>
               </a:lnSpc>
@@ -17366,7 +18161,7 @@
               <a:t>快排的最坏是 </a:t>
             </a:r>
             <a:r>
-              <a:rPr lang="zh-CN" sz="2340" dirty="0" i="1">
+              <a:rPr lang="zh-CN" sz="2340" i="1" dirty="0">
                 <a:solidFill>
                   <a:srgbClr val="1A1A18"/>
                 </a:solidFill>
@@ -17388,7 +18183,7 @@
               <a:t>，靠</a:t>
             </a:r>
             <a:r>
-              <a:rPr lang="zh-CN" sz="2340" dirty="0" b="1">
+              <a:rPr lang="zh-CN" sz="2340" b="1" dirty="0">
                 <a:solidFill>
                   <a:srgbClr val="8A4B2A"/>
                 </a:solidFill>
@@ -17410,7 +18205,7 @@
               <a:t>和</a:t>
             </a:r>
             <a:r>
-              <a:rPr lang="zh-CN" sz="2340" dirty="0" b="1">
+              <a:rPr lang="zh-CN" sz="2340" b="1" dirty="0">
                 <a:solidFill>
                   <a:srgbClr val="8A4B2A"/>
                 </a:solidFill>
@@ -17433,7 +18228,7 @@
             </a:r>
           </a:p>
           <a:p>
-            <a:pPr marL="270000" indent="-230000" lvl="0">
+            <a:pPr marL="270000" lvl="0" indent="-230000">
               <a:lnSpc>
                 <a:spcPct val="100000"/>
               </a:lnSpc>
@@ -17458,7 +18253,7 @@
               <a:t>归并稳定、最坏有保证，代价是 </a:t>
             </a:r>
             <a:r>
-              <a:rPr lang="zh-CN" sz="2340" dirty="0" i="1">
+              <a:rPr lang="zh-CN" sz="2340" i="1" dirty="0">
                 <a:solidFill>
                   <a:srgbClr val="1A1A18"/>
                 </a:solidFill>
@@ -17481,7 +18276,7 @@
             </a:r>
           </a:p>
           <a:p>
-            <a:pPr marL="270000" indent="-230000" lvl="0">
+            <a:pPr marL="270000" lvl="0" indent="-230000">
               <a:lnSpc>
                 <a:spcPct val="100000"/>
               </a:lnSpc>
@@ -17506,7 +18301,7 @@
               <a:t>比较模型的下界是 </a:t>
             </a:r>
             <a:r>
-              <a:rPr lang="zh-CN" sz="2340" dirty="0" i="1">
+              <a:rPr lang="zh-CN" sz="2340" i="1" dirty="0">
                 <a:solidFill>
                   <a:srgbClr val="1A1A18"/>
                 </a:solidFill>
@@ -17528,7 +18323,7 @@
               <a:t>；要更快只能</a:t>
             </a:r>
             <a:r>
-              <a:rPr lang="zh-CN" sz="2340" dirty="0" b="1">
+              <a:rPr lang="zh-CN" sz="2340" b="1" dirty="0">
                 <a:solidFill>
                   <a:srgbClr val="8A4B2A"/>
                 </a:solidFill>
@@ -17540,7 +18335,7 @@
             </a:r>
           </a:p>
           <a:p>
-            <a:pPr marL="270000" indent="-230000" lvl="0">
+            <a:pPr marL="270000" lvl="0" indent="-230000">
               <a:lnSpc>
                 <a:spcPct val="100000"/>
               </a:lnSpc>
@@ -17565,7 +18360,7 @@
               <a:t>基数排序必须</a:t>
             </a:r>
             <a:r>
-              <a:rPr lang="zh-CN" sz="2340" dirty="0" b="1">
+              <a:rPr lang="zh-CN" sz="2340" b="1" dirty="0">
                 <a:solidFill>
                   <a:srgbClr val="8A4B2A"/>
                 </a:solidFill>
@@ -17611,7 +18406,7 @@
           </a:bodyPr>
           <a:lstStyle/>
           <a:p>
-            <a:pPr marL="0" indent="0" lvl="0">
+            <a:pPr marL="0" lvl="0" indent="0">
               <a:lnSpc>
                 <a:spcPct val="100000"/>
               </a:lnSpc>
@@ -17653,7 +18448,7 @@
           </a:bodyPr>
           <a:lstStyle/>
           <a:p>
-            <a:pPr marL="0" indent="0" lvl="0" algn="r">
+            <a:pPr marL="0" lvl="0" indent="0" algn="r">
               <a:lnSpc>
                 <a:spcPct val="100000"/>
               </a:lnSpc>
@@ -17675,6 +18470,9 @@
       </p:sp>
     </p:spTree>
   </p:cSld>
+  <p:clrMapOvr>
+    <a:masterClrMapping/>
+  </p:clrMapOvr>
 </p:sld>
 </file>
 
@@ -17717,14 +18515,14 @@
           </a:bodyPr>
           <a:lstStyle/>
           <a:p>
-            <a:pPr marL="0" indent="0" lvl="0">
-              <a:lnSpc>
-                <a:spcPct val="100000"/>
-              </a:lnSpc>
-              <a:buNone/>
-            </a:pPr>
-            <a:r>
-              <a:rPr lang="zh-CN" sz="3200" dirty="0" b="1">
+            <a:pPr marL="0" lvl="0" indent="0">
+              <a:lnSpc>
+                <a:spcPct val="100000"/>
+              </a:lnSpc>
+              <a:buNone/>
+            </a:pPr>
+            <a:r>
+              <a:rPr lang="zh-CN" sz="3200" b="1" dirty="0">
                 <a:solidFill>
                   <a:srgbClr val="1A1A18"/>
                 </a:solidFill>
@@ -17761,7 +18559,9 @@
         <p:txBody>
           <a:bodyPr/>
           <a:lstStyle/>
-          <a:p/>
+          <a:p>
+            <a:endParaRPr/>
+          </a:p>
         </p:txBody>
       </p:sp>
       <p:sp>
@@ -17795,7 +18595,7 @@
           </a:bodyPr>
           <a:lstStyle/>
           <a:p>
-            <a:pPr marL="0" indent="0" lvl="0">
+            <a:pPr marL="0" lvl="0" indent="0">
               <a:lnSpc>
                 <a:spcPct val="104000"/>
               </a:lnSpc>
@@ -17837,7 +18637,7 @@
           </a:bodyPr>
           <a:lstStyle/>
           <a:p>
-            <a:pPr marL="270000" indent="-230000" lvl="0">
+            <a:pPr marL="270000" lvl="0" indent="-230000">
               <a:lnSpc>
                 <a:spcPct val="100000"/>
               </a:lnSpc>
@@ -17863,7 +18663,7 @@
             </a:r>
           </a:p>
           <a:p>
-            <a:pPr marL="270000" indent="-230000" lvl="0">
+            <a:pPr marL="270000" lvl="0" indent="-230000">
               <a:lnSpc>
                 <a:spcPct val="100000"/>
               </a:lnSpc>
@@ -17888,7 +18688,7 @@
               <a:t>把基数排序改成从</a:t>
             </a:r>
             <a:r>
-              <a:rPr lang="zh-CN" sz="2340" dirty="0" b="1">
+              <a:rPr lang="zh-CN" sz="2340" b="1" dirty="0">
                 <a:solidFill>
                   <a:srgbClr val="8A4B2A"/>
                 </a:solidFill>
@@ -17911,7 +18711,7 @@
             </a:r>
           </a:p>
           <a:p>
-            <a:pPr marL="270000" indent="-230000" lvl="0">
+            <a:pPr marL="270000" lvl="0" indent="-230000">
               <a:lnSpc>
                 <a:spcPct val="100000"/>
               </a:lnSpc>
@@ -17962,7 +18762,9 @@
         <p:txBody>
           <a:bodyPr/>
           <a:lstStyle/>
-          <a:p/>
+          <a:p>
+            <a:endParaRPr/>
+          </a:p>
         </p:txBody>
       </p:sp>
       <p:sp>
@@ -17987,7 +18789,7 @@
           </a:bodyPr>
           <a:lstStyle/>
           <a:p>
-            <a:pPr marL="0" indent="0" lvl="0">
+            <a:pPr marL="0" lvl="0" indent="0">
               <a:lnSpc>
                 <a:spcPct val="100000"/>
               </a:lnSpc>
@@ -18005,7 +18807,7 @@
               <a:t>测试里所有排序算法</a:t>
             </a:r>
             <a:r>
-              <a:rPr lang="zh-CN" sz="2145" dirty="0" b="1">
+              <a:rPr lang="zh-CN" sz="2145" b="1" dirty="0">
                 <a:solidFill>
                   <a:srgbClr val="8A4B2A"/>
                 </a:solidFill>
@@ -18051,7 +18853,7 @@
           </a:bodyPr>
           <a:lstStyle/>
           <a:p>
-            <a:pPr marL="0" indent="0" lvl="0">
+            <a:pPr marL="0" lvl="0" indent="0">
               <a:lnSpc>
                 <a:spcPct val="100000"/>
               </a:lnSpc>
@@ -18093,7 +18895,7 @@
           </a:bodyPr>
           <a:lstStyle/>
           <a:p>
-            <a:pPr marL="0" indent="0" lvl="0" algn="r">
+            <a:pPr marL="0" lvl="0" indent="0" algn="r">
               <a:lnSpc>
                 <a:spcPct val="100000"/>
               </a:lnSpc>
@@ -18115,6 +18917,9 @@
       </p:sp>
     </p:spTree>
   </p:cSld>
+  <p:clrMapOvr>
+    <a:masterClrMapping/>
+  </p:clrMapOvr>
 </p:sld>
 </file>
 
@@ -18157,14 +18962,14 @@
           </a:bodyPr>
           <a:lstStyle/>
           <a:p>
-            <a:pPr marL="0" indent="0" lvl="0">
-              <a:lnSpc>
-                <a:spcPct val="100000"/>
-              </a:lnSpc>
-              <a:buNone/>
-            </a:pPr>
-            <a:r>
-              <a:rPr lang="zh-CN" sz="3200" dirty="0" b="1">
+            <a:pPr marL="0" lvl="0" indent="0">
+              <a:lnSpc>
+                <a:spcPct val="100000"/>
+              </a:lnSpc>
+              <a:buNone/>
+            </a:pPr>
+            <a:r>
+              <a:rPr lang="zh-CN" sz="3200" b="1" dirty="0">
                 <a:solidFill>
                   <a:srgbClr val="1A1A18"/>
                 </a:solidFill>
@@ -18201,7 +19006,9 @@
         <p:txBody>
           <a:bodyPr/>
           <a:lstStyle/>
-          <a:p/>
+          <a:p>
+            <a:endParaRPr/>
+          </a:p>
         </p:txBody>
       </p:sp>
       <p:sp>
@@ -18235,7 +19042,7 @@
           </a:bodyPr>
           <a:lstStyle/>
           <a:p>
-            <a:pPr marL="0" indent="0" lvl="0">
+            <a:pPr marL="0" lvl="0" indent="0">
               <a:lnSpc>
                 <a:spcPct val="100000"/>
               </a:lnSpc>
@@ -18254,7 +19061,7 @@
             </a:r>
           </a:p>
           <a:p>
-            <a:pPr marL="0" indent="0" lvl="0">
+            <a:pPr marL="0" lvl="0" indent="0">
               <a:lnSpc>
                 <a:spcPct val="104000"/>
               </a:lnSpc>
@@ -18273,7 +19080,7 @@
             </a:r>
           </a:p>
           <a:p>
-            <a:pPr marL="0" indent="0" lvl="0">
+            <a:pPr marL="0" lvl="0" indent="0">
               <a:lnSpc>
                 <a:spcPct val="104000"/>
               </a:lnSpc>
@@ -18347,7 +19154,7 @@
             </a:r>
           </a:p>
           <a:p>
-            <a:pPr marL="0" indent="0" lvl="0">
+            <a:pPr marL="0" lvl="0" indent="0">
               <a:lnSpc>
                 <a:spcPct val="104000"/>
               </a:lnSpc>
@@ -18432,7 +19239,7 @@
             </a:r>
           </a:p>
           <a:p>
-            <a:pPr marL="0" indent="0" lvl="0">
+            <a:pPr marL="0" lvl="0" indent="0">
               <a:lnSpc>
                 <a:spcPct val="104000"/>
               </a:lnSpc>
@@ -18495,7 +19302,7 @@
             </a:r>
           </a:p>
           <a:p>
-            <a:pPr marL="0" indent="0" lvl="0">
+            <a:pPr marL="0" lvl="0" indent="0">
               <a:lnSpc>
                 <a:spcPct val="104000"/>
               </a:lnSpc>
@@ -18536,7 +19343,7 @@
             </a:r>
           </a:p>
           <a:p>
-            <a:pPr marL="0" indent="0" lvl="0">
+            <a:pPr marL="0" lvl="0" indent="0">
               <a:lnSpc>
                 <a:spcPct val="104000"/>
               </a:lnSpc>
@@ -18621,7 +19428,7 @@
             </a:r>
           </a:p>
           <a:p>
-            <a:pPr marL="0" indent="0" lvl="0">
+            <a:pPr marL="0" lvl="0" indent="0">
               <a:lnSpc>
                 <a:spcPct val="104000"/>
               </a:lnSpc>
@@ -18662,7 +19469,7 @@
             </a:r>
           </a:p>
           <a:p>
-            <a:pPr marL="0" indent="0" lvl="0">
+            <a:pPr marL="0" lvl="0" indent="0">
               <a:lnSpc>
                 <a:spcPct val="104000"/>
               </a:lnSpc>
@@ -18681,7 +19488,7 @@
             </a:r>
           </a:p>
           <a:p>
-            <a:pPr marL="0" indent="0" lvl="0">
+            <a:pPr marL="0" lvl="0" indent="0">
               <a:lnSpc>
                 <a:spcPct val="104000"/>
               </a:lnSpc>
@@ -18700,7 +19507,7 @@
             </a:r>
           </a:p>
           <a:p>
-            <a:pPr marL="0" indent="0" lvl="0">
+            <a:pPr marL="0" lvl="0" indent="0">
               <a:lnSpc>
                 <a:spcPct val="104000"/>
               </a:lnSpc>
@@ -18719,7 +19526,7 @@
             </a:r>
           </a:p>
           <a:p>
-            <a:pPr marL="0" indent="0" lvl="0">
+            <a:pPr marL="0" lvl="0" indent="0">
               <a:lnSpc>
                 <a:spcPct val="104000"/>
               </a:lnSpc>
@@ -18738,7 +19545,7 @@
             </a:r>
           </a:p>
           <a:p>
-            <a:pPr marL="0" indent="0" lvl="0">
+            <a:pPr marL="0" lvl="0" indent="0">
               <a:lnSpc>
                 <a:spcPct val="104000"/>
               </a:lnSpc>
@@ -18780,7 +19587,7 @@
           </a:bodyPr>
           <a:lstStyle/>
           <a:p>
-            <a:pPr marL="0" indent="0" lvl="0">
+            <a:pPr marL="0" lvl="0" indent="0">
               <a:lnSpc>
                 <a:spcPct val="100000"/>
               </a:lnSpc>
@@ -18822,7 +19629,7 @@
           </a:bodyPr>
           <a:lstStyle/>
           <a:p>
-            <a:pPr marL="0" indent="0" lvl="0" algn="r">
+            <a:pPr marL="0" lvl="0" indent="0" algn="r">
               <a:lnSpc>
                 <a:spcPct val="100000"/>
               </a:lnSpc>
@@ -18844,6 +19651,9 @@
       </p:sp>
     </p:spTree>
   </p:cSld>
+  <p:clrMapOvr>
+    <a:masterClrMapping/>
+  </p:clrMapOvr>
 </p:sld>
 </file>
 
@@ -18886,14 +19696,14 @@
           </a:bodyPr>
           <a:lstStyle/>
           <a:p>
-            <a:pPr marL="0" indent="0" lvl="0">
-              <a:lnSpc>
-                <a:spcPct val="100000"/>
-              </a:lnSpc>
-              <a:buNone/>
-            </a:pPr>
-            <a:r>
-              <a:rPr lang="zh-CN" sz="3200" dirty="0" b="1">
+            <a:pPr marL="0" lvl="0" indent="0">
+              <a:lnSpc>
+                <a:spcPct val="100000"/>
+              </a:lnSpc>
+              <a:buNone/>
+            </a:pPr>
+            <a:r>
+              <a:rPr lang="zh-CN" sz="3200" b="1" dirty="0">
                 <a:solidFill>
                   <a:srgbClr val="1A1A18"/>
                 </a:solidFill>
@@ -18930,7 +19740,9 @@
         <p:txBody>
           <a:bodyPr/>
           <a:lstStyle/>
-          <a:p/>
+          <a:p>
+            <a:endParaRPr/>
+          </a:p>
         </p:txBody>
       </p:sp>
       <p:sp>
@@ -18955,7 +19767,7 @@
           </a:bodyPr>
           <a:lstStyle/>
           <a:p>
-            <a:pPr marL="270000" indent="-230000" lvl="0">
+            <a:pPr marL="270000" lvl="0" indent="-230000">
               <a:lnSpc>
                 <a:spcPct val="100000"/>
               </a:lnSpc>
@@ -18969,7 +19781,7 @@
               <a:buChar char="●"/>
             </a:pPr>
             <a:r>
-              <a:rPr lang="zh-CN" sz="2340" dirty="0" b="1">
+              <a:rPr lang="zh-CN" sz="2340" b="1" dirty="0">
                 <a:solidFill>
                   <a:srgbClr val="8A4B2A"/>
                 </a:solidFill>
@@ -18992,7 +19804,7 @@
             </a:r>
           </a:p>
           <a:p>
-            <a:pPr marL="270000" indent="-230000" lvl="0">
+            <a:pPr marL="270000" lvl="0" indent="-230000">
               <a:lnSpc>
                 <a:spcPct val="100000"/>
               </a:lnSpc>
@@ -19006,7 +19818,7 @@
               <a:buChar char="●"/>
             </a:pPr>
             <a:r>
-              <a:rPr lang="zh-CN" sz="2340" dirty="0" b="1">
+              <a:rPr lang="zh-CN" sz="2340" b="1" dirty="0">
                 <a:solidFill>
                   <a:srgbClr val="8A4B2A"/>
                 </a:solidFill>
@@ -19028,7 +19840,7 @@
               <a:t>：</a:t>
             </a:r>
             <a:r>
-              <a:rPr lang="zh-CN" sz="2340" dirty="0" i="1">
+              <a:rPr lang="zh-CN" sz="2340" i="1" dirty="0">
                 <a:solidFill>
                   <a:srgbClr val="1A1A18"/>
                 </a:solidFill>
@@ -19074,7 +19886,7 @@
           </a:bodyPr>
           <a:lstStyle/>
           <a:p>
-            <a:pPr marL="0" indent="0" lvl="0">
+            <a:pPr marL="0" lvl="0" indent="0">
               <a:lnSpc>
                 <a:spcPct val="100000"/>
               </a:lnSpc>
@@ -19092,7 +19904,7 @@
               <a:t>所以它常被用作</a:t>
             </a:r>
             <a:r>
-              <a:rPr lang="zh-CN" sz="2340" dirty="0" b="1">
+              <a:rPr lang="zh-CN" sz="2340" b="1" dirty="0">
                 <a:solidFill>
                   <a:srgbClr val="8A4B2A"/>
                 </a:solidFill>
@@ -19138,14 +19950,14 @@
           </a:bodyPr>
           <a:lstStyle/>
           <a:p>
-            <a:pPr marL="0" indent="0" lvl="0">
-              <a:lnSpc>
-                <a:spcPct val="100000"/>
-              </a:lnSpc>
-              <a:buNone/>
-            </a:pPr>
-            <a:r>
-              <a:rPr lang="zh-CN" sz="2340" dirty="0" b="1">
+            <a:pPr marL="0" lvl="0" indent="0">
+              <a:lnSpc>
+                <a:spcPct val="100000"/>
+              </a:lnSpc>
+              <a:buNone/>
+            </a:pPr>
+            <a:r>
+              <a:rPr lang="zh-CN" sz="2340" b="1" dirty="0">
                 <a:solidFill>
                   <a:srgbClr val="8A4B2A"/>
                 </a:solidFill>
@@ -19156,7 +19968,7 @@
               <a:t>n 小的时候 </a:t>
             </a:r>
             <a:r>
-              <a:rPr lang="zh-CN" sz="2340" dirty="0" b="1" i="1">
+              <a:rPr lang="zh-CN" sz="2340" b="1" i="1" dirty="0">
                 <a:solidFill>
                   <a:srgbClr val="8A4B2A"/>
                 </a:solidFill>
@@ -19167,7 +19979,7 @@
               <a:t>O(n²)</a:t>
             </a:r>
             <a:r>
-              <a:rPr lang="zh-CN" sz="2340" dirty="0" b="1">
+              <a:rPr lang="zh-CN" sz="2340" b="1" dirty="0">
                 <a:solidFill>
                   <a:srgbClr val="8A4B2A"/>
                 </a:solidFill>
@@ -19178,7 +19990,7 @@
               <a:t> 完全可能比 </a:t>
             </a:r>
             <a:r>
-              <a:rPr lang="zh-CN" sz="2340" dirty="0" b="1" i="1">
+              <a:rPr lang="zh-CN" sz="2340" b="1" i="1" dirty="0">
                 <a:solidFill>
                   <a:srgbClr val="8A4B2A"/>
                 </a:solidFill>
@@ -19189,7 +20001,7 @@
               <a:t>O(n log n)</a:t>
             </a:r>
             <a:r>
-              <a:rPr lang="zh-CN" sz="2340" dirty="0" b="1">
+              <a:rPr lang="zh-CN" sz="2340" b="1" dirty="0">
                 <a:solidFill>
                   <a:srgbClr val="8A4B2A"/>
                 </a:solidFill>
@@ -19235,7 +20047,7 @@
           </a:bodyPr>
           <a:lstStyle/>
           <a:p>
-            <a:pPr marL="0" indent="0" lvl="0">
+            <a:pPr marL="0" lvl="0" indent="0">
               <a:lnSpc>
                 <a:spcPct val="100000"/>
               </a:lnSpc>
@@ -19277,7 +20089,7 @@
           </a:bodyPr>
           <a:lstStyle/>
           <a:p>
-            <a:pPr marL="0" indent="0" lvl="0" algn="r">
+            <a:pPr marL="0" lvl="0" indent="0" algn="r">
               <a:lnSpc>
                 <a:spcPct val="100000"/>
               </a:lnSpc>
@@ -19299,6 +20111,9 @@
       </p:sp>
     </p:spTree>
   </p:cSld>
+  <p:clrMapOvr>
+    <a:masterClrMapping/>
+  </p:clrMapOvr>
 </p:sld>
 </file>
 
@@ -19341,14 +20156,14 @@
           </a:bodyPr>
           <a:lstStyle/>
           <a:p>
-            <a:pPr marL="0" indent="0" lvl="0">
-              <a:lnSpc>
-                <a:spcPct val="100000"/>
-              </a:lnSpc>
-              <a:buNone/>
-            </a:pPr>
-            <a:r>
-              <a:rPr lang="zh-CN" sz="3200" dirty="0" b="1">
+            <a:pPr marL="0" lvl="0" indent="0">
+              <a:lnSpc>
+                <a:spcPct val="100000"/>
+              </a:lnSpc>
+              <a:buNone/>
+            </a:pPr>
+            <a:r>
+              <a:rPr lang="zh-CN" sz="3200" b="1" dirty="0">
                 <a:solidFill>
                   <a:srgbClr val="1A1A18"/>
                 </a:solidFill>
@@ -19385,7 +20200,9 @@
         <p:txBody>
           <a:bodyPr/>
           <a:lstStyle/>
-          <a:p/>
+          <a:p>
+            <a:endParaRPr/>
+          </a:p>
         </p:txBody>
       </p:sp>
       <p:pic>
@@ -19397,7 +20214,7 @@
           <p:nvPr/>
         </p:nvPicPr>
         <p:blipFill>
-          <a:blip r:embed="rId100"/>
+          <a:blip r:embed="rId2"/>
           <a:stretch>
             <a:fillRect/>
           </a:stretch>
@@ -19434,7 +20251,7 @@
           </a:bodyPr>
           <a:lstStyle/>
           <a:p>
-            <a:pPr marL="0" indent="0" lvl="0" algn="ctr">
+            <a:pPr marL="0" lvl="0" indent="0" algn="ctr">
               <a:lnSpc>
                 <a:spcPct val="100000"/>
               </a:lnSpc>
@@ -19476,7 +20293,7 @@
           </a:bodyPr>
           <a:lstStyle/>
           <a:p>
-            <a:pPr marL="0" indent="0" lvl="0">
+            <a:pPr marL="0" lvl="0" indent="0">
               <a:lnSpc>
                 <a:spcPct val="100000"/>
               </a:lnSpc>
@@ -19494,7 +20311,7 @@
               <a:t>先按</a:t>
             </a:r>
             <a:r>
-              <a:rPr lang="zh-CN" sz="1368" dirty="0" b="1">
+              <a:rPr lang="zh-CN" sz="1368" b="1" dirty="0">
                 <a:solidFill>
                   <a:srgbClr val="8A4B2A"/>
                 </a:solidFill>
@@ -19540,14 +20357,14 @@
           </a:bodyPr>
           <a:lstStyle/>
           <a:p>
-            <a:pPr marL="0" indent="0" lvl="0">
-              <a:lnSpc>
-                <a:spcPct val="100000"/>
-              </a:lnSpc>
-              <a:buNone/>
-            </a:pPr>
-            <a:r>
-              <a:rPr lang="zh-CN" sz="1368" dirty="0" b="1">
+            <a:pPr marL="0" lvl="0" indent="0">
+              <a:lnSpc>
+                <a:spcPct val="100000"/>
+              </a:lnSpc>
+              <a:buNone/>
+            </a:pPr>
+            <a:r>
+              <a:rPr lang="zh-CN" sz="1368" b="1" dirty="0">
                 <a:solidFill>
                   <a:srgbClr val="8A4B2A"/>
                 </a:solidFill>
@@ -19593,7 +20410,7 @@
           </a:bodyPr>
           <a:lstStyle/>
           <a:p>
-            <a:pPr marL="0" indent="0" lvl="0">
+            <a:pPr marL="0" lvl="0" indent="0">
               <a:lnSpc>
                 <a:spcPct val="100000"/>
               </a:lnSpc>
@@ -19611,7 +20428,7 @@
               <a:t>代价与增量序列有关，「每次除以 2」约 </a:t>
             </a:r>
             <a:r>
-              <a:rPr lang="zh-CN" sz="1368" dirty="0" i="1">
+              <a:rPr lang="zh-CN" sz="1368" i="1" dirty="0">
                 <a:solidFill>
                   <a:srgbClr val="1A1A18"/>
                 </a:solidFill>
@@ -19633,7 +20450,7 @@
               <a:t>。</a:t>
             </a:r>
             <a:r>
-              <a:rPr lang="zh-CN" sz="1368" dirty="0" b="1">
+              <a:rPr lang="zh-CN" sz="1368" b="1" dirty="0">
                 <a:solidFill>
                   <a:srgbClr val="8A4B2A"/>
                 </a:solidFill>
@@ -19679,7 +20496,7 @@
           </a:bodyPr>
           <a:lstStyle/>
           <a:p>
-            <a:pPr marL="0" indent="0" lvl="0">
+            <a:pPr marL="0" lvl="0" indent="0">
               <a:lnSpc>
                 <a:spcPct val="100000"/>
               </a:lnSpc>
@@ -19721,7 +20538,7 @@
           </a:bodyPr>
           <a:lstStyle/>
           <a:p>
-            <a:pPr marL="0" indent="0" lvl="0" algn="r">
+            <a:pPr marL="0" lvl="0" indent="0" algn="r">
               <a:lnSpc>
                 <a:spcPct val="100000"/>
               </a:lnSpc>
@@ -19743,6 +20560,9 @@
       </p:sp>
     </p:spTree>
   </p:cSld>
+  <p:clrMapOvr>
+    <a:masterClrMapping/>
+  </p:clrMapOvr>
 </p:sld>
 </file>
 
@@ -19785,14 +20605,14 @@
           </a:bodyPr>
           <a:lstStyle/>
           <a:p>
-            <a:pPr marL="0" indent="0" lvl="0">
-              <a:lnSpc>
-                <a:spcPct val="100000"/>
-              </a:lnSpc>
-              <a:buNone/>
-            </a:pPr>
-            <a:r>
-              <a:rPr lang="zh-CN" sz="3200" dirty="0" b="1">
+            <a:pPr marL="0" lvl="0" indent="0">
+              <a:lnSpc>
+                <a:spcPct val="100000"/>
+              </a:lnSpc>
+              <a:buNone/>
+            </a:pPr>
+            <a:r>
+              <a:rPr lang="zh-CN" sz="3200" b="1" dirty="0">
                 <a:solidFill>
                   <a:srgbClr val="1A1A18"/>
                 </a:solidFill>
@@ -19829,7 +20649,9 @@
         <p:txBody>
           <a:bodyPr/>
           <a:lstStyle/>
-          <a:p/>
+          <a:p>
+            <a:endParaRPr/>
+          </a:p>
         </p:txBody>
       </p:sp>
       <p:sp>
@@ -19854,7 +20676,7 @@
           </a:bodyPr>
           <a:lstStyle/>
           <a:p>
-            <a:pPr marL="0" indent="0" lvl="0">
+            <a:pPr marL="0" lvl="0" indent="0">
               <a:lnSpc>
                 <a:spcPct val="100000"/>
               </a:lnSpc>
@@ -19872,7 +20694,7 @@
               <a:t>第 </a:t>
             </a:r>
             <a:r>
-              <a:rPr lang="zh-CN" sz="2340" dirty="0" i="1">
+              <a:rPr lang="zh-CN" sz="2340" i="1" dirty="0">
                 <a:solidFill>
                   <a:srgbClr val="1A1A18"/>
                 </a:solidFill>
@@ -19916,7 +20738,7 @@
               <a:t> 扫出最小值，与位置 </a:t>
             </a:r>
             <a:r>
-              <a:rPr lang="zh-CN" sz="2340" dirty="0" i="1">
+              <a:rPr lang="zh-CN" sz="2340" i="1" dirty="0">
                 <a:solidFill>
                   <a:srgbClr val="1A1A18"/>
                 </a:solidFill>
@@ -19971,7 +20793,7 @@
           </a:bodyPr>
           <a:lstStyle/>
           <a:p>
-            <a:pPr marL="0" indent="0" lvl="0">
+            <a:pPr marL="0" lvl="0" indent="0">
               <a:lnSpc>
                 <a:spcPct val="104000"/>
               </a:lnSpc>
@@ -19990,7 +20812,7 @@
             </a:r>
           </a:p>
           <a:p>
-            <a:pPr marL="0" indent="0" lvl="0">
+            <a:pPr marL="0" lvl="0" indent="0">
               <a:lnSpc>
                 <a:spcPct val="104000"/>
               </a:lnSpc>
@@ -20009,7 +20831,7 @@
             </a:r>
           </a:p>
           <a:p>
-            <a:pPr marL="0" indent="0" lvl="0">
+            <a:pPr marL="0" lvl="0" indent="0">
               <a:lnSpc>
                 <a:spcPct val="104000"/>
               </a:lnSpc>
@@ -20028,7 +20850,7 @@
             </a:r>
           </a:p>
           <a:p>
-            <a:pPr marL="0" indent="0" lvl="0">
+            <a:pPr marL="0" lvl="0" indent="0">
               <a:lnSpc>
                 <a:spcPct val="104000"/>
               </a:lnSpc>
@@ -20070,7 +20892,7 @@
           </a:bodyPr>
           <a:lstStyle/>
           <a:p>
-            <a:pPr marL="270000" indent="-230000" lvl="0">
+            <a:pPr marL="270000" lvl="0" indent="-230000">
               <a:lnSpc>
                 <a:spcPct val="100000"/>
               </a:lnSpc>
@@ -20095,7 +20917,7 @@
               <a:t>无论输入是否有序，比较次数都是 </a:t>
             </a:r>
             <a:r>
-              <a:rPr lang="zh-CN" sz="2340" dirty="0" i="1">
+              <a:rPr lang="zh-CN" sz="2340" i="1" dirty="0">
                 <a:solidFill>
                   <a:srgbClr val="1A1A18"/>
                 </a:solidFill>
@@ -20107,7 +20929,7 @@
             </a:r>
           </a:p>
           <a:p>
-            <a:pPr marL="270000" indent="-230000" lvl="0">
+            <a:pPr marL="270000" lvl="0" indent="-230000">
               <a:lnSpc>
                 <a:spcPct val="100000"/>
               </a:lnSpc>
@@ -20132,7 +20954,7 @@
               <a:t>只做至多 </a:t>
             </a:r>
             <a:r>
-              <a:rPr lang="zh-CN" sz="2340" dirty="0" i="1">
+              <a:rPr lang="zh-CN" sz="2340" i="1" dirty="0">
                 <a:solidFill>
                   <a:srgbClr val="1A1A18"/>
                 </a:solidFill>
@@ -20154,7 +20976,7 @@
               <a:t> 次交换，额外空间 </a:t>
             </a:r>
             <a:r>
-              <a:rPr lang="zh-CN" sz="2340" dirty="0" i="1">
+              <a:rPr lang="zh-CN" sz="2340" i="1" dirty="0">
                 <a:solidFill>
                   <a:srgbClr val="1A1A18"/>
                 </a:solidFill>
@@ -20166,7 +20988,7 @@
             </a:r>
           </a:p>
           <a:p>
-            <a:pPr marL="270000" indent="-230000" lvl="0">
+            <a:pPr marL="270000" lvl="0" indent="-230000">
               <a:lnSpc>
                 <a:spcPct val="100000"/>
               </a:lnSpc>
@@ -20180,7 +21002,7 @@
               <a:buChar char="●"/>
             </a:pPr>
             <a:r>
-              <a:rPr lang="zh-CN" sz="2340" dirty="0" b="1">
+              <a:rPr lang="zh-CN" sz="2340" b="1" dirty="0">
                 <a:solidFill>
                   <a:srgbClr val="8A4B2A"/>
                 </a:solidFill>
@@ -20226,7 +21048,7 @@
           </a:bodyPr>
           <a:lstStyle/>
           <a:p>
-            <a:pPr marL="0" indent="0" lvl="0">
+            <a:pPr marL="0" lvl="0" indent="0">
               <a:lnSpc>
                 <a:spcPct val="100000"/>
               </a:lnSpc>
@@ -20268,7 +21090,7 @@
           </a:bodyPr>
           <a:lstStyle/>
           <a:p>
-            <a:pPr marL="0" indent="0" lvl="0">
+            <a:pPr marL="0" lvl="0" indent="0">
               <a:lnSpc>
                 <a:spcPct val="100000"/>
               </a:lnSpc>
@@ -20310,7 +21132,7 @@
           </a:bodyPr>
           <a:lstStyle/>
           <a:p>
-            <a:pPr marL="0" indent="0" lvl="0" algn="r">
+            <a:pPr marL="0" lvl="0" indent="0" algn="r">
               <a:lnSpc>
                 <a:spcPct val="100000"/>
               </a:lnSpc>
@@ -20332,6 +21154,9 @@
       </p:sp>
     </p:spTree>
   </p:cSld>
+  <p:clrMapOvr>
+    <a:masterClrMapping/>
+  </p:clrMapOvr>
 </p:sld>
 </file>
 
@@ -20374,14 +21199,14 @@
           </a:bodyPr>
           <a:lstStyle/>
           <a:p>
-            <a:pPr marL="0" indent="0" lvl="0">
-              <a:lnSpc>
-                <a:spcPct val="100000"/>
-              </a:lnSpc>
-              <a:buNone/>
-            </a:pPr>
-            <a:r>
-              <a:rPr lang="zh-CN" sz="3200" dirty="0" b="1">
+            <a:pPr marL="0" lvl="0" indent="0">
+              <a:lnSpc>
+                <a:spcPct val="100000"/>
+              </a:lnSpc>
+              <a:buNone/>
+            </a:pPr>
+            <a:r>
+              <a:rPr lang="zh-CN" sz="3200" b="1" dirty="0">
                 <a:solidFill>
                   <a:srgbClr val="1A1A18"/>
                 </a:solidFill>
@@ -20418,7 +21243,9 @@
         <p:txBody>
           <a:bodyPr/>
           <a:lstStyle/>
-          <a:p/>
+          <a:p>
+            <a:endParaRPr/>
+          </a:p>
         </p:txBody>
       </p:sp>
       <p:pic>
@@ -20430,7 +21257,7 @@
           <p:nvPr/>
         </p:nvPicPr>
         <p:blipFill>
-          <a:blip r:embed="rId100"/>
+          <a:blip r:embed="rId2"/>
           <a:stretch>
             <a:fillRect/>
           </a:stretch>
@@ -20467,7 +21294,7 @@
           </a:bodyPr>
           <a:lstStyle/>
           <a:p>
-            <a:pPr marL="0" indent="0" lvl="0" algn="ctr">
+            <a:pPr marL="0" lvl="0" indent="0" algn="ctr">
               <a:lnSpc>
                 <a:spcPct val="100000"/>
               </a:lnSpc>
@@ -20509,7 +21336,7 @@
           </a:bodyPr>
           <a:lstStyle/>
           <a:p>
-            <a:pPr marL="0" indent="0" lvl="0">
+            <a:pPr marL="0" lvl="0" indent="0">
               <a:lnSpc>
                 <a:spcPct val="100000"/>
               </a:lnSpc>
@@ -20551,7 +21378,7 @@
           </a:bodyPr>
           <a:lstStyle/>
           <a:p>
-            <a:pPr marL="0" indent="0" lvl="0" algn="r">
+            <a:pPr marL="0" lvl="0" indent="0" algn="r">
               <a:lnSpc>
                 <a:spcPct val="100000"/>
               </a:lnSpc>
@@ -20573,6 +21400,9 @@
       </p:sp>
     </p:spTree>
   </p:cSld>
+  <p:clrMapOvr>
+    <a:masterClrMapping/>
+  </p:clrMapOvr>
 </p:sld>
 </file>
 
@@ -20615,14 +21445,14 @@
           </a:bodyPr>
           <a:lstStyle/>
           <a:p>
-            <a:pPr marL="0" indent="0" lvl="0">
-              <a:lnSpc>
-                <a:spcPct val="100000"/>
-              </a:lnSpc>
-              <a:buNone/>
-            </a:pPr>
-            <a:r>
-              <a:rPr lang="zh-CN" sz="3200" dirty="0" b="1">
+            <a:pPr marL="0" lvl="0" indent="0">
+              <a:lnSpc>
+                <a:spcPct val="100000"/>
+              </a:lnSpc>
+              <a:buNone/>
+            </a:pPr>
+            <a:r>
+              <a:rPr lang="zh-CN" sz="3200" b="1" dirty="0">
                 <a:solidFill>
                   <a:srgbClr val="1A1A18"/>
                 </a:solidFill>
@@ -20659,7 +21489,9 @@
         <p:txBody>
           <a:bodyPr/>
           <a:lstStyle/>
-          <a:p/>
+          <a:p>
+            <a:endParaRPr/>
+          </a:p>
         </p:txBody>
       </p:sp>
       <p:sp>
@@ -20693,7 +21525,7 @@
           </a:bodyPr>
           <a:lstStyle/>
           <a:p>
-            <a:pPr marL="0" indent="0" lvl="0">
+            <a:pPr marL="0" lvl="0" indent="0">
               <a:lnSpc>
                 <a:spcPct val="100000"/>
               </a:lnSpc>
@@ -20712,7 +21544,7 @@
             </a:r>
           </a:p>
           <a:p>
-            <a:pPr marL="0" indent="0" lvl="0">
+            <a:pPr marL="0" lvl="0" indent="0">
               <a:lnSpc>
                 <a:spcPct val="104000"/>
               </a:lnSpc>
@@ -20731,7 +21563,7 @@
             </a:r>
           </a:p>
           <a:p>
-            <a:pPr marL="0" indent="0" lvl="0">
+            <a:pPr marL="0" lvl="0" indent="0">
               <a:lnSpc>
                 <a:spcPct val="104000"/>
               </a:lnSpc>
@@ -20849,7 +21681,7 @@
             </a:r>
           </a:p>
           <a:p>
-            <a:pPr marL="0" indent="0" lvl="0">
+            <a:pPr marL="0" lvl="0" indent="0">
               <a:lnSpc>
                 <a:spcPct val="104000"/>
               </a:lnSpc>
@@ -20934,7 +21766,7 @@
             </a:r>
           </a:p>
           <a:p>
-            <a:pPr marL="0" indent="0" lvl="0">
+            <a:pPr marL="0" lvl="0" indent="0">
               <a:lnSpc>
                 <a:spcPct val="104000"/>
               </a:lnSpc>
@@ -21019,7 +21851,7 @@
             </a:r>
           </a:p>
           <a:p>
-            <a:pPr marL="0" indent="0" lvl="0">
+            <a:pPr marL="0" lvl="0" indent="0">
               <a:lnSpc>
                 <a:spcPct val="104000"/>
               </a:lnSpc>
@@ -21104,7 +21936,7 @@
             </a:r>
           </a:p>
           <a:p>
-            <a:pPr marL="0" indent="0" lvl="0">
+            <a:pPr marL="0" lvl="0" indent="0">
               <a:lnSpc>
                 <a:spcPct val="104000"/>
               </a:lnSpc>
@@ -21167,7 +21999,7 @@
             </a:r>
           </a:p>
           <a:p>
-            <a:pPr marL="0" indent="0" lvl="0">
+            <a:pPr marL="0" lvl="0" indent="0">
               <a:lnSpc>
                 <a:spcPct val="104000"/>
               </a:lnSpc>
@@ -21208,7 +22040,7 @@
             </a:r>
           </a:p>
           <a:p>
-            <a:pPr marL="0" indent="0" lvl="0">
+            <a:pPr marL="0" lvl="0" indent="0">
               <a:lnSpc>
                 <a:spcPct val="104000"/>
               </a:lnSpc>
@@ -21227,7 +22059,7 @@
             </a:r>
           </a:p>
           <a:p>
-            <a:pPr marL="0" indent="0" lvl="0">
+            <a:pPr marL="0" lvl="0" indent="0">
               <a:lnSpc>
                 <a:spcPct val="104000"/>
               </a:lnSpc>
@@ -21246,7 +22078,7 @@
             </a:r>
           </a:p>
           <a:p>
-            <a:pPr marL="0" indent="0" lvl="0">
+            <a:pPr marL="0" lvl="0" indent="0">
               <a:lnSpc>
                 <a:spcPct val="104000"/>
               </a:lnSpc>
@@ -21265,7 +22097,7 @@
             </a:r>
           </a:p>
           <a:p>
-            <a:pPr marL="0" indent="0" lvl="0">
+            <a:pPr marL="0" lvl="0" indent="0">
               <a:lnSpc>
                 <a:spcPct val="104000"/>
               </a:lnSpc>
@@ -21284,7 +22116,7 @@
             </a:r>
           </a:p>
           <a:p>
-            <a:pPr marL="0" indent="0" lvl="0">
+            <a:pPr marL="0" lvl="0" indent="0">
               <a:lnSpc>
                 <a:spcPct val="104000"/>
               </a:lnSpc>
@@ -21303,7 +22135,7 @@
             </a:r>
           </a:p>
           <a:p>
-            <a:pPr marL="0" indent="0" lvl="0">
+            <a:pPr marL="0" lvl="0" indent="0">
               <a:lnSpc>
                 <a:spcPct val="104000"/>
               </a:lnSpc>
@@ -21377,7 +22209,7 @@
             </a:r>
           </a:p>
           <a:p>
-            <a:pPr marL="0" indent="0" lvl="0">
+            <a:pPr marL="0" lvl="0" indent="0">
               <a:lnSpc>
                 <a:spcPct val="104000"/>
               </a:lnSpc>
@@ -21484,7 +22316,7 @@
             </a:r>
           </a:p>
           <a:p>
-            <a:pPr marL="0" indent="0" lvl="0">
+            <a:pPr marL="0" lvl="0" indent="0">
               <a:lnSpc>
                 <a:spcPct val="104000"/>
               </a:lnSpc>
@@ -21525,7 +22357,7 @@
             </a:r>
           </a:p>
           <a:p>
-            <a:pPr marL="0" indent="0" lvl="0">
+            <a:pPr marL="0" lvl="0" indent="0">
               <a:lnSpc>
                 <a:spcPct val="104000"/>
               </a:lnSpc>
@@ -21544,7 +22376,7 @@
             </a:r>
           </a:p>
           <a:p>
-            <a:pPr marL="0" indent="0" lvl="0">
+            <a:pPr marL="0" lvl="0" indent="0">
               <a:lnSpc>
                 <a:spcPct val="104000"/>
               </a:lnSpc>
@@ -21629,7 +22461,7 @@
             </a:r>
           </a:p>
           <a:p>
-            <a:pPr marL="0" indent="0" lvl="0">
+            <a:pPr marL="0" lvl="0" indent="0">
               <a:lnSpc>
                 <a:spcPct val="104000"/>
               </a:lnSpc>
@@ -21670,7 +22502,7 @@
             </a:r>
           </a:p>
           <a:p>
-            <a:pPr marL="0" indent="0" lvl="0">
+            <a:pPr marL="0" lvl="0" indent="0">
               <a:lnSpc>
                 <a:spcPct val="104000"/>
               </a:lnSpc>
@@ -21733,7 +22565,7 @@
             </a:r>
           </a:p>
           <a:p>
-            <a:pPr marL="0" indent="0" lvl="0">
+            <a:pPr marL="0" lvl="0" indent="0">
               <a:lnSpc>
                 <a:spcPct val="104000"/>
               </a:lnSpc>
@@ -21796,7 +22628,7 @@
             </a:r>
           </a:p>
           <a:p>
-            <a:pPr marL="0" indent="0" lvl="0">
+            <a:pPr marL="0" lvl="0" indent="0">
               <a:lnSpc>
                 <a:spcPct val="104000"/>
               </a:lnSpc>
@@ -21815,7 +22647,7 @@
             </a:r>
           </a:p>
           <a:p>
-            <a:pPr marL="0" indent="0" lvl="0">
+            <a:pPr marL="0" lvl="0" indent="0">
               <a:lnSpc>
                 <a:spcPct val="104000"/>
               </a:lnSpc>
@@ -21857,7 +22689,7 @@
           </a:bodyPr>
           <a:lstStyle/>
           <a:p>
-            <a:pPr marL="0" indent="0" lvl="0">
+            <a:pPr marL="0" lvl="0" indent="0">
               <a:lnSpc>
                 <a:spcPct val="100000"/>
               </a:lnSpc>
@@ -21899,7 +22731,7 @@
           </a:bodyPr>
           <a:lstStyle/>
           <a:p>
-            <a:pPr marL="0" indent="0" lvl="0" algn="r">
+            <a:pPr marL="0" lvl="0" indent="0" algn="r">
               <a:lnSpc>
                 <a:spcPct val="100000"/>
               </a:lnSpc>
@@ -21921,6 +22753,9 @@
       </p:sp>
     </p:spTree>
   </p:cSld>
+  <p:clrMapOvr>
+    <a:masterClrMapping/>
+  </p:clrMapOvr>
 </p:sld>
 </file>
 
@@ -22033,5 +22868,322 @@
       </a:bgFillStyleLst>
     </a:fmtScheme>
   </a:themeElements>
+  <a:objectDefaults/>
+  <a:extraClrSchemeLst/>
+</a:theme>
+</file>
+
+<file path=ppt/theme/theme2.xml><?xml version="1.0" encoding="utf-8"?>
+<a:theme xmlns:a="http://schemas.openxmlformats.org/drawingml/2006/main" name="Office Theme">
+  <a:themeElements>
+    <a:clrScheme name="Office">
+      <a:dk1>
+        <a:sysClr val="windowText" lastClr="000000"/>
+      </a:dk1>
+      <a:lt1>
+        <a:sysClr val="window" lastClr="FFFFFF"/>
+      </a:lt1>
+      <a:dk2>
+        <a:srgbClr val="0E2841"/>
+      </a:dk2>
+      <a:lt2>
+        <a:srgbClr val="E8E8E8"/>
+      </a:lt2>
+      <a:accent1>
+        <a:srgbClr val="156082"/>
+      </a:accent1>
+      <a:accent2>
+        <a:srgbClr val="E97132"/>
+      </a:accent2>
+      <a:accent3>
+        <a:srgbClr val="196B24"/>
+      </a:accent3>
+      <a:accent4>
+        <a:srgbClr val="0F9ED5"/>
+      </a:accent4>
+      <a:accent5>
+        <a:srgbClr val="A02B93"/>
+      </a:accent5>
+      <a:accent6>
+        <a:srgbClr val="4EA72E"/>
+      </a:accent6>
+      <a:hlink>
+        <a:srgbClr val="467886"/>
+      </a:hlink>
+      <a:folHlink>
+        <a:srgbClr val="96607D"/>
+      </a:folHlink>
+    </a:clrScheme>
+    <a:fontScheme name="Office">
+      <a:majorFont>
+        <a:latin typeface="Aptos Display" panose="02110004020202020204"/>
+        <a:ea typeface=""/>
+        <a:cs typeface=""/>
+        <a:font script="Jpan" typeface="游ゴシック Light"/>
+        <a:font script="Hang" typeface="맑은 고딕"/>
+        <a:font script="Hans" typeface="等线 Light"/>
+        <a:font script="Hant" typeface="新細明體"/>
+        <a:font script="Arab" typeface="Times New Roman"/>
+        <a:font script="Hebr" typeface="Times New Roman"/>
+        <a:font script="Thai" typeface="Angsana New"/>
+        <a:font script="Ethi" typeface="Nyala"/>
+        <a:font script="Beng" typeface="Vrinda"/>
+        <a:font script="Gujr" typeface="Shruti"/>
+        <a:font script="Khmr" typeface="MoolBoran"/>
+        <a:font script="Knda" typeface="Tunga"/>
+        <a:font script="Guru" typeface="Raavi"/>
+        <a:font script="Cans" typeface="Euphemia"/>
+        <a:font script="Cher" typeface="Plantagenet Cherokee"/>
+        <a:font script="Yiii" typeface="Microsoft Yi Baiti"/>
+        <a:font script="Tibt" typeface="Microsoft Himalaya"/>
+        <a:font script="Thaa" typeface="MV Boli"/>
+        <a:font script="Deva" typeface="Mangal"/>
+        <a:font script="Telu" typeface="Gautami"/>
+        <a:font script="Taml" typeface="Latha"/>
+        <a:font script="Syrc" typeface="Estrangelo Edessa"/>
+        <a:font script="Orya" typeface="Kalinga"/>
+        <a:font script="Mlym" typeface="Kartika"/>
+        <a:font script="Laoo" typeface="DokChampa"/>
+        <a:font script="Sinh" typeface="Iskoola Pota"/>
+        <a:font script="Mong" typeface="Mongolian Baiti"/>
+        <a:font script="Viet" typeface="Times New Roman"/>
+        <a:font script="Uigh" typeface="Microsoft Uighur"/>
+        <a:font script="Geor" typeface="Sylfaen"/>
+        <a:font script="Armn" typeface="Arial"/>
+        <a:font script="Bugi" typeface="Leelawadee UI"/>
+        <a:font script="Bopo" typeface="Microsoft JhengHei"/>
+        <a:font script="Java" typeface="Javanese Text"/>
+        <a:font script="Lisu" typeface="Segoe UI"/>
+        <a:font script="Mymr" typeface="Myanmar Text"/>
+        <a:font script="Nkoo" typeface="Ebrima"/>
+        <a:font script="Olck" typeface="Nirmala UI"/>
+        <a:font script="Osma" typeface="Ebrima"/>
+        <a:font script="Phag" typeface="Phagspa"/>
+        <a:font script="Syrn" typeface="Estrangelo Edessa"/>
+        <a:font script="Syrj" typeface="Estrangelo Edessa"/>
+        <a:font script="Syre" typeface="Estrangelo Edessa"/>
+        <a:font script="Sora" typeface="Nirmala UI"/>
+        <a:font script="Tale" typeface="Microsoft Tai Le"/>
+        <a:font script="Talu" typeface="Microsoft New Tai Lue"/>
+        <a:font script="Tfng" typeface="Ebrima"/>
+      </a:majorFont>
+      <a:minorFont>
+        <a:latin typeface="Aptos" panose="02110004020202020204"/>
+        <a:ea typeface=""/>
+        <a:cs typeface=""/>
+        <a:font script="Jpan" typeface="游ゴシック"/>
+        <a:font script="Hang" typeface="맑은 고딕"/>
+        <a:font script="Hans" typeface="等线"/>
+        <a:font script="Hant" typeface="新細明體"/>
+        <a:font script="Arab" typeface="Arial"/>
+        <a:font script="Hebr" typeface="Arial"/>
+        <a:font script="Thai" typeface="Cordia New"/>
+        <a:font script="Ethi" typeface="Nyala"/>
+        <a:font script="Beng" typeface="Vrinda"/>
+        <a:font script="Gujr" typeface="Shruti"/>
+        <a:font script="Khmr" typeface="DaunPenh"/>
+        <a:font script="Knda" typeface="Tunga"/>
+        <a:font script="Guru" typeface="Raavi"/>
+        <a:font script="Cans" typeface="Euphemia"/>
+        <a:font script="Cher" typeface="Plantagenet Cherokee"/>
+        <a:font script="Yiii" typeface="Microsoft Yi Baiti"/>
+        <a:font script="Tibt" typeface="Microsoft Himalaya"/>
+        <a:font script="Thaa" typeface="MV Boli"/>
+        <a:font script="Deva" typeface="Mangal"/>
+        <a:font script="Telu" typeface="Gautami"/>
+        <a:font script="Taml" typeface="Latha"/>
+        <a:font script="Syrc" typeface="Estrangelo Edessa"/>
+        <a:font script="Orya" typeface="Kalinga"/>
+        <a:font script="Mlym" typeface="Kartika"/>
+        <a:font script="Laoo" typeface="DokChampa"/>
+        <a:font script="Sinh" typeface="Iskoola Pota"/>
+        <a:font script="Mong" typeface="Mongolian Baiti"/>
+        <a:font script="Viet" typeface="Arial"/>
+        <a:font script="Uigh" typeface="Microsoft Uighur"/>
+        <a:font script="Geor" typeface="Sylfaen"/>
+        <a:font script="Armn" typeface="Arial"/>
+        <a:font script="Bugi" typeface="Leelawadee UI"/>
+        <a:font script="Bopo" typeface="Microsoft JhengHei"/>
+        <a:font script="Java" typeface="Javanese Text"/>
+        <a:font script="Lisu" typeface="Segoe UI"/>
+        <a:font script="Mymr" typeface="Myanmar Text"/>
+        <a:font script="Nkoo" typeface="Ebrima"/>
+        <a:font script="Olck" typeface="Nirmala UI"/>
+        <a:font script="Osma" typeface="Ebrima"/>
+        <a:font script="Phag" typeface="Phagspa"/>
+        <a:font script="Syrn" typeface="Estrangelo Edessa"/>
+        <a:font script="Syrj" typeface="Estrangelo Edessa"/>
+        <a:font script="Syre" typeface="Estrangelo Edessa"/>
+        <a:font script="Sora" typeface="Nirmala UI"/>
+        <a:font script="Tale" typeface="Microsoft Tai Le"/>
+        <a:font script="Talu" typeface="Microsoft New Tai Lue"/>
+        <a:font script="Tfng" typeface="Ebrima"/>
+      </a:minorFont>
+    </a:fontScheme>
+    <a:fmtScheme name="Office">
+      <a:fillStyleLst>
+        <a:solidFill>
+          <a:schemeClr val="phClr"/>
+        </a:solidFill>
+        <a:gradFill rotWithShape="1">
+          <a:gsLst>
+            <a:gs pos="0">
+              <a:schemeClr val="phClr">
+                <a:lumMod val="110000"/>
+                <a:satMod val="105000"/>
+                <a:tint val="67000"/>
+              </a:schemeClr>
+            </a:gs>
+            <a:gs pos="50000">
+              <a:schemeClr val="phClr">
+                <a:lumMod val="105000"/>
+                <a:satMod val="103000"/>
+                <a:tint val="73000"/>
+              </a:schemeClr>
+            </a:gs>
+            <a:gs pos="100000">
+              <a:schemeClr val="phClr">
+                <a:lumMod val="105000"/>
+                <a:satMod val="109000"/>
+                <a:tint val="81000"/>
+              </a:schemeClr>
+            </a:gs>
+          </a:gsLst>
+          <a:lin ang="5400000" scaled="0"/>
+        </a:gradFill>
+        <a:gradFill rotWithShape="1">
+          <a:gsLst>
+            <a:gs pos="0">
+              <a:schemeClr val="phClr">
+                <a:satMod val="103000"/>
+                <a:lumMod val="102000"/>
+                <a:tint val="94000"/>
+              </a:schemeClr>
+            </a:gs>
+            <a:gs pos="50000">
+              <a:schemeClr val="phClr">
+                <a:satMod val="110000"/>
+                <a:lumMod val="100000"/>
+                <a:shade val="100000"/>
+              </a:schemeClr>
+            </a:gs>
+            <a:gs pos="100000">
+              <a:schemeClr val="phClr">
+                <a:lumMod val="99000"/>
+                <a:satMod val="120000"/>
+                <a:shade val="78000"/>
+              </a:schemeClr>
+            </a:gs>
+          </a:gsLst>
+          <a:lin ang="5400000" scaled="0"/>
+        </a:gradFill>
+      </a:fillStyleLst>
+      <a:lnStyleLst>
+        <a:ln w="12700" cap="flat" cmpd="sng" algn="ctr">
+          <a:solidFill>
+            <a:schemeClr val="phClr"/>
+          </a:solidFill>
+          <a:prstDash val="solid"/>
+          <a:miter lim="800000"/>
+        </a:ln>
+        <a:ln w="19050" cap="flat" cmpd="sng" algn="ctr">
+          <a:solidFill>
+            <a:schemeClr val="phClr"/>
+          </a:solidFill>
+          <a:prstDash val="solid"/>
+          <a:miter lim="800000"/>
+        </a:ln>
+        <a:ln w="25400" cap="flat" cmpd="sng" algn="ctr">
+          <a:solidFill>
+            <a:schemeClr val="phClr"/>
+          </a:solidFill>
+          <a:prstDash val="solid"/>
+          <a:miter lim="800000"/>
+        </a:ln>
+      </a:lnStyleLst>
+      <a:effectStyleLst>
+        <a:effectStyle>
+          <a:effectLst/>
+        </a:effectStyle>
+        <a:effectStyle>
+          <a:effectLst/>
+        </a:effectStyle>
+        <a:effectStyle>
+          <a:effectLst>
+            <a:outerShdw blurRad="57150" dist="19050" dir="5400000" algn="ctr" rotWithShape="0">
+              <a:srgbClr val="000000">
+                <a:alpha val="63000"/>
+              </a:srgbClr>
+            </a:outerShdw>
+          </a:effectLst>
+        </a:effectStyle>
+      </a:effectStyleLst>
+      <a:bgFillStyleLst>
+        <a:solidFill>
+          <a:schemeClr val="phClr"/>
+        </a:solidFill>
+        <a:solidFill>
+          <a:schemeClr val="phClr">
+            <a:tint val="95000"/>
+            <a:satMod val="170000"/>
+          </a:schemeClr>
+        </a:solidFill>
+        <a:gradFill rotWithShape="1">
+          <a:gsLst>
+            <a:gs pos="0">
+              <a:schemeClr val="phClr">
+                <a:tint val="93000"/>
+                <a:satMod val="150000"/>
+                <a:shade val="98000"/>
+                <a:lumMod val="102000"/>
+              </a:schemeClr>
+            </a:gs>
+            <a:gs pos="50000">
+              <a:schemeClr val="phClr">
+                <a:tint val="98000"/>
+                <a:satMod val="130000"/>
+                <a:shade val="90000"/>
+                <a:lumMod val="103000"/>
+              </a:schemeClr>
+            </a:gs>
+            <a:gs pos="100000">
+              <a:schemeClr val="phClr">
+                <a:shade val="63000"/>
+                <a:satMod val="120000"/>
+              </a:schemeClr>
+            </a:gs>
+          </a:gsLst>
+          <a:lin ang="5400000" scaled="0"/>
+        </a:gradFill>
+      </a:bgFillStyleLst>
+    </a:fmtScheme>
+  </a:themeElements>
+  <a:objectDefaults>
+    <a:lnDef>
+      <a:spPr/>
+      <a:bodyPr/>
+      <a:lstStyle/>
+      <a:style>
+        <a:lnRef idx="2">
+          <a:schemeClr val="accent1"/>
+        </a:lnRef>
+        <a:fillRef idx="0">
+          <a:schemeClr val="accent1"/>
+        </a:fillRef>
+        <a:effectRef idx="1">
+          <a:schemeClr val="accent1"/>
+        </a:effectRef>
+        <a:fontRef idx="minor">
+          <a:schemeClr val="tx1"/>
+        </a:fontRef>
+      </a:style>
+    </a:lnDef>
+  </a:objectDefaults>
+  <a:extraClrSchemeLst/>
+  <a:extLst>
+    <a:ext uri="{05A4C25C-085E-4340-85A3-A5531E510DB2}">
+      <thm15:themeFamily xmlns:thm15="http://schemas.microsoft.com/office/thememl/2012/main" name="Office Theme" id="{2E142A2C-CD16-42D6-873A-C26D2A0506FA}" vid="{1BDDFF52-6CD6-40A5-AB3C-68EB2F1E4D0A}"/>
+    </a:ext>
+  </a:extLst>
 </a:theme>
 </file>
--- a/book/slides/pptx/ch08-sorting.pptx
+++ b/book/slides/pptx/ch08-sorting.pptx
@@ -47,112 +47,12 @@
   </p:sldIdLst>
   <p:sldSz cx="12192000" cy="6858000"/>
   <p:notesSz cx="6858000" cy="9144000"/>
-  <p:defaultTextStyle>
-    <a:defPPr>
-      <a:defRPr lang="en-CN"/>
-    </a:defPPr>
-    <a:lvl1pPr marL="0" algn="l" defTabSz="914400" rtl="0" eaLnBrk="1" latinLnBrk="0" hangingPunct="1">
-      <a:defRPr sz="1800" kern="1200">
-        <a:solidFill>
-          <a:schemeClr val="tx1"/>
-        </a:solidFill>
-        <a:latin typeface="+mn-lt"/>
-        <a:ea typeface="+mn-ea"/>
-        <a:cs typeface="+mn-cs"/>
-      </a:defRPr>
-    </a:lvl1pPr>
-    <a:lvl2pPr marL="457200" algn="l" defTabSz="914400" rtl="0" eaLnBrk="1" latinLnBrk="0" hangingPunct="1">
-      <a:defRPr sz="1800" kern="1200">
-        <a:solidFill>
-          <a:schemeClr val="tx1"/>
-        </a:solidFill>
-        <a:latin typeface="+mn-lt"/>
-        <a:ea typeface="+mn-ea"/>
-        <a:cs typeface="+mn-cs"/>
-      </a:defRPr>
-    </a:lvl2pPr>
-    <a:lvl3pPr marL="914400" algn="l" defTabSz="914400" rtl="0" eaLnBrk="1" latinLnBrk="0" hangingPunct="1">
-      <a:defRPr sz="1800" kern="1200">
-        <a:solidFill>
-          <a:schemeClr val="tx1"/>
-        </a:solidFill>
-        <a:latin typeface="+mn-lt"/>
-        <a:ea typeface="+mn-ea"/>
-        <a:cs typeface="+mn-cs"/>
-      </a:defRPr>
-    </a:lvl3pPr>
-    <a:lvl4pPr marL="1371600" algn="l" defTabSz="914400" rtl="0" eaLnBrk="1" latinLnBrk="0" hangingPunct="1">
-      <a:defRPr sz="1800" kern="1200">
-        <a:solidFill>
-          <a:schemeClr val="tx1"/>
-        </a:solidFill>
-        <a:latin typeface="+mn-lt"/>
-        <a:ea typeface="+mn-ea"/>
-        <a:cs typeface="+mn-cs"/>
-      </a:defRPr>
-    </a:lvl4pPr>
-    <a:lvl5pPr marL="1828800" algn="l" defTabSz="914400" rtl="0" eaLnBrk="1" latinLnBrk="0" hangingPunct="1">
-      <a:defRPr sz="1800" kern="1200">
-        <a:solidFill>
-          <a:schemeClr val="tx1"/>
-        </a:solidFill>
-        <a:latin typeface="+mn-lt"/>
-        <a:ea typeface="+mn-ea"/>
-        <a:cs typeface="+mn-cs"/>
-      </a:defRPr>
-    </a:lvl5pPr>
-    <a:lvl6pPr marL="2286000" algn="l" defTabSz="914400" rtl="0" eaLnBrk="1" latinLnBrk="0" hangingPunct="1">
-      <a:defRPr sz="1800" kern="1200">
-        <a:solidFill>
-          <a:schemeClr val="tx1"/>
-        </a:solidFill>
-        <a:latin typeface="+mn-lt"/>
-        <a:ea typeface="+mn-ea"/>
-        <a:cs typeface="+mn-cs"/>
-      </a:defRPr>
-    </a:lvl6pPr>
-    <a:lvl7pPr marL="2743200" algn="l" defTabSz="914400" rtl="0" eaLnBrk="1" latinLnBrk="0" hangingPunct="1">
-      <a:defRPr sz="1800" kern="1200">
-        <a:solidFill>
-          <a:schemeClr val="tx1"/>
-        </a:solidFill>
-        <a:latin typeface="+mn-lt"/>
-        <a:ea typeface="+mn-ea"/>
-        <a:cs typeface="+mn-cs"/>
-      </a:defRPr>
-    </a:lvl7pPr>
-    <a:lvl8pPr marL="3200400" algn="l" defTabSz="914400" rtl="0" eaLnBrk="1" latinLnBrk="0" hangingPunct="1">
-      <a:defRPr sz="1800" kern="1200">
-        <a:solidFill>
-          <a:schemeClr val="tx1"/>
-        </a:solidFill>
-        <a:latin typeface="+mn-lt"/>
-        <a:ea typeface="+mn-ea"/>
-        <a:cs typeface="+mn-cs"/>
-      </a:defRPr>
-    </a:lvl8pPr>
-    <a:lvl9pPr marL="3657600" algn="l" defTabSz="914400" rtl="0" eaLnBrk="1" latinLnBrk="0" hangingPunct="1">
-      <a:defRPr sz="1800" kern="1200">
-        <a:solidFill>
-          <a:schemeClr val="tx1"/>
-        </a:solidFill>
-        <a:latin typeface="+mn-lt"/>
-        <a:ea typeface="+mn-ea"/>
-        <a:cs typeface="+mn-cs"/>
-      </a:defRPr>
-    </a:lvl9pPr>
-  </p:defaultTextStyle>
 </p:presentation>
 </file>
 
 <file path=ppt/notesMasters/notesMaster1.xml><?xml version="1.0" encoding="utf-8"?>
 <p:notesMaster xmlns:a="http://schemas.openxmlformats.org/drawingml/2006/main" xmlns:r="http://schemas.openxmlformats.org/officeDocument/2006/relationships" xmlns:p="http://schemas.openxmlformats.org/presentationml/2006/main">
   <p:cSld>
-    <p:bg>
-      <p:bgRef idx="1001">
-        <a:schemeClr val="bg1"/>
-      </p:bgRef>
-    </p:bg>
     <p:spTree>
       <p:nvGrpSpPr>
         <p:cNvPr id="1" name=""/>
@@ -170,102 +70,10 @@
     </p:spTree>
   </p:cSld>
   <p:clrMap bg1="lt1" tx1="dk1" bg2="lt2" tx2="dk2" accent1="accent1" accent2="accent2" accent3="accent3" accent4="accent4" accent5="accent5" accent6="accent6" hlink="hlink" folHlink="folHlink"/>
-  <p:notesStyle>
-    <a:lvl1pPr marL="0" algn="l" defTabSz="914400" rtl="0" eaLnBrk="1" latinLnBrk="0" hangingPunct="1">
-      <a:defRPr sz="1200" kern="1200">
-        <a:solidFill>
-          <a:schemeClr val="tx1"/>
-        </a:solidFill>
-        <a:latin typeface="+mn-lt"/>
-        <a:ea typeface="+mn-ea"/>
-        <a:cs typeface="+mn-cs"/>
-      </a:defRPr>
-    </a:lvl1pPr>
-    <a:lvl2pPr marL="457200" algn="l" defTabSz="914400" rtl="0" eaLnBrk="1" latinLnBrk="0" hangingPunct="1">
-      <a:defRPr sz="1200" kern="1200">
-        <a:solidFill>
-          <a:schemeClr val="tx1"/>
-        </a:solidFill>
-        <a:latin typeface="+mn-lt"/>
-        <a:ea typeface="+mn-ea"/>
-        <a:cs typeface="+mn-cs"/>
-      </a:defRPr>
-    </a:lvl2pPr>
-    <a:lvl3pPr marL="914400" algn="l" defTabSz="914400" rtl="0" eaLnBrk="1" latinLnBrk="0" hangingPunct="1">
-      <a:defRPr sz="1200" kern="1200">
-        <a:solidFill>
-          <a:schemeClr val="tx1"/>
-        </a:solidFill>
-        <a:latin typeface="+mn-lt"/>
-        <a:ea typeface="+mn-ea"/>
-        <a:cs typeface="+mn-cs"/>
-      </a:defRPr>
-    </a:lvl3pPr>
-    <a:lvl4pPr marL="1371600" algn="l" defTabSz="914400" rtl="0" eaLnBrk="1" latinLnBrk="0" hangingPunct="1">
-      <a:defRPr sz="1200" kern="1200">
-        <a:solidFill>
-          <a:schemeClr val="tx1"/>
-        </a:solidFill>
-        <a:latin typeface="+mn-lt"/>
-        <a:ea typeface="+mn-ea"/>
-        <a:cs typeface="+mn-cs"/>
-      </a:defRPr>
-    </a:lvl4pPr>
-    <a:lvl5pPr marL="1828800" algn="l" defTabSz="914400" rtl="0" eaLnBrk="1" latinLnBrk="0" hangingPunct="1">
-      <a:defRPr sz="1200" kern="1200">
-        <a:solidFill>
-          <a:schemeClr val="tx1"/>
-        </a:solidFill>
-        <a:latin typeface="+mn-lt"/>
-        <a:ea typeface="+mn-ea"/>
-        <a:cs typeface="+mn-cs"/>
-      </a:defRPr>
-    </a:lvl5pPr>
-    <a:lvl6pPr marL="2286000" algn="l" defTabSz="914400" rtl="0" eaLnBrk="1" latinLnBrk="0" hangingPunct="1">
-      <a:defRPr sz="1200" kern="1200">
-        <a:solidFill>
-          <a:schemeClr val="tx1"/>
-        </a:solidFill>
-        <a:latin typeface="+mn-lt"/>
-        <a:ea typeface="+mn-ea"/>
-        <a:cs typeface="+mn-cs"/>
-      </a:defRPr>
-    </a:lvl6pPr>
-    <a:lvl7pPr marL="2743200" algn="l" defTabSz="914400" rtl="0" eaLnBrk="1" latinLnBrk="0" hangingPunct="1">
-      <a:defRPr sz="1200" kern="1200">
-        <a:solidFill>
-          <a:schemeClr val="tx1"/>
-        </a:solidFill>
-        <a:latin typeface="+mn-lt"/>
-        <a:ea typeface="+mn-ea"/>
-        <a:cs typeface="+mn-cs"/>
-      </a:defRPr>
-    </a:lvl7pPr>
-    <a:lvl8pPr marL="3200400" algn="l" defTabSz="914400" rtl="0" eaLnBrk="1" latinLnBrk="0" hangingPunct="1">
-      <a:defRPr sz="1200" kern="1200">
-        <a:solidFill>
-          <a:schemeClr val="tx1"/>
-        </a:solidFill>
-        <a:latin typeface="+mn-lt"/>
-        <a:ea typeface="+mn-ea"/>
-        <a:cs typeface="+mn-cs"/>
-      </a:defRPr>
-    </a:lvl8pPr>
-    <a:lvl9pPr marL="3657600" algn="l" defTabSz="914400" rtl="0" eaLnBrk="1" latinLnBrk="0" hangingPunct="1">
-      <a:defRPr sz="1200" kern="1200">
-        <a:solidFill>
-          <a:schemeClr val="tx1"/>
-        </a:solidFill>
-        <a:latin typeface="+mn-lt"/>
-        <a:ea typeface="+mn-ea"/>
-        <a:cs typeface="+mn-cs"/>
-      </a:defRPr>
-    </a:lvl9pPr>
-  </p:notesStyle>
 </p:notesMaster>
 </file>
 
-<file path=ppt/notesSlides/notesSlide1.xml><?xml version="1.0" encoding="utf-8"?>
+<file path=ppt/notesSlides/notesSlide12.xml><?xml version="1.0" encoding="utf-8"?>
 <p:notes xmlns:a="http://schemas.openxmlformats.org/drawingml/2006/main" xmlns:r="http://schemas.openxmlformats.org/officeDocument/2006/relationships" xmlns:p="http://schemas.openxmlformats.org/presentationml/2006/main">
   <p:cSld>
     <p:spTree>
@@ -305,7 +113,7 @@
           <a:bodyPr/>
           <a:lstStyle/>
           <a:p>
-            <a:pPr marL="0" lvl="0" indent="0">
+            <a:pPr marL="0" indent="0" lvl="0">
               <a:lnSpc>
                 <a:spcPct val="100000"/>
               </a:lnSpc>
@@ -320,11 +128,11 @@
                 <a:ea typeface="Noto Sans CJK SC"/>
                 <a:cs typeface="Segoe UI"/>
               </a:rPr>
-              <a:t>举个例子：先按成绩排，再按班级用稳定排序排，结果就是「班级内按成绩」。</a:t>
-            </a:r>
-          </a:p>
-          <a:p>
-            <a:pPr marL="0" lvl="0" indent="0">
+              <a:t>分割（partition）是全部难点。这里用的是最直白的写法：</a:t>
+            </a:r>
+          </a:p>
+          <a:p>
+            <a:pPr marL="0" indent="0" lvl="0">
               <a:lnSpc>
                 <a:spcPct val="100000"/>
               </a:lnSpc>
@@ -339,16 +147,390 @@
                 <a:ea typeface="Noto Sans CJK SC"/>
                 <a:cs typeface="Segoe UI"/>
               </a:rPr>
-              <a:t>用不稳定的排序做这件事就得不到想要的结果。</a:t>
+              <a:t>boundary 左边全是小于轴值的，扫一遍把小的换过去，最后把轴值换到分界点。</a:t>
+            </a:r>
+          </a:p>
+          <a:p>
+            <a:pPr marL="0" indent="0" lvl="0">
+              <a:lnSpc>
+                <a:spcPct val="100000"/>
+              </a:lnSpc>
+              <a:buNone/>
+            </a:pPr>
+            <a:r>
+              <a:rPr lang="zh-CN" sz="1200" dirty="0">
+                <a:solidFill>
+                  <a:srgbClr val="1A1A18"/>
+                </a:solidFill>
+                <a:latin typeface="Segoe UI"/>
+                <a:ea typeface="Noto Sans CJK SC"/>
+                <a:cs typeface="Segoe UI"/>
+              </a:rPr>
+              <a:t>平均 O(n log n)，最坏 O(n^2)——输入已经有序而轴值取末尾时，</a:t>
+            </a:r>
+          </a:p>
+          <a:p>
+            <a:pPr marL="0" indent="0" lvl="0">
+              <a:lnSpc>
+                <a:spcPct val="100000"/>
+              </a:lnSpc>
+              <a:buNone/>
+            </a:pPr>
+            <a:r>
+              <a:rPr lang="zh-CN" sz="1200" dirty="0">
+                <a:solidFill>
+                  <a:srgbClr val="1A1A18"/>
+                </a:solidFill>
+                <a:latin typeface="Segoe UI"/>
+                <a:ea typeface="Noto Sans CJK SC"/>
+                <a:cs typeface="Segoe UI"/>
+              </a:rPr>
+              <a:t>每次只分出一个元素，递归深度 n。</a:t>
             </a:r>
           </a:p>
         </p:txBody>
       </p:sp>
     </p:spTree>
   </p:cSld>
-  <p:clrMapOvr>
-    <a:masterClrMapping/>
-  </p:clrMapOvr>
+</p:notes>
+</file>
+
+<file path=ppt/notesSlides/notesSlide15.xml><?xml version="1.0" encoding="utf-8"?>
+<p:notes xmlns:a="http://schemas.openxmlformats.org/drawingml/2006/main" xmlns:r="http://schemas.openxmlformats.org/officeDocument/2006/relationships" xmlns:p="http://schemas.openxmlformats.org/presentationml/2006/main">
+  <p:cSld>
+    <p:spTree>
+      <p:nvGrpSpPr>
+        <p:cNvPr id="1" name=""/>
+        <p:cNvGrpSpPr/>
+        <p:nvPr/>
+      </p:nvGrpSpPr>
+      <p:grpSpPr>
+        <a:xfrm>
+          <a:off x="0" y="0"/>
+          <a:ext cx="0" cy="0"/>
+          <a:chOff x="0" y="0"/>
+          <a:chExt cx="0" cy="0"/>
+        </a:xfrm>
+      </p:grpSpPr>
+      <p:sp>
+        <p:nvSpPr>
+          <p:cNvPr id="2" name="备注"/>
+          <p:cNvSpPr>
+            <a:spLocks noGrp="1"/>
+          </p:cNvSpPr>
+          <p:nvPr>
+            <p:ph type="body" idx="1"/>
+          </p:nvPr>
+        </p:nvSpPr>
+        <p:spPr>
+          <a:xfrm>
+            <a:off x="457200" y="3886200"/>
+            <a:ext cx="5943600" cy="4400550"/>
+          </a:xfrm>
+          <a:prstGeom prst="rect">
+            <a:avLst/>
+          </a:prstGeom>
+        </p:spPr>
+        <p:txBody>
+          <a:bodyPr/>
+          <a:lstStyle/>
+          <a:p>
+            <a:pPr marL="0" indent="0" lvl="0">
+              <a:lnSpc>
+                <a:spcPct val="100000"/>
+              </a:lnSpc>
+              <a:buNone/>
+            </a:pPr>
+            <a:r>
+              <a:rPr lang="zh-CN" sz="1200" dirty="0">
+                <a:solidFill>
+                  <a:srgbClr val="1A1A18"/>
+                </a:solidFill>
+                <a:latin typeface="Segoe UI"/>
+                <a:ea typeface="Noto Sans CJK SC"/>
+                <a:cs typeface="Segoe UI"/>
+              </a:rPr>
+              <a:t>分治的另一种切法：快排是「先分好再递归」，归并是「先递归再合并」。</a:t>
+            </a:r>
+          </a:p>
+          <a:p>
+            <a:pPr marL="0" indent="0" lvl="0">
+              <a:lnSpc>
+                <a:spcPct val="100000"/>
+              </a:lnSpc>
+              <a:buNone/>
+            </a:pPr>
+            <a:r>
+              <a:rPr lang="zh-CN" sz="1200" dirty="0">
+                <a:solidFill>
+                  <a:srgbClr val="1A1A18"/>
+                </a:solidFill>
+                <a:latin typeface="Segoe UI"/>
+                <a:ea typeface="Noto Sans CJK SC"/>
+                <a:cs typeface="Segoe UI"/>
+              </a:rPr>
+              <a:t>归并的两个特点：</a:t>
+            </a:r>
+          </a:p>
+          <a:p>
+            <a:pPr marL="0" indent="0" lvl="0">
+              <a:lnSpc>
+                <a:spcPct val="100000"/>
+              </a:lnSpc>
+              <a:buNone/>
+            </a:pPr>
+            <a:r>
+              <a:rPr lang="zh-CN" sz="1200" dirty="0">
+                <a:solidFill>
+                  <a:srgbClr val="1A1A18"/>
+                </a:solidFill>
+                <a:latin typeface="Segoe UI"/>
+                <a:ea typeface="Noto Sans CJK SC"/>
+                <a:cs typeface="Segoe UI"/>
+              </a:rPr>
+              <a:t>1. 稳定（合并时相等取左边的）；</a:t>
+            </a:r>
+          </a:p>
+          <a:p>
+            <a:pPr marL="0" indent="0" lvl="0">
+              <a:lnSpc>
+                <a:spcPct val="100000"/>
+              </a:lnSpc>
+              <a:buNone/>
+            </a:pPr>
+            <a:r>
+              <a:rPr lang="zh-CN" sz="1200" dirty="0">
+                <a:solidFill>
+                  <a:srgbClr val="1A1A18"/>
+                </a:solidFill>
+                <a:latin typeface="Segoe UI"/>
+                <a:ea typeface="Noto Sans CJK SC"/>
+                <a:cs typeface="Segoe UI"/>
+              </a:rPr>
+              <a:t>2. 最坏也是 O(n log n)，没有快排那种退化。</a:t>
+            </a:r>
+          </a:p>
+          <a:p>
+            <a:pPr marL="0" indent="0" lvl="0">
+              <a:lnSpc>
+                <a:spcPct val="100000"/>
+              </a:lnSpc>
+              <a:buNone/>
+            </a:pPr>
+            <a:r>
+              <a:rPr lang="zh-CN" sz="1200" dirty="0">
+                <a:solidFill>
+                  <a:srgbClr val="1A1A18"/>
+                </a:solidFill>
+                <a:latin typeface="Segoe UI"/>
+                <a:ea typeface="Noto Sans CJK SC"/>
+                <a:cs typeface="Segoe UI"/>
+              </a:rPr>
+              <a:t>代价是需要 O(n) 的额外空间——这是它不如快排流行的主要原因。</a:t>
+            </a:r>
+          </a:p>
+          <a:p>
+            <a:pPr marL="0" indent="0" lvl="0">
+              <a:lnSpc>
+                <a:spcPct val="100000"/>
+              </a:lnSpc>
+              <a:buNone/>
+            </a:pPr>
+            <a:r>
+              <a:rPr lang="zh-CN" sz="1200" dirty="0">
+                <a:solidFill>
+                  <a:srgbClr val="1A1A18"/>
+                </a:solidFill>
+                <a:latin typeface="Segoe UI"/>
+                <a:ea typeface="Noto Sans CJK SC"/>
+                <a:cs typeface="Segoe UI"/>
+              </a:rPr>
+              <a:t>归并还有一个别处没有的好处：它天然适合外排序，因为只需要顺序读写。</a:t>
+            </a:r>
+          </a:p>
+          <a:p>
+            <a:pPr marL="0" indent="0" lvl="0">
+              <a:lnSpc>
+                <a:spcPct val="100000"/>
+              </a:lnSpc>
+              <a:buNone/>
+            </a:pPr>
+            <a:r>
+              <a:rPr lang="zh-CN" sz="1200" dirty="0">
+                <a:solidFill>
+                  <a:srgbClr val="1A1A18"/>
+                </a:solidFill>
+                <a:latin typeface="Segoe UI"/>
+                <a:ea typeface="Noto Sans CJK SC"/>
+                <a:cs typeface="Segoe UI"/>
+              </a:rPr>
+              <a:t>第 9 章全靠它。</a:t>
+            </a:r>
+          </a:p>
+        </p:txBody>
+      </p:sp>
+    </p:spTree>
+  </p:cSld>
+</p:notes>
+</file>
+
+<file path=ppt/notesSlides/notesSlide19.xml><?xml version="1.0" encoding="utf-8"?>
+<p:notes xmlns:a="http://schemas.openxmlformats.org/drawingml/2006/main" xmlns:r="http://schemas.openxmlformats.org/officeDocument/2006/relationships" xmlns:p="http://schemas.openxmlformats.org/presentationml/2006/main">
+  <p:cSld>
+    <p:spTree>
+      <p:nvGrpSpPr>
+        <p:cNvPr id="1" name=""/>
+        <p:cNvGrpSpPr/>
+        <p:nvPr/>
+      </p:nvGrpSpPr>
+      <p:grpSpPr>
+        <a:xfrm>
+          <a:off x="0" y="0"/>
+          <a:ext cx="0" cy="0"/>
+          <a:chOff x="0" y="0"/>
+          <a:chExt cx="0" cy="0"/>
+        </a:xfrm>
+      </p:grpSpPr>
+      <p:sp>
+        <p:nvSpPr>
+          <p:cNvPr id="2" name="备注"/>
+          <p:cNvSpPr>
+            <a:spLocks noGrp="1"/>
+          </p:cNvSpPr>
+          <p:nvPr>
+            <p:ph type="body" idx="1"/>
+          </p:nvPr>
+        </p:nvSpPr>
+        <p:spPr>
+          <a:xfrm>
+            <a:off x="457200" y="3886200"/>
+            <a:ext cx="5943600" cy="4400550"/>
+          </a:xfrm>
+          <a:prstGeom prst="rect">
+            <a:avLst/>
+          </a:prstGeom>
+        </p:spPr>
+        <p:txBody>
+          <a:bodyPr/>
+          <a:lstStyle/>
+          <a:p>
+            <a:pPr marL="0" indent="0" lvl="0">
+              <a:lnSpc>
+                <a:spcPct val="100000"/>
+              </a:lnSpc>
+              <a:buNone/>
+            </a:pPr>
+            <a:r>
+              <a:rPr lang="zh-CN" sz="1200" dirty="0">
+                <a:solidFill>
+                  <a:srgbClr val="1A1A18"/>
+                </a:solidFill>
+                <a:latin typeface="Segoe UI"/>
+                <a:ea typeface="Noto Sans CJK SC"/>
+                <a:cs typeface="Segoe UI"/>
+              </a:rPr>
+              <a:t>桶式排序：关键码范围有限时，开一排桶，直接扔进去，O(n + r)。</a:t>
+            </a:r>
+          </a:p>
+          <a:p>
+            <a:pPr marL="0" indent="0" lvl="0">
+              <a:lnSpc>
+                <a:spcPct val="100000"/>
+              </a:lnSpc>
+              <a:buNone/>
+            </a:pPr>
+            <a:r>
+              <a:rPr lang="zh-CN" sz="1200" dirty="0">
+                <a:solidFill>
+                  <a:srgbClr val="1A1A18"/>
+                </a:solidFill>
+                <a:latin typeface="Segoe UI"/>
+                <a:ea typeface="Noto Sans CJK SC"/>
+                <a:cs typeface="Segoe UI"/>
+              </a:rPr>
+              <a:t>基数排序：把关键码按位拆开，从低位到高位依次做桶式排序。</a:t>
+            </a:r>
+          </a:p>
+          <a:p>
+            <a:pPr marL="0" indent="0" lvl="0">
+              <a:lnSpc>
+                <a:spcPct val="100000"/>
+              </a:lnSpc>
+              <a:buNone/>
+            </a:pPr>
+            <a:r>
+              <a:rPr lang="zh-CN" sz="1200" dirty="0">
+                <a:solidFill>
+                  <a:srgbClr val="1A1A18"/>
+                </a:solidFill>
+                <a:latin typeface="Segoe UI"/>
+                <a:ea typeface="Noto Sans CJK SC"/>
+                <a:cs typeface="Segoe UI"/>
+              </a:rPr>
+              <a:t>d 位、每位 r 个值时是 O(d(n + r))。</a:t>
+            </a:r>
+          </a:p>
+          <a:p>
+            <a:pPr marL="0" indent="0" lvl="0">
+              <a:lnSpc>
+                <a:spcPct val="100000"/>
+              </a:lnSpc>
+              <a:buNone/>
+            </a:pPr>
+            <a:r>
+              <a:rPr lang="zh-CN" sz="1200" dirty="0">
+                <a:solidFill>
+                  <a:srgbClr val="1A1A18"/>
+                </a:solidFill>
+                <a:latin typeface="Segoe UI"/>
+                <a:ea typeface="Noto Sans CJK SC"/>
+                <a:cs typeface="Segoe UI"/>
+              </a:rPr>
+              <a:t>为什么必须从低位开始？因为每一轮的桶式排序必须是稳定的，</a:t>
+            </a:r>
+          </a:p>
+          <a:p>
+            <a:pPr marL="0" indent="0" lvl="0">
+              <a:lnSpc>
+                <a:spcPct val="100000"/>
+              </a:lnSpc>
+              <a:buNone/>
+            </a:pPr>
+            <a:r>
+              <a:rPr lang="zh-CN" sz="1200" dirty="0">
+                <a:solidFill>
+                  <a:srgbClr val="1A1A18"/>
+                </a:solidFill>
+                <a:latin typeface="Segoe UI"/>
+                <a:ea typeface="Noto Sans CJK SC"/>
+                <a:cs typeface="Segoe UI"/>
+              </a:rPr>
+              <a:t>低位的结果才能被高位的排序保留下来。反过来做会把低位的功夫全废掉。</a:t>
+            </a:r>
+          </a:p>
+          <a:p>
+            <a:pPr marL="0" indent="0" lvl="0">
+              <a:lnSpc>
+                <a:spcPct val="100000"/>
+              </a:lnSpc>
+              <a:buNone/>
+            </a:pPr>
+            <a:r>
+              <a:rPr lang="zh-CN" sz="1200" dirty="0">
+                <a:solidFill>
+                  <a:srgbClr val="1A1A18"/>
+                </a:solidFill>
+                <a:latin typeface="Segoe UI"/>
+                <a:ea typeface="Noto Sans CJK SC"/>
+                <a:cs typeface="Segoe UI"/>
+              </a:rPr>
+              <a:t>这一点值得当场问学生。</a:t>
+            </a:r>
+          </a:p>
+        </p:txBody>
+      </p:sp>
+    </p:spTree>
+  </p:cSld>
 </p:notes>
 </file>
 
@@ -392,7 +574,7 @@
           <a:bodyPr/>
           <a:lstStyle/>
           <a:p>
-            <a:pPr marL="0" lvl="0" indent="0">
+            <a:pPr marL="0" indent="0" lvl="0">
               <a:lnSpc>
                 <a:spcPct val="100000"/>
               </a:lnSpc>
@@ -407,11 +589,11 @@
                 <a:ea typeface="Noto Sans CJK SC"/>
                 <a:cs typeface="Segoe UI"/>
               </a:rPr>
-              <a:t>形象说法：像整理手里的扑克牌，抓一张就往左边已经排好的那段里插。</a:t>
-            </a:r>
-          </a:p>
-          <a:p>
-            <a:pPr marL="0" lvl="0" indent="0">
+              <a:t>举个例子：先按成绩排，再按班级用稳定排序排，结果就是「班级内按成绩」。</a:t>
+            </a:r>
+          </a:p>
+          <a:p>
+            <a:pPr marL="0" indent="0" lvl="0">
               <a:lnSpc>
                 <a:spcPct val="100000"/>
               </a:lnSpc>
@@ -426,141 +608,13 @@
                 <a:ea typeface="Noto Sans CJK SC"/>
                 <a:cs typeface="Segoe UI"/>
               </a:rPr>
-              <a:t>最好情况：输入已有序，每张牌比一次就位，O(n)。</a:t>
-            </a:r>
-          </a:p>
-          <a:p>
-            <a:pPr marL="0" lvl="0" indent="0">
-              <a:lnSpc>
-                <a:spcPct val="100000"/>
-              </a:lnSpc>
-              <a:buNone/>
-            </a:pPr>
-            <a:r>
-              <a:rPr lang="zh-CN" sz="1200" dirty="0">
-                <a:solidFill>
-                  <a:srgbClr val="1A1A18"/>
-                </a:solidFill>
-                <a:latin typeface="Segoe UI"/>
-                <a:ea typeface="Noto Sans CJK SC"/>
-                <a:cs typeface="Segoe UI"/>
-              </a:rPr>
-              <a:t>最坏情况：输入逆序，第 i 张要比 i 次，O(n^2)。</a:t>
-            </a:r>
-          </a:p>
-          <a:p>
-            <a:pPr marL="0" lvl="0" indent="0">
-              <a:lnSpc>
-                <a:spcPct val="100000"/>
-              </a:lnSpc>
-              <a:buNone/>
-            </a:pPr>
-            <a:r>
-              <a:rPr lang="zh-CN" sz="1200" dirty="0">
-                <a:solidFill>
-                  <a:srgbClr val="1A1A18"/>
-                </a:solidFill>
-                <a:latin typeface="Segoe UI"/>
-                <a:ea typeface="Noto Sans CJK SC"/>
-                <a:cs typeface="Segoe UI"/>
-              </a:rPr>
-              <a:t>所以说「插入排序是 O(n^2)」对，说「是 Θ(n^2)」就错了。</a:t>
+              <a:t>用不稳定的排序做这件事就得不到想要的结果。</a:t>
             </a:r>
           </a:p>
         </p:txBody>
       </p:sp>
     </p:spTree>
   </p:cSld>
-  <p:clrMapOvr>
-    <a:masterClrMapping/>
-  </p:clrMapOvr>
-</p:notes>
-</file>
-
-<file path=ppt/notesSlides/notesSlide3.xml><?xml version="1.0" encoding="utf-8"?>
-<p:notes xmlns:a="http://schemas.openxmlformats.org/drawingml/2006/main" xmlns:r="http://schemas.openxmlformats.org/officeDocument/2006/relationships" xmlns:p="http://schemas.openxmlformats.org/presentationml/2006/main">
-  <p:cSld>
-    <p:spTree>
-      <p:nvGrpSpPr>
-        <p:cNvPr id="1" name=""/>
-        <p:cNvGrpSpPr/>
-        <p:nvPr/>
-      </p:nvGrpSpPr>
-      <p:grpSpPr>
-        <a:xfrm>
-          <a:off x="0" y="0"/>
-          <a:ext cx="0" cy="0"/>
-          <a:chOff x="0" y="0"/>
-          <a:chExt cx="0" cy="0"/>
-        </a:xfrm>
-      </p:grpSpPr>
-      <p:sp>
-        <p:nvSpPr>
-          <p:cNvPr id="2" name="备注"/>
-          <p:cNvSpPr>
-            <a:spLocks noGrp="1"/>
-          </p:cNvSpPr>
-          <p:nvPr>
-            <p:ph type="body" idx="1"/>
-          </p:nvPr>
-        </p:nvSpPr>
-        <p:spPr>
-          <a:xfrm>
-            <a:off x="457200" y="3886200"/>
-            <a:ext cx="5943600" cy="4400550"/>
-          </a:xfrm>
-          <a:prstGeom prst="rect">
-            <a:avLst/>
-          </a:prstGeom>
-        </p:spPr>
-        <p:txBody>
-          <a:bodyPr/>
-          <a:lstStyle/>
-          <a:p>
-            <a:pPr marL="0" lvl="0" indent="0">
-              <a:lnSpc>
-                <a:spcPct val="100000"/>
-              </a:lnSpc>
-              <a:buNone/>
-            </a:pPr>
-            <a:r>
-              <a:rPr lang="zh-CN" sz="1200" dirty="0">
-                <a:solidFill>
-                  <a:srgbClr val="1A1A18"/>
-                </a:solidFill>
-                <a:latin typeface="Segoe UI"/>
-                <a:ea typeface="Noto Sans CJK SC"/>
-                <a:cs typeface="Segoe UI"/>
-              </a:rPr>
-              <a:t>这是第 1 章「渐进分析不是全部」的一个实例，可以回头指一下。</a:t>
-            </a:r>
-          </a:p>
-          <a:p>
-            <a:pPr marL="0" lvl="0" indent="0">
-              <a:lnSpc>
-                <a:spcPct val="100000"/>
-              </a:lnSpc>
-              <a:buNone/>
-            </a:pPr>
-            <a:r>
-              <a:rPr lang="zh-CN" sz="1200" dirty="0">
-                <a:solidFill>
-                  <a:srgbClr val="1A1A18"/>
-                </a:solidFill>
-                <a:latin typeface="Segoe UI"/>
-                <a:ea typeface="Noto Sans CJK SC"/>
-                <a:cs typeface="Segoe UI"/>
-              </a:rPr>
-              <a:t>标准库的 sort 内部就是这么做的（introsort：快排 + 堆排 + 插入排序）。</a:t>
-            </a:r>
-          </a:p>
-        </p:txBody>
-      </p:sp>
-    </p:spTree>
-  </p:cSld>
-  <p:clrMapOvr>
-    <a:masterClrMapping/>
-  </p:clrMapOvr>
 </p:notes>
 </file>
 
@@ -604,7 +658,7 @@
           <a:bodyPr/>
           <a:lstStyle/>
           <a:p>
-            <a:pPr marL="0" lvl="0" indent="0">
+            <a:pPr marL="0" indent="0" lvl="0">
               <a:lnSpc>
                 <a:spcPct val="100000"/>
               </a:lnSpc>
@@ -619,11 +673,11 @@
                 <a:ea typeface="Noto Sans CJK SC"/>
                 <a:cs typeface="Segoe UI"/>
               </a:rPr>
-              <a:t>两步：先把整个数组建成最大堆，再反复「把根和末尾交换、堆长度减一、下沉」。</a:t>
-            </a:r>
-          </a:p>
-          <a:p>
-            <a:pPr marL="0" lvl="0" indent="0">
+              <a:t>形象说法：像整理手里的扑克牌，抓一张就往左边已经排好的那段里插。</a:t>
+            </a:r>
+          </a:p>
+          <a:p>
+            <a:pPr marL="0" indent="0" lvl="0">
               <a:lnSpc>
                 <a:spcPct val="100000"/>
               </a:lnSpc>
@@ -638,11 +692,11 @@
                 <a:ea typeface="Noto Sans CJK SC"/>
                 <a:cs typeface="Segoe UI"/>
               </a:rPr>
-              <a:t>关键点：建堆是 O(n)（第 5 章证过），所以总代价 O(n log n) 里那个 log n</a:t>
-            </a:r>
-          </a:p>
-          <a:p>
-            <a:pPr marL="0" lvl="0" indent="0">
+              <a:t>最好情况：输入已有序，每张牌比一次就位，O(n)。</a:t>
+            </a:r>
+          </a:p>
+          <a:p>
+            <a:pPr marL="0" indent="0" lvl="0">
               <a:lnSpc>
                 <a:spcPct val="100000"/>
               </a:lnSpc>
@@ -657,11 +711,11 @@
                 <a:ea typeface="Noto Sans CJK SC"/>
                 <a:cs typeface="Segoe UI"/>
               </a:rPr>
-              <a:t>全部来自后面 n 次取最大值。</a:t>
-            </a:r>
-          </a:p>
-          <a:p>
-            <a:pPr marL="0" lvl="0" indent="0">
+              <a:t>最坏情况：输入逆序，第 i 张要比 i 次，O(n^2)。</a:t>
+            </a:r>
+          </a:p>
+          <a:p>
+            <a:pPr marL="0" indent="0" lvl="0">
               <a:lnSpc>
                 <a:spcPct val="100000"/>
               </a:lnSpc>
@@ -676,35 +730,13 @@
                 <a:ea typeface="Noto Sans CJK SC"/>
                 <a:cs typeface="Segoe UI"/>
               </a:rPr>
-              <a:t>优点：就地、最坏也是 O(n log n)。缺点：不稳定，而且缓存局部性差</a:t>
-            </a:r>
-          </a:p>
-          <a:p>
-            <a:pPr marL="0" lvl="0" indent="0">
-              <a:lnSpc>
-                <a:spcPct val="100000"/>
-              </a:lnSpc>
-              <a:buNone/>
-            </a:pPr>
-            <a:r>
-              <a:rPr lang="zh-CN" sz="1200" dirty="0">
-                <a:solidFill>
-                  <a:srgbClr val="1A1A18"/>
-                </a:solidFill>
-                <a:latin typeface="Segoe UI"/>
-                <a:ea typeface="Noto Sans CJK SC"/>
-                <a:cs typeface="Segoe UI"/>
-              </a:rPr>
-              <a:t>（下标跳来跳去），实际常数往往比快排大。</a:t>
+              <a:t>所以说「插入排序是 O(n^2)」对，说「是 Θ(n^2)」就错了。</a:t>
             </a:r>
           </a:p>
         </p:txBody>
       </p:sp>
     </p:spTree>
   </p:cSld>
-  <p:clrMapOvr>
-    <a:masterClrMapping/>
-  </p:clrMapOvr>
 </p:notes>
 </file>
 
@@ -748,7 +780,7 @@
           <a:bodyPr/>
           <a:lstStyle/>
           <a:p>
-            <a:pPr marL="0" lvl="0" indent="0">
+            <a:pPr marL="0" indent="0" lvl="0">
               <a:lnSpc>
                 <a:spcPct val="100000"/>
               </a:lnSpc>
@@ -763,11 +795,11 @@
                 <a:ea typeface="Noto Sans CJK SC"/>
                 <a:cs typeface="Segoe UI"/>
               </a:rPr>
-              <a:t>分割（partition）是全部难点。这里用的是最直白的写法：</a:t>
-            </a:r>
-          </a:p>
-          <a:p>
-            <a:pPr marL="0" lvl="0" indent="0">
+              <a:t>这是第 1 章「渐进分析不是全部」的一个实例，可以回头指一下。</a:t>
+            </a:r>
+          </a:p>
+          <a:p>
+            <a:pPr marL="0" indent="0" lvl="0">
               <a:lnSpc>
                 <a:spcPct val="100000"/>
               </a:lnSpc>
@@ -782,58 +814,17 @@
                 <a:ea typeface="Noto Sans CJK SC"/>
                 <a:cs typeface="Segoe UI"/>
               </a:rPr>
-              <a:t>boundary 左边全是小于轴值的，扫一遍把小的换过去，最后把轴值换到分界点。</a:t>
-            </a:r>
-          </a:p>
-          <a:p>
-            <a:pPr marL="0" lvl="0" indent="0">
-              <a:lnSpc>
-                <a:spcPct val="100000"/>
-              </a:lnSpc>
-              <a:buNone/>
-            </a:pPr>
-            <a:r>
-              <a:rPr lang="zh-CN" sz="1200" dirty="0">
-                <a:solidFill>
-                  <a:srgbClr val="1A1A18"/>
-                </a:solidFill>
-                <a:latin typeface="Segoe UI"/>
-                <a:ea typeface="Noto Sans CJK SC"/>
-                <a:cs typeface="Segoe UI"/>
-              </a:rPr>
-              <a:t>平均 O(n log n)，最坏 O(n^2)——输入已经有序而轴值取末尾时，</a:t>
-            </a:r>
-          </a:p>
-          <a:p>
-            <a:pPr marL="0" lvl="0" indent="0">
-              <a:lnSpc>
-                <a:spcPct val="100000"/>
-              </a:lnSpc>
-              <a:buNone/>
-            </a:pPr>
-            <a:r>
-              <a:rPr lang="zh-CN" sz="1200" dirty="0">
-                <a:solidFill>
-                  <a:srgbClr val="1A1A18"/>
-                </a:solidFill>
-                <a:latin typeface="Segoe UI"/>
-                <a:ea typeface="Noto Sans CJK SC"/>
-                <a:cs typeface="Segoe UI"/>
-              </a:rPr>
-              <a:t>每次只分出一个元素，递归深度 n。</a:t>
+              <a:t>标准库的 sort 内部就是这么做的（introsort：快排 + 堆排 + 插入排序）。</a:t>
             </a:r>
           </a:p>
         </p:txBody>
       </p:sp>
     </p:spTree>
   </p:cSld>
-  <p:clrMapOvr>
-    <a:masterClrMapping/>
-  </p:clrMapOvr>
 </p:notes>
 </file>
 
-<file path=ppt/notesSlides/notesSlide6.xml><?xml version="1.0" encoding="utf-8"?>
+<file path=ppt/notesSlides/notesSlide9.xml><?xml version="1.0" encoding="utf-8"?>
 <p:notes xmlns:a="http://schemas.openxmlformats.org/drawingml/2006/main" xmlns:r="http://schemas.openxmlformats.org/officeDocument/2006/relationships" xmlns:p="http://schemas.openxmlformats.org/presentationml/2006/main">
   <p:cSld>
     <p:spTree>
@@ -873,7 +864,7 @@
           <a:bodyPr/>
           <a:lstStyle/>
           <a:p>
-            <a:pPr marL="0" lvl="0" indent="0">
+            <a:pPr marL="0" indent="0" lvl="0">
               <a:lnSpc>
                 <a:spcPct val="100000"/>
               </a:lnSpc>
@@ -888,11 +879,11 @@
                 <a:ea typeface="Noto Sans CJK SC"/>
                 <a:cs typeface="Segoe UI"/>
               </a:rPr>
-              <a:t>分治的另一种切法：快排是「先分好再递归」，归并是「先递归再合并」。</a:t>
-            </a:r>
-          </a:p>
-          <a:p>
-            <a:pPr marL="0" lvl="0" indent="0">
+              <a:t>两步：先把整个数组建成最大堆，再反复「把根和末尾交换、堆长度减一、下沉」。</a:t>
+            </a:r>
+          </a:p>
+          <a:p>
+            <a:pPr marL="0" indent="0" lvl="0">
               <a:lnSpc>
                 <a:spcPct val="100000"/>
               </a:lnSpc>
@@ -907,11 +898,11 @@
                 <a:ea typeface="Noto Sans CJK SC"/>
                 <a:cs typeface="Segoe UI"/>
               </a:rPr>
-              <a:t>归并的两个特点：</a:t>
-            </a:r>
-          </a:p>
-          <a:p>
-            <a:pPr marL="0" lvl="0" indent="0">
+              <a:t>关键点：建堆是 O(n)（第 5 章证过），所以总代价 O(n log n) 里那个 log n</a:t>
+            </a:r>
+          </a:p>
+          <a:p>
+            <a:pPr marL="0" indent="0" lvl="0">
               <a:lnSpc>
                 <a:spcPct val="100000"/>
               </a:lnSpc>
@@ -926,11 +917,11 @@
                 <a:ea typeface="Noto Sans CJK SC"/>
                 <a:cs typeface="Segoe UI"/>
               </a:rPr>
-              <a:t>1. 稳定（合并时相等取左边的）；</a:t>
-            </a:r>
-          </a:p>
-          <a:p>
-            <a:pPr marL="0" lvl="0" indent="0">
+              <a:t>全部来自后面 n 次取最大值。</a:t>
+            </a:r>
+          </a:p>
+          <a:p>
+            <a:pPr marL="0" indent="0" lvl="0">
               <a:lnSpc>
                 <a:spcPct val="100000"/>
               </a:lnSpc>
@@ -945,11 +936,11 @@
                 <a:ea typeface="Noto Sans CJK SC"/>
                 <a:cs typeface="Segoe UI"/>
               </a:rPr>
-              <a:t>2. 最坏也是 O(n log n)，没有快排那种退化。</a:t>
-            </a:r>
-          </a:p>
-          <a:p>
-            <a:pPr marL="0" lvl="0" indent="0">
+              <a:t>优点：就地、最坏也是 O(n log n)。缺点：不稳定，而且缓存局部性差</a:t>
+            </a:r>
+          </a:p>
+          <a:p>
+            <a:pPr marL="0" indent="0" lvl="0">
               <a:lnSpc>
                 <a:spcPct val="100000"/>
               </a:lnSpc>
@@ -964,217 +955,13 @@
                 <a:ea typeface="Noto Sans CJK SC"/>
                 <a:cs typeface="Segoe UI"/>
               </a:rPr>
-              <a:t>代价是需要 O(n) 的额外空间——这是它不如快排流行的主要原因。</a:t>
-            </a:r>
-          </a:p>
-          <a:p>
-            <a:pPr marL="0" lvl="0" indent="0">
-              <a:lnSpc>
-                <a:spcPct val="100000"/>
-              </a:lnSpc>
-              <a:buNone/>
-            </a:pPr>
-            <a:r>
-              <a:rPr lang="zh-CN" sz="1200" dirty="0">
-                <a:solidFill>
-                  <a:srgbClr val="1A1A18"/>
-                </a:solidFill>
-                <a:latin typeface="Segoe UI"/>
-                <a:ea typeface="Noto Sans CJK SC"/>
-                <a:cs typeface="Segoe UI"/>
-              </a:rPr>
-              <a:t>归并还有一个别处没有的好处：它天然适合外排序，因为只需要顺序读写。</a:t>
-            </a:r>
-          </a:p>
-          <a:p>
-            <a:pPr marL="0" lvl="0" indent="0">
-              <a:lnSpc>
-                <a:spcPct val="100000"/>
-              </a:lnSpc>
-              <a:buNone/>
-            </a:pPr>
-            <a:r>
-              <a:rPr lang="zh-CN" sz="1200" dirty="0">
-                <a:solidFill>
-                  <a:srgbClr val="1A1A18"/>
-                </a:solidFill>
-                <a:latin typeface="Segoe UI"/>
-                <a:ea typeface="Noto Sans CJK SC"/>
-                <a:cs typeface="Segoe UI"/>
-              </a:rPr>
-              <a:t>第 9 章全靠它。</a:t>
+              <a:t>（下标跳来跳去），实际常数往往比快排大。</a:t>
             </a:r>
           </a:p>
         </p:txBody>
       </p:sp>
     </p:spTree>
   </p:cSld>
-  <p:clrMapOvr>
-    <a:masterClrMapping/>
-  </p:clrMapOvr>
-</p:notes>
-</file>
-
-<file path=ppt/notesSlides/notesSlide7.xml><?xml version="1.0" encoding="utf-8"?>
-<p:notes xmlns:a="http://schemas.openxmlformats.org/drawingml/2006/main" xmlns:r="http://schemas.openxmlformats.org/officeDocument/2006/relationships" xmlns:p="http://schemas.openxmlformats.org/presentationml/2006/main">
-  <p:cSld>
-    <p:spTree>
-      <p:nvGrpSpPr>
-        <p:cNvPr id="1" name=""/>
-        <p:cNvGrpSpPr/>
-        <p:nvPr/>
-      </p:nvGrpSpPr>
-      <p:grpSpPr>
-        <a:xfrm>
-          <a:off x="0" y="0"/>
-          <a:ext cx="0" cy="0"/>
-          <a:chOff x="0" y="0"/>
-          <a:chExt cx="0" cy="0"/>
-        </a:xfrm>
-      </p:grpSpPr>
-      <p:sp>
-        <p:nvSpPr>
-          <p:cNvPr id="2" name="备注"/>
-          <p:cNvSpPr>
-            <a:spLocks noGrp="1"/>
-          </p:cNvSpPr>
-          <p:nvPr>
-            <p:ph type="body" idx="1"/>
-          </p:nvPr>
-        </p:nvSpPr>
-        <p:spPr>
-          <a:xfrm>
-            <a:off x="457200" y="3886200"/>
-            <a:ext cx="5943600" cy="4400550"/>
-          </a:xfrm>
-          <a:prstGeom prst="rect">
-            <a:avLst/>
-          </a:prstGeom>
-        </p:spPr>
-        <p:txBody>
-          <a:bodyPr/>
-          <a:lstStyle/>
-          <a:p>
-            <a:pPr marL="0" lvl="0" indent="0">
-              <a:lnSpc>
-                <a:spcPct val="100000"/>
-              </a:lnSpc>
-              <a:buNone/>
-            </a:pPr>
-            <a:r>
-              <a:rPr lang="zh-CN" sz="1200" dirty="0">
-                <a:solidFill>
-                  <a:srgbClr val="1A1A18"/>
-                </a:solidFill>
-                <a:latin typeface="Segoe UI"/>
-                <a:ea typeface="Noto Sans CJK SC"/>
-                <a:cs typeface="Segoe UI"/>
-              </a:rPr>
-              <a:t>桶式排序：关键码范围有限时，开一排桶，直接扔进去，O(n + r)。</a:t>
-            </a:r>
-          </a:p>
-          <a:p>
-            <a:pPr marL="0" lvl="0" indent="0">
-              <a:lnSpc>
-                <a:spcPct val="100000"/>
-              </a:lnSpc>
-              <a:buNone/>
-            </a:pPr>
-            <a:r>
-              <a:rPr lang="zh-CN" sz="1200" dirty="0">
-                <a:solidFill>
-                  <a:srgbClr val="1A1A18"/>
-                </a:solidFill>
-                <a:latin typeface="Segoe UI"/>
-                <a:ea typeface="Noto Sans CJK SC"/>
-                <a:cs typeface="Segoe UI"/>
-              </a:rPr>
-              <a:t>基数排序：把关键码按位拆开，从低位到高位依次做桶式排序。</a:t>
-            </a:r>
-          </a:p>
-          <a:p>
-            <a:pPr marL="0" lvl="0" indent="0">
-              <a:lnSpc>
-                <a:spcPct val="100000"/>
-              </a:lnSpc>
-              <a:buNone/>
-            </a:pPr>
-            <a:r>
-              <a:rPr lang="zh-CN" sz="1200" dirty="0">
-                <a:solidFill>
-                  <a:srgbClr val="1A1A18"/>
-                </a:solidFill>
-                <a:latin typeface="Segoe UI"/>
-                <a:ea typeface="Noto Sans CJK SC"/>
-                <a:cs typeface="Segoe UI"/>
-              </a:rPr>
-              <a:t>d 位、每位 r 个值时是 O(d(n + r))。</a:t>
-            </a:r>
-          </a:p>
-          <a:p>
-            <a:pPr marL="0" lvl="0" indent="0">
-              <a:lnSpc>
-                <a:spcPct val="100000"/>
-              </a:lnSpc>
-              <a:buNone/>
-            </a:pPr>
-            <a:r>
-              <a:rPr lang="zh-CN" sz="1200" dirty="0">
-                <a:solidFill>
-                  <a:srgbClr val="1A1A18"/>
-                </a:solidFill>
-                <a:latin typeface="Segoe UI"/>
-                <a:ea typeface="Noto Sans CJK SC"/>
-                <a:cs typeface="Segoe UI"/>
-              </a:rPr>
-              <a:t>为什么必须从低位开始？因为每一轮的桶式排序必须是稳定的，</a:t>
-            </a:r>
-          </a:p>
-          <a:p>
-            <a:pPr marL="0" lvl="0" indent="0">
-              <a:lnSpc>
-                <a:spcPct val="100000"/>
-              </a:lnSpc>
-              <a:buNone/>
-            </a:pPr>
-            <a:r>
-              <a:rPr lang="zh-CN" sz="1200" dirty="0">
-                <a:solidFill>
-                  <a:srgbClr val="1A1A18"/>
-                </a:solidFill>
-                <a:latin typeface="Segoe UI"/>
-                <a:ea typeface="Noto Sans CJK SC"/>
-                <a:cs typeface="Segoe UI"/>
-              </a:rPr>
-              <a:t>低位的结果才能被高位的排序保留下来。反过来做会把低位的功夫全废掉。</a:t>
-            </a:r>
-          </a:p>
-          <a:p>
-            <a:pPr marL="0" lvl="0" indent="0">
-              <a:lnSpc>
-                <a:spcPct val="100000"/>
-              </a:lnSpc>
-              <a:buNone/>
-            </a:pPr>
-            <a:r>
-              <a:rPr lang="zh-CN" sz="1200" dirty="0">
-                <a:solidFill>
-                  <a:srgbClr val="1A1A18"/>
-                </a:solidFill>
-                <a:latin typeface="Segoe UI"/>
-                <a:ea typeface="Noto Sans CJK SC"/>
-                <a:cs typeface="Segoe UI"/>
-              </a:rPr>
-              <a:t>这一点值得当场问学生。</a:t>
-            </a:r>
-          </a:p>
-        </p:txBody>
-      </p:sp>
-    </p:spTree>
-  </p:cSld>
-  <p:clrMapOvr>
-    <a:masterClrMapping/>
-  </p:clrMapOvr>
 </p:notes>
 </file>
 
@@ -1197,20 +984,12 @@
       </p:grpSpPr>
     </p:spTree>
   </p:cSld>
-  <p:clrMapOvr>
-    <a:masterClrMapping/>
-  </p:clrMapOvr>
 </p:sldLayout>
 </file>
 
 <file path=ppt/slideMasters/slideMaster1.xml><?xml version="1.0" encoding="utf-8"?>
 <p:sldMaster xmlns:a="http://schemas.openxmlformats.org/drawingml/2006/main" xmlns:r="http://schemas.openxmlformats.org/officeDocument/2006/relationships" xmlns:p="http://schemas.openxmlformats.org/presentationml/2006/main">
   <p:cSld>
-    <p:bg>
-      <p:bgRef idx="1001">
-        <a:schemeClr val="bg1"/>
-      </p:bgRef>
-    </p:bg>
     <p:spTree>
       <p:nvGrpSpPr>
         <p:cNvPr id="1" name=""/>
@@ -1231,286 +1010,6 @@
   <p:sldLayoutIdLst>
     <p:sldLayoutId id="2147483649" r:id="rId1"/>
   </p:sldLayoutIdLst>
-  <p:txStyles>
-    <p:titleStyle>
-      <a:lvl1pPr algn="l" defTabSz="914400" rtl="0" eaLnBrk="1" latinLnBrk="0" hangingPunct="1">
-        <a:lnSpc>
-          <a:spcPct val="90000"/>
-        </a:lnSpc>
-        <a:spcBef>
-          <a:spcPct val="0"/>
-        </a:spcBef>
-        <a:buNone/>
-        <a:defRPr sz="4400" kern="1200">
-          <a:solidFill>
-            <a:schemeClr val="tx1"/>
-          </a:solidFill>
-          <a:latin typeface="+mj-lt"/>
-          <a:ea typeface="+mj-ea"/>
-          <a:cs typeface="+mj-cs"/>
-        </a:defRPr>
-      </a:lvl1pPr>
-    </p:titleStyle>
-    <p:bodyStyle>
-      <a:lvl1pPr marL="228600" indent="-228600" algn="l" defTabSz="914400" rtl="0" eaLnBrk="1" latinLnBrk="0" hangingPunct="1">
-        <a:lnSpc>
-          <a:spcPct val="90000"/>
-        </a:lnSpc>
-        <a:spcBef>
-          <a:spcPts val="1000"/>
-        </a:spcBef>
-        <a:buFont typeface="Arial" panose="020B0604020202020204" pitchFamily="34" charset="0"/>
-        <a:buChar char="•"/>
-        <a:defRPr sz="2800" kern="1200">
-          <a:solidFill>
-            <a:schemeClr val="tx1"/>
-          </a:solidFill>
-          <a:latin typeface="+mn-lt"/>
-          <a:ea typeface="+mn-ea"/>
-          <a:cs typeface="+mn-cs"/>
-        </a:defRPr>
-      </a:lvl1pPr>
-      <a:lvl2pPr marL="685800" indent="-228600" algn="l" defTabSz="914400" rtl="0" eaLnBrk="1" latinLnBrk="0" hangingPunct="1">
-        <a:lnSpc>
-          <a:spcPct val="90000"/>
-        </a:lnSpc>
-        <a:spcBef>
-          <a:spcPts val="500"/>
-        </a:spcBef>
-        <a:buFont typeface="Arial" panose="020B0604020202020204" pitchFamily="34" charset="0"/>
-        <a:buChar char="•"/>
-        <a:defRPr sz="2400" kern="1200">
-          <a:solidFill>
-            <a:schemeClr val="tx1"/>
-          </a:solidFill>
-          <a:latin typeface="+mn-lt"/>
-          <a:ea typeface="+mn-ea"/>
-          <a:cs typeface="+mn-cs"/>
-        </a:defRPr>
-      </a:lvl2pPr>
-      <a:lvl3pPr marL="1143000" indent="-228600" algn="l" defTabSz="914400" rtl="0" eaLnBrk="1" latinLnBrk="0" hangingPunct="1">
-        <a:lnSpc>
-          <a:spcPct val="90000"/>
-        </a:lnSpc>
-        <a:spcBef>
-          <a:spcPts val="500"/>
-        </a:spcBef>
-        <a:buFont typeface="Arial" panose="020B0604020202020204" pitchFamily="34" charset="0"/>
-        <a:buChar char="•"/>
-        <a:defRPr sz="2000" kern="1200">
-          <a:solidFill>
-            <a:schemeClr val="tx1"/>
-          </a:solidFill>
-          <a:latin typeface="+mn-lt"/>
-          <a:ea typeface="+mn-ea"/>
-          <a:cs typeface="+mn-cs"/>
-        </a:defRPr>
-      </a:lvl3pPr>
-      <a:lvl4pPr marL="1600200" indent="-228600" algn="l" defTabSz="914400" rtl="0" eaLnBrk="1" latinLnBrk="0" hangingPunct="1">
-        <a:lnSpc>
-          <a:spcPct val="90000"/>
-        </a:lnSpc>
-        <a:spcBef>
-          <a:spcPts val="500"/>
-        </a:spcBef>
-        <a:buFont typeface="Arial" panose="020B0604020202020204" pitchFamily="34" charset="0"/>
-        <a:buChar char="•"/>
-        <a:defRPr sz="1800" kern="1200">
-          <a:solidFill>
-            <a:schemeClr val="tx1"/>
-          </a:solidFill>
-          <a:latin typeface="+mn-lt"/>
-          <a:ea typeface="+mn-ea"/>
-          <a:cs typeface="+mn-cs"/>
-        </a:defRPr>
-      </a:lvl4pPr>
-      <a:lvl5pPr marL="2057400" indent="-228600" algn="l" defTabSz="914400" rtl="0" eaLnBrk="1" latinLnBrk="0" hangingPunct="1">
-        <a:lnSpc>
-          <a:spcPct val="90000"/>
-        </a:lnSpc>
-        <a:spcBef>
-          <a:spcPts val="500"/>
-        </a:spcBef>
-        <a:buFont typeface="Arial" panose="020B0604020202020204" pitchFamily="34" charset="0"/>
-        <a:buChar char="•"/>
-        <a:defRPr sz="1800" kern="1200">
-          <a:solidFill>
-            <a:schemeClr val="tx1"/>
-          </a:solidFill>
-          <a:latin typeface="+mn-lt"/>
-          <a:ea typeface="+mn-ea"/>
-          <a:cs typeface="+mn-cs"/>
-        </a:defRPr>
-      </a:lvl5pPr>
-      <a:lvl6pPr marL="2514600" indent="-228600" algn="l" defTabSz="914400" rtl="0" eaLnBrk="1" latinLnBrk="0" hangingPunct="1">
-        <a:lnSpc>
-          <a:spcPct val="90000"/>
-        </a:lnSpc>
-        <a:spcBef>
-          <a:spcPts val="500"/>
-        </a:spcBef>
-        <a:buFont typeface="Arial" panose="020B0604020202020204" pitchFamily="34" charset="0"/>
-        <a:buChar char="•"/>
-        <a:defRPr sz="1800" kern="1200">
-          <a:solidFill>
-            <a:schemeClr val="tx1"/>
-          </a:solidFill>
-          <a:latin typeface="+mn-lt"/>
-          <a:ea typeface="+mn-ea"/>
-          <a:cs typeface="+mn-cs"/>
-        </a:defRPr>
-      </a:lvl6pPr>
-      <a:lvl7pPr marL="2971800" indent="-228600" algn="l" defTabSz="914400" rtl="0" eaLnBrk="1" latinLnBrk="0" hangingPunct="1">
-        <a:lnSpc>
-          <a:spcPct val="90000"/>
-        </a:lnSpc>
-        <a:spcBef>
-          <a:spcPts val="500"/>
-        </a:spcBef>
-        <a:buFont typeface="Arial" panose="020B0604020202020204" pitchFamily="34" charset="0"/>
-        <a:buChar char="•"/>
-        <a:defRPr sz="1800" kern="1200">
-          <a:solidFill>
-            <a:schemeClr val="tx1"/>
-          </a:solidFill>
-          <a:latin typeface="+mn-lt"/>
-          <a:ea typeface="+mn-ea"/>
-          <a:cs typeface="+mn-cs"/>
-        </a:defRPr>
-      </a:lvl7pPr>
-      <a:lvl8pPr marL="3429000" indent="-228600" algn="l" defTabSz="914400" rtl="0" eaLnBrk="1" latinLnBrk="0" hangingPunct="1">
-        <a:lnSpc>
-          <a:spcPct val="90000"/>
-        </a:lnSpc>
-        <a:spcBef>
-          <a:spcPts val="500"/>
-        </a:spcBef>
-        <a:buFont typeface="Arial" panose="020B0604020202020204" pitchFamily="34" charset="0"/>
-        <a:buChar char="•"/>
-        <a:defRPr sz="1800" kern="1200">
-          <a:solidFill>
-            <a:schemeClr val="tx1"/>
-          </a:solidFill>
-          <a:latin typeface="+mn-lt"/>
-          <a:ea typeface="+mn-ea"/>
-          <a:cs typeface="+mn-cs"/>
-        </a:defRPr>
-      </a:lvl8pPr>
-      <a:lvl9pPr marL="3886200" indent="-228600" algn="l" defTabSz="914400" rtl="0" eaLnBrk="1" latinLnBrk="0" hangingPunct="1">
-        <a:lnSpc>
-          <a:spcPct val="90000"/>
-        </a:lnSpc>
-        <a:spcBef>
-          <a:spcPts val="500"/>
-        </a:spcBef>
-        <a:buFont typeface="Arial" panose="020B0604020202020204" pitchFamily="34" charset="0"/>
-        <a:buChar char="•"/>
-        <a:defRPr sz="1800" kern="1200">
-          <a:solidFill>
-            <a:schemeClr val="tx1"/>
-          </a:solidFill>
-          <a:latin typeface="+mn-lt"/>
-          <a:ea typeface="+mn-ea"/>
-          <a:cs typeface="+mn-cs"/>
-        </a:defRPr>
-      </a:lvl9pPr>
-    </p:bodyStyle>
-    <p:otherStyle>
-      <a:defPPr>
-        <a:defRPr lang="en-CN"/>
-      </a:defPPr>
-      <a:lvl1pPr marL="0" algn="l" defTabSz="914400" rtl="0" eaLnBrk="1" latinLnBrk="0" hangingPunct="1">
-        <a:defRPr sz="1800" kern="1200">
-          <a:solidFill>
-            <a:schemeClr val="tx1"/>
-          </a:solidFill>
-          <a:latin typeface="+mn-lt"/>
-          <a:ea typeface="+mn-ea"/>
-          <a:cs typeface="+mn-cs"/>
-        </a:defRPr>
-      </a:lvl1pPr>
-      <a:lvl2pPr marL="457200" algn="l" defTabSz="914400" rtl="0" eaLnBrk="1" latinLnBrk="0" hangingPunct="1">
-        <a:defRPr sz="1800" kern="1200">
-          <a:solidFill>
-            <a:schemeClr val="tx1"/>
-          </a:solidFill>
-          <a:latin typeface="+mn-lt"/>
-          <a:ea typeface="+mn-ea"/>
-          <a:cs typeface="+mn-cs"/>
-        </a:defRPr>
-      </a:lvl2pPr>
-      <a:lvl3pPr marL="914400" algn="l" defTabSz="914400" rtl="0" eaLnBrk="1" latinLnBrk="0" hangingPunct="1">
-        <a:defRPr sz="1800" kern="1200">
-          <a:solidFill>
-            <a:schemeClr val="tx1"/>
-          </a:solidFill>
-          <a:latin typeface="+mn-lt"/>
-          <a:ea typeface="+mn-ea"/>
-          <a:cs typeface="+mn-cs"/>
-        </a:defRPr>
-      </a:lvl3pPr>
-      <a:lvl4pPr marL="1371600" algn="l" defTabSz="914400" rtl="0" eaLnBrk="1" latinLnBrk="0" hangingPunct="1">
-        <a:defRPr sz="1800" kern="1200">
-          <a:solidFill>
-            <a:schemeClr val="tx1"/>
-          </a:solidFill>
-          <a:latin typeface="+mn-lt"/>
-          <a:ea typeface="+mn-ea"/>
-          <a:cs typeface="+mn-cs"/>
-        </a:defRPr>
-      </a:lvl4pPr>
-      <a:lvl5pPr marL="1828800" algn="l" defTabSz="914400" rtl="0" eaLnBrk="1" latinLnBrk="0" hangingPunct="1">
-        <a:defRPr sz="1800" kern="1200">
-          <a:solidFill>
-            <a:schemeClr val="tx1"/>
-          </a:solidFill>
-          <a:latin typeface="+mn-lt"/>
-          <a:ea typeface="+mn-ea"/>
-          <a:cs typeface="+mn-cs"/>
-        </a:defRPr>
-      </a:lvl5pPr>
-      <a:lvl6pPr marL="2286000" algn="l" defTabSz="914400" rtl="0" eaLnBrk="1" latinLnBrk="0" hangingPunct="1">
-        <a:defRPr sz="1800" kern="1200">
-          <a:solidFill>
-            <a:schemeClr val="tx1"/>
-          </a:solidFill>
-          <a:latin typeface="+mn-lt"/>
-          <a:ea typeface="+mn-ea"/>
-          <a:cs typeface="+mn-cs"/>
-        </a:defRPr>
-      </a:lvl6pPr>
-      <a:lvl7pPr marL="2743200" algn="l" defTabSz="914400" rtl="0" eaLnBrk="1" latinLnBrk="0" hangingPunct="1">
-        <a:defRPr sz="1800" kern="1200">
-          <a:solidFill>
-            <a:schemeClr val="tx1"/>
-          </a:solidFill>
-          <a:latin typeface="+mn-lt"/>
-          <a:ea typeface="+mn-ea"/>
-          <a:cs typeface="+mn-cs"/>
-        </a:defRPr>
-      </a:lvl7pPr>
-      <a:lvl8pPr marL="3200400" algn="l" defTabSz="914400" rtl="0" eaLnBrk="1" latinLnBrk="0" hangingPunct="1">
-        <a:defRPr sz="1800" kern="1200">
-          <a:solidFill>
-            <a:schemeClr val="tx1"/>
-          </a:solidFill>
-          <a:latin typeface="+mn-lt"/>
-          <a:ea typeface="+mn-ea"/>
-          <a:cs typeface="+mn-cs"/>
-        </a:defRPr>
-      </a:lvl8pPr>
-      <a:lvl9pPr marL="3657600" algn="l" defTabSz="914400" rtl="0" eaLnBrk="1" latinLnBrk="0" hangingPunct="1">
-        <a:defRPr sz="1800" kern="1200">
-          <a:solidFill>
-            <a:schemeClr val="tx1"/>
-          </a:solidFill>
-          <a:latin typeface="+mn-lt"/>
-          <a:ea typeface="+mn-ea"/>
-          <a:cs typeface="+mn-cs"/>
-        </a:defRPr>
-      </a:lvl9pPr>
-    </p:otherStyle>
-  </p:txStyles>
 </p:sldMaster>
 </file>
 
@@ -1553,14 +1052,14 @@
           </a:bodyPr>
           <a:lstStyle/>
           <a:p>
-            <a:pPr marL="0" lvl="0" indent="0" algn="ctr">
-              <a:lnSpc>
-                <a:spcPct val="100000"/>
-              </a:lnSpc>
-              <a:buNone/>
-            </a:pPr>
-            <a:r>
-              <a:rPr lang="zh-CN" sz="4000" b="1" dirty="0">
+            <a:pPr marL="0" indent="0" lvl="0" algn="ctr">
+              <a:lnSpc>
+                <a:spcPct val="100000"/>
+              </a:lnSpc>
+              <a:buNone/>
+            </a:pPr>
+            <a:r>
+              <a:rPr lang="zh-CN" sz="4000" dirty="0" b="1">
                 <a:solidFill>
                   <a:srgbClr val="1A1A18"/>
                 </a:solidFill>
@@ -1597,9 +1096,7 @@
         <p:txBody>
           <a:bodyPr/>
           <a:lstStyle/>
-          <a:p>
-            <a:endParaRPr/>
-          </a:p>
+          <a:p/>
         </p:txBody>
       </p:sp>
       <p:sp>
@@ -1624,7 +1121,7 @@
           </a:bodyPr>
           <a:lstStyle/>
           <a:p>
-            <a:pPr marL="0" lvl="0" indent="0" algn="ctr">
+            <a:pPr marL="0" indent="0" lvl="0" algn="ctr">
               <a:lnSpc>
                 <a:spcPct val="100000"/>
               </a:lnSpc>
@@ -1666,14 +1163,14 @@
           </a:bodyPr>
           <a:lstStyle/>
           <a:p>
-            <a:pPr marL="0" lvl="0" indent="0">
-              <a:lnSpc>
-                <a:spcPct val="100000"/>
-              </a:lnSpc>
-              <a:buNone/>
-            </a:pPr>
-            <a:r>
-              <a:rPr lang="zh-CN" sz="1800" b="1" dirty="0">
+            <a:pPr marL="0" indent="0" lvl="0">
+              <a:lnSpc>
+                <a:spcPct val="100000"/>
+              </a:lnSpc>
+              <a:buNone/>
+            </a:pPr>
+            <a:r>
+              <a:rPr lang="zh-CN" sz="1800" dirty="0" b="1">
                 <a:solidFill>
                   <a:srgbClr val="8A4B2A"/>
                 </a:solidFill>
@@ -1708,7 +1205,7 @@
           </a:bodyPr>
           <a:lstStyle/>
           <a:p>
-            <a:pPr marL="270000" lvl="0" indent="-230000">
+            <a:pPr marL="270000" indent="-230000" lvl="0">
               <a:lnSpc>
                 <a:spcPct val="100000"/>
               </a:lnSpc>
@@ -1734,7 +1231,7 @@
             </a:r>
           </a:p>
           <a:p>
-            <a:pPr marL="270000" lvl="0" indent="-230000">
+            <a:pPr marL="270000" indent="-230000" lvl="0">
               <a:lnSpc>
                 <a:spcPct val="100000"/>
               </a:lnSpc>
@@ -1759,7 +1256,7 @@
               <a:t>选择类：直接选择、</a:t>
             </a:r>
             <a:r>
-              <a:rPr lang="zh-CN" sz="1800" b="1" dirty="0">
+              <a:rPr lang="zh-CN" sz="1800" dirty="0" b="1">
                 <a:solidFill>
                   <a:srgbClr val="8A4B2A"/>
                 </a:solidFill>
@@ -1771,7 +1268,7 @@
             </a:r>
           </a:p>
           <a:p>
-            <a:pPr marL="270000" lvl="0" indent="-230000">
+            <a:pPr marL="270000" indent="-230000" lvl="0">
               <a:lnSpc>
                 <a:spcPct val="100000"/>
               </a:lnSpc>
@@ -1796,7 +1293,7 @@
               <a:t>交换类：冒泡、</a:t>
             </a:r>
             <a:r>
-              <a:rPr lang="zh-CN" sz="1800" b="1" dirty="0">
+              <a:rPr lang="zh-CN" sz="1800" dirty="0" b="1">
                 <a:solidFill>
                   <a:srgbClr val="8A4B2A"/>
                 </a:solidFill>
@@ -1808,7 +1305,7 @@
             </a:r>
           </a:p>
           <a:p>
-            <a:pPr marL="270000" lvl="0" indent="-230000">
+            <a:pPr marL="270000" indent="-230000" lvl="0">
               <a:lnSpc>
                 <a:spcPct val="100000"/>
               </a:lnSpc>
@@ -1834,7 +1331,7 @@
             </a:r>
           </a:p>
           <a:p>
-            <a:pPr marL="270000" lvl="0" indent="-230000">
+            <a:pPr marL="270000" indent="-230000" lvl="0">
               <a:lnSpc>
                 <a:spcPct val="100000"/>
               </a:lnSpc>
@@ -1883,7 +1380,7 @@
           </a:bodyPr>
           <a:lstStyle/>
           <a:p>
-            <a:pPr marL="0" lvl="0" indent="0">
+            <a:pPr marL="0" indent="0" lvl="0">
               <a:lnSpc>
                 <a:spcPct val="100000"/>
               </a:lnSpc>
@@ -1901,7 +1398,7 @@
               <a:t>一条主线：</a:t>
             </a:r>
             <a:r>
-              <a:rPr lang="zh-CN" sz="1800" b="1" dirty="0">
+              <a:rPr lang="zh-CN" sz="1800" dirty="0" b="1">
                 <a:solidFill>
                   <a:srgbClr val="8A4B2A"/>
                 </a:solidFill>
@@ -1912,7 +1409,7 @@
               <a:t>代价从 </a:t>
             </a:r>
             <a:r>
-              <a:rPr lang="zh-CN" sz="1800" b="1" i="1" dirty="0">
+              <a:rPr lang="zh-CN" sz="1800" dirty="0" b="1" i="1">
                 <a:solidFill>
                   <a:srgbClr val="8A4B2A"/>
                 </a:solidFill>
@@ -1923,7 +1420,7 @@
               <a:t>O(n²)</a:t>
             </a:r>
             <a:r>
-              <a:rPr lang="zh-CN" sz="1800" b="1" dirty="0">
+              <a:rPr lang="zh-CN" sz="1800" dirty="0" b="1">
                 <a:solidFill>
                   <a:srgbClr val="8A4B2A"/>
                 </a:solidFill>
@@ -1934,7 +1431,7 @@
               <a:t> 到 </a:t>
             </a:r>
             <a:r>
-              <a:rPr lang="zh-CN" sz="1800" b="1" i="1" dirty="0">
+              <a:rPr lang="zh-CN" sz="1800" dirty="0" b="1" i="1">
                 <a:solidFill>
                   <a:srgbClr val="8A4B2A"/>
                 </a:solidFill>
@@ -1945,7 +1442,7 @@
               <a:t>O(n log n)</a:t>
             </a:r>
             <a:r>
-              <a:rPr lang="zh-CN" sz="1800" b="1" dirty="0">
+              <a:rPr lang="zh-CN" sz="1800" dirty="0" b="1">
                 <a:solidFill>
                   <a:srgbClr val="8A4B2A"/>
                 </a:solidFill>
@@ -1980,7 +1477,7 @@
           </a:bodyPr>
           <a:lstStyle/>
           <a:p>
-            <a:pPr marL="0" lvl="0" indent="0">
+            <a:pPr marL="0" indent="0" lvl="0">
               <a:lnSpc>
                 <a:spcPct val="100000"/>
               </a:lnSpc>
@@ -2022,7 +1519,7 @@
           </a:bodyPr>
           <a:lstStyle/>
           <a:p>
-            <a:pPr marL="0" lvl="0" indent="0" algn="r">
+            <a:pPr marL="0" indent="0" lvl="0" algn="r">
               <a:lnSpc>
                 <a:spcPct val="100000"/>
               </a:lnSpc>
@@ -2044,9 +1541,6 @@
       </p:sp>
     </p:spTree>
   </p:cSld>
-  <p:clrMapOvr>
-    <a:masterClrMapping/>
-  </p:clrMapOvr>
 </p:sld>
 </file>
 
@@ -2089,14 +1583,14 @@
           </a:bodyPr>
           <a:lstStyle/>
           <a:p>
-            <a:pPr marL="0" lvl="0" indent="0">
-              <a:lnSpc>
-                <a:spcPct val="100000"/>
-              </a:lnSpc>
-              <a:buNone/>
-            </a:pPr>
-            <a:r>
-              <a:rPr lang="zh-CN" sz="3200" b="1" dirty="0">
+            <a:pPr marL="0" indent="0" lvl="0">
+              <a:lnSpc>
+                <a:spcPct val="100000"/>
+              </a:lnSpc>
+              <a:buNone/>
+            </a:pPr>
+            <a:r>
+              <a:rPr lang="zh-CN" sz="3200" dirty="0" b="1">
                 <a:solidFill>
                   <a:srgbClr val="1A1A18"/>
                 </a:solidFill>
@@ -2133,9 +1627,7 @@
         <p:txBody>
           <a:bodyPr/>
           <a:lstStyle/>
-          <a:p>
-            <a:endParaRPr/>
-          </a:p>
+          <a:p/>
         </p:txBody>
       </p:sp>
       <p:sp>
@@ -2160,7 +1652,7 @@
           </a:bodyPr>
           <a:lstStyle/>
           <a:p>
-            <a:pPr marL="0" lvl="0" indent="0">
+            <a:pPr marL="0" indent="0" lvl="0">
               <a:lnSpc>
                 <a:spcPct val="100000"/>
               </a:lnSpc>
@@ -2211,7 +1703,7 @@
           </a:bodyPr>
           <a:lstStyle/>
           <a:p>
-            <a:pPr marL="0" lvl="0" indent="0">
+            <a:pPr marL="0" indent="0" lvl="0">
               <a:lnSpc>
                 <a:spcPct val="104000"/>
               </a:lnSpc>
@@ -2230,7 +1722,7 @@
             </a:r>
           </a:p>
           <a:p>
-            <a:pPr marL="0" lvl="0" indent="0">
+            <a:pPr marL="0" indent="0" lvl="0">
               <a:lnSpc>
                 <a:spcPct val="104000"/>
               </a:lnSpc>
@@ -2249,7 +1741,7 @@
             </a:r>
           </a:p>
           <a:p>
-            <a:pPr marL="0" lvl="0" indent="0">
+            <a:pPr marL="0" indent="0" lvl="0">
               <a:lnSpc>
                 <a:spcPct val="104000"/>
               </a:lnSpc>
@@ -2291,7 +1783,7 @@
           </a:bodyPr>
           <a:lstStyle/>
           <a:p>
-            <a:pPr marL="270000" lvl="0" indent="-230000">
+            <a:pPr marL="270000" indent="-230000" lvl="0">
               <a:lnSpc>
                 <a:spcPct val="100000"/>
               </a:lnSpc>
@@ -2317,7 +1809,7 @@
             </a:r>
           </a:p>
           <a:p>
-            <a:pPr marL="270000" lvl="0" indent="-230000">
+            <a:pPr marL="270000" indent="-230000" lvl="0">
               <a:lnSpc>
                 <a:spcPct val="100000"/>
               </a:lnSpc>
@@ -2342,7 +1834,7 @@
               <a:t>一趟没有交换即可提前结束：已有序时 </a:t>
             </a:r>
             <a:r>
-              <a:rPr lang="zh-CN" sz="2340" i="1" dirty="0">
+              <a:rPr lang="zh-CN" sz="2340" dirty="0" i="1">
                 <a:solidFill>
                   <a:srgbClr val="1A1A18"/>
                 </a:solidFill>
@@ -2354,7 +1846,7 @@
             </a:r>
           </a:p>
           <a:p>
-            <a:pPr marL="270000" lvl="0" indent="-230000">
+            <a:pPr marL="270000" indent="-230000" lvl="0">
               <a:lnSpc>
                 <a:spcPct val="100000"/>
               </a:lnSpc>
@@ -2379,7 +1871,7 @@
               <a:t>逆序时仍需 </a:t>
             </a:r>
             <a:r>
-              <a:rPr lang="zh-CN" sz="2340" i="1" dirty="0">
+              <a:rPr lang="zh-CN" sz="2340" dirty="0" i="1">
                 <a:solidFill>
                   <a:srgbClr val="1A1A18"/>
                 </a:solidFill>
@@ -2425,7 +1917,7 @@
           </a:bodyPr>
           <a:lstStyle/>
           <a:p>
-            <a:pPr marL="0" lvl="0" indent="0">
+            <a:pPr marL="0" indent="0" lvl="0">
               <a:lnSpc>
                 <a:spcPct val="100000"/>
               </a:lnSpc>
@@ -2467,7 +1959,7 @@
           </a:bodyPr>
           <a:lstStyle/>
           <a:p>
-            <a:pPr marL="0" lvl="0" indent="0">
+            <a:pPr marL="0" indent="0" lvl="0">
               <a:lnSpc>
                 <a:spcPct val="100000"/>
               </a:lnSpc>
@@ -2509,7 +2001,7 @@
           </a:bodyPr>
           <a:lstStyle/>
           <a:p>
-            <a:pPr marL="0" lvl="0" indent="0" algn="r">
+            <a:pPr marL="0" indent="0" lvl="0" algn="r">
               <a:lnSpc>
                 <a:spcPct val="100000"/>
               </a:lnSpc>
@@ -2531,9 +2023,6 @@
       </p:sp>
     </p:spTree>
   </p:cSld>
-  <p:clrMapOvr>
-    <a:masterClrMapping/>
-  </p:clrMapOvr>
 </p:sld>
 </file>
 
@@ -2576,14 +2065,14 @@
           </a:bodyPr>
           <a:lstStyle/>
           <a:p>
-            <a:pPr marL="0" lvl="0" indent="0">
-              <a:lnSpc>
-                <a:spcPct val="100000"/>
-              </a:lnSpc>
-              <a:buNone/>
-            </a:pPr>
-            <a:r>
-              <a:rPr lang="zh-CN" sz="3200" b="1" dirty="0">
+            <a:pPr marL="0" indent="0" lvl="0">
+              <a:lnSpc>
+                <a:spcPct val="100000"/>
+              </a:lnSpc>
+              <a:buNone/>
+            </a:pPr>
+            <a:r>
+              <a:rPr lang="zh-CN" sz="3200" dirty="0" b="1">
                 <a:solidFill>
                   <a:srgbClr val="1A1A18"/>
                 </a:solidFill>
@@ -2620,9 +2109,7 @@
         <p:txBody>
           <a:bodyPr/>
           <a:lstStyle/>
-          <a:p>
-            <a:endParaRPr/>
-          </a:p>
+          <a:p/>
         </p:txBody>
       </p:sp>
       <p:pic>
@@ -2634,7 +2121,7 @@
           <p:nvPr/>
         </p:nvPicPr>
         <p:blipFill>
-          <a:blip r:embed="rId2"/>
+          <a:blip r:embed="rId100"/>
           <a:stretch>
             <a:fillRect/>
           </a:stretch>
@@ -2671,7 +2158,7 @@
           </a:bodyPr>
           <a:lstStyle/>
           <a:p>
-            <a:pPr marL="0" lvl="0" indent="0" algn="ctr">
+            <a:pPr marL="0" indent="0" lvl="0" algn="ctr">
               <a:lnSpc>
                 <a:spcPct val="100000"/>
               </a:lnSpc>
@@ -2713,7 +2200,7 @@
           </a:bodyPr>
           <a:lstStyle/>
           <a:p>
-            <a:pPr marL="0" lvl="0" indent="0">
+            <a:pPr marL="0" indent="0" lvl="0">
               <a:lnSpc>
                 <a:spcPct val="100000"/>
               </a:lnSpc>
@@ -2731,7 +2218,7 @@
               <a:t>选一个</a:t>
             </a:r>
             <a:r>
-              <a:rPr lang="zh-CN" sz="1476" b="1" dirty="0">
+              <a:rPr lang="zh-CN" sz="1476" dirty="0" b="1">
                 <a:solidFill>
                   <a:srgbClr val="8A4B2A"/>
                 </a:solidFill>
@@ -2777,7 +2264,7 @@
           </a:bodyPr>
           <a:lstStyle/>
           <a:p>
-            <a:pPr marL="0" lvl="0" indent="0">
+            <a:pPr marL="0" indent="0" lvl="0">
               <a:lnSpc>
                 <a:spcPct val="100000"/>
               </a:lnSpc>
@@ -2819,7 +2306,7 @@
           </a:bodyPr>
           <a:lstStyle/>
           <a:p>
-            <a:pPr marL="0" lvl="0" indent="0" algn="r">
+            <a:pPr marL="0" indent="0" lvl="0" algn="r">
               <a:lnSpc>
                 <a:spcPct val="100000"/>
               </a:lnSpc>
@@ -2841,9 +2328,6 @@
       </p:sp>
     </p:spTree>
   </p:cSld>
-  <p:clrMapOvr>
-    <a:masterClrMapping/>
-  </p:clrMapOvr>
 </p:sld>
 </file>
 
@@ -2886,14 +2370,14 @@
           </a:bodyPr>
           <a:lstStyle/>
           <a:p>
-            <a:pPr marL="0" lvl="0" indent="0">
-              <a:lnSpc>
-                <a:spcPct val="100000"/>
-              </a:lnSpc>
-              <a:buNone/>
-            </a:pPr>
-            <a:r>
-              <a:rPr lang="zh-CN" sz="3200" b="1" dirty="0">
+            <a:pPr marL="0" indent="0" lvl="0">
+              <a:lnSpc>
+                <a:spcPct val="100000"/>
+              </a:lnSpc>
+              <a:buNone/>
+            </a:pPr>
+            <a:r>
+              <a:rPr lang="zh-CN" sz="3200" dirty="0" b="1">
                 <a:solidFill>
                   <a:srgbClr val="1A1A18"/>
                 </a:solidFill>
@@ -2930,9 +2414,7 @@
         <p:txBody>
           <a:bodyPr/>
           <a:lstStyle/>
-          <a:p>
-            <a:endParaRPr/>
-          </a:p>
+          <a:p/>
         </p:txBody>
       </p:sp>
       <p:sp>
@@ -2966,7 +2448,7 @@
           </a:bodyPr>
           <a:lstStyle/>
           <a:p>
-            <a:pPr marL="0" lvl="0" indent="0">
+            <a:pPr marL="0" indent="0" lvl="0">
               <a:lnSpc>
                 <a:spcPct val="100000"/>
               </a:lnSpc>
@@ -2985,7 +2467,7 @@
             </a:r>
           </a:p>
           <a:p>
-            <a:pPr marL="0" lvl="0" indent="0">
+            <a:pPr marL="0" indent="0" lvl="0">
               <a:lnSpc>
                 <a:spcPct val="104000"/>
               </a:lnSpc>
@@ -3103,7 +2585,7 @@
             </a:r>
           </a:p>
           <a:p>
-            <a:pPr marL="0" lvl="0" indent="0">
+            <a:pPr marL="0" indent="0" lvl="0">
               <a:lnSpc>
                 <a:spcPct val="104000"/>
               </a:lnSpc>
@@ -3188,7 +2670,7 @@
             </a:r>
           </a:p>
           <a:p>
-            <a:pPr marL="0" lvl="0" indent="0">
+            <a:pPr marL="0" indent="0" lvl="0">
               <a:lnSpc>
                 <a:spcPct val="104000"/>
               </a:lnSpc>
@@ -3229,7 +2711,7 @@
             </a:r>
           </a:p>
           <a:p>
-            <a:pPr marL="0" lvl="0" indent="0">
+            <a:pPr marL="0" indent="0" lvl="0">
               <a:lnSpc>
                 <a:spcPct val="104000"/>
               </a:lnSpc>
@@ -3314,7 +2796,7 @@
             </a:r>
           </a:p>
           <a:p>
-            <a:pPr marL="0" lvl="0" indent="0">
+            <a:pPr marL="0" indent="0" lvl="0">
               <a:lnSpc>
                 <a:spcPct val="104000"/>
               </a:lnSpc>
@@ -3355,7 +2837,7 @@
             </a:r>
           </a:p>
           <a:p>
-            <a:pPr marL="0" lvl="0" indent="0">
+            <a:pPr marL="0" indent="0" lvl="0">
               <a:lnSpc>
                 <a:spcPct val="104000"/>
               </a:lnSpc>
@@ -3396,7 +2878,7 @@
             </a:r>
           </a:p>
           <a:p>
-            <a:pPr marL="0" lvl="0" indent="0">
+            <a:pPr marL="0" indent="0" lvl="0">
               <a:lnSpc>
                 <a:spcPct val="104000"/>
               </a:lnSpc>
@@ -3415,7 +2897,7 @@
             </a:r>
           </a:p>
           <a:p>
-            <a:pPr marL="0" lvl="0" indent="0">
+            <a:pPr marL="0" indent="0" lvl="0">
               <a:lnSpc>
                 <a:spcPct val="104000"/>
               </a:lnSpc>
@@ -3434,7 +2916,7 @@
             </a:r>
           </a:p>
           <a:p>
-            <a:pPr marL="0" lvl="0" indent="0">
+            <a:pPr marL="0" indent="0" lvl="0">
               <a:lnSpc>
                 <a:spcPct val="104000"/>
               </a:lnSpc>
@@ -3453,7 +2935,7 @@
             </a:r>
           </a:p>
           <a:p>
-            <a:pPr marL="0" lvl="0" indent="0">
+            <a:pPr marL="0" indent="0" lvl="0">
               <a:lnSpc>
                 <a:spcPct val="104000"/>
               </a:lnSpc>
@@ -3472,7 +2954,7 @@
             </a:r>
           </a:p>
           <a:p>
-            <a:pPr marL="0" lvl="0" indent="0">
+            <a:pPr marL="0" indent="0" lvl="0">
               <a:lnSpc>
                 <a:spcPct val="104000"/>
               </a:lnSpc>
@@ -3513,7 +2995,7 @@
             </a:r>
           </a:p>
           <a:p>
-            <a:pPr marL="0" lvl="0" indent="0">
+            <a:pPr marL="0" indent="0" lvl="0">
               <a:lnSpc>
                 <a:spcPct val="104000"/>
               </a:lnSpc>
@@ -3554,7 +3036,7 @@
             </a:r>
           </a:p>
           <a:p>
-            <a:pPr marL="0" lvl="0" indent="0">
+            <a:pPr marL="0" indent="0" lvl="0">
               <a:lnSpc>
                 <a:spcPct val="104000"/>
               </a:lnSpc>
@@ -3595,7 +3077,7 @@
             </a:r>
           </a:p>
           <a:p>
-            <a:pPr marL="0" lvl="0" indent="0">
+            <a:pPr marL="0" indent="0" lvl="0">
               <a:lnSpc>
                 <a:spcPct val="104000"/>
               </a:lnSpc>
@@ -3614,7 +3096,7 @@
             </a:r>
           </a:p>
           <a:p>
-            <a:pPr marL="0" lvl="0" indent="0">
+            <a:pPr marL="0" indent="0" lvl="0">
               <a:lnSpc>
                 <a:spcPct val="104000"/>
               </a:lnSpc>
@@ -3633,7 +3115,7 @@
             </a:r>
           </a:p>
           <a:p>
-            <a:pPr marL="0" lvl="0" indent="0">
+            <a:pPr marL="0" indent="0" lvl="0">
               <a:lnSpc>
                 <a:spcPct val="104000"/>
               </a:lnSpc>
@@ -3751,7 +3233,7 @@
             </a:r>
           </a:p>
           <a:p>
-            <a:pPr marL="0" lvl="0" indent="0">
+            <a:pPr marL="0" indent="0" lvl="0">
               <a:lnSpc>
                 <a:spcPct val="104000"/>
               </a:lnSpc>
@@ -3836,7 +3318,7 @@
             </a:r>
           </a:p>
           <a:p>
-            <a:pPr marL="0" lvl="0" indent="0">
+            <a:pPr marL="0" indent="0" lvl="0">
               <a:lnSpc>
                 <a:spcPct val="104000"/>
               </a:lnSpc>
@@ -3899,7 +3381,7 @@
             </a:r>
           </a:p>
           <a:p>
-            <a:pPr marL="0" lvl="0" indent="0">
+            <a:pPr marL="0" indent="0" lvl="0">
               <a:lnSpc>
                 <a:spcPct val="104000"/>
               </a:lnSpc>
@@ -3918,7 +3400,7 @@
             </a:r>
           </a:p>
           <a:p>
-            <a:pPr marL="0" lvl="0" indent="0">
+            <a:pPr marL="0" indent="0" lvl="0">
               <a:lnSpc>
                 <a:spcPct val="104000"/>
               </a:lnSpc>
@@ -3959,7 +3441,7 @@
             </a:r>
           </a:p>
           <a:p>
-            <a:pPr marL="0" lvl="0" indent="0">
+            <a:pPr marL="0" indent="0" lvl="0">
               <a:lnSpc>
                 <a:spcPct val="104000"/>
               </a:lnSpc>
@@ -3978,7 +3460,7 @@
             </a:r>
           </a:p>
           <a:p>
-            <a:pPr marL="0" lvl="0" indent="0">
+            <a:pPr marL="0" indent="0" lvl="0">
               <a:lnSpc>
                 <a:spcPct val="104000"/>
               </a:lnSpc>
@@ -3997,7 +3479,7 @@
             </a:r>
           </a:p>
           <a:p>
-            <a:pPr marL="0" lvl="0" indent="0">
+            <a:pPr marL="0" indent="0" lvl="0">
               <a:lnSpc>
                 <a:spcPct val="104000"/>
               </a:lnSpc>
@@ -4016,7 +3498,7 @@
             </a:r>
           </a:p>
           <a:p>
-            <a:pPr marL="0" lvl="0" indent="0">
+            <a:pPr marL="0" indent="0" lvl="0">
               <a:lnSpc>
                 <a:spcPct val="104000"/>
               </a:lnSpc>
@@ -4135,7 +3617,7 @@
           </a:bodyPr>
           <a:lstStyle/>
           <a:p>
-            <a:pPr marL="0" lvl="0" indent="0">
+            <a:pPr marL="0" indent="0" lvl="0">
               <a:lnSpc>
                 <a:spcPct val="100000"/>
               </a:lnSpc>
@@ -4177,7 +3659,7 @@
           </a:bodyPr>
           <a:lstStyle/>
           <a:p>
-            <a:pPr marL="0" lvl="0" indent="0" algn="r">
+            <a:pPr marL="0" indent="0" lvl="0" algn="r">
               <a:lnSpc>
                 <a:spcPct val="100000"/>
               </a:lnSpc>
@@ -4199,9 +3681,6 @@
       </p:sp>
     </p:spTree>
   </p:cSld>
-  <p:clrMapOvr>
-    <a:masterClrMapping/>
-  </p:clrMapOvr>
 </p:sld>
 </file>
 
@@ -4244,14 +3723,14 @@
           </a:bodyPr>
           <a:lstStyle/>
           <a:p>
-            <a:pPr marL="0" lvl="0" indent="0">
-              <a:lnSpc>
-                <a:spcPct val="100000"/>
-              </a:lnSpc>
-              <a:buNone/>
-            </a:pPr>
-            <a:r>
-              <a:rPr lang="zh-CN" sz="3200" b="1" dirty="0">
+            <a:pPr marL="0" indent="0" lvl="0">
+              <a:lnSpc>
+                <a:spcPct val="100000"/>
+              </a:lnSpc>
+              <a:buNone/>
+            </a:pPr>
+            <a:r>
+              <a:rPr lang="zh-CN" sz="3200" dirty="0" b="1">
                 <a:solidFill>
                   <a:srgbClr val="1A1A18"/>
                 </a:solidFill>
@@ -4288,9 +3767,7 @@
         <p:txBody>
           <a:bodyPr/>
           <a:lstStyle/>
-          <a:p>
-            <a:endParaRPr/>
-          </a:p>
+          <a:p/>
         </p:txBody>
       </p:sp>
       <p:graphicFrame>
@@ -4310,20 +3787,8 @@
             <a:tbl>
               <a:tblPr firstRow="1"/>
               <a:tblGrid>
-                <a:gridCol w="4505169">
-                  <a:extLst>
-                    <a:ext uri="{9D8B030D-6E8A-4147-A177-3AD203B41FA5}">
-                      <a16:colId xmlns:a16="http://schemas.microsoft.com/office/drawing/2014/main" val="20000"/>
-                    </a:ext>
-                  </a:extLst>
-                </a:gridCol>
-                <a:gridCol w="6552975">
-                  <a:extLst>
-                    <a:ext uri="{9D8B030D-6E8A-4147-A177-3AD203B41FA5}">
-                      <a16:colId xmlns:a16="http://schemas.microsoft.com/office/drawing/2014/main" val="20001"/>
-                    </a:ext>
-                  </a:extLst>
-                </a:gridCol>
+                <a:gridCol w="4505169"/>
+                <a:gridCol w="6552975"/>
               </a:tblGrid>
               <a:tr h="380504">
                 <a:tc>
@@ -4331,14 +3796,14 @@
                     <a:bodyPr/>
                     <a:lstStyle/>
                     <a:p>
-                      <a:pPr marL="0" lvl="0" indent="0">
+                      <a:pPr marL="0" indent="0" lvl="0">
                         <a:lnSpc>
                           <a:spcPct val="100000"/>
                         </a:lnSpc>
                         <a:buNone/>
                       </a:pPr>
                       <a:r>
-                        <a:rPr lang="zh-CN" sz="1755" b="1" dirty="0">
+                        <a:rPr lang="zh-CN" sz="1755" dirty="0" b="1">
                           <a:solidFill>
                             <a:srgbClr val="1A1A18"/>
                           </a:solidFill>
@@ -4381,14 +3846,14 @@
                     <a:bodyPr/>
                     <a:lstStyle/>
                     <a:p>
-                      <a:pPr marL="0" lvl="0" indent="0">
+                      <a:pPr marL="0" indent="0" lvl="0">
                         <a:lnSpc>
                           <a:spcPct val="100000"/>
                         </a:lnSpc>
                         <a:buNone/>
                       </a:pPr>
                       <a:r>
-                        <a:rPr lang="zh-CN" sz="1755" b="1" dirty="0">
+                        <a:rPr lang="zh-CN" sz="1755" dirty="0" b="1">
                           <a:solidFill>
                             <a:srgbClr val="1A1A18"/>
                           </a:solidFill>
@@ -4426,11 +3891,6 @@
                     </a:solidFill>
                   </a:tcPr>
                 </a:tc>
-                <a:extLst>
-                  <a:ext uri="{0D108BD9-81ED-4DB2-BD59-A6C34878D82A}">
-                    <a16:rowId xmlns:a16="http://schemas.microsoft.com/office/drawing/2014/main" val="10000"/>
-                  </a:ext>
-                </a:extLst>
               </a:tr>
               <a:tr h="380504">
                 <a:tc>
@@ -4438,7 +3898,7 @@
                     <a:bodyPr/>
                     <a:lstStyle/>
                     <a:p>
-                      <a:pPr marL="0" lvl="0" indent="0">
+                      <a:pPr marL="0" indent="0" lvl="0">
                         <a:lnSpc>
                           <a:spcPct val="100000"/>
                         </a:lnSpc>
@@ -4488,7 +3948,7 @@
                     <a:bodyPr/>
                     <a:lstStyle/>
                     <a:p>
-                      <a:pPr marL="0" lvl="0" indent="0">
+                      <a:pPr marL="0" indent="0" lvl="0">
                         <a:lnSpc>
                           <a:spcPct val="100000"/>
                         </a:lnSpc>
@@ -4533,11 +3993,6 @@
                     </a:solidFill>
                   </a:tcPr>
                 </a:tc>
-                <a:extLst>
-                  <a:ext uri="{0D108BD9-81ED-4DB2-BD59-A6C34878D82A}">
-                    <a16:rowId xmlns:a16="http://schemas.microsoft.com/office/drawing/2014/main" val="10001"/>
-                  </a:ext>
-                </a:extLst>
               </a:tr>
               <a:tr h="380504">
                 <a:tc>
@@ -4545,7 +4000,7 @@
                     <a:bodyPr/>
                     <a:lstStyle/>
                     <a:p>
-                      <a:pPr marL="0" lvl="0" indent="0">
+                      <a:pPr marL="0" indent="0" lvl="0">
                         <a:lnSpc>
                           <a:spcPct val="100000"/>
                         </a:lnSpc>
@@ -4595,7 +4050,7 @@
                     <a:bodyPr/>
                     <a:lstStyle/>
                     <a:p>
-                      <a:pPr marL="0" lvl="0" indent="0">
+                      <a:pPr marL="0" indent="0" lvl="0">
                         <a:lnSpc>
                           <a:spcPct val="100000"/>
                         </a:lnSpc>
@@ -4640,11 +4095,6 @@
                     </a:solidFill>
                   </a:tcPr>
                 </a:tc>
-                <a:extLst>
-                  <a:ext uri="{0D108BD9-81ED-4DB2-BD59-A6C34878D82A}">
-                    <a16:rowId xmlns:a16="http://schemas.microsoft.com/office/drawing/2014/main" val="10002"/>
-                  </a:ext>
-                </a:extLst>
               </a:tr>
               <a:tr h="380504">
                 <a:tc>
@@ -4652,7 +4102,7 @@
                     <a:bodyPr/>
                     <a:lstStyle/>
                     <a:p>
-                      <a:pPr marL="0" lvl="0" indent="0">
+                      <a:pPr marL="0" indent="0" lvl="0">
                         <a:lnSpc>
                           <a:spcPct val="100000"/>
                         </a:lnSpc>
@@ -4702,7 +4152,7 @@
                     <a:bodyPr/>
                     <a:lstStyle/>
                     <a:p>
-                      <a:pPr marL="0" lvl="0" indent="0">
+                      <a:pPr marL="0" indent="0" lvl="0">
                         <a:lnSpc>
                           <a:spcPct val="100000"/>
                         </a:lnSpc>
@@ -4747,11 +4197,6 @@
                     </a:solidFill>
                   </a:tcPr>
                 </a:tc>
-                <a:extLst>
-                  <a:ext uri="{0D108BD9-81ED-4DB2-BD59-A6C34878D82A}">
-                    <a16:rowId xmlns:a16="http://schemas.microsoft.com/office/drawing/2014/main" val="10003"/>
-                  </a:ext>
-                </a:extLst>
               </a:tr>
               <a:tr h="380504">
                 <a:tc>
@@ -4759,7 +4204,7 @@
                     <a:bodyPr/>
                     <a:lstStyle/>
                     <a:p>
-                      <a:pPr marL="0" lvl="0" indent="0">
+                      <a:pPr marL="0" indent="0" lvl="0">
                         <a:lnSpc>
                           <a:spcPct val="100000"/>
                         </a:lnSpc>
@@ -4777,7 +4222,7 @@
                         <a:t>递归改成对</a:t>
                       </a:r>
                       <a:r>
-                        <a:rPr lang="zh-CN" sz="1755" b="1" dirty="0">
+                        <a:rPr lang="zh-CN" sz="1755" dirty="0" b="1">
                           <a:solidFill>
                             <a:srgbClr val="8A4B2A"/>
                           </a:solidFill>
@@ -4831,7 +4276,7 @@
                     <a:bodyPr/>
                     <a:lstStyle/>
                     <a:p>
-                      <a:pPr marL="0" lvl="0" indent="0">
+                      <a:pPr marL="0" indent="0" lvl="0">
                         <a:lnSpc>
                           <a:spcPct val="100000"/>
                         </a:lnSpc>
@@ -4849,7 +4294,7 @@
                         <a:t>栈深度降到 </a:t>
                       </a:r>
                       <a:r>
-                        <a:rPr lang="zh-CN" sz="1755" i="1" dirty="0">
+                        <a:rPr lang="zh-CN" sz="1755" dirty="0" i="1">
                           <a:solidFill>
                             <a:srgbClr val="1A1A18"/>
                           </a:solidFill>
@@ -4887,11 +4332,6 @@
                     </a:solidFill>
                   </a:tcPr>
                 </a:tc>
-                <a:extLst>
-                  <a:ext uri="{0D108BD9-81ED-4DB2-BD59-A6C34878D82A}">
-                    <a16:rowId xmlns:a16="http://schemas.microsoft.com/office/drawing/2014/main" val="10004"/>
-                  </a:ext>
-                </a:extLst>
               </a:tr>
             </a:tbl>
           </a:graphicData>
@@ -4919,14 +4359,14 @@
           </a:bodyPr>
           <a:lstStyle/>
           <a:p>
-            <a:pPr marL="0" lvl="0" indent="0">
-              <a:lnSpc>
-                <a:spcPct val="100000"/>
-              </a:lnSpc>
-              <a:buNone/>
-            </a:pPr>
-            <a:r>
-              <a:rPr lang="zh-CN" sz="2340" b="1" dirty="0">
+            <a:pPr marL="0" indent="0" lvl="0">
+              <a:lnSpc>
+                <a:spcPct val="100000"/>
+              </a:lnSpc>
+              <a:buNone/>
+            </a:pPr>
+            <a:r>
+              <a:rPr lang="zh-CN" sz="2340" dirty="0" b="1">
                 <a:solidFill>
                   <a:srgbClr val="8A4B2A"/>
                 </a:solidFill>
@@ -4948,7 +4388,7 @@
               <a:t>：不做的话，最坏情况下递归深度是 </a:t>
             </a:r>
             <a:r>
-              <a:rPr lang="zh-CN" sz="2340" i="1" dirty="0">
+              <a:rPr lang="zh-CN" sz="2340" dirty="0" i="1">
                 <a:solidFill>
                   <a:srgbClr val="1A1A18"/>
                 </a:solidFill>
@@ -4994,7 +4434,7 @@
           </a:bodyPr>
           <a:lstStyle/>
           <a:p>
-            <a:pPr marL="0" lvl="0" indent="0">
+            <a:pPr marL="0" indent="0" lvl="0">
               <a:lnSpc>
                 <a:spcPct val="100000"/>
               </a:lnSpc>
@@ -5036,7 +4476,7 @@
           </a:bodyPr>
           <a:lstStyle/>
           <a:p>
-            <a:pPr marL="0" lvl="0" indent="0" algn="r">
+            <a:pPr marL="0" indent="0" lvl="0" algn="r">
               <a:lnSpc>
                 <a:spcPct val="100000"/>
               </a:lnSpc>
@@ -5058,9 +4498,6 @@
       </p:sp>
     </p:spTree>
   </p:cSld>
-  <p:clrMapOvr>
-    <a:masterClrMapping/>
-  </p:clrMapOvr>
 </p:sld>
 </file>
 
@@ -5103,14 +4540,14 @@
           </a:bodyPr>
           <a:lstStyle/>
           <a:p>
-            <a:pPr marL="0" lvl="0" indent="0">
-              <a:lnSpc>
-                <a:spcPct val="100000"/>
-              </a:lnSpc>
-              <a:buNone/>
-            </a:pPr>
-            <a:r>
-              <a:rPr lang="zh-CN" sz="3200" b="1" dirty="0">
+            <a:pPr marL="0" indent="0" lvl="0">
+              <a:lnSpc>
+                <a:spcPct val="100000"/>
+              </a:lnSpc>
+              <a:buNone/>
+            </a:pPr>
+            <a:r>
+              <a:rPr lang="zh-CN" sz="3200" dirty="0" b="1">
                 <a:solidFill>
                   <a:srgbClr val="1A1A18"/>
                 </a:solidFill>
@@ -5147,9 +4584,7 @@
         <p:txBody>
           <a:bodyPr/>
           <a:lstStyle/>
-          <a:p>
-            <a:endParaRPr/>
-          </a:p>
+          <a:p/>
         </p:txBody>
       </p:sp>
       <p:pic>
@@ -5161,7 +4596,7 @@
           <p:nvPr/>
         </p:nvPicPr>
         <p:blipFill>
-          <a:blip r:embed="rId2"/>
+          <a:blip r:embed="rId100"/>
           <a:stretch>
             <a:fillRect/>
           </a:stretch>
@@ -5198,7 +4633,7 @@
           </a:bodyPr>
           <a:lstStyle/>
           <a:p>
-            <a:pPr marL="0" lvl="0" indent="0" algn="ctr">
+            <a:pPr marL="0" indent="0" lvl="0" algn="ctr">
               <a:lnSpc>
                 <a:spcPct val="100000"/>
               </a:lnSpc>
@@ -5240,7 +4675,7 @@
           </a:bodyPr>
           <a:lstStyle/>
           <a:p>
-            <a:pPr marL="0" lvl="0" indent="0">
+            <a:pPr marL="0" indent="0" lvl="0">
               <a:lnSpc>
                 <a:spcPct val="100000"/>
               </a:lnSpc>
@@ -5282,7 +4717,7 @@
           </a:bodyPr>
           <a:lstStyle/>
           <a:p>
-            <a:pPr marL="0" lvl="0" indent="0" algn="r">
+            <a:pPr marL="0" indent="0" lvl="0" algn="r">
               <a:lnSpc>
                 <a:spcPct val="100000"/>
               </a:lnSpc>
@@ -5304,9 +4739,6 @@
       </p:sp>
     </p:spTree>
   </p:cSld>
-  <p:clrMapOvr>
-    <a:masterClrMapping/>
-  </p:clrMapOvr>
 </p:sld>
 </file>
 
@@ -5349,22 +4781,22 @@
           </a:bodyPr>
           <a:lstStyle/>
           <a:p>
-            <a:pPr marL="0" lvl="0" indent="0">
-              <a:lnSpc>
-                <a:spcPct val="100000"/>
-              </a:lnSpc>
-              <a:buNone/>
-            </a:pPr>
-            <a:r>
-              <a:rPr lang="zh-CN" sz="3200" b="1" dirty="0">
-                <a:solidFill>
-                  <a:srgbClr val="1A1A18"/>
-                </a:solidFill>
-                <a:latin typeface="Segoe UI"/>
-                <a:ea typeface="Noto Sans CJK SC"/>
-                <a:cs typeface="Segoe UI"/>
-              </a:rPr>
-              <a:t>8.5 归并排序</a:t>
+            <a:pPr marL="0" indent="0" lvl="0">
+              <a:lnSpc>
+                <a:spcPct val="100000"/>
+              </a:lnSpc>
+              <a:buNone/>
+            </a:pPr>
+            <a:r>
+              <a:rPr lang="zh-CN" sz="3200" dirty="0" b="1">
+                <a:solidFill>
+                  <a:srgbClr val="1A1A18"/>
+                </a:solidFill>
+                <a:latin typeface="Segoe UI"/>
+                <a:ea typeface="Noto Sans CJK SC"/>
+                <a:cs typeface="Segoe UI"/>
+              </a:rPr>
+              <a:t>8.5 归并排序（续）</a:t>
             </a:r>
           </a:p>
         </p:txBody>
@@ -5393,9 +4825,7 @@
         <p:txBody>
           <a:bodyPr/>
           <a:lstStyle/>
-          <a:p>
-            <a:endParaRPr/>
-          </a:p>
+          <a:p/>
         </p:txBody>
       </p:sp>
       <p:sp>
@@ -5429,7 +4859,7 @@
           </a:bodyPr>
           <a:lstStyle/>
           <a:p>
-            <a:pPr marL="0" lvl="0" indent="0">
+            <a:pPr marL="0" indent="0" lvl="0">
               <a:lnSpc>
                 <a:spcPct val="100000"/>
               </a:lnSpc>
@@ -5448,7 +4878,7 @@
             </a:r>
           </a:p>
           <a:p>
-            <a:pPr marL="0" lvl="0" indent="0">
+            <a:pPr marL="0" indent="0" lvl="0">
               <a:lnSpc>
                 <a:spcPct val="104000"/>
               </a:lnSpc>
@@ -5544,7 +4974,7 @@
             </a:r>
           </a:p>
           <a:p>
-            <a:pPr marL="0" lvl="0" indent="0">
+            <a:pPr marL="0" indent="0" lvl="0">
               <a:lnSpc>
                 <a:spcPct val="104000"/>
               </a:lnSpc>
@@ -5629,7 +5059,7 @@
             </a:r>
           </a:p>
           <a:p>
-            <a:pPr marL="0" lvl="0" indent="0">
+            <a:pPr marL="0" indent="0" lvl="0">
               <a:lnSpc>
                 <a:spcPct val="104000"/>
               </a:lnSpc>
@@ -5670,7 +5100,7 @@
             </a:r>
           </a:p>
           <a:p>
-            <a:pPr marL="0" lvl="0" indent="0">
+            <a:pPr marL="0" indent="0" lvl="0">
               <a:lnSpc>
                 <a:spcPct val="104000"/>
               </a:lnSpc>
@@ -5711,7 +5141,7 @@
             </a:r>
           </a:p>
           <a:p>
-            <a:pPr marL="0" lvl="0" indent="0">
+            <a:pPr marL="0" indent="0" lvl="0">
               <a:lnSpc>
                 <a:spcPct val="104000"/>
               </a:lnSpc>
@@ -5752,7 +5182,7 @@
             </a:r>
           </a:p>
           <a:p>
-            <a:pPr marL="0" lvl="0" indent="0">
+            <a:pPr marL="0" indent="0" lvl="0">
               <a:lnSpc>
                 <a:spcPct val="104000"/>
               </a:lnSpc>
@@ -5793,7 +5223,7 @@
             </a:r>
           </a:p>
           <a:p>
-            <a:pPr marL="0" lvl="0" indent="0">
+            <a:pPr marL="0" indent="0" lvl="0">
               <a:lnSpc>
                 <a:spcPct val="104000"/>
               </a:lnSpc>
@@ -5812,7 +5242,7 @@
             </a:r>
           </a:p>
           <a:p>
-            <a:pPr marL="0" lvl="0" indent="0">
+            <a:pPr marL="0" indent="0" lvl="0">
               <a:lnSpc>
                 <a:spcPct val="104000"/>
               </a:lnSpc>
@@ -5831,7 +5261,7 @@
             </a:r>
           </a:p>
           <a:p>
-            <a:pPr marL="0" lvl="0" indent="0">
+            <a:pPr marL="0" indent="0" lvl="0">
               <a:lnSpc>
                 <a:spcPct val="104000"/>
               </a:lnSpc>
@@ -5872,7 +5302,7 @@
             </a:r>
           </a:p>
           <a:p>
-            <a:pPr marL="0" lvl="0" indent="0">
+            <a:pPr marL="0" indent="0" lvl="0">
               <a:lnSpc>
                 <a:spcPct val="104000"/>
               </a:lnSpc>
@@ -5913,7 +5343,7 @@
             </a:r>
           </a:p>
           <a:p>
-            <a:pPr marL="0" lvl="0" indent="0">
+            <a:pPr marL="0" indent="0" lvl="0">
               <a:lnSpc>
                 <a:spcPct val="104000"/>
               </a:lnSpc>
@@ -5976,7 +5406,7 @@
             </a:r>
           </a:p>
           <a:p>
-            <a:pPr marL="0" lvl="0" indent="0">
+            <a:pPr marL="0" indent="0" lvl="0">
               <a:lnSpc>
                 <a:spcPct val="104000"/>
               </a:lnSpc>
@@ -5995,7 +5425,7 @@
             </a:r>
           </a:p>
           <a:p>
-            <a:pPr marL="0" lvl="0" indent="0">
+            <a:pPr marL="0" indent="0" lvl="0">
               <a:lnSpc>
                 <a:spcPct val="104000"/>
               </a:lnSpc>
@@ -6014,7 +5444,7 @@
             </a:r>
           </a:p>
           <a:p>
-            <a:pPr marL="0" lvl="0" indent="0">
+            <a:pPr marL="0" indent="0" lvl="0">
               <a:lnSpc>
                 <a:spcPct val="104000"/>
               </a:lnSpc>
@@ -6110,7 +5540,7 @@
             </a:r>
           </a:p>
           <a:p>
-            <a:pPr marL="0" lvl="0" indent="0">
+            <a:pPr marL="0" indent="0" lvl="0">
               <a:lnSpc>
                 <a:spcPct val="104000"/>
               </a:lnSpc>
@@ -6173,7 +5603,7 @@
             </a:r>
           </a:p>
           <a:p>
-            <a:pPr marL="0" lvl="0" indent="0">
+            <a:pPr marL="0" indent="0" lvl="0">
               <a:lnSpc>
                 <a:spcPct val="104000"/>
               </a:lnSpc>
@@ -6258,7 +5688,7 @@
             </a:r>
           </a:p>
           <a:p>
-            <a:pPr marL="0" lvl="0" indent="0">
+            <a:pPr marL="0" indent="0" lvl="0">
               <a:lnSpc>
                 <a:spcPct val="104000"/>
               </a:lnSpc>
@@ -6343,7 +5773,7 @@
             </a:r>
           </a:p>
           <a:p>
-            <a:pPr marL="0" lvl="0" indent="0">
+            <a:pPr marL="0" indent="0" lvl="0">
               <a:lnSpc>
                 <a:spcPct val="104000"/>
               </a:lnSpc>
@@ -6362,7 +5792,7 @@
             </a:r>
           </a:p>
           <a:p>
-            <a:pPr marL="0" lvl="0" indent="0">
+            <a:pPr marL="0" indent="0" lvl="0">
               <a:lnSpc>
                 <a:spcPct val="104000"/>
               </a:lnSpc>
@@ -6381,7 +5811,7 @@
             </a:r>
           </a:p>
           <a:p>
-            <a:pPr marL="0" lvl="0" indent="0">
+            <a:pPr marL="0" indent="0" lvl="0">
               <a:lnSpc>
                 <a:spcPct val="104000"/>
               </a:lnSpc>
@@ -6400,7 +5830,7 @@
             </a:r>
           </a:p>
           <a:p>
-            <a:pPr marL="0" lvl="0" indent="0">
+            <a:pPr marL="0" indent="0" lvl="0">
               <a:lnSpc>
                 <a:spcPct val="104000"/>
               </a:lnSpc>
@@ -6419,7 +5849,7 @@
             </a:r>
           </a:p>
           <a:p>
-            <a:pPr marL="0" lvl="0" indent="0">
+            <a:pPr marL="0" indent="0" lvl="0">
               <a:lnSpc>
                 <a:spcPct val="104000"/>
               </a:lnSpc>
@@ -6438,7 +5868,7 @@
             </a:r>
           </a:p>
           <a:p>
-            <a:pPr marL="0" lvl="0" indent="0">
+            <a:pPr marL="0" indent="0" lvl="0">
               <a:lnSpc>
                 <a:spcPct val="104000"/>
               </a:lnSpc>
@@ -6457,7 +5887,7 @@
             </a:r>
           </a:p>
           <a:p>
-            <a:pPr marL="0" lvl="0" indent="0">
+            <a:pPr marL="0" indent="0" lvl="0">
               <a:lnSpc>
                 <a:spcPct val="104000"/>
               </a:lnSpc>
@@ -6531,7 +5961,7 @@
             </a:r>
           </a:p>
           <a:p>
-            <a:pPr marL="0" lvl="0" indent="0">
+            <a:pPr marL="0" indent="0" lvl="0">
               <a:lnSpc>
                 <a:spcPct val="104000"/>
               </a:lnSpc>
@@ -6572,7 +6002,7 @@
             </a:r>
           </a:p>
           <a:p>
-            <a:pPr marL="0" lvl="0" indent="0">
+            <a:pPr marL="0" indent="0" lvl="0">
               <a:lnSpc>
                 <a:spcPct val="104000"/>
               </a:lnSpc>
@@ -6613,7 +6043,7 @@
             </a:r>
           </a:p>
           <a:p>
-            <a:pPr marL="0" lvl="0" indent="0">
+            <a:pPr marL="0" indent="0" lvl="0">
               <a:lnSpc>
                 <a:spcPct val="104000"/>
               </a:lnSpc>
@@ -6655,7 +6085,7 @@
           </a:bodyPr>
           <a:lstStyle/>
           <a:p>
-            <a:pPr marL="0" lvl="0" indent="0">
+            <a:pPr marL="0" indent="0" lvl="0">
               <a:lnSpc>
                 <a:spcPct val="100000"/>
               </a:lnSpc>
@@ -6697,7 +6127,7 @@
           </a:bodyPr>
           <a:lstStyle/>
           <a:p>
-            <a:pPr marL="0" lvl="0" indent="0" algn="r">
+            <a:pPr marL="0" indent="0" lvl="0" algn="r">
               <a:lnSpc>
                 <a:spcPct val="100000"/>
               </a:lnSpc>
@@ -6719,9 +6149,6 @@
       </p:sp>
     </p:spTree>
   </p:cSld>
-  <p:clrMapOvr>
-    <a:masterClrMapping/>
-  </p:clrMapOvr>
 </p:sld>
 </file>
 
@@ -6764,14 +6191,14 @@
           </a:bodyPr>
           <a:lstStyle/>
           <a:p>
-            <a:pPr marL="0" lvl="0" indent="0">
-              <a:lnSpc>
-                <a:spcPct val="100000"/>
-              </a:lnSpc>
-              <a:buNone/>
-            </a:pPr>
-            <a:r>
-              <a:rPr lang="zh-CN" sz="3200" b="1" dirty="0">
+            <a:pPr marL="0" indent="0" lvl="0">
+              <a:lnSpc>
+                <a:spcPct val="100000"/>
+              </a:lnSpc>
+              <a:buNone/>
+            </a:pPr>
+            <a:r>
+              <a:rPr lang="zh-CN" sz="3200" dirty="0" b="1">
                 <a:solidFill>
                   <a:srgbClr val="1A1A18"/>
                 </a:solidFill>
@@ -6808,9 +6235,7 @@
         <p:txBody>
           <a:bodyPr/>
           <a:lstStyle/>
-          <a:p>
-            <a:endParaRPr/>
-          </a:p>
+          <a:p/>
         </p:txBody>
       </p:sp>
       <p:sp>
@@ -6835,14 +6260,14 @@
           </a:bodyPr>
           <a:lstStyle/>
           <a:p>
-            <a:pPr marL="0" lvl="0" indent="0">
-              <a:lnSpc>
-                <a:spcPct val="100000"/>
-              </a:lnSpc>
-              <a:buNone/>
-            </a:pPr>
-            <a:r>
-              <a:rPr lang="zh-CN" sz="2340" b="1" dirty="0">
+            <a:pPr marL="0" indent="0" lvl="0">
+              <a:lnSpc>
+                <a:spcPct val="100000"/>
+              </a:lnSpc>
+              <a:buNone/>
+            </a:pPr>
+            <a:r>
+              <a:rPr lang="zh-CN" sz="2340" dirty="0" b="1">
                 <a:solidFill>
                   <a:srgbClr val="8A4B2A"/>
                 </a:solidFill>
@@ -6853,7 +6278,7 @@
               <a:t>比较排序的下界是 </a:t>
             </a:r>
             <a:r>
-              <a:rPr lang="zh-CN" sz="2340" b="1" i="1" dirty="0">
+              <a:rPr lang="zh-CN" sz="2340" dirty="0" b="1" i="1">
                 <a:solidFill>
                   <a:srgbClr val="8A4B2A"/>
                 </a:solidFill>
@@ -6901,9 +6326,7 @@
         <p:txBody>
           <a:bodyPr/>
           <a:lstStyle/>
-          <a:p>
-            <a:endParaRPr/>
-          </a:p>
+          <a:p/>
         </p:txBody>
       </p:sp>
       <p:sp>
@@ -6928,7 +6351,7 @@
           </a:bodyPr>
           <a:lstStyle/>
           <a:p>
-            <a:pPr marL="0" lvl="0" indent="0">
+            <a:pPr marL="0" indent="0" lvl="0">
               <a:lnSpc>
                 <a:spcPct val="100000"/>
               </a:lnSpc>
@@ -6946,7 +6369,7 @@
               <a:t>n 个元素有 </a:t>
             </a:r>
             <a:r>
-              <a:rPr lang="zh-CN" sz="2145" i="1" dirty="0">
+              <a:rPr lang="zh-CN" sz="2145" dirty="0" i="1">
                 <a:solidFill>
                   <a:srgbClr val="6B6B66"/>
                 </a:solidFill>
@@ -6968,7 +6391,7 @@
               <a:t> 种排列，每次比较至多把可能性减半， 所以至少要 </a:t>
             </a:r>
             <a:r>
-              <a:rPr lang="zh-CN" sz="2145" i="1" dirty="0">
+              <a:rPr lang="zh-CN" sz="2145" dirty="0" i="1">
                 <a:solidFill>
                   <a:srgbClr val="6B6B66"/>
                 </a:solidFill>
@@ -7014,7 +6437,7 @@
           </a:bodyPr>
           <a:lstStyle/>
           <a:p>
-            <a:pPr marL="0" lvl="0" indent="0">
+            <a:pPr marL="0" indent="0" lvl="0">
               <a:lnSpc>
                 <a:spcPct val="100000"/>
               </a:lnSpc>
@@ -7032,7 +6455,7 @@
               <a:t>想更快，就只能</a:t>
             </a:r>
             <a:r>
-              <a:rPr lang="zh-CN" sz="2340" b="1" dirty="0">
+              <a:rPr lang="zh-CN" sz="2340" dirty="0" b="1">
                 <a:solidFill>
                   <a:srgbClr val="8A4B2A"/>
                 </a:solidFill>
@@ -7078,7 +6501,7 @@
           </a:bodyPr>
           <a:lstStyle/>
           <a:p>
-            <a:pPr marL="0" lvl="0" indent="0">
+            <a:pPr marL="0" indent="0" lvl="0">
               <a:lnSpc>
                 <a:spcPct val="100000"/>
               </a:lnSpc>
@@ -7120,7 +6543,7 @@
           </a:bodyPr>
           <a:lstStyle/>
           <a:p>
-            <a:pPr marL="0" lvl="0" indent="0" algn="r">
+            <a:pPr marL="0" indent="0" lvl="0" algn="r">
               <a:lnSpc>
                 <a:spcPct val="100000"/>
               </a:lnSpc>
@@ -7142,9 +6565,6 @@
       </p:sp>
     </p:spTree>
   </p:cSld>
-  <p:clrMapOvr>
-    <a:masterClrMapping/>
-  </p:clrMapOvr>
 </p:sld>
 </file>
 
@@ -7187,14 +6607,14 @@
           </a:bodyPr>
           <a:lstStyle/>
           <a:p>
-            <a:pPr marL="0" lvl="0" indent="0">
-              <a:lnSpc>
-                <a:spcPct val="100000"/>
-              </a:lnSpc>
-              <a:buNone/>
-            </a:pPr>
-            <a:r>
-              <a:rPr lang="zh-CN" sz="3200" b="1" dirty="0">
+            <a:pPr marL="0" indent="0" lvl="0">
+              <a:lnSpc>
+                <a:spcPct val="100000"/>
+              </a:lnSpc>
+              <a:buNone/>
+            </a:pPr>
+            <a:r>
+              <a:rPr lang="zh-CN" sz="3200" dirty="0" b="1">
                 <a:solidFill>
                   <a:srgbClr val="1A1A18"/>
                 </a:solidFill>
@@ -7231,9 +6651,7 @@
         <p:txBody>
           <a:bodyPr/>
           <a:lstStyle/>
-          <a:p>
-            <a:endParaRPr/>
-          </a:p>
+          <a:p/>
         </p:txBody>
       </p:sp>
       <p:sp>
@@ -7258,7 +6676,7 @@
           </a:bodyPr>
           <a:lstStyle/>
           <a:p>
-            <a:pPr marL="0" lvl="0" indent="0">
+            <a:pPr marL="0" indent="0" lvl="0">
               <a:lnSpc>
                 <a:spcPct val="100000"/>
               </a:lnSpc>
@@ -7331,7 +6749,7 @@
           </a:bodyPr>
           <a:lstStyle/>
           <a:p>
-            <a:pPr marL="0" lvl="0" indent="0">
+            <a:pPr marL="0" indent="0" lvl="0">
               <a:lnSpc>
                 <a:spcPct val="104000"/>
               </a:lnSpc>
@@ -7350,7 +6768,7 @@
             </a:r>
           </a:p>
           <a:p>
-            <a:pPr marL="0" lvl="0" indent="0">
+            <a:pPr marL="0" indent="0" lvl="0">
               <a:lnSpc>
                 <a:spcPct val="104000"/>
               </a:lnSpc>
@@ -7369,7 +6787,7 @@
             </a:r>
           </a:p>
           <a:p>
-            <a:pPr marL="0" lvl="0" indent="0">
+            <a:pPr marL="0" indent="0" lvl="0">
               <a:lnSpc>
                 <a:spcPct val="104000"/>
               </a:lnSpc>
@@ -7411,7 +6829,7 @@
           </a:bodyPr>
           <a:lstStyle/>
           <a:p>
-            <a:pPr marL="0" lvl="0" indent="0">
+            <a:pPr marL="0" indent="0" lvl="0">
               <a:lnSpc>
                 <a:spcPct val="100000"/>
               </a:lnSpc>
@@ -7429,7 +6847,7 @@
               <a:t>时间 </a:t>
             </a:r>
             <a:r>
-              <a:rPr lang="zh-CN" sz="2340" i="1" dirty="0">
+              <a:rPr lang="zh-CN" sz="2340" dirty="0" i="1">
                 <a:solidFill>
                   <a:srgbClr val="1A1A18"/>
                 </a:solidFill>
@@ -7451,7 +6869,7 @@
               <a:t>，空间 </a:t>
             </a:r>
             <a:r>
-              <a:rPr lang="zh-CN" sz="2340" i="1" dirty="0">
+              <a:rPr lang="zh-CN" sz="2340" dirty="0" i="1">
                 <a:solidFill>
                   <a:srgbClr val="1A1A18"/>
                 </a:solidFill>
@@ -7497,7 +6915,7 @@
           </a:bodyPr>
           <a:lstStyle/>
           <a:p>
-            <a:pPr marL="0" lvl="0" indent="0">
+            <a:pPr marL="0" indent="0" lvl="0">
               <a:lnSpc>
                 <a:spcPct val="100000"/>
               </a:lnSpc>
@@ -7539,7 +6957,7 @@
           </a:bodyPr>
           <a:lstStyle/>
           <a:p>
-            <a:pPr marL="0" lvl="0" indent="0">
+            <a:pPr marL="0" indent="0" lvl="0">
               <a:lnSpc>
                 <a:spcPct val="100000"/>
               </a:lnSpc>
@@ -7581,7 +6999,7 @@
           </a:bodyPr>
           <a:lstStyle/>
           <a:p>
-            <a:pPr marL="0" lvl="0" indent="0" algn="r">
+            <a:pPr marL="0" indent="0" lvl="0" algn="r">
               <a:lnSpc>
                 <a:spcPct val="100000"/>
               </a:lnSpc>
@@ -7603,9 +7021,6 @@
       </p:sp>
     </p:spTree>
   </p:cSld>
-  <p:clrMapOvr>
-    <a:masterClrMapping/>
-  </p:clrMapOvr>
 </p:sld>
 </file>
 
@@ -7648,14 +7063,14 @@
           </a:bodyPr>
           <a:lstStyle/>
           <a:p>
-            <a:pPr marL="0" lvl="0" indent="0">
-              <a:lnSpc>
-                <a:spcPct val="100000"/>
-              </a:lnSpc>
-              <a:buNone/>
-            </a:pPr>
-            <a:r>
-              <a:rPr lang="zh-CN" sz="3200" b="1" dirty="0">
+            <a:pPr marL="0" indent="0" lvl="0">
+              <a:lnSpc>
+                <a:spcPct val="100000"/>
+              </a:lnSpc>
+              <a:buNone/>
+            </a:pPr>
+            <a:r>
+              <a:rPr lang="zh-CN" sz="3200" dirty="0" b="1">
                 <a:solidFill>
                   <a:srgbClr val="1A1A18"/>
                 </a:solidFill>
@@ -7692,9 +7107,7 @@
         <p:txBody>
           <a:bodyPr/>
           <a:lstStyle/>
-          <a:p>
-            <a:endParaRPr/>
-          </a:p>
+          <a:p/>
         </p:txBody>
       </p:sp>
       <p:pic>
@@ -7706,7 +7119,7 @@
           <p:nvPr/>
         </p:nvPicPr>
         <p:blipFill>
-          <a:blip r:embed="rId2"/>
+          <a:blip r:embed="rId100"/>
           <a:stretch>
             <a:fillRect/>
           </a:stretch>
@@ -7743,7 +7156,7 @@
           </a:bodyPr>
           <a:lstStyle/>
           <a:p>
-            <a:pPr marL="0" lvl="0" indent="0" algn="ctr">
+            <a:pPr marL="0" indent="0" lvl="0" algn="ctr">
               <a:lnSpc>
                 <a:spcPct val="100000"/>
               </a:lnSpc>
@@ -7785,7 +7198,7 @@
           </a:bodyPr>
           <a:lstStyle/>
           <a:p>
-            <a:pPr marL="0" lvl="0" indent="0">
+            <a:pPr marL="0" indent="0" lvl="0">
               <a:lnSpc>
                 <a:spcPct val="100000"/>
               </a:lnSpc>
@@ -7827,7 +7240,7 @@
           </a:bodyPr>
           <a:lstStyle/>
           <a:p>
-            <a:pPr marL="0" lvl="0" indent="0" algn="r">
+            <a:pPr marL="0" indent="0" lvl="0" algn="r">
               <a:lnSpc>
                 <a:spcPct val="100000"/>
               </a:lnSpc>
@@ -7849,9 +7262,6 @@
       </p:sp>
     </p:spTree>
   </p:cSld>
-  <p:clrMapOvr>
-    <a:masterClrMapping/>
-  </p:clrMapOvr>
 </p:sld>
 </file>
 
@@ -7894,22 +7304,22 @@
           </a:bodyPr>
           <a:lstStyle/>
           <a:p>
-            <a:pPr marL="0" lvl="0" indent="0">
-              <a:lnSpc>
-                <a:spcPct val="100000"/>
-              </a:lnSpc>
-              <a:buNone/>
-            </a:pPr>
-            <a:r>
-              <a:rPr lang="zh-CN" sz="3200" b="1" dirty="0">
-                <a:solidFill>
-                  <a:srgbClr val="1A1A18"/>
-                </a:solidFill>
-                <a:latin typeface="Segoe UI"/>
-                <a:ea typeface="Noto Sans CJK SC"/>
-                <a:cs typeface="Segoe UI"/>
-              </a:rPr>
-              <a:t>8.6.2 基数排序</a:t>
+            <a:pPr marL="0" indent="0" lvl="0">
+              <a:lnSpc>
+                <a:spcPct val="100000"/>
+              </a:lnSpc>
+              <a:buNone/>
+            </a:pPr>
+            <a:r>
+              <a:rPr lang="zh-CN" sz="3200" dirty="0" b="1">
+                <a:solidFill>
+                  <a:srgbClr val="1A1A18"/>
+                </a:solidFill>
+                <a:latin typeface="Segoe UI"/>
+                <a:ea typeface="Noto Sans CJK SC"/>
+                <a:cs typeface="Segoe UI"/>
+              </a:rPr>
+              <a:t>8.6.2 基数排序（续）</a:t>
             </a:r>
           </a:p>
         </p:txBody>
@@ -7938,9 +7348,7 @@
         <p:txBody>
           <a:bodyPr/>
           <a:lstStyle/>
-          <a:p>
-            <a:endParaRPr/>
-          </a:p>
+          <a:p/>
         </p:txBody>
       </p:sp>
       <p:sp>
@@ -7974,7 +7382,7 @@
           </a:bodyPr>
           <a:lstStyle/>
           <a:p>
-            <a:pPr marL="0" lvl="0" indent="0">
+            <a:pPr marL="0" indent="0" lvl="0">
               <a:lnSpc>
                 <a:spcPct val="100000"/>
               </a:lnSpc>
@@ -7993,7 +7401,7 @@
             </a:r>
           </a:p>
           <a:p>
-            <a:pPr marL="0" lvl="0" indent="0">
+            <a:pPr marL="0" indent="0" lvl="0">
               <a:lnSpc>
                 <a:spcPct val="104000"/>
               </a:lnSpc>
@@ -8012,7 +7420,7 @@
             </a:r>
           </a:p>
           <a:p>
-            <a:pPr marL="0" lvl="0" indent="0">
+            <a:pPr marL="0" indent="0" lvl="0">
               <a:lnSpc>
                 <a:spcPct val="104000"/>
               </a:lnSpc>
@@ -8086,7 +7494,7 @@
             </a:r>
           </a:p>
           <a:p>
-            <a:pPr marL="0" lvl="0" indent="0">
+            <a:pPr marL="0" indent="0" lvl="0">
               <a:lnSpc>
                 <a:spcPct val="104000"/>
               </a:lnSpc>
@@ -8127,7 +7535,7 @@
             </a:r>
           </a:p>
           <a:p>
-            <a:pPr marL="0" lvl="0" indent="0">
+            <a:pPr marL="0" indent="0" lvl="0">
               <a:lnSpc>
                 <a:spcPct val="104000"/>
               </a:lnSpc>
@@ -8256,7 +7664,7 @@
             </a:r>
           </a:p>
           <a:p>
-            <a:pPr marL="0" lvl="0" indent="0">
+            <a:pPr marL="0" indent="0" lvl="0">
               <a:lnSpc>
                 <a:spcPct val="104000"/>
               </a:lnSpc>
@@ -8319,7 +7727,7 @@
             </a:r>
           </a:p>
           <a:p>
-            <a:pPr marL="0" lvl="0" indent="0">
+            <a:pPr marL="0" indent="0" lvl="0">
               <a:lnSpc>
                 <a:spcPct val="104000"/>
               </a:lnSpc>
@@ -8382,7 +7790,7 @@
             </a:r>
           </a:p>
           <a:p>
-            <a:pPr marL="0" lvl="0" indent="0">
+            <a:pPr marL="0" indent="0" lvl="0">
               <a:lnSpc>
                 <a:spcPct val="104000"/>
               </a:lnSpc>
@@ -8489,7 +7897,7 @@
             </a:r>
           </a:p>
           <a:p>
-            <a:pPr marL="0" lvl="0" indent="0">
+            <a:pPr marL="0" indent="0" lvl="0">
               <a:lnSpc>
                 <a:spcPct val="104000"/>
               </a:lnSpc>
@@ -8530,7 +7938,7 @@
             </a:r>
           </a:p>
           <a:p>
-            <a:pPr marL="0" lvl="0" indent="0">
+            <a:pPr marL="0" indent="0" lvl="0">
               <a:lnSpc>
                 <a:spcPct val="104000"/>
               </a:lnSpc>
@@ -8549,7 +7957,7 @@
             </a:r>
           </a:p>
           <a:p>
-            <a:pPr marL="0" lvl="0" indent="0">
+            <a:pPr marL="0" indent="0" lvl="0">
               <a:lnSpc>
                 <a:spcPct val="104000"/>
               </a:lnSpc>
@@ -8612,7 +8020,7 @@
             </a:r>
           </a:p>
           <a:p>
-            <a:pPr marL="0" lvl="0" indent="0">
+            <a:pPr marL="0" indent="0" lvl="0">
               <a:lnSpc>
                 <a:spcPct val="104000"/>
               </a:lnSpc>
@@ -8719,7 +8127,7 @@
             </a:r>
           </a:p>
           <a:p>
-            <a:pPr marL="0" lvl="0" indent="0">
+            <a:pPr marL="0" indent="0" lvl="0">
               <a:lnSpc>
                 <a:spcPct val="104000"/>
               </a:lnSpc>
@@ -8782,7 +8190,7 @@
             </a:r>
           </a:p>
           <a:p>
-            <a:pPr marL="0" lvl="0" indent="0">
+            <a:pPr marL="0" indent="0" lvl="0">
               <a:lnSpc>
                 <a:spcPct val="104000"/>
               </a:lnSpc>
@@ -8889,7 +8297,7 @@
             </a:r>
           </a:p>
           <a:p>
-            <a:pPr marL="0" lvl="0" indent="0">
+            <a:pPr marL="0" indent="0" lvl="0">
               <a:lnSpc>
                 <a:spcPct val="104000"/>
               </a:lnSpc>
@@ -8930,7 +8338,7 @@
             </a:r>
           </a:p>
           <a:p>
-            <a:pPr marL="0" lvl="0" indent="0">
+            <a:pPr marL="0" indent="0" lvl="0">
               <a:lnSpc>
                 <a:spcPct val="104000"/>
               </a:lnSpc>
@@ -8949,7 +8357,7 @@
             </a:r>
           </a:p>
           <a:p>
-            <a:pPr marL="0" lvl="0" indent="0">
+            <a:pPr marL="0" indent="0" lvl="0">
               <a:lnSpc>
                 <a:spcPct val="104000"/>
               </a:lnSpc>
@@ -8968,7 +8376,7 @@
             </a:r>
           </a:p>
           <a:p>
-            <a:pPr marL="0" lvl="0" indent="0">
+            <a:pPr marL="0" indent="0" lvl="0">
               <a:lnSpc>
                 <a:spcPct val="104000"/>
               </a:lnSpc>
@@ -8987,7 +8395,7 @@
             </a:r>
           </a:p>
           <a:p>
-            <a:pPr marL="0" lvl="0" indent="0">
+            <a:pPr marL="0" indent="0" lvl="0">
               <a:lnSpc>
                 <a:spcPct val="104000"/>
               </a:lnSpc>
@@ -9029,7 +8437,7 @@
           </a:bodyPr>
           <a:lstStyle/>
           <a:p>
-            <a:pPr marL="0" lvl="0" indent="0">
+            <a:pPr marL="0" indent="0" lvl="0">
               <a:lnSpc>
                 <a:spcPct val="100000"/>
               </a:lnSpc>
@@ -9071,7 +8479,7 @@
           </a:bodyPr>
           <a:lstStyle/>
           <a:p>
-            <a:pPr marL="0" lvl="0" indent="0" algn="r">
+            <a:pPr marL="0" indent="0" lvl="0" algn="r">
               <a:lnSpc>
                 <a:spcPct val="100000"/>
               </a:lnSpc>
@@ -9093,9 +8501,6 @@
       </p:sp>
     </p:spTree>
   </p:cSld>
-  <p:clrMapOvr>
-    <a:masterClrMapping/>
-  </p:clrMapOvr>
 </p:sld>
 </file>
 
@@ -9138,14 +8543,14 @@
           </a:bodyPr>
           <a:lstStyle/>
           <a:p>
-            <a:pPr marL="0" lvl="0" indent="0">
-              <a:lnSpc>
-                <a:spcPct val="100000"/>
-              </a:lnSpc>
-              <a:buNone/>
-            </a:pPr>
-            <a:r>
-              <a:rPr lang="zh-CN" sz="3200" b="1" dirty="0">
+            <a:pPr marL="0" indent="0" lvl="0">
+              <a:lnSpc>
+                <a:spcPct val="100000"/>
+              </a:lnSpc>
+              <a:buNone/>
+            </a:pPr>
+            <a:r>
+              <a:rPr lang="zh-CN" sz="3200" dirty="0" b="1">
                 <a:solidFill>
                   <a:srgbClr val="1A1A18"/>
                 </a:solidFill>
@@ -9182,9 +8587,7 @@
         <p:txBody>
           <a:bodyPr/>
           <a:lstStyle/>
-          <a:p>
-            <a:endParaRPr/>
-          </a:p>
+          <a:p/>
         </p:txBody>
       </p:sp>
       <p:sp>
@@ -9209,7 +8612,7 @@
           </a:bodyPr>
           <a:lstStyle/>
           <a:p>
-            <a:pPr marL="270000" lvl="0" indent="-230000">
+            <a:pPr marL="270000" indent="-230000" lvl="0">
               <a:lnSpc>
                 <a:spcPct val="100000"/>
               </a:lnSpc>
@@ -9223,7 +8626,7 @@
               <a:buChar char="●"/>
             </a:pPr>
             <a:r>
-              <a:rPr lang="zh-CN" sz="2340" b="1" dirty="0">
+              <a:rPr lang="zh-CN" sz="2340" dirty="0" b="1">
                 <a:solidFill>
                   <a:srgbClr val="8A4B2A"/>
                 </a:solidFill>
@@ -9246,7 +8649,7 @@
             </a:r>
           </a:p>
           <a:p>
-            <a:pPr marL="270000" lvl="0" indent="-230000">
+            <a:pPr marL="270000" indent="-230000" lvl="0">
               <a:lnSpc>
                 <a:spcPct val="100000"/>
               </a:lnSpc>
@@ -9260,7 +8663,7 @@
               <a:buChar char="●"/>
             </a:pPr>
             <a:r>
-              <a:rPr lang="zh-CN" sz="2340" b="1" dirty="0">
+              <a:rPr lang="zh-CN" sz="2340" dirty="0" b="1">
                 <a:solidFill>
                   <a:srgbClr val="8A4B2A"/>
                 </a:solidFill>
@@ -9282,7 +8685,7 @@
               <a:t>：额外空间 </a:t>
             </a:r>
             <a:r>
-              <a:rPr lang="zh-CN" sz="2340" i="1" dirty="0">
+              <a:rPr lang="zh-CN" sz="2340" dirty="0" i="1">
                 <a:solidFill>
                   <a:srgbClr val="1A1A18"/>
                 </a:solidFill>
@@ -9294,7 +8697,7 @@
             </a:r>
           </a:p>
           <a:p>
-            <a:pPr marL="270000" lvl="0" indent="-230000">
+            <a:pPr marL="270000" indent="-230000" lvl="0">
               <a:lnSpc>
                 <a:spcPct val="100000"/>
               </a:lnSpc>
@@ -9308,7 +8711,7 @@
               <a:buChar char="●"/>
             </a:pPr>
             <a:r>
-              <a:rPr lang="zh-CN" sz="2340" b="1" dirty="0">
+              <a:rPr lang="zh-CN" sz="2340" dirty="0" b="1">
                 <a:solidFill>
                   <a:srgbClr val="8A4B2A"/>
                 </a:solidFill>
@@ -9354,14 +8757,14 @@
           </a:bodyPr>
           <a:lstStyle/>
           <a:p>
-            <a:pPr marL="0" lvl="0" indent="0">
-              <a:lnSpc>
-                <a:spcPct val="100000"/>
-              </a:lnSpc>
-              <a:buNone/>
-            </a:pPr>
-            <a:r>
-              <a:rPr lang="zh-CN" sz="2340" b="1" dirty="0">
+            <a:pPr marL="0" indent="0" lvl="0">
+              <a:lnSpc>
+                <a:spcPct val="100000"/>
+              </a:lnSpc>
+              <a:buNone/>
+            </a:pPr>
+            <a:r>
+              <a:rPr lang="zh-CN" sz="2340" dirty="0" b="1">
                 <a:solidFill>
                   <a:srgbClr val="8A4B2A"/>
                 </a:solidFill>
@@ -9383,7 +8786,7 @@
               <a:t>：按多个字段排序时， 先排次要字段、再用</a:t>
             </a:r>
             <a:r>
-              <a:rPr lang="zh-CN" sz="2340" b="1" dirty="0">
+              <a:rPr lang="zh-CN" sz="2340" dirty="0" b="1">
                 <a:solidFill>
                   <a:srgbClr val="8A4B2A"/>
                 </a:solidFill>
@@ -9429,7 +8832,7 @@
           </a:bodyPr>
           <a:lstStyle/>
           <a:p>
-            <a:pPr marL="0" lvl="0" indent="0">
+            <a:pPr marL="0" indent="0" lvl="0">
               <a:lnSpc>
                 <a:spcPct val="100000"/>
               </a:lnSpc>
@@ -9471,7 +8874,7 @@
           </a:bodyPr>
           <a:lstStyle/>
           <a:p>
-            <a:pPr marL="0" lvl="0" indent="0" algn="r">
+            <a:pPr marL="0" indent="0" lvl="0" algn="r">
               <a:lnSpc>
                 <a:spcPct val="100000"/>
               </a:lnSpc>
@@ -9493,9 +8896,6 @@
       </p:sp>
     </p:spTree>
   </p:cSld>
-  <p:clrMapOvr>
-    <a:masterClrMapping/>
-  </p:clrMapOvr>
 </p:sld>
 </file>
 
@@ -9538,14 +8938,14 @@
           </a:bodyPr>
           <a:lstStyle/>
           <a:p>
-            <a:pPr marL="0" lvl="0" indent="0">
-              <a:lnSpc>
-                <a:spcPct val="100000"/>
-              </a:lnSpc>
-              <a:buNone/>
-            </a:pPr>
-            <a:r>
-              <a:rPr lang="zh-CN" sz="3200" b="1" dirty="0">
+            <a:pPr marL="0" indent="0" lvl="0">
+              <a:lnSpc>
+                <a:spcPct val="100000"/>
+              </a:lnSpc>
+              <a:buNone/>
+            </a:pPr>
+            <a:r>
+              <a:rPr lang="zh-CN" sz="3200" dirty="0" b="1">
                 <a:solidFill>
                   <a:srgbClr val="1A1A18"/>
                 </a:solidFill>
@@ -9582,9 +8982,7 @@
         <p:txBody>
           <a:bodyPr/>
           <a:lstStyle/>
-          <a:p>
-            <a:endParaRPr/>
-          </a:p>
+          <a:p/>
         </p:txBody>
       </p:sp>
       <p:sp>
@@ -9609,7 +9007,7 @@
           </a:bodyPr>
           <a:lstStyle/>
           <a:p>
-            <a:pPr marL="0" lvl="0" indent="0">
+            <a:pPr marL="0" indent="0" lvl="0">
               <a:lnSpc>
                 <a:spcPct val="100000"/>
               </a:lnSpc>
@@ -9682,7 +9080,7 @@
           </a:bodyPr>
           <a:lstStyle/>
           <a:p>
-            <a:pPr marL="0" lvl="0" indent="0">
+            <a:pPr marL="0" indent="0" lvl="0">
               <a:lnSpc>
                 <a:spcPct val="104000"/>
               </a:lnSpc>
@@ -9701,7 +9099,7 @@
             </a:r>
           </a:p>
           <a:p>
-            <a:pPr marL="0" lvl="0" indent="0">
+            <a:pPr marL="0" indent="0" lvl="0">
               <a:lnSpc>
                 <a:spcPct val="104000"/>
               </a:lnSpc>
@@ -9720,7 +9118,7 @@
             </a:r>
           </a:p>
           <a:p>
-            <a:pPr marL="0" lvl="0" indent="0">
+            <a:pPr marL="0" indent="0" lvl="0">
               <a:lnSpc>
                 <a:spcPct val="104000"/>
               </a:lnSpc>
@@ -9762,7 +9160,7 @@
           </a:bodyPr>
           <a:lstStyle/>
           <a:p>
-            <a:pPr marL="0" lvl="0" indent="0">
+            <a:pPr marL="0" indent="0" lvl="0">
               <a:lnSpc>
                 <a:spcPct val="100000"/>
               </a:lnSpc>
@@ -9804,7 +9202,7 @@
           </a:bodyPr>
           <a:lstStyle/>
           <a:p>
-            <a:pPr marL="270000" lvl="0" indent="-230000">
+            <a:pPr marL="270000" indent="-230000" lvl="0">
               <a:lnSpc>
                 <a:spcPct val="100000"/>
               </a:lnSpc>
@@ -9830,7 +9228,7 @@
             </a:r>
           </a:p>
           <a:p>
-            <a:pPr marL="270000" lvl="0" indent="-230000">
+            <a:pPr marL="270000" indent="-230000" lvl="0">
               <a:lnSpc>
                 <a:spcPct val="100000"/>
               </a:lnSpc>
@@ -9856,7 +9254,7 @@
             </a:r>
           </a:p>
           <a:p>
-            <a:pPr marL="270000" lvl="0" indent="-230000">
+            <a:pPr marL="270000" indent="-230000" lvl="0">
               <a:lnSpc>
                 <a:spcPct val="100000"/>
               </a:lnSpc>
@@ -9905,7 +9303,7 @@
           </a:bodyPr>
           <a:lstStyle/>
           <a:p>
-            <a:pPr marL="0" lvl="0" indent="0">
+            <a:pPr marL="0" indent="0" lvl="0">
               <a:lnSpc>
                 <a:spcPct val="100000"/>
               </a:lnSpc>
@@ -9947,7 +9345,7 @@
           </a:bodyPr>
           <a:lstStyle/>
           <a:p>
-            <a:pPr marL="0" lvl="0" indent="0" algn="r">
+            <a:pPr marL="0" indent="0" lvl="0" algn="r">
               <a:lnSpc>
                 <a:spcPct val="100000"/>
               </a:lnSpc>
@@ -9969,9 +9367,6 @@
       </p:sp>
     </p:spTree>
   </p:cSld>
-  <p:clrMapOvr>
-    <a:masterClrMapping/>
-  </p:clrMapOvr>
 </p:sld>
 </file>
 
@@ -10014,14 +9409,14 @@
           </a:bodyPr>
           <a:lstStyle/>
           <a:p>
-            <a:pPr marL="0" lvl="0" indent="0">
-              <a:lnSpc>
-                <a:spcPct val="100000"/>
-              </a:lnSpc>
-              <a:buNone/>
-            </a:pPr>
-            <a:r>
-              <a:rPr lang="zh-CN" sz="3200" b="1" dirty="0">
+            <a:pPr marL="0" indent="0" lvl="0">
+              <a:lnSpc>
+                <a:spcPct val="100000"/>
+              </a:lnSpc>
+              <a:buNone/>
+            </a:pPr>
+            <a:r>
+              <a:rPr lang="zh-CN" sz="3200" dirty="0" b="1">
                 <a:solidFill>
                   <a:srgbClr val="1A1A18"/>
                 </a:solidFill>
@@ -10058,9 +9453,7 @@
         <p:txBody>
           <a:bodyPr/>
           <a:lstStyle/>
-          <a:p>
-            <a:endParaRPr/>
-          </a:p>
+          <a:p/>
         </p:txBody>
       </p:sp>
       <p:graphicFrame>
@@ -10080,41 +9473,11 @@
             <a:tbl>
               <a:tblPr firstRow="1"/>
               <a:tblGrid>
-                <a:gridCol w="1789343">
-                  <a:extLst>
-                    <a:ext uri="{9D8B030D-6E8A-4147-A177-3AD203B41FA5}">
-                      <a16:colId xmlns:a16="http://schemas.microsoft.com/office/drawing/2014/main" val="20000"/>
-                    </a:ext>
-                  </a:extLst>
-                </a:gridCol>
-                <a:gridCol w="2791376">
-                  <a:extLst>
-                    <a:ext uri="{9D8B030D-6E8A-4147-A177-3AD203B41FA5}">
-                      <a16:colId xmlns:a16="http://schemas.microsoft.com/office/drawing/2014/main" val="20001"/>
-                    </a:ext>
-                  </a:extLst>
-                </a:gridCol>
-                <a:gridCol w="2684015">
-                  <a:extLst>
-                    <a:ext uri="{9D8B030D-6E8A-4147-A177-3AD203B41FA5}">
-                      <a16:colId xmlns:a16="http://schemas.microsoft.com/office/drawing/2014/main" val="20002"/>
-                    </a:ext>
-                  </a:extLst>
-                </a:gridCol>
-                <a:gridCol w="2451400">
-                  <a:extLst>
-                    <a:ext uri="{9D8B030D-6E8A-4147-A177-3AD203B41FA5}">
-                      <a16:colId xmlns:a16="http://schemas.microsoft.com/office/drawing/2014/main" val="20003"/>
-                    </a:ext>
-                  </a:extLst>
-                </a:gridCol>
-                <a:gridCol w="1342010">
-                  <a:extLst>
-                    <a:ext uri="{9D8B030D-6E8A-4147-A177-3AD203B41FA5}">
-                      <a16:colId xmlns:a16="http://schemas.microsoft.com/office/drawing/2014/main" val="20004"/>
-                    </a:ext>
-                  </a:extLst>
-                </a:gridCol>
+                <a:gridCol w="1789343"/>
+                <a:gridCol w="2791376"/>
+                <a:gridCol w="2684015"/>
+                <a:gridCol w="2451400"/>
+                <a:gridCol w="1342010"/>
               </a:tblGrid>
               <a:tr h="380504">
                 <a:tc>
@@ -10122,14 +9485,14 @@
                     <a:bodyPr/>
                     <a:lstStyle/>
                     <a:p>
-                      <a:pPr marL="0" lvl="0" indent="0">
+                      <a:pPr marL="0" indent="0" lvl="0">
                         <a:lnSpc>
                           <a:spcPct val="100000"/>
                         </a:lnSpc>
                         <a:buNone/>
                       </a:pPr>
                       <a:r>
-                        <a:rPr lang="zh-CN" sz="1755" b="1" dirty="0">
+                        <a:rPr lang="zh-CN" sz="1755" dirty="0" b="1">
                           <a:solidFill>
                             <a:srgbClr val="1A1A18"/>
                           </a:solidFill>
@@ -10172,14 +9535,14 @@
                     <a:bodyPr/>
                     <a:lstStyle/>
                     <a:p>
-                      <a:pPr marL="0" lvl="0" indent="0">
+                      <a:pPr marL="0" indent="0" lvl="0">
                         <a:lnSpc>
                           <a:spcPct val="100000"/>
                         </a:lnSpc>
                         <a:buNone/>
                       </a:pPr>
                       <a:r>
-                        <a:rPr lang="zh-CN" sz="1755" b="1" dirty="0">
+                        <a:rPr lang="zh-CN" sz="1755" dirty="0" b="1">
                           <a:solidFill>
                             <a:srgbClr val="1A1A18"/>
                           </a:solidFill>
@@ -10222,14 +9585,14 @@
                     <a:bodyPr/>
                     <a:lstStyle/>
                     <a:p>
-                      <a:pPr marL="0" lvl="0" indent="0">
+                      <a:pPr marL="0" indent="0" lvl="0">
                         <a:lnSpc>
                           <a:spcPct val="100000"/>
                         </a:lnSpc>
                         <a:buNone/>
                       </a:pPr>
                       <a:r>
-                        <a:rPr lang="zh-CN" sz="1755" b="1" dirty="0">
+                        <a:rPr lang="zh-CN" sz="1755" dirty="0" b="1">
                           <a:solidFill>
                             <a:srgbClr val="1A1A18"/>
                           </a:solidFill>
@@ -10272,14 +9635,14 @@
                     <a:bodyPr/>
                     <a:lstStyle/>
                     <a:p>
-                      <a:pPr marL="0" lvl="0" indent="0">
+                      <a:pPr marL="0" indent="0" lvl="0">
                         <a:lnSpc>
                           <a:spcPct val="100000"/>
                         </a:lnSpc>
                         <a:buNone/>
                       </a:pPr>
                       <a:r>
-                        <a:rPr lang="zh-CN" sz="1755" b="1" dirty="0">
+                        <a:rPr lang="zh-CN" sz="1755" dirty="0" b="1">
                           <a:solidFill>
                             <a:srgbClr val="1A1A18"/>
                           </a:solidFill>
@@ -10322,14 +9685,14 @@
                     <a:bodyPr/>
                     <a:lstStyle/>
                     <a:p>
-                      <a:pPr marL="0" lvl="0" indent="0">
+                      <a:pPr marL="0" indent="0" lvl="0">
                         <a:lnSpc>
                           <a:spcPct val="100000"/>
                         </a:lnSpc>
                         <a:buNone/>
                       </a:pPr>
                       <a:r>
-                        <a:rPr lang="zh-CN" sz="1755" b="1" dirty="0">
+                        <a:rPr lang="zh-CN" sz="1755" dirty="0" b="1">
                           <a:solidFill>
                             <a:srgbClr val="1A1A18"/>
                           </a:solidFill>
@@ -10367,11 +9730,6 @@
                     </a:solidFill>
                   </a:tcPr>
                 </a:tc>
-                <a:extLst>
-                  <a:ext uri="{0D108BD9-81ED-4DB2-BD59-A6C34878D82A}">
-                    <a16:rowId xmlns:a16="http://schemas.microsoft.com/office/drawing/2014/main" val="10000"/>
-                  </a:ext>
-                </a:extLst>
               </a:tr>
               <a:tr h="380504">
                 <a:tc>
@@ -10379,7 +9737,7 @@
                     <a:bodyPr/>
                     <a:lstStyle/>
                     <a:p>
-                      <a:pPr marL="0" lvl="0" indent="0">
+                      <a:pPr marL="0" indent="0" lvl="0">
                         <a:lnSpc>
                           <a:spcPct val="100000"/>
                         </a:lnSpc>
@@ -10429,14 +9787,14 @@
                     <a:bodyPr/>
                     <a:lstStyle/>
                     <a:p>
-                      <a:pPr marL="0" lvl="0" indent="0">
+                      <a:pPr marL="0" indent="0" lvl="0">
                         <a:lnSpc>
                           <a:spcPct val="100000"/>
                         </a:lnSpc>
                         <a:buNone/>
                       </a:pPr>
                       <a:r>
-                        <a:rPr lang="zh-CN" sz="1755" i="1" dirty="0">
+                        <a:rPr lang="zh-CN" sz="1755" dirty="0" i="1">
                           <a:solidFill>
                             <a:srgbClr val="1A1A18"/>
                           </a:solidFill>
@@ -10479,14 +9837,14 @@
                     <a:bodyPr/>
                     <a:lstStyle/>
                     <a:p>
-                      <a:pPr marL="0" lvl="0" indent="0">
+                      <a:pPr marL="0" indent="0" lvl="0">
                         <a:lnSpc>
                           <a:spcPct val="100000"/>
                         </a:lnSpc>
                         <a:buNone/>
                       </a:pPr>
                       <a:r>
-                        <a:rPr lang="zh-CN" sz="1755" i="1" dirty="0">
+                        <a:rPr lang="zh-CN" sz="1755" dirty="0" i="1">
                           <a:solidFill>
                             <a:srgbClr val="1A1A18"/>
                           </a:solidFill>
@@ -10529,14 +9887,14 @@
                     <a:bodyPr/>
                     <a:lstStyle/>
                     <a:p>
-                      <a:pPr marL="0" lvl="0" indent="0">
+                      <a:pPr marL="0" indent="0" lvl="0">
                         <a:lnSpc>
                           <a:spcPct val="100000"/>
                         </a:lnSpc>
                         <a:buNone/>
                       </a:pPr>
                       <a:r>
-                        <a:rPr lang="zh-CN" sz="1755" i="1" dirty="0">
+                        <a:rPr lang="zh-CN" sz="1755" dirty="0" i="1">
                           <a:solidFill>
                             <a:srgbClr val="1A1A18"/>
                           </a:solidFill>
@@ -10579,7 +9937,7 @@
                     <a:bodyPr/>
                     <a:lstStyle/>
                     <a:p>
-                      <a:pPr marL="0" lvl="0" indent="0">
+                      <a:pPr marL="0" indent="0" lvl="0">
                         <a:lnSpc>
                           <a:spcPct val="100000"/>
                         </a:lnSpc>
@@ -10624,11 +9982,6 @@
                     </a:solidFill>
                   </a:tcPr>
                 </a:tc>
-                <a:extLst>
-                  <a:ext uri="{0D108BD9-81ED-4DB2-BD59-A6C34878D82A}">
-                    <a16:rowId xmlns:a16="http://schemas.microsoft.com/office/drawing/2014/main" val="10001"/>
-                  </a:ext>
-                </a:extLst>
               </a:tr>
               <a:tr h="380504">
                 <a:tc>
@@ -10636,7 +9989,7 @@
                     <a:bodyPr/>
                     <a:lstStyle/>
                     <a:p>
-                      <a:pPr marL="0" lvl="0" indent="0">
+                      <a:pPr marL="0" indent="0" lvl="0">
                         <a:lnSpc>
                           <a:spcPct val="100000"/>
                         </a:lnSpc>
@@ -10686,14 +10039,14 @@
                     <a:bodyPr/>
                     <a:lstStyle/>
                     <a:p>
-                      <a:pPr marL="0" lvl="0" indent="0">
+                      <a:pPr marL="0" indent="0" lvl="0">
                         <a:lnSpc>
                           <a:spcPct val="100000"/>
                         </a:lnSpc>
                         <a:buNone/>
                       </a:pPr>
                       <a:r>
-                        <a:rPr lang="zh-CN" sz="1755" i="1" dirty="0">
+                        <a:rPr lang="zh-CN" sz="1755" dirty="0" i="1">
                           <a:solidFill>
                             <a:srgbClr val="1A1A18"/>
                           </a:solidFill>
@@ -10736,7 +10089,7 @@
                     <a:bodyPr/>
                     <a:lstStyle/>
                     <a:p>
-                      <a:pPr marL="0" lvl="0" indent="0">
+                      <a:pPr marL="0" indent="0" lvl="0">
                         <a:lnSpc>
                           <a:spcPct val="100000"/>
                         </a:lnSpc>
@@ -10786,14 +10139,14 @@
                     <a:bodyPr/>
                     <a:lstStyle/>
                     <a:p>
-                      <a:pPr marL="0" lvl="0" indent="0">
+                      <a:pPr marL="0" indent="0" lvl="0">
                         <a:lnSpc>
                           <a:spcPct val="100000"/>
                         </a:lnSpc>
                         <a:buNone/>
                       </a:pPr>
                       <a:r>
-                        <a:rPr lang="zh-CN" sz="1755" i="1" dirty="0">
+                        <a:rPr lang="zh-CN" sz="1755" dirty="0" i="1">
                           <a:solidFill>
                             <a:srgbClr val="1A1A18"/>
                           </a:solidFill>
@@ -10836,7 +10189,7 @@
                     <a:bodyPr/>
                     <a:lstStyle/>
                     <a:p>
-                      <a:pPr marL="0" lvl="0" indent="0">
+                      <a:pPr marL="0" indent="0" lvl="0">
                         <a:lnSpc>
                           <a:spcPct val="100000"/>
                         </a:lnSpc>
@@ -10881,11 +10234,6 @@
                     </a:solidFill>
                   </a:tcPr>
                 </a:tc>
-                <a:extLst>
-                  <a:ext uri="{0D108BD9-81ED-4DB2-BD59-A6C34878D82A}">
-                    <a16:rowId xmlns:a16="http://schemas.microsoft.com/office/drawing/2014/main" val="10002"/>
-                  </a:ext>
-                </a:extLst>
               </a:tr>
               <a:tr h="380504">
                 <a:tc>
@@ -10893,7 +10241,7 @@
                     <a:bodyPr/>
                     <a:lstStyle/>
                     <a:p>
-                      <a:pPr marL="0" lvl="0" indent="0">
+                      <a:pPr marL="0" indent="0" lvl="0">
                         <a:lnSpc>
                           <a:spcPct val="100000"/>
                         </a:lnSpc>
@@ -10943,14 +10291,14 @@
                     <a:bodyPr/>
                     <a:lstStyle/>
                     <a:p>
-                      <a:pPr marL="0" lvl="0" indent="0">
+                      <a:pPr marL="0" indent="0" lvl="0">
                         <a:lnSpc>
                           <a:spcPct val="100000"/>
                         </a:lnSpc>
                         <a:buNone/>
                       </a:pPr>
                       <a:r>
-                        <a:rPr lang="zh-CN" sz="1755" i="1" dirty="0">
+                        <a:rPr lang="zh-CN" sz="1755" dirty="0" i="1">
                           <a:solidFill>
                             <a:srgbClr val="1A1A18"/>
                           </a:solidFill>
@@ -10993,14 +10341,14 @@
                     <a:bodyPr/>
                     <a:lstStyle/>
                     <a:p>
-                      <a:pPr marL="0" lvl="0" indent="0">
+                      <a:pPr marL="0" indent="0" lvl="0">
                         <a:lnSpc>
                           <a:spcPct val="100000"/>
                         </a:lnSpc>
                         <a:buNone/>
                       </a:pPr>
                       <a:r>
-                        <a:rPr lang="zh-CN" sz="1755" i="1" dirty="0">
+                        <a:rPr lang="zh-CN" sz="1755" dirty="0" i="1">
                           <a:solidFill>
                             <a:srgbClr val="1A1A18"/>
                           </a:solidFill>
@@ -11043,14 +10391,14 @@
                     <a:bodyPr/>
                     <a:lstStyle/>
                     <a:p>
-                      <a:pPr marL="0" lvl="0" indent="0">
+                      <a:pPr marL="0" indent="0" lvl="0">
                         <a:lnSpc>
                           <a:spcPct val="100000"/>
                         </a:lnSpc>
                         <a:buNone/>
                       </a:pPr>
                       <a:r>
-                        <a:rPr lang="zh-CN" sz="1755" i="1" dirty="0">
+                        <a:rPr lang="zh-CN" sz="1755" dirty="0" i="1">
                           <a:solidFill>
                             <a:srgbClr val="1A1A18"/>
                           </a:solidFill>
@@ -11093,7 +10441,7 @@
                     <a:bodyPr/>
                     <a:lstStyle/>
                     <a:p>
-                      <a:pPr marL="0" lvl="0" indent="0">
+                      <a:pPr marL="0" indent="0" lvl="0">
                         <a:lnSpc>
                           <a:spcPct val="100000"/>
                         </a:lnSpc>
@@ -11138,11 +10486,6 @@
                     </a:solidFill>
                   </a:tcPr>
                 </a:tc>
-                <a:extLst>
-                  <a:ext uri="{0D108BD9-81ED-4DB2-BD59-A6C34878D82A}">
-                    <a16:rowId xmlns:a16="http://schemas.microsoft.com/office/drawing/2014/main" val="10003"/>
-                  </a:ext>
-                </a:extLst>
               </a:tr>
               <a:tr h="380504">
                 <a:tc>
@@ -11150,7 +10493,7 @@
                     <a:bodyPr/>
                     <a:lstStyle/>
                     <a:p>
-                      <a:pPr marL="0" lvl="0" indent="0">
+                      <a:pPr marL="0" indent="0" lvl="0">
                         <a:lnSpc>
                           <a:spcPct val="100000"/>
                         </a:lnSpc>
@@ -11200,14 +10543,14 @@
                     <a:bodyPr/>
                     <a:lstStyle/>
                     <a:p>
-                      <a:pPr marL="0" lvl="0" indent="0">
+                      <a:pPr marL="0" indent="0" lvl="0">
                         <a:lnSpc>
                           <a:spcPct val="100000"/>
                         </a:lnSpc>
                         <a:buNone/>
                       </a:pPr>
                       <a:r>
-                        <a:rPr lang="zh-CN" sz="1755" i="1" dirty="0">
+                        <a:rPr lang="zh-CN" sz="1755" dirty="0" i="1">
                           <a:solidFill>
                             <a:srgbClr val="1A1A18"/>
                           </a:solidFill>
@@ -11250,14 +10593,14 @@
                     <a:bodyPr/>
                     <a:lstStyle/>
                     <a:p>
-                      <a:pPr marL="0" lvl="0" indent="0">
+                      <a:pPr marL="0" indent="0" lvl="0">
                         <a:lnSpc>
                           <a:spcPct val="100000"/>
                         </a:lnSpc>
                         <a:buNone/>
                       </a:pPr>
                       <a:r>
-                        <a:rPr lang="zh-CN" sz="1755" i="1" dirty="0">
+                        <a:rPr lang="zh-CN" sz="1755" dirty="0" i="1">
                           <a:solidFill>
                             <a:srgbClr val="1A1A18"/>
                           </a:solidFill>
@@ -11300,14 +10643,14 @@
                     <a:bodyPr/>
                     <a:lstStyle/>
                     <a:p>
-                      <a:pPr marL="0" lvl="0" indent="0">
+                      <a:pPr marL="0" indent="0" lvl="0">
                         <a:lnSpc>
                           <a:spcPct val="100000"/>
                         </a:lnSpc>
                         <a:buNone/>
                       </a:pPr>
                       <a:r>
-                        <a:rPr lang="zh-CN" sz="1755" i="1" dirty="0">
+                        <a:rPr lang="zh-CN" sz="1755" dirty="0" i="1">
                           <a:solidFill>
                             <a:srgbClr val="1A1A18"/>
                           </a:solidFill>
@@ -11350,7 +10693,7 @@
                     <a:bodyPr/>
                     <a:lstStyle/>
                     <a:p>
-                      <a:pPr marL="0" lvl="0" indent="0">
+                      <a:pPr marL="0" indent="0" lvl="0">
                         <a:lnSpc>
                           <a:spcPct val="100000"/>
                         </a:lnSpc>
@@ -11395,11 +10738,6 @@
                     </a:solidFill>
                   </a:tcPr>
                 </a:tc>
-                <a:extLst>
-                  <a:ext uri="{0D108BD9-81ED-4DB2-BD59-A6C34878D82A}">
-                    <a16:rowId xmlns:a16="http://schemas.microsoft.com/office/drawing/2014/main" val="10004"/>
-                  </a:ext>
-                </a:extLst>
               </a:tr>
               <a:tr h="380504">
                 <a:tc>
@@ -11407,7 +10745,7 @@
                     <a:bodyPr/>
                     <a:lstStyle/>
                     <a:p>
-                      <a:pPr marL="0" lvl="0" indent="0">
+                      <a:pPr marL="0" indent="0" lvl="0">
                         <a:lnSpc>
                           <a:spcPct val="100000"/>
                         </a:lnSpc>
@@ -11457,14 +10795,14 @@
                     <a:bodyPr/>
                     <a:lstStyle/>
                     <a:p>
-                      <a:pPr marL="0" lvl="0" indent="0">
+                      <a:pPr marL="0" indent="0" lvl="0">
                         <a:lnSpc>
                           <a:spcPct val="100000"/>
                         </a:lnSpc>
                         <a:buNone/>
                       </a:pPr>
                       <a:r>
-                        <a:rPr lang="zh-CN" sz="1755" i="1" dirty="0">
+                        <a:rPr lang="zh-CN" sz="1755" dirty="0" i="1">
                           <a:solidFill>
                             <a:srgbClr val="1A1A18"/>
                           </a:solidFill>
@@ -11507,14 +10845,14 @@
                     <a:bodyPr/>
                     <a:lstStyle/>
                     <a:p>
-                      <a:pPr marL="0" lvl="0" indent="0">
+                      <a:pPr marL="0" indent="0" lvl="0">
                         <a:lnSpc>
                           <a:spcPct val="100000"/>
                         </a:lnSpc>
                         <a:buNone/>
                       </a:pPr>
                       <a:r>
-                        <a:rPr lang="zh-CN" sz="1755" i="1" dirty="0">
+                        <a:rPr lang="zh-CN" sz="1755" dirty="0" i="1">
                           <a:solidFill>
                             <a:srgbClr val="1A1A18"/>
                           </a:solidFill>
@@ -11557,14 +10895,14 @@
                     <a:bodyPr/>
                     <a:lstStyle/>
                     <a:p>
-                      <a:pPr marL="0" lvl="0" indent="0">
+                      <a:pPr marL="0" indent="0" lvl="0">
                         <a:lnSpc>
                           <a:spcPct val="100000"/>
                         </a:lnSpc>
                         <a:buNone/>
                       </a:pPr>
                       <a:r>
-                        <a:rPr lang="zh-CN" sz="1755" i="1" dirty="0">
+                        <a:rPr lang="zh-CN" sz="1755" dirty="0" i="1">
                           <a:solidFill>
                             <a:srgbClr val="1A1A18"/>
                           </a:solidFill>
@@ -11607,7 +10945,7 @@
                     <a:bodyPr/>
                     <a:lstStyle/>
                     <a:p>
-                      <a:pPr marL="0" lvl="0" indent="0">
+                      <a:pPr marL="0" indent="0" lvl="0">
                         <a:lnSpc>
                           <a:spcPct val="100000"/>
                         </a:lnSpc>
@@ -11652,11 +10990,6 @@
                     </a:solidFill>
                   </a:tcPr>
                 </a:tc>
-                <a:extLst>
-                  <a:ext uri="{0D108BD9-81ED-4DB2-BD59-A6C34878D82A}">
-                    <a16:rowId xmlns:a16="http://schemas.microsoft.com/office/drawing/2014/main" val="10005"/>
-                  </a:ext>
-                </a:extLst>
               </a:tr>
               <a:tr h="380504">
                 <a:tc>
@@ -11664,7 +10997,7 @@
                     <a:bodyPr/>
                     <a:lstStyle/>
                     <a:p>
-                      <a:pPr marL="0" lvl="0" indent="0">
+                      <a:pPr marL="0" indent="0" lvl="0">
                         <a:lnSpc>
                           <a:spcPct val="100000"/>
                         </a:lnSpc>
@@ -11714,14 +11047,14 @@
                     <a:bodyPr/>
                     <a:lstStyle/>
                     <a:p>
-                      <a:pPr marL="0" lvl="0" indent="0">
+                      <a:pPr marL="0" indent="0" lvl="0">
                         <a:lnSpc>
                           <a:spcPct val="100000"/>
                         </a:lnSpc>
                         <a:buNone/>
                       </a:pPr>
                       <a:r>
-                        <a:rPr lang="zh-CN" sz="1755" i="1" dirty="0">
+                        <a:rPr lang="zh-CN" sz="1755" dirty="0" i="1">
                           <a:solidFill>
                             <a:srgbClr val="1A1A18"/>
                           </a:solidFill>
@@ -11764,14 +11097,14 @@
                     <a:bodyPr/>
                     <a:lstStyle/>
                     <a:p>
-                      <a:pPr marL="0" lvl="0" indent="0">
+                      <a:pPr marL="0" indent="0" lvl="0">
                         <a:lnSpc>
                           <a:spcPct val="100000"/>
                         </a:lnSpc>
                         <a:buNone/>
                       </a:pPr>
                       <a:r>
-                        <a:rPr lang="zh-CN" sz="1755" i="1" dirty="0">
+                        <a:rPr lang="zh-CN" sz="1755" dirty="0" i="1">
                           <a:solidFill>
                             <a:srgbClr val="1A1A18"/>
                           </a:solidFill>
@@ -11814,14 +11147,14 @@
                     <a:bodyPr/>
                     <a:lstStyle/>
                     <a:p>
-                      <a:pPr marL="0" lvl="0" indent="0">
+                      <a:pPr marL="0" indent="0" lvl="0">
                         <a:lnSpc>
                           <a:spcPct val="100000"/>
                         </a:lnSpc>
                         <a:buNone/>
                       </a:pPr>
                       <a:r>
-                        <a:rPr lang="zh-CN" sz="1755" i="1" dirty="0">
+                        <a:rPr lang="zh-CN" sz="1755" dirty="0" i="1">
                           <a:solidFill>
                             <a:srgbClr val="1A1A18"/>
                           </a:solidFill>
@@ -11864,14 +11197,14 @@
                     <a:bodyPr/>
                     <a:lstStyle/>
                     <a:p>
-                      <a:pPr marL="0" lvl="0" indent="0">
+                      <a:pPr marL="0" indent="0" lvl="0">
                         <a:lnSpc>
                           <a:spcPct val="100000"/>
                         </a:lnSpc>
                         <a:buNone/>
                       </a:pPr>
                       <a:r>
-                        <a:rPr lang="zh-CN" sz="1755" b="1" dirty="0">
+                        <a:rPr lang="zh-CN" sz="1755" dirty="0" b="1">
                           <a:solidFill>
                             <a:srgbClr val="8A4B2A"/>
                           </a:solidFill>
@@ -11909,11 +11242,6 @@
                     </a:solidFill>
                   </a:tcPr>
                 </a:tc>
-                <a:extLst>
-                  <a:ext uri="{0D108BD9-81ED-4DB2-BD59-A6C34878D82A}">
-                    <a16:rowId xmlns:a16="http://schemas.microsoft.com/office/drawing/2014/main" val="10006"/>
-                  </a:ext>
-                </a:extLst>
               </a:tr>
               <a:tr h="380504">
                 <a:tc>
@@ -11921,7 +11249,7 @@
                     <a:bodyPr/>
                     <a:lstStyle/>
                     <a:p>
-                      <a:pPr marL="0" lvl="0" indent="0">
+                      <a:pPr marL="0" indent="0" lvl="0">
                         <a:lnSpc>
                           <a:spcPct val="100000"/>
                         </a:lnSpc>
@@ -11971,14 +11299,14 @@
                     <a:bodyPr/>
                     <a:lstStyle/>
                     <a:p>
-                      <a:pPr marL="0" lvl="0" indent="0">
+                      <a:pPr marL="0" indent="0" lvl="0">
                         <a:lnSpc>
                           <a:spcPct val="100000"/>
                         </a:lnSpc>
                         <a:buNone/>
                       </a:pPr>
                       <a:r>
-                        <a:rPr lang="zh-CN" sz="1755" i="1" dirty="0">
+                        <a:rPr lang="zh-CN" sz="1755" dirty="0" i="1">
                           <a:solidFill>
                             <a:srgbClr val="1A1A18"/>
                           </a:solidFill>
@@ -12021,14 +11349,14 @@
                     <a:bodyPr/>
                     <a:lstStyle/>
                     <a:p>
-                      <a:pPr marL="0" lvl="0" indent="0">
+                      <a:pPr marL="0" indent="0" lvl="0">
                         <a:lnSpc>
                           <a:spcPct val="100000"/>
                         </a:lnSpc>
                         <a:buNone/>
                       </a:pPr>
                       <a:r>
-                        <a:rPr lang="zh-CN" sz="1755" i="1" dirty="0">
+                        <a:rPr lang="zh-CN" sz="1755" dirty="0" i="1">
                           <a:solidFill>
                             <a:srgbClr val="1A1A18"/>
                           </a:solidFill>
@@ -12071,14 +11399,14 @@
                     <a:bodyPr/>
                     <a:lstStyle/>
                     <a:p>
-                      <a:pPr marL="0" lvl="0" indent="0">
+                      <a:pPr marL="0" indent="0" lvl="0">
                         <a:lnSpc>
                           <a:spcPct val="100000"/>
                         </a:lnSpc>
                         <a:buNone/>
                       </a:pPr>
                       <a:r>
-                        <a:rPr lang="zh-CN" sz="1755" i="1" dirty="0">
+                        <a:rPr lang="zh-CN" sz="1755" dirty="0" i="1">
                           <a:solidFill>
                             <a:srgbClr val="1A1A18"/>
                           </a:solidFill>
@@ -12121,14 +11449,14 @@
                     <a:bodyPr/>
                     <a:lstStyle/>
                     <a:p>
-                      <a:pPr marL="0" lvl="0" indent="0">
+                      <a:pPr marL="0" indent="0" lvl="0">
                         <a:lnSpc>
                           <a:spcPct val="100000"/>
                         </a:lnSpc>
                         <a:buNone/>
                       </a:pPr>
                       <a:r>
-                        <a:rPr lang="zh-CN" sz="1755" b="1" dirty="0">
+                        <a:rPr lang="zh-CN" sz="1755" dirty="0" b="1">
                           <a:solidFill>
                             <a:srgbClr val="8A4B2A"/>
                           </a:solidFill>
@@ -12166,11 +11494,6 @@
                     </a:solidFill>
                   </a:tcPr>
                 </a:tc>
-                <a:extLst>
-                  <a:ext uri="{0D108BD9-81ED-4DB2-BD59-A6C34878D82A}">
-                    <a16:rowId xmlns:a16="http://schemas.microsoft.com/office/drawing/2014/main" val="10007"/>
-                  </a:ext>
-                </a:extLst>
               </a:tr>
             </a:tbl>
           </a:graphicData>
@@ -12198,7 +11521,7 @@
           </a:bodyPr>
           <a:lstStyle/>
           <a:p>
-            <a:pPr marL="0" lvl="0" indent="0">
+            <a:pPr marL="0" indent="0" lvl="0">
               <a:lnSpc>
                 <a:spcPct val="100000"/>
               </a:lnSpc>
@@ -12240,7 +11563,7 @@
           </a:bodyPr>
           <a:lstStyle/>
           <a:p>
-            <a:pPr marL="0" lvl="0" indent="0" algn="r">
+            <a:pPr marL="0" indent="0" lvl="0" algn="r">
               <a:lnSpc>
                 <a:spcPct val="100000"/>
               </a:lnSpc>
@@ -12262,9 +11585,6 @@
       </p:sp>
     </p:spTree>
   </p:cSld>
-  <p:clrMapOvr>
-    <a:masterClrMapping/>
-  </p:clrMapOvr>
 </p:sld>
 </file>
 
@@ -12307,14 +11627,14 @@
           </a:bodyPr>
           <a:lstStyle/>
           <a:p>
-            <a:pPr marL="0" lvl="0" indent="0">
-              <a:lnSpc>
-                <a:spcPct val="100000"/>
-              </a:lnSpc>
-              <a:buNone/>
-            </a:pPr>
-            <a:r>
-              <a:rPr lang="zh-CN" sz="3200" b="1" dirty="0">
+            <a:pPr marL="0" indent="0" lvl="0">
+              <a:lnSpc>
+                <a:spcPct val="100000"/>
+              </a:lnSpc>
+              <a:buNone/>
+            </a:pPr>
+            <a:r>
+              <a:rPr lang="zh-CN" sz="3200" dirty="0" b="1">
                 <a:solidFill>
                   <a:srgbClr val="1A1A18"/>
                 </a:solidFill>
@@ -12351,9 +11671,7 @@
         <p:txBody>
           <a:bodyPr/>
           <a:lstStyle/>
-          <a:p>
-            <a:endParaRPr/>
-          </a:p>
+          <a:p/>
         </p:txBody>
       </p:sp>
       <p:sp>
@@ -12378,7 +11696,7 @@
           </a:bodyPr>
           <a:lstStyle/>
           <a:p>
-            <a:pPr marL="0" lvl="0" indent="0">
+            <a:pPr marL="0" indent="0" lvl="0">
               <a:lnSpc>
                 <a:spcPct val="100000"/>
               </a:lnSpc>
@@ -12437,27 +11755,9 @@
             <a:tbl>
               <a:tblPr firstRow="1"/>
               <a:tblGrid>
-                <a:gridCol w="4008994">
-                  <a:extLst>
-                    <a:ext uri="{9D8B030D-6E8A-4147-A177-3AD203B41FA5}">
-                      <a16:colId xmlns:a16="http://schemas.microsoft.com/office/drawing/2014/main" val="20000"/>
-                    </a:ext>
-                  </a:extLst>
-                </a:gridCol>
-                <a:gridCol w="3340829">
-                  <a:extLst>
-                    <a:ext uri="{9D8B030D-6E8A-4147-A177-3AD203B41FA5}">
-                      <a16:colId xmlns:a16="http://schemas.microsoft.com/office/drawing/2014/main" val="20001"/>
-                    </a:ext>
-                  </a:extLst>
-                </a:gridCol>
-                <a:gridCol w="3708321">
-                  <a:extLst>
-                    <a:ext uri="{9D8B030D-6E8A-4147-A177-3AD203B41FA5}">
-                      <a16:colId xmlns:a16="http://schemas.microsoft.com/office/drawing/2014/main" val="20002"/>
-                    </a:ext>
-                  </a:extLst>
-                </a:gridCol>
+                <a:gridCol w="4008994"/>
+                <a:gridCol w="3340829"/>
+                <a:gridCol w="3708321"/>
               </a:tblGrid>
               <a:tr h="380504">
                 <a:tc>
@@ -12465,14 +11765,14 @@
                     <a:bodyPr/>
                     <a:lstStyle/>
                     <a:p>
-                      <a:pPr marL="0" lvl="0" indent="0">
+                      <a:pPr marL="0" indent="0" lvl="0">
                         <a:lnSpc>
                           <a:spcPct val="100000"/>
                         </a:lnSpc>
                         <a:buNone/>
                       </a:pPr>
                       <a:r>
-                        <a:rPr lang="zh-CN" sz="1755" b="1" dirty="0">
+                        <a:rPr lang="zh-CN" sz="1755" dirty="0" b="1">
                           <a:solidFill>
                             <a:srgbClr val="1A1A18"/>
                           </a:solidFill>
@@ -12515,14 +11815,14 @@
                     <a:bodyPr/>
                     <a:lstStyle/>
                     <a:p>
-                      <a:pPr marL="0" lvl="0" indent="0">
+                      <a:pPr marL="0" indent="0" lvl="0">
                         <a:lnSpc>
                           <a:spcPct val="100000"/>
                         </a:lnSpc>
                         <a:buNone/>
                       </a:pPr>
                       <a:r>
-                        <a:rPr lang="zh-CN" sz="1755" b="1" dirty="0">
+                        <a:rPr lang="zh-CN" sz="1755" dirty="0" b="1">
                           <a:solidFill>
                             <a:srgbClr val="1A1A18"/>
                           </a:solidFill>
@@ -12565,14 +11865,14 @@
                     <a:bodyPr/>
                     <a:lstStyle/>
                     <a:p>
-                      <a:pPr marL="0" lvl="0" indent="0" algn="r">
+                      <a:pPr marL="0" indent="0" lvl="0" algn="r">
                         <a:lnSpc>
                           <a:spcPct val="100000"/>
                         </a:lnSpc>
                         <a:buNone/>
                       </a:pPr>
                       <a:r>
-                        <a:rPr lang="zh-CN" sz="1755" b="1" dirty="0">
+                        <a:rPr lang="zh-CN" sz="1755" dirty="0" b="1">
                           <a:solidFill>
                             <a:srgbClr val="1A1A18"/>
                           </a:solidFill>
@@ -12610,11 +11910,6 @@
                     </a:solidFill>
                   </a:tcPr>
                 </a:tc>
-                <a:extLst>
-                  <a:ext uri="{0D108BD9-81ED-4DB2-BD59-A6C34878D82A}">
-                    <a16:rowId xmlns:a16="http://schemas.microsoft.com/office/drawing/2014/main" val="10000"/>
-                  </a:ext>
-                </a:extLst>
               </a:tr>
               <a:tr h="380504">
                 <a:tc>
@@ -12622,7 +11917,7 @@
                     <a:bodyPr/>
                     <a:lstStyle/>
                     <a:p>
-                      <a:pPr marL="0" lvl="0" indent="0">
+                      <a:pPr marL="0" indent="0" lvl="0">
                         <a:lnSpc>
                           <a:spcPct val="100000"/>
                         </a:lnSpc>
@@ -12672,7 +11967,7 @@
                     <a:bodyPr/>
                     <a:lstStyle/>
                     <a:p>
-                      <a:pPr marL="0" lvl="0" indent="0">
+                      <a:pPr marL="0" indent="0" lvl="0">
                         <a:lnSpc>
                           <a:spcPct val="100000"/>
                         </a:lnSpc>
@@ -12722,7 +12017,7 @@
                     <a:bodyPr/>
                     <a:lstStyle/>
                     <a:p>
-                      <a:pPr marL="0" lvl="0" indent="0" algn="r">
+                      <a:pPr marL="0" indent="0" lvl="0" algn="r">
                         <a:lnSpc>
                           <a:spcPct val="100000"/>
                         </a:lnSpc>
@@ -12767,11 +12062,6 @@
                     </a:solidFill>
                   </a:tcPr>
                 </a:tc>
-                <a:extLst>
-                  <a:ext uri="{0D108BD9-81ED-4DB2-BD59-A6C34878D82A}">
-                    <a16:rowId xmlns:a16="http://schemas.microsoft.com/office/drawing/2014/main" val="10001"/>
-                  </a:ext>
-                </a:extLst>
               </a:tr>
               <a:tr h="380504">
                 <a:tc>
@@ -12779,7 +12069,7 @@
                     <a:bodyPr/>
                     <a:lstStyle/>
                     <a:p>
-                      <a:pPr marL="0" lvl="0" indent="0">
+                      <a:pPr marL="0" indent="0" lvl="0">
                         <a:lnSpc>
                           <a:spcPct val="100000"/>
                         </a:lnSpc>
@@ -12829,7 +12119,7 @@
                     <a:bodyPr/>
                     <a:lstStyle/>
                     <a:p>
-                      <a:pPr marL="0" lvl="0" indent="0">
+                      <a:pPr marL="0" indent="0" lvl="0">
                         <a:lnSpc>
                           <a:spcPct val="100000"/>
                         </a:lnSpc>
@@ -12879,7 +12169,7 @@
                     <a:bodyPr/>
                     <a:lstStyle/>
                     <a:p>
-                      <a:pPr marL="0" lvl="0" indent="0" algn="r">
+                      <a:pPr marL="0" indent="0" lvl="0" algn="r">
                         <a:lnSpc>
                           <a:spcPct val="100000"/>
                         </a:lnSpc>
@@ -12924,11 +12214,6 @@
                     </a:solidFill>
                   </a:tcPr>
                 </a:tc>
-                <a:extLst>
-                  <a:ext uri="{0D108BD9-81ED-4DB2-BD59-A6C34878D82A}">
-                    <a16:rowId xmlns:a16="http://schemas.microsoft.com/office/drawing/2014/main" val="10002"/>
-                  </a:ext>
-                </a:extLst>
               </a:tr>
               <a:tr h="380504">
                 <a:tc>
@@ -12936,7 +12221,7 @@
                     <a:bodyPr/>
                     <a:lstStyle/>
                     <a:p>
-                      <a:pPr marL="0" lvl="0" indent="0">
+                      <a:pPr marL="0" indent="0" lvl="0">
                         <a:lnSpc>
                           <a:spcPct val="100000"/>
                         </a:lnSpc>
@@ -12986,7 +12271,7 @@
                     <a:bodyPr/>
                     <a:lstStyle/>
                     <a:p>
-                      <a:pPr marL="0" lvl="0" indent="0">
+                      <a:pPr marL="0" indent="0" lvl="0">
                         <a:lnSpc>
                           <a:spcPct val="100000"/>
                         </a:lnSpc>
@@ -13036,7 +12321,7 @@
                     <a:bodyPr/>
                     <a:lstStyle/>
                     <a:p>
-                      <a:pPr marL="0" lvl="0" indent="0" algn="r">
+                      <a:pPr marL="0" indent="0" lvl="0" algn="r">
                         <a:lnSpc>
                           <a:spcPct val="100000"/>
                         </a:lnSpc>
@@ -13081,11 +12366,6 @@
                     </a:solidFill>
                   </a:tcPr>
                 </a:tc>
-                <a:extLst>
-                  <a:ext uri="{0D108BD9-81ED-4DB2-BD59-A6C34878D82A}">
-                    <a16:rowId xmlns:a16="http://schemas.microsoft.com/office/drawing/2014/main" val="10003"/>
-                  </a:ext>
-                </a:extLst>
               </a:tr>
               <a:tr h="380504">
                 <a:tc>
@@ -13093,7 +12373,7 @@
                     <a:bodyPr/>
                     <a:lstStyle/>
                     <a:p>
-                      <a:pPr marL="0" lvl="0" indent="0">
+                      <a:pPr marL="0" indent="0" lvl="0">
                         <a:lnSpc>
                           <a:spcPct val="100000"/>
                         </a:lnSpc>
@@ -13143,7 +12423,7 @@
                     <a:bodyPr/>
                     <a:lstStyle/>
                     <a:p>
-                      <a:pPr marL="0" lvl="0" indent="0">
+                      <a:pPr marL="0" indent="0" lvl="0">
                         <a:lnSpc>
                           <a:spcPct val="100000"/>
                         </a:lnSpc>
@@ -13193,7 +12473,7 @@
                     <a:bodyPr/>
                     <a:lstStyle/>
                     <a:p>
-                      <a:pPr marL="0" lvl="0" indent="0" algn="r">
+                      <a:pPr marL="0" indent="0" lvl="0" algn="r">
                         <a:lnSpc>
                           <a:spcPct val="100000"/>
                         </a:lnSpc>
@@ -13238,11 +12518,6 @@
                     </a:solidFill>
                   </a:tcPr>
                 </a:tc>
-                <a:extLst>
-                  <a:ext uri="{0D108BD9-81ED-4DB2-BD59-A6C34878D82A}">
-                    <a16:rowId xmlns:a16="http://schemas.microsoft.com/office/drawing/2014/main" val="10004"/>
-                  </a:ext>
-                </a:extLst>
               </a:tr>
             </a:tbl>
           </a:graphicData>
@@ -13270,7 +12545,7 @@
           </a:bodyPr>
           <a:lstStyle/>
           <a:p>
-            <a:pPr marL="0" lvl="0" indent="0">
+            <a:pPr marL="0" indent="0" lvl="0">
               <a:lnSpc>
                 <a:spcPct val="100000"/>
               </a:lnSpc>
@@ -13288,7 +12563,7 @@
               <a:t>同为 </a:t>
             </a:r>
             <a:r>
-              <a:rPr lang="zh-CN" sz="2340" i="1" dirty="0">
+              <a:rPr lang="zh-CN" sz="2340" dirty="0" i="1">
                 <a:solidFill>
                   <a:srgbClr val="1A1A18"/>
                 </a:solidFill>
@@ -13334,7 +12609,7 @@
           </a:bodyPr>
           <a:lstStyle/>
           <a:p>
-            <a:pPr marL="0" lvl="0" indent="0">
+            <a:pPr marL="0" indent="0" lvl="0">
               <a:lnSpc>
                 <a:spcPct val="100000"/>
               </a:lnSpc>
@@ -13376,7 +12651,7 @@
           </a:bodyPr>
           <a:lstStyle/>
           <a:p>
-            <a:pPr marL="0" lvl="0" indent="0">
+            <a:pPr marL="0" indent="0" lvl="0">
               <a:lnSpc>
                 <a:spcPct val="100000"/>
               </a:lnSpc>
@@ -13418,7 +12693,7 @@
           </a:bodyPr>
           <a:lstStyle/>
           <a:p>
-            <a:pPr marL="0" lvl="0" indent="0" algn="r">
+            <a:pPr marL="0" indent="0" lvl="0" algn="r">
               <a:lnSpc>
                 <a:spcPct val="100000"/>
               </a:lnSpc>
@@ -13440,9 +12715,6 @@
       </p:sp>
     </p:spTree>
   </p:cSld>
-  <p:clrMapOvr>
-    <a:masterClrMapping/>
-  </p:clrMapOvr>
 </p:sld>
 </file>
 
@@ -13485,14 +12757,14 @@
           </a:bodyPr>
           <a:lstStyle/>
           <a:p>
-            <a:pPr marL="0" lvl="0" indent="0">
-              <a:lnSpc>
-                <a:spcPct val="100000"/>
-              </a:lnSpc>
-              <a:buNone/>
-            </a:pPr>
-            <a:r>
-              <a:rPr lang="zh-CN" sz="3200" b="1" dirty="0">
+            <a:pPr marL="0" indent="0" lvl="0">
+              <a:lnSpc>
+                <a:spcPct val="100000"/>
+              </a:lnSpc>
+              <a:buNone/>
+            </a:pPr>
+            <a:r>
+              <a:rPr lang="zh-CN" sz="3200" dirty="0" b="1">
                 <a:solidFill>
                   <a:srgbClr val="1A1A18"/>
                 </a:solidFill>
@@ -13529,9 +12801,7 @@
         <p:txBody>
           <a:bodyPr/>
           <a:lstStyle/>
-          <a:p>
-            <a:endParaRPr/>
-          </a:p>
+          <a:p/>
         </p:txBody>
       </p:sp>
       <p:pic>
@@ -13543,7 +12813,7 @@
           <p:nvPr/>
         </p:nvPicPr>
         <p:blipFill>
-          <a:blip r:embed="rId2"/>
+          <a:blip r:embed="rId100"/>
           <a:stretch>
             <a:fillRect/>
           </a:stretch>
@@ -13580,7 +12850,7 @@
           </a:bodyPr>
           <a:lstStyle/>
           <a:p>
-            <a:pPr marL="0" lvl="0" indent="0" algn="ctr">
+            <a:pPr marL="0" indent="0" lvl="0" algn="ctr">
               <a:lnSpc>
                 <a:spcPct val="100000"/>
               </a:lnSpc>
@@ -13622,7 +12892,7 @@
           </a:bodyPr>
           <a:lstStyle/>
           <a:p>
-            <a:pPr marL="0" lvl="0" indent="0">
+            <a:pPr marL="0" indent="0" lvl="0">
               <a:lnSpc>
                 <a:spcPct val="100000"/>
               </a:lnSpc>
@@ -13664,7 +12934,7 @@
           </a:bodyPr>
           <a:lstStyle/>
           <a:p>
-            <a:pPr marL="0" lvl="0" indent="0" algn="r">
+            <a:pPr marL="0" indent="0" lvl="0" algn="r">
               <a:lnSpc>
                 <a:spcPct val="100000"/>
               </a:lnSpc>
@@ -13686,9 +12956,6 @@
       </p:sp>
     </p:spTree>
   </p:cSld>
-  <p:clrMapOvr>
-    <a:masterClrMapping/>
-  </p:clrMapOvr>
 </p:sld>
 </file>
 
@@ -13731,22 +12998,22 @@
           </a:bodyPr>
           <a:lstStyle/>
           <a:p>
-            <a:pPr marL="0" lvl="0" indent="0">
-              <a:lnSpc>
-                <a:spcPct val="100000"/>
-              </a:lnSpc>
-              <a:buNone/>
-            </a:pPr>
-            <a:r>
-              <a:rPr lang="zh-CN" sz="3200" b="1" dirty="0">
-                <a:solidFill>
-                  <a:srgbClr val="1A1A18"/>
-                </a:solidFill>
-                <a:latin typeface="Segoe UI"/>
-                <a:ea typeface="Noto Sans CJK SC"/>
-                <a:cs typeface="Segoe UI"/>
-              </a:rPr>
-              <a:t>8.7.3 比较排序的下限</a:t>
+            <a:pPr marL="0" indent="0" lvl="0">
+              <a:lnSpc>
+                <a:spcPct val="100000"/>
+              </a:lnSpc>
+              <a:buNone/>
+            </a:pPr>
+            <a:r>
+              <a:rPr lang="zh-CN" sz="3200" dirty="0" b="1">
+                <a:solidFill>
+                  <a:srgbClr val="1A1A18"/>
+                </a:solidFill>
+                <a:latin typeface="Segoe UI"/>
+                <a:ea typeface="Noto Sans CJK SC"/>
+                <a:cs typeface="Segoe UI"/>
+              </a:rPr>
+              <a:t>8.7.3 比较排序的下限（续）</a:t>
             </a:r>
           </a:p>
         </p:txBody>
@@ -13775,9 +13042,7 @@
         <p:txBody>
           <a:bodyPr/>
           <a:lstStyle/>
-          <a:p>
-            <a:endParaRPr/>
-          </a:p>
+          <a:p/>
         </p:txBody>
       </p:sp>
       <p:sp>
@@ -13802,14 +13067,14 @@
           </a:bodyPr>
           <a:lstStyle/>
           <a:p>
-            <a:pPr marL="0" lvl="0" indent="0">
-              <a:lnSpc>
-                <a:spcPct val="100000"/>
-              </a:lnSpc>
-              <a:buNone/>
-            </a:pPr>
-            <a:r>
-              <a:rPr lang="zh-CN" sz="2340" i="1" dirty="0">
+            <a:pPr marL="0" indent="0" lvl="0">
+              <a:lnSpc>
+                <a:spcPct val="100000"/>
+              </a:lnSpc>
+              <a:buNone/>
+            </a:pPr>
+            <a:r>
+              <a:rPr lang="zh-CN" sz="2340" dirty="0" i="1">
                 <a:solidFill>
                   <a:srgbClr val="1A1A18"/>
                 </a:solidFill>
@@ -13831,7 +13096,7 @@
               <a:t> 个互异元素有 </a:t>
             </a:r>
             <a:r>
-              <a:rPr lang="zh-CN" sz="2340" i="1" dirty="0">
+              <a:rPr lang="zh-CN" sz="2340" dirty="0" i="1">
                 <a:solidFill>
                   <a:srgbClr val="1A1A18"/>
                 </a:solidFill>
@@ -13877,7 +13142,7 @@
           </a:bodyPr>
           <a:lstStyle/>
           <a:p>
-            <a:pPr marL="0" lvl="0" indent="0">
+            <a:pPr marL="0" indent="0" lvl="0">
               <a:lnSpc>
                 <a:spcPct val="100000"/>
               </a:lnSpc>
@@ -13895,7 +13160,7 @@
               <a:t>判定树至少有 </a:t>
             </a:r>
             <a:r>
-              <a:rPr lang="zh-CN" sz="2340" i="1" dirty="0">
+              <a:rPr lang="zh-CN" sz="2340" dirty="0" i="1">
                 <a:solidFill>
                   <a:srgbClr val="1A1A18"/>
                 </a:solidFill>
@@ -13941,14 +13206,14 @@
           </a:bodyPr>
           <a:lstStyle/>
           <a:p>
-            <a:pPr marL="0" lvl="0" indent="0" algn="ctr">
-              <a:lnSpc>
-                <a:spcPct val="100000"/>
-              </a:lnSpc>
-              <a:buNone/>
-            </a:pPr>
-            <a:r>
-              <a:rPr lang="zh-CN" sz="2600" i="1" dirty="0">
+            <a:pPr marL="0" indent="0" lvl="0" algn="ctr">
+              <a:lnSpc>
+                <a:spcPct val="100000"/>
+              </a:lnSpc>
+              <a:buNone/>
+            </a:pPr>
+            <a:r>
+              <a:rPr lang="zh-CN" sz="2600" dirty="0" i="1">
                 <a:solidFill>
                   <a:srgbClr val="1A1A18"/>
                 </a:solidFill>
@@ -13983,7 +13248,7 @@
           </a:bodyPr>
           <a:lstStyle/>
           <a:p>
-            <a:pPr marL="0" lvl="0" indent="0">
+            <a:pPr marL="0" indent="0" lvl="0">
               <a:lnSpc>
                 <a:spcPct val="100000"/>
               </a:lnSpc>
@@ -14001,7 +13266,7 @@
               <a:t>这限制的是</a:t>
             </a:r>
             <a:r>
-              <a:rPr lang="zh-CN" sz="2340" b="1" dirty="0">
+              <a:rPr lang="zh-CN" sz="2340" dirty="0" b="1">
                 <a:solidFill>
                   <a:srgbClr val="8A4B2A"/>
                 </a:solidFill>
@@ -14023,7 +13288,7 @@
               <a:t>的排序。桶式与基数利用关键码结构， 不在这个模型里，所以能达到 </a:t>
             </a:r>
             <a:r>
-              <a:rPr lang="zh-CN" sz="2340" i="1" dirty="0">
+              <a:rPr lang="zh-CN" sz="2340" dirty="0" i="1">
                 <a:solidFill>
                   <a:srgbClr val="1A1A18"/>
                 </a:solidFill>
@@ -14045,7 +13310,7 @@
               <a:t> 或 </a:t>
             </a:r>
             <a:r>
-              <a:rPr lang="zh-CN" sz="2340" i="1" dirty="0">
+              <a:rPr lang="zh-CN" sz="2340" dirty="0" i="1">
                 <a:solidFill>
                   <a:srgbClr val="1A1A18"/>
                 </a:solidFill>
@@ -14091,7 +13356,7 @@
           </a:bodyPr>
           <a:lstStyle/>
           <a:p>
-            <a:pPr marL="0" lvl="0" indent="0">
+            <a:pPr marL="0" indent="0" lvl="0">
               <a:lnSpc>
                 <a:spcPct val="100000"/>
               </a:lnSpc>
@@ -14133,7 +13398,7 @@
           </a:bodyPr>
           <a:lstStyle/>
           <a:p>
-            <a:pPr marL="0" lvl="0" indent="0" algn="r">
+            <a:pPr marL="0" indent="0" lvl="0" algn="r">
               <a:lnSpc>
                 <a:spcPct val="100000"/>
               </a:lnSpc>
@@ -14155,9 +13420,6 @@
       </p:sp>
     </p:spTree>
   </p:cSld>
-  <p:clrMapOvr>
-    <a:masterClrMapping/>
-  </p:clrMapOvr>
 </p:sld>
 </file>
 
@@ -14200,14 +13462,14 @@
           </a:bodyPr>
           <a:lstStyle/>
           <a:p>
-            <a:pPr marL="0" lvl="0" indent="0">
-              <a:lnSpc>
-                <a:spcPct val="100000"/>
-              </a:lnSpc>
-              <a:buNone/>
-            </a:pPr>
-            <a:r>
-              <a:rPr lang="zh-CN" sz="3200" b="1" dirty="0">
+            <a:pPr marL="0" indent="0" lvl="0">
+              <a:lnSpc>
+                <a:spcPct val="100000"/>
+              </a:lnSpc>
+              <a:buNone/>
+            </a:pPr>
+            <a:r>
+              <a:rPr lang="zh-CN" sz="3200" dirty="0" b="1">
                 <a:solidFill>
                   <a:srgbClr val="1A1A18"/>
                 </a:solidFill>
@@ -14244,9 +13506,7 @@
         <p:txBody>
           <a:bodyPr/>
           <a:lstStyle/>
-          <a:p>
-            <a:endParaRPr/>
-          </a:p>
+          <a:p/>
         </p:txBody>
       </p:sp>
       <p:sp>
@@ -14271,7 +13531,7 @@
           </a:bodyPr>
           <a:lstStyle/>
           <a:p>
-            <a:pPr marL="270000" lvl="0" indent="-230000">
+            <a:pPr marL="270000" indent="-230000" lvl="0">
               <a:lnSpc>
                 <a:spcPct val="100000"/>
               </a:lnSpc>
@@ -14285,7 +13545,7 @@
               <a:buChar char="●"/>
             </a:pPr>
             <a:r>
-              <a:rPr lang="zh-CN" sz="2340" b="1" dirty="0">
+              <a:rPr lang="zh-CN" sz="2340" dirty="0" b="1">
                 <a:solidFill>
                   <a:srgbClr val="8A4B2A"/>
                 </a:solidFill>
@@ -14308,7 +13568,7 @@
             </a:r>
           </a:p>
           <a:p>
-            <a:pPr marL="270000" lvl="0" indent="-230000">
+            <a:pPr marL="270000" indent="-230000" lvl="0">
               <a:lnSpc>
                 <a:spcPct val="100000"/>
               </a:lnSpc>
@@ -14322,7 +13582,7 @@
               <a:buChar char="●"/>
             </a:pPr>
             <a:r>
-              <a:rPr lang="zh-CN" sz="2340" b="1" dirty="0">
+              <a:rPr lang="zh-CN" sz="2340" dirty="0" b="1">
                 <a:solidFill>
                   <a:srgbClr val="8A4B2A"/>
                 </a:solidFill>
@@ -14345,7 +13605,7 @@
             </a:r>
           </a:p>
           <a:p>
-            <a:pPr marL="270000" lvl="0" indent="-230000">
+            <a:pPr marL="270000" indent="-230000" lvl="0">
               <a:lnSpc>
                 <a:spcPct val="100000"/>
               </a:lnSpc>
@@ -14359,7 +13619,7 @@
               <a:buChar char="●"/>
             </a:pPr>
             <a:r>
-              <a:rPr lang="zh-CN" sz="2340" b="1" dirty="0">
+              <a:rPr lang="zh-CN" sz="2340" dirty="0" b="1">
                 <a:solidFill>
                   <a:srgbClr val="8A4B2A"/>
                 </a:solidFill>
@@ -14382,7 +13642,7 @@
             </a:r>
           </a:p>
           <a:p>
-            <a:pPr marL="270000" lvl="0" indent="-230000">
+            <a:pPr marL="270000" indent="-230000" lvl="0">
               <a:lnSpc>
                 <a:spcPct val="100000"/>
               </a:lnSpc>
@@ -14396,7 +13656,7 @@
               <a:buChar char="●"/>
             </a:pPr>
             <a:r>
-              <a:rPr lang="zh-CN" sz="2340" b="1" dirty="0">
+              <a:rPr lang="zh-CN" sz="2340" dirty="0" b="1">
                 <a:solidFill>
                   <a:srgbClr val="8A4B2A"/>
                 </a:solidFill>
@@ -14419,7 +13679,7 @@
             </a:r>
           </a:p>
           <a:p>
-            <a:pPr marL="270000" lvl="0" indent="-230000">
+            <a:pPr marL="270000" indent="-230000" lvl="0">
               <a:lnSpc>
                 <a:spcPct val="100000"/>
               </a:lnSpc>
@@ -14433,7 +13693,7 @@
               <a:buChar char="●"/>
             </a:pPr>
             <a:r>
-              <a:rPr lang="zh-CN" sz="2340" b="1" dirty="0">
+              <a:rPr lang="zh-CN" sz="2340" dirty="0" b="1">
                 <a:solidFill>
                   <a:srgbClr val="8A4B2A"/>
                 </a:solidFill>
@@ -14456,7 +13716,7 @@
             </a:r>
           </a:p>
           <a:p>
-            <a:pPr marL="270000" lvl="0" indent="-230000">
+            <a:pPr marL="270000" indent="-230000" lvl="0">
               <a:lnSpc>
                 <a:spcPct val="100000"/>
               </a:lnSpc>
@@ -14470,7 +13730,7 @@
               <a:buChar char="●"/>
             </a:pPr>
             <a:r>
-              <a:rPr lang="zh-CN" sz="2340" b="1" dirty="0">
+              <a:rPr lang="zh-CN" sz="2340" dirty="0" b="1">
                 <a:solidFill>
                   <a:srgbClr val="8A4B2A"/>
                 </a:solidFill>
@@ -14516,14 +13776,14 @@
           </a:bodyPr>
           <a:lstStyle/>
           <a:p>
-            <a:pPr marL="0" lvl="0" indent="0">
-              <a:lnSpc>
-                <a:spcPct val="100000"/>
-              </a:lnSpc>
-              <a:buNone/>
-            </a:pPr>
-            <a:r>
-              <a:rPr lang="zh-CN" sz="2340" b="1" dirty="0">
+            <a:pPr marL="0" indent="0" lvl="0">
+              <a:lnSpc>
+                <a:spcPct val="100000"/>
+              </a:lnSpc>
+              <a:buNone/>
+            </a:pPr>
+            <a:r>
+              <a:rPr lang="zh-CN" sz="2340" dirty="0" b="1">
                 <a:solidFill>
                   <a:srgbClr val="8A4B2A"/>
                 </a:solidFill>
@@ -14569,7 +13829,7 @@
           </a:bodyPr>
           <a:lstStyle/>
           <a:p>
-            <a:pPr marL="0" lvl="0" indent="0">
+            <a:pPr marL="0" indent="0" lvl="0">
               <a:lnSpc>
                 <a:spcPct val="100000"/>
               </a:lnSpc>
@@ -14611,7 +13871,7 @@
           </a:bodyPr>
           <a:lstStyle/>
           <a:p>
-            <a:pPr marL="0" lvl="0" indent="0" algn="r">
+            <a:pPr marL="0" indent="0" lvl="0" algn="r">
               <a:lnSpc>
                 <a:spcPct val="100000"/>
               </a:lnSpc>
@@ -14633,9 +13893,6 @@
       </p:sp>
     </p:spTree>
   </p:cSld>
-  <p:clrMapOvr>
-    <a:masterClrMapping/>
-  </p:clrMapOvr>
 </p:sld>
 </file>
 
@@ -14678,14 +13935,14 @@
           </a:bodyPr>
           <a:lstStyle/>
           <a:p>
-            <a:pPr marL="0" lvl="0" indent="0">
-              <a:lnSpc>
-                <a:spcPct val="100000"/>
-              </a:lnSpc>
-              <a:buNone/>
-            </a:pPr>
-            <a:r>
-              <a:rPr lang="zh-CN" sz="3200" b="1" dirty="0">
+            <a:pPr marL="0" indent="0" lvl="0">
+              <a:lnSpc>
+                <a:spcPct val="100000"/>
+              </a:lnSpc>
+              <a:buNone/>
+            </a:pPr>
+            <a:r>
+              <a:rPr lang="zh-CN" sz="3200" dirty="0" b="1">
                 <a:solidFill>
                   <a:srgbClr val="1A1A18"/>
                 </a:solidFill>
@@ -14722,9 +13979,7 @@
         <p:txBody>
           <a:bodyPr/>
           <a:lstStyle/>
-          <a:p>
-            <a:endParaRPr/>
-          </a:p>
+          <a:p/>
         </p:txBody>
       </p:sp>
       <p:sp>
@@ -14749,7 +14004,7 @@
           </a:bodyPr>
           <a:lstStyle/>
           <a:p>
-            <a:pPr marL="0" lvl="0" indent="0">
+            <a:pPr marL="0" indent="0" lvl="0">
               <a:lnSpc>
                 <a:spcPct val="100000"/>
               </a:lnSpc>
@@ -14791,7 +14046,7 @@
           </a:bodyPr>
           <a:lstStyle/>
           <a:p>
-            <a:pPr marL="0" lvl="0" indent="0">
+            <a:pPr marL="0" indent="0" lvl="0">
               <a:lnSpc>
                 <a:spcPct val="100000"/>
               </a:lnSpc>
@@ -14833,7 +14088,7 @@
           </a:bodyPr>
           <a:lstStyle/>
           <a:p>
-            <a:pPr marL="0" lvl="0" indent="0" algn="r">
+            <a:pPr marL="0" indent="0" lvl="0" algn="r">
               <a:lnSpc>
                 <a:spcPct val="100000"/>
               </a:lnSpc>
@@ -14855,9 +14110,6 @@
       </p:sp>
     </p:spTree>
   </p:cSld>
-  <p:clrMapOvr>
-    <a:masterClrMapping/>
-  </p:clrMapOvr>
 </p:sld>
 </file>
 
@@ -14900,14 +14152,14 @@
           </a:bodyPr>
           <a:lstStyle/>
           <a:p>
-            <a:pPr marL="0" lvl="0" indent="0">
-              <a:lnSpc>
-                <a:spcPct val="100000"/>
-              </a:lnSpc>
-              <a:buNone/>
-            </a:pPr>
-            <a:r>
-              <a:rPr lang="zh-CN" sz="3200" b="1" dirty="0">
+            <a:pPr marL="0" indent="0" lvl="0">
+              <a:lnSpc>
+                <a:spcPct val="100000"/>
+              </a:lnSpc>
+              <a:buNone/>
+            </a:pPr>
+            <a:r>
+              <a:rPr lang="zh-CN" sz="3200" dirty="0" b="1">
                 <a:solidFill>
                   <a:srgbClr val="1A1A18"/>
                 </a:solidFill>
@@ -14944,9 +14196,7 @@
         <p:txBody>
           <a:bodyPr/>
           <a:lstStyle/>
-          <a:p>
-            <a:endParaRPr/>
-          </a:p>
+          <a:p/>
         </p:txBody>
       </p:sp>
       <p:sp>
@@ -14971,7 +14221,7 @@
           </a:bodyPr>
           <a:lstStyle/>
           <a:p>
-            <a:pPr marL="0" lvl="0" indent="0">
+            <a:pPr marL="0" indent="0" lvl="0">
               <a:lnSpc>
                 <a:spcPct val="100000"/>
               </a:lnSpc>
@@ -15035,7 +14285,7 @@
           </a:bodyPr>
           <a:lstStyle/>
           <a:p>
-            <a:pPr marL="0" lvl="0" indent="0">
+            <a:pPr marL="0" indent="0" lvl="0">
               <a:lnSpc>
                 <a:spcPct val="100000"/>
               </a:lnSpc>
@@ -15077,7 +14327,7 @@
           </a:bodyPr>
           <a:lstStyle/>
           <a:p>
-            <a:pPr marL="0" lvl="0" indent="0" algn="r">
+            <a:pPr marL="0" indent="0" lvl="0" algn="r">
               <a:lnSpc>
                 <a:spcPct val="100000"/>
               </a:lnSpc>
@@ -15099,9 +14349,6 @@
       </p:sp>
     </p:spTree>
   </p:cSld>
-  <p:clrMapOvr>
-    <a:masterClrMapping/>
-  </p:clrMapOvr>
 </p:sld>
 </file>
 
@@ -15144,14 +14391,14 @@
           </a:bodyPr>
           <a:lstStyle/>
           <a:p>
-            <a:pPr marL="0" lvl="0" indent="0">
-              <a:lnSpc>
-                <a:spcPct val="100000"/>
-              </a:lnSpc>
-              <a:buNone/>
-            </a:pPr>
-            <a:r>
-              <a:rPr lang="zh-CN" sz="3200" b="1" dirty="0">
+            <a:pPr marL="0" indent="0" lvl="0">
+              <a:lnSpc>
+                <a:spcPct val="100000"/>
+              </a:lnSpc>
+              <a:buNone/>
+            </a:pPr>
+            <a:r>
+              <a:rPr lang="zh-CN" sz="3200" dirty="0" b="1">
                 <a:solidFill>
                   <a:srgbClr val="1A1A18"/>
                 </a:solidFill>
@@ -15188,9 +14435,7 @@
         <p:txBody>
           <a:bodyPr/>
           <a:lstStyle/>
-          <a:p>
-            <a:endParaRPr/>
-          </a:p>
+          <a:p/>
         </p:txBody>
       </p:sp>
       <p:sp>
@@ -15215,7 +14460,7 @@
           </a:bodyPr>
           <a:lstStyle/>
           <a:p>
-            <a:pPr marL="0" lvl="0" indent="0">
+            <a:pPr marL="0" indent="0" lvl="0">
               <a:lnSpc>
                 <a:spcPct val="100000"/>
               </a:lnSpc>
@@ -15279,7 +14524,7 @@
           </a:bodyPr>
           <a:lstStyle/>
           <a:p>
-            <a:pPr marL="0" lvl="0" indent="0">
+            <a:pPr marL="0" indent="0" lvl="0">
               <a:lnSpc>
                 <a:spcPct val="100000"/>
               </a:lnSpc>
@@ -15321,7 +14566,7 @@
           </a:bodyPr>
           <a:lstStyle/>
           <a:p>
-            <a:pPr marL="0" lvl="0" indent="0" algn="r">
+            <a:pPr marL="0" indent="0" lvl="0" algn="r">
               <a:lnSpc>
                 <a:spcPct val="100000"/>
               </a:lnSpc>
@@ -15343,9 +14588,6 @@
       </p:sp>
     </p:spTree>
   </p:cSld>
-  <p:clrMapOvr>
-    <a:masterClrMapping/>
-  </p:clrMapOvr>
 </p:sld>
 </file>
 
@@ -15388,14 +14630,14 @@
           </a:bodyPr>
           <a:lstStyle/>
           <a:p>
-            <a:pPr marL="0" lvl="0" indent="0">
-              <a:lnSpc>
-                <a:spcPct val="100000"/>
-              </a:lnSpc>
-              <a:buNone/>
-            </a:pPr>
-            <a:r>
-              <a:rPr lang="zh-CN" sz="3200" b="1" dirty="0">
+            <a:pPr marL="0" indent="0" lvl="0">
+              <a:lnSpc>
+                <a:spcPct val="100000"/>
+              </a:lnSpc>
+              <a:buNone/>
+            </a:pPr>
+            <a:r>
+              <a:rPr lang="zh-CN" sz="3200" dirty="0" b="1">
                 <a:solidFill>
                   <a:srgbClr val="1A1A18"/>
                 </a:solidFill>
@@ -15432,9 +14674,7 @@
         <p:txBody>
           <a:bodyPr/>
           <a:lstStyle/>
-          <a:p>
-            <a:endParaRPr/>
-          </a:p>
+          <a:p/>
         </p:txBody>
       </p:sp>
       <p:sp>
@@ -15459,7 +14699,7 @@
           </a:bodyPr>
           <a:lstStyle/>
           <a:p>
-            <a:pPr marL="270000" lvl="0" indent="-230000">
+            <a:pPr marL="270000" indent="-230000" lvl="0">
               <a:lnSpc>
                 <a:spcPct val="100000"/>
               </a:lnSpc>
@@ -15485,7 +14725,7 @@
             </a:r>
           </a:p>
           <a:p>
-            <a:pPr marL="270000" lvl="0" indent="-230000">
+            <a:pPr marL="270000" indent="-230000" lvl="0">
               <a:lnSpc>
                 <a:spcPct val="100000"/>
               </a:lnSpc>
@@ -15511,7 +14751,7 @@
             </a:r>
           </a:p>
           <a:p>
-            <a:pPr marL="270000" lvl="0" indent="-230000">
+            <a:pPr marL="270000" indent="-230000" lvl="0">
               <a:lnSpc>
                 <a:spcPct val="100000"/>
               </a:lnSpc>
@@ -15537,7 +14777,7 @@
             </a:r>
           </a:p>
           <a:p>
-            <a:pPr marL="270000" lvl="0" indent="-230000">
+            <a:pPr marL="270000" indent="-230000" lvl="0">
               <a:lnSpc>
                 <a:spcPct val="100000"/>
               </a:lnSpc>
@@ -15586,7 +14826,7 @@
           </a:bodyPr>
           <a:lstStyle/>
           <a:p>
-            <a:pPr marL="0" lvl="0" indent="0">
+            <a:pPr marL="0" indent="0" lvl="0">
               <a:lnSpc>
                 <a:spcPct val="100000"/>
               </a:lnSpc>
@@ -15628,7 +14868,7 @@
           </a:bodyPr>
           <a:lstStyle/>
           <a:p>
-            <a:pPr marL="0" lvl="0" indent="0" algn="r">
+            <a:pPr marL="0" indent="0" lvl="0" algn="r">
               <a:lnSpc>
                 <a:spcPct val="100000"/>
               </a:lnSpc>
@@ -15650,9 +14890,6 @@
       </p:sp>
     </p:spTree>
   </p:cSld>
-  <p:clrMapOvr>
-    <a:masterClrMapping/>
-  </p:clrMapOvr>
 </p:sld>
 </file>
 
@@ -15695,14 +14932,14 @@
           </a:bodyPr>
           <a:lstStyle/>
           <a:p>
-            <a:pPr marL="0" lvl="0" indent="0">
-              <a:lnSpc>
-                <a:spcPct val="100000"/>
-              </a:lnSpc>
-              <a:buNone/>
-            </a:pPr>
-            <a:r>
-              <a:rPr lang="zh-CN" sz="3200" b="1" dirty="0">
+            <a:pPr marL="0" indent="0" lvl="0">
+              <a:lnSpc>
+                <a:spcPct val="100000"/>
+              </a:lnSpc>
+              <a:buNone/>
+            </a:pPr>
+            <a:r>
+              <a:rPr lang="zh-CN" sz="3200" dirty="0" b="1">
                 <a:solidFill>
                   <a:srgbClr val="1A1A18"/>
                 </a:solidFill>
@@ -15739,9 +14976,7 @@
         <p:txBody>
           <a:bodyPr/>
           <a:lstStyle/>
-          <a:p>
-            <a:endParaRPr/>
-          </a:p>
+          <a:p/>
         </p:txBody>
       </p:sp>
       <p:pic>
@@ -15753,7 +14988,7 @@
           <p:nvPr/>
         </p:nvPicPr>
         <p:blipFill>
-          <a:blip r:embed="rId2"/>
+          <a:blip r:embed="rId100"/>
           <a:stretch>
             <a:fillRect/>
           </a:stretch>
@@ -15790,7 +15025,7 @@
           </a:bodyPr>
           <a:lstStyle/>
           <a:p>
-            <a:pPr marL="0" lvl="0" indent="0" algn="ctr">
+            <a:pPr marL="0" indent="0" lvl="0" algn="ctr">
               <a:lnSpc>
                 <a:spcPct val="100000"/>
               </a:lnSpc>
@@ -15832,7 +15067,7 @@
           </a:bodyPr>
           <a:lstStyle/>
           <a:p>
-            <a:pPr marL="0" lvl="0" indent="0">
+            <a:pPr marL="0" indent="0" lvl="0">
               <a:lnSpc>
                 <a:spcPct val="100000"/>
               </a:lnSpc>
@@ -15874,7 +15109,7 @@
           </a:bodyPr>
           <a:lstStyle/>
           <a:p>
-            <a:pPr marL="0" lvl="0" indent="0" algn="r">
+            <a:pPr marL="0" indent="0" lvl="0" algn="r">
               <a:lnSpc>
                 <a:spcPct val="100000"/>
               </a:lnSpc>
@@ -15896,9 +15131,6 @@
       </p:sp>
     </p:spTree>
   </p:cSld>
-  <p:clrMapOvr>
-    <a:masterClrMapping/>
-  </p:clrMapOvr>
 </p:sld>
 </file>
 
@@ -15941,14 +15173,14 @@
           </a:bodyPr>
           <a:lstStyle/>
           <a:p>
-            <a:pPr marL="0" lvl="0" indent="0">
-              <a:lnSpc>
-                <a:spcPct val="100000"/>
-              </a:lnSpc>
-              <a:buNone/>
-            </a:pPr>
-            <a:r>
-              <a:rPr lang="zh-CN" sz="3200" b="1" dirty="0">
+            <a:pPr marL="0" indent="0" lvl="0">
+              <a:lnSpc>
+                <a:spcPct val="100000"/>
+              </a:lnSpc>
+              <a:buNone/>
+            </a:pPr>
+            <a:r>
+              <a:rPr lang="zh-CN" sz="3200" dirty="0" b="1">
                 <a:solidFill>
                   <a:srgbClr val="1A1A18"/>
                 </a:solidFill>
@@ -15985,9 +15217,7 @@
         <p:txBody>
           <a:bodyPr/>
           <a:lstStyle/>
-          <a:p>
-            <a:endParaRPr/>
-          </a:p>
+          <a:p/>
         </p:txBody>
       </p:sp>
       <p:sp>
@@ -16012,7 +15242,7 @@
           </a:bodyPr>
           <a:lstStyle/>
           <a:p>
-            <a:pPr marL="270000" lvl="0" indent="-230000">
+            <a:pPr marL="270000" indent="-230000" lvl="0">
               <a:lnSpc>
                 <a:spcPct val="100000"/>
               </a:lnSpc>
@@ -16038,7 +15268,7 @@
             </a:r>
           </a:p>
           <a:p>
-            <a:pPr marL="270000" lvl="0" indent="-230000">
+            <a:pPr marL="270000" indent="-230000" lvl="0">
               <a:lnSpc>
                 <a:spcPct val="100000"/>
               </a:lnSpc>
@@ -16064,7 +15294,7 @@
             </a:r>
           </a:p>
           <a:p>
-            <a:pPr marL="270000" lvl="0" indent="-230000">
+            <a:pPr marL="270000" indent="-230000" lvl="0">
               <a:lnSpc>
                 <a:spcPct val="100000"/>
               </a:lnSpc>
@@ -16090,7 +15320,7 @@
             </a:r>
           </a:p>
           <a:p>
-            <a:pPr marL="270000" lvl="0" indent="-230000">
+            <a:pPr marL="270000" indent="-230000" lvl="0">
               <a:lnSpc>
                 <a:spcPct val="100000"/>
               </a:lnSpc>
@@ -16139,7 +15369,7 @@
           </a:bodyPr>
           <a:lstStyle/>
           <a:p>
-            <a:pPr marL="0" lvl="0" indent="0">
+            <a:pPr marL="0" indent="0" lvl="0">
               <a:lnSpc>
                 <a:spcPct val="100000"/>
               </a:lnSpc>
@@ -16181,7 +15411,7 @@
           </a:bodyPr>
           <a:lstStyle/>
           <a:p>
-            <a:pPr marL="0" lvl="0" indent="0" algn="r">
+            <a:pPr marL="0" indent="0" lvl="0" algn="r">
               <a:lnSpc>
                 <a:spcPct val="100000"/>
               </a:lnSpc>
@@ -16203,9 +15433,6 @@
       </p:sp>
     </p:spTree>
   </p:cSld>
-  <p:clrMapOvr>
-    <a:masterClrMapping/>
-  </p:clrMapOvr>
 </p:sld>
 </file>
 
@@ -16248,14 +15475,14 @@
           </a:bodyPr>
           <a:lstStyle/>
           <a:p>
-            <a:pPr marL="0" lvl="0" indent="0">
-              <a:lnSpc>
-                <a:spcPct val="100000"/>
-              </a:lnSpc>
-              <a:buNone/>
-            </a:pPr>
-            <a:r>
-              <a:rPr lang="zh-CN" sz="3200" b="1" dirty="0">
+            <a:pPr marL="0" indent="0" lvl="0">
+              <a:lnSpc>
+                <a:spcPct val="100000"/>
+              </a:lnSpc>
+              <a:buNone/>
+            </a:pPr>
+            <a:r>
+              <a:rPr lang="zh-CN" sz="3200" dirty="0" b="1">
                 <a:solidFill>
                   <a:srgbClr val="1A1A18"/>
                 </a:solidFill>
@@ -16292,9 +15519,7 @@
         <p:txBody>
           <a:bodyPr/>
           <a:lstStyle/>
-          <a:p>
-            <a:endParaRPr/>
-          </a:p>
+          <a:p/>
         </p:txBody>
       </p:sp>
       <p:sp>
@@ -16319,7 +15544,7 @@
           </a:bodyPr>
           <a:lstStyle/>
           <a:p>
-            <a:pPr marL="0" lvl="0" indent="0">
+            <a:pPr marL="0" indent="0" lvl="0">
               <a:lnSpc>
                 <a:spcPct val="100000"/>
               </a:lnSpc>
@@ -16493,7 +15718,7 @@
           </a:bodyPr>
           <a:lstStyle/>
           <a:p>
-            <a:pPr marL="0" lvl="0" indent="0">
+            <a:pPr marL="0" indent="0" lvl="0">
               <a:lnSpc>
                 <a:spcPct val="100000"/>
               </a:lnSpc>
@@ -16535,7 +15760,7 @@
           </a:bodyPr>
           <a:lstStyle/>
           <a:p>
-            <a:pPr marL="0" lvl="0" indent="0" algn="r">
+            <a:pPr marL="0" indent="0" lvl="0" algn="r">
               <a:lnSpc>
                 <a:spcPct val="100000"/>
               </a:lnSpc>
@@ -16557,9 +15782,6 @@
       </p:sp>
     </p:spTree>
   </p:cSld>
-  <p:clrMapOvr>
-    <a:masterClrMapping/>
-  </p:clrMapOvr>
 </p:sld>
 </file>
 
@@ -16602,14 +15824,14 @@
           </a:bodyPr>
           <a:lstStyle/>
           <a:p>
-            <a:pPr marL="0" lvl="0" indent="0">
-              <a:lnSpc>
-                <a:spcPct val="100000"/>
-              </a:lnSpc>
-              <a:buNone/>
-            </a:pPr>
-            <a:r>
-              <a:rPr lang="zh-CN" sz="3200" b="1" dirty="0">
+            <a:pPr marL="0" indent="0" lvl="0">
+              <a:lnSpc>
+                <a:spcPct val="100000"/>
+              </a:lnSpc>
+              <a:buNone/>
+            </a:pPr>
+            <a:r>
+              <a:rPr lang="zh-CN" sz="3200" dirty="0" b="1">
                 <a:solidFill>
                   <a:srgbClr val="1A1A18"/>
                 </a:solidFill>
@@ -16646,9 +15868,7 @@
         <p:txBody>
           <a:bodyPr/>
           <a:lstStyle/>
-          <a:p>
-            <a:endParaRPr/>
-          </a:p>
+          <a:p/>
         </p:txBody>
       </p:sp>
       <p:sp>
@@ -16673,7 +15893,7 @@
           </a:bodyPr>
           <a:lstStyle/>
           <a:p>
-            <a:pPr marL="0" lvl="0" indent="0">
+            <a:pPr marL="0" indent="0" lvl="0">
               <a:lnSpc>
                 <a:spcPct val="100000"/>
               </a:lnSpc>
@@ -16715,7 +15935,7 @@
           </a:bodyPr>
           <a:lstStyle/>
           <a:p>
-            <a:pPr marL="0" lvl="0" indent="0">
+            <a:pPr marL="0" indent="0" lvl="0">
               <a:lnSpc>
                 <a:spcPct val="100000"/>
               </a:lnSpc>
@@ -16757,7 +15977,7 @@
           </a:bodyPr>
           <a:lstStyle/>
           <a:p>
-            <a:pPr marL="0" lvl="0" indent="0" algn="r">
+            <a:pPr marL="0" indent="0" lvl="0" algn="r">
               <a:lnSpc>
                 <a:spcPct val="100000"/>
               </a:lnSpc>
@@ -16779,9 +15999,6 @@
       </p:sp>
     </p:spTree>
   </p:cSld>
-  <p:clrMapOvr>
-    <a:masterClrMapping/>
-  </p:clrMapOvr>
 </p:sld>
 </file>
 
@@ -16824,14 +16041,14 @@
           </a:bodyPr>
           <a:lstStyle/>
           <a:p>
-            <a:pPr marL="0" lvl="0" indent="0">
-              <a:lnSpc>
-                <a:spcPct val="100000"/>
-              </a:lnSpc>
-              <a:buNone/>
-            </a:pPr>
-            <a:r>
-              <a:rPr lang="zh-CN" sz="3200" b="1" dirty="0">
+            <a:pPr marL="0" indent="0" lvl="0">
+              <a:lnSpc>
+                <a:spcPct val="100000"/>
+              </a:lnSpc>
+              <a:buNone/>
+            </a:pPr>
+            <a:r>
+              <a:rPr lang="zh-CN" sz="3200" dirty="0" b="1">
                 <a:solidFill>
                   <a:srgbClr val="1A1A18"/>
                 </a:solidFill>
@@ -16868,9 +16085,7 @@
         <p:txBody>
           <a:bodyPr/>
           <a:lstStyle/>
-          <a:p>
-            <a:endParaRPr/>
-          </a:p>
+          <a:p/>
         </p:txBody>
       </p:sp>
       <p:sp>
@@ -16895,7 +16110,7 @@
           </a:bodyPr>
           <a:lstStyle/>
           <a:p>
-            <a:pPr marL="0" lvl="0" indent="0">
+            <a:pPr marL="0" indent="0" lvl="0">
               <a:lnSpc>
                 <a:spcPct val="100000"/>
               </a:lnSpc>
@@ -16937,7 +16152,7 @@
           </a:bodyPr>
           <a:lstStyle/>
           <a:p>
-            <a:pPr marL="0" lvl="0" indent="0">
+            <a:pPr marL="0" indent="0" lvl="0">
               <a:lnSpc>
                 <a:spcPct val="100000"/>
               </a:lnSpc>
@@ -16979,7 +16194,7 @@
           </a:bodyPr>
           <a:lstStyle/>
           <a:p>
-            <a:pPr marL="0" lvl="0" indent="0" algn="r">
+            <a:pPr marL="0" indent="0" lvl="0" algn="r">
               <a:lnSpc>
                 <a:spcPct val="100000"/>
               </a:lnSpc>
@@ -17001,9 +16216,6 @@
       </p:sp>
     </p:spTree>
   </p:cSld>
-  <p:clrMapOvr>
-    <a:masterClrMapping/>
-  </p:clrMapOvr>
 </p:sld>
 </file>
 
@@ -17046,14 +16258,14 @@
           </a:bodyPr>
           <a:lstStyle/>
           <a:p>
-            <a:pPr marL="0" lvl="0" indent="0">
-              <a:lnSpc>
-                <a:spcPct val="100000"/>
-              </a:lnSpc>
-              <a:buNone/>
-            </a:pPr>
-            <a:r>
-              <a:rPr lang="zh-CN" sz="3200" b="1" dirty="0">
+            <a:pPr marL="0" indent="0" lvl="0">
+              <a:lnSpc>
+                <a:spcPct val="100000"/>
+              </a:lnSpc>
+              <a:buNone/>
+            </a:pPr>
+            <a:r>
+              <a:rPr lang="zh-CN" sz="3200" dirty="0" b="1">
                 <a:solidFill>
                   <a:srgbClr val="1A1A18"/>
                 </a:solidFill>
@@ -17090,9 +16302,7 @@
         <p:txBody>
           <a:bodyPr/>
           <a:lstStyle/>
-          <a:p>
-            <a:endParaRPr/>
-          </a:p>
+          <a:p/>
         </p:txBody>
       </p:sp>
       <p:sp>
@@ -17117,7 +16327,7 @@
           </a:bodyPr>
           <a:lstStyle/>
           <a:p>
-            <a:pPr marL="0" lvl="0" indent="0">
+            <a:pPr marL="0" indent="0" lvl="0">
               <a:lnSpc>
                 <a:spcPct val="100000"/>
               </a:lnSpc>
@@ -17168,7 +16378,7 @@
           </a:bodyPr>
           <a:lstStyle/>
           <a:p>
-            <a:pPr marL="0" lvl="0" indent="0">
+            <a:pPr marL="0" indent="0" lvl="0">
               <a:lnSpc>
                 <a:spcPct val="100000"/>
               </a:lnSpc>
@@ -17187,7 +16397,7 @@
             </a:r>
           </a:p>
           <a:p>
-            <a:pPr marL="0" lvl="0" indent="0">
+            <a:pPr marL="0" indent="0" lvl="0">
               <a:lnSpc>
                 <a:spcPct val="104000"/>
               </a:lnSpc>
@@ -17206,7 +16416,7 @@
             </a:r>
           </a:p>
           <a:p>
-            <a:pPr marL="0" lvl="0" indent="0">
+            <a:pPr marL="0" indent="0" lvl="0">
               <a:lnSpc>
                 <a:spcPct val="104000"/>
               </a:lnSpc>
@@ -17302,7 +16512,7 @@
             </a:r>
           </a:p>
           <a:p>
-            <a:pPr marL="0" lvl="0" indent="0">
+            <a:pPr marL="0" indent="0" lvl="0">
               <a:lnSpc>
                 <a:spcPct val="104000"/>
               </a:lnSpc>
@@ -17431,7 +16641,7 @@
             </a:r>
           </a:p>
           <a:p>
-            <a:pPr marL="0" lvl="0" indent="0">
+            <a:pPr marL="0" indent="0" lvl="0">
               <a:lnSpc>
                 <a:spcPct val="104000"/>
               </a:lnSpc>
@@ -17450,7 +16660,7 @@
             </a:r>
           </a:p>
           <a:p>
-            <a:pPr marL="0" lvl="0" indent="0">
+            <a:pPr marL="0" indent="0" lvl="0">
               <a:lnSpc>
                 <a:spcPct val="104000"/>
               </a:lnSpc>
@@ -17469,7 +16679,7 @@
             </a:r>
           </a:p>
           <a:p>
-            <a:pPr marL="0" lvl="0" indent="0">
+            <a:pPr marL="0" indent="0" lvl="0">
               <a:lnSpc>
                 <a:spcPct val="104000"/>
               </a:lnSpc>
@@ -17499,7 +16709,7 @@
             </a:r>
           </a:p>
           <a:p>
-            <a:pPr marL="0" lvl="0" indent="0">
+            <a:pPr marL="0" indent="0" lvl="0">
               <a:lnSpc>
                 <a:spcPct val="104000"/>
               </a:lnSpc>
@@ -17529,7 +16739,7 @@
             </a:r>
           </a:p>
           <a:p>
-            <a:pPr marL="0" lvl="0" indent="0">
+            <a:pPr marL="0" indent="0" lvl="0">
               <a:lnSpc>
                 <a:spcPct val="104000"/>
               </a:lnSpc>
@@ -17559,7 +16769,7 @@
             </a:r>
           </a:p>
           <a:p>
-            <a:pPr marL="0" lvl="0" indent="0">
+            <a:pPr marL="0" indent="0" lvl="0">
               <a:lnSpc>
                 <a:spcPct val="104000"/>
               </a:lnSpc>
@@ -17666,7 +16876,7 @@
             </a:r>
           </a:p>
           <a:p>
-            <a:pPr marL="0" lvl="0" indent="0">
+            <a:pPr marL="0" indent="0" lvl="0">
               <a:lnSpc>
                 <a:spcPct val="104000"/>
               </a:lnSpc>
@@ -17707,7 +16917,7 @@
             </a:r>
           </a:p>
           <a:p>
-            <a:pPr marL="0" lvl="0" indent="0">
+            <a:pPr marL="0" indent="0" lvl="0">
               <a:lnSpc>
                 <a:spcPct val="104000"/>
               </a:lnSpc>
@@ -17737,7 +16947,7 @@
             </a:r>
           </a:p>
           <a:p>
-            <a:pPr marL="0" lvl="0" indent="0">
+            <a:pPr marL="0" indent="0" lvl="0">
               <a:lnSpc>
                 <a:spcPct val="104000"/>
               </a:lnSpc>
@@ -17779,7 +16989,7 @@
           </a:bodyPr>
           <a:lstStyle/>
           <a:p>
-            <a:pPr marL="0" lvl="0" indent="0">
+            <a:pPr marL="0" indent="0" lvl="0">
               <a:lnSpc>
                 <a:spcPct val="100000"/>
               </a:lnSpc>
@@ -17821,7 +17031,7 @@
           </a:bodyPr>
           <a:lstStyle/>
           <a:p>
-            <a:pPr marL="0" lvl="0" indent="0" algn="r">
+            <a:pPr marL="0" indent="0" lvl="0" algn="r">
               <a:lnSpc>
                 <a:spcPct val="100000"/>
               </a:lnSpc>
@@ -17843,9 +17053,6 @@
       </p:sp>
     </p:spTree>
   </p:cSld>
-  <p:clrMapOvr>
-    <a:masterClrMapping/>
-  </p:clrMapOvr>
 </p:sld>
 </file>
 
@@ -17888,14 +17095,14 @@
           </a:bodyPr>
           <a:lstStyle/>
           <a:p>
-            <a:pPr marL="0" lvl="0" indent="0">
-              <a:lnSpc>
-                <a:spcPct val="100000"/>
-              </a:lnSpc>
-              <a:buNone/>
-            </a:pPr>
-            <a:r>
-              <a:rPr lang="zh-CN" sz="3200" b="1" dirty="0">
+            <a:pPr marL="0" indent="0" lvl="0">
+              <a:lnSpc>
+                <a:spcPct val="100000"/>
+              </a:lnSpc>
+              <a:buNone/>
+            </a:pPr>
+            <a:r>
+              <a:rPr lang="zh-CN" sz="3200" dirty="0" b="1">
                 <a:solidFill>
                   <a:srgbClr val="1A1A18"/>
                 </a:solidFill>
@@ -17932,9 +17139,7 @@
         <p:txBody>
           <a:bodyPr/>
           <a:lstStyle/>
-          <a:p>
-            <a:endParaRPr/>
-          </a:p>
+          <a:p/>
         </p:txBody>
       </p:sp>
       <p:sp>
@@ -17959,7 +17164,7 @@
           </a:bodyPr>
           <a:lstStyle/>
           <a:p>
-            <a:pPr marL="270000" lvl="0" indent="-230000">
+            <a:pPr marL="270000" indent="-230000" lvl="0">
               <a:lnSpc>
                 <a:spcPct val="100000"/>
               </a:lnSpc>
@@ -17984,7 +17189,7 @@
               <a:t>稳定性在</a:t>
             </a:r>
             <a:r>
-              <a:rPr lang="zh-CN" sz="2340" b="1" dirty="0">
+              <a:rPr lang="zh-CN" sz="2340" dirty="0" b="1">
                 <a:solidFill>
                   <a:srgbClr val="8A4B2A"/>
                 </a:solidFill>
@@ -18007,7 +17212,7 @@
             </a:r>
           </a:p>
           <a:p>
-            <a:pPr marL="270000" lvl="0" indent="-230000">
+            <a:pPr marL="270000" indent="-230000" lvl="0">
               <a:lnSpc>
                 <a:spcPct val="100000"/>
               </a:lnSpc>
@@ -18032,7 +17237,7 @@
               <a:t>插入排序对近乎有序的输入是 </a:t>
             </a:r>
             <a:r>
-              <a:rPr lang="zh-CN" sz="2340" i="1" dirty="0">
+              <a:rPr lang="zh-CN" sz="2340" dirty="0" i="1">
                 <a:solidFill>
                   <a:srgbClr val="1A1A18"/>
                 </a:solidFill>
@@ -18055,7 +17260,7 @@
             </a:r>
           </a:p>
           <a:p>
-            <a:pPr marL="270000" lvl="0" indent="-230000">
+            <a:pPr marL="270000" indent="-230000" lvl="0">
               <a:lnSpc>
                 <a:spcPct val="100000"/>
               </a:lnSpc>
@@ -18080,7 +17285,7 @@
               <a:t>堆排序靠第 5 章的堆；</a:t>
             </a:r>
             <a:r>
-              <a:rPr lang="zh-CN" sz="2340" b="1" dirty="0">
+              <a:rPr lang="zh-CN" sz="2340" dirty="0" b="1">
                 <a:solidFill>
                   <a:srgbClr val="8A4B2A"/>
                 </a:solidFill>
@@ -18091,7 +17296,7 @@
               <a:t>建堆 </a:t>
             </a:r>
             <a:r>
-              <a:rPr lang="zh-CN" sz="2340" b="1" i="1" dirty="0">
+              <a:rPr lang="zh-CN" sz="2340" dirty="0" b="1" i="1">
                 <a:solidFill>
                   <a:srgbClr val="8A4B2A"/>
                 </a:solidFill>
@@ -18113,7 +17318,7 @@
               <a:t>，总代价里的 </a:t>
             </a:r>
             <a:r>
-              <a:rPr lang="zh-CN" sz="2340" i="1" dirty="0">
+              <a:rPr lang="zh-CN" sz="2340" dirty="0" i="1">
                 <a:solidFill>
                   <a:srgbClr val="1A1A18"/>
                 </a:solidFill>
@@ -18136,7 +17341,7 @@
             </a:r>
           </a:p>
           <a:p>
-            <a:pPr marL="270000" lvl="0" indent="-230000">
+            <a:pPr marL="270000" indent="-230000" lvl="0">
               <a:lnSpc>
                 <a:spcPct val="100000"/>
               </a:lnSpc>
@@ -18161,7 +17366,7 @@
               <a:t>快排的最坏是 </a:t>
             </a:r>
             <a:r>
-              <a:rPr lang="zh-CN" sz="2340" i="1" dirty="0">
+              <a:rPr lang="zh-CN" sz="2340" dirty="0" i="1">
                 <a:solidFill>
                   <a:srgbClr val="1A1A18"/>
                 </a:solidFill>
@@ -18183,7 +17388,7 @@
               <a:t>，靠</a:t>
             </a:r>
             <a:r>
-              <a:rPr lang="zh-CN" sz="2340" b="1" dirty="0">
+              <a:rPr lang="zh-CN" sz="2340" dirty="0" b="1">
                 <a:solidFill>
                   <a:srgbClr val="8A4B2A"/>
                 </a:solidFill>
@@ -18205,7 +17410,7 @@
               <a:t>和</a:t>
             </a:r>
             <a:r>
-              <a:rPr lang="zh-CN" sz="2340" b="1" dirty="0">
+              <a:rPr lang="zh-CN" sz="2340" dirty="0" b="1">
                 <a:solidFill>
                   <a:srgbClr val="8A4B2A"/>
                 </a:solidFill>
@@ -18228,7 +17433,7 @@
             </a:r>
           </a:p>
           <a:p>
-            <a:pPr marL="270000" lvl="0" indent="-230000">
+            <a:pPr marL="270000" indent="-230000" lvl="0">
               <a:lnSpc>
                 <a:spcPct val="100000"/>
               </a:lnSpc>
@@ -18253,7 +17458,7 @@
               <a:t>归并稳定、最坏有保证，代价是 </a:t>
             </a:r>
             <a:r>
-              <a:rPr lang="zh-CN" sz="2340" i="1" dirty="0">
+              <a:rPr lang="zh-CN" sz="2340" dirty="0" i="1">
                 <a:solidFill>
                   <a:srgbClr val="1A1A18"/>
                 </a:solidFill>
@@ -18276,7 +17481,7 @@
             </a:r>
           </a:p>
           <a:p>
-            <a:pPr marL="270000" lvl="0" indent="-230000">
+            <a:pPr marL="270000" indent="-230000" lvl="0">
               <a:lnSpc>
                 <a:spcPct val="100000"/>
               </a:lnSpc>
@@ -18301,7 +17506,7 @@
               <a:t>比较模型的下界是 </a:t>
             </a:r>
             <a:r>
-              <a:rPr lang="zh-CN" sz="2340" i="1" dirty="0">
+              <a:rPr lang="zh-CN" sz="2340" dirty="0" i="1">
                 <a:solidFill>
                   <a:srgbClr val="1A1A18"/>
                 </a:solidFill>
@@ -18323,7 +17528,7 @@
               <a:t>；要更快只能</a:t>
             </a:r>
             <a:r>
-              <a:rPr lang="zh-CN" sz="2340" b="1" dirty="0">
+              <a:rPr lang="zh-CN" sz="2340" dirty="0" b="1">
                 <a:solidFill>
                   <a:srgbClr val="8A4B2A"/>
                 </a:solidFill>
@@ -18335,7 +17540,7 @@
             </a:r>
           </a:p>
           <a:p>
-            <a:pPr marL="270000" lvl="0" indent="-230000">
+            <a:pPr marL="270000" indent="-230000" lvl="0">
               <a:lnSpc>
                 <a:spcPct val="100000"/>
               </a:lnSpc>
@@ -18360,7 +17565,7 @@
               <a:t>基数排序必须</a:t>
             </a:r>
             <a:r>
-              <a:rPr lang="zh-CN" sz="2340" b="1" dirty="0">
+              <a:rPr lang="zh-CN" sz="2340" dirty="0" b="1">
                 <a:solidFill>
                   <a:srgbClr val="8A4B2A"/>
                 </a:solidFill>
@@ -18406,7 +17611,7 @@
           </a:bodyPr>
           <a:lstStyle/>
           <a:p>
-            <a:pPr marL="0" lvl="0" indent="0">
+            <a:pPr marL="0" indent="0" lvl="0">
               <a:lnSpc>
                 <a:spcPct val="100000"/>
               </a:lnSpc>
@@ -18448,7 +17653,7 @@
           </a:bodyPr>
           <a:lstStyle/>
           <a:p>
-            <a:pPr marL="0" lvl="0" indent="0" algn="r">
+            <a:pPr marL="0" indent="0" lvl="0" algn="r">
               <a:lnSpc>
                 <a:spcPct val="100000"/>
               </a:lnSpc>
@@ -18470,9 +17675,6 @@
       </p:sp>
     </p:spTree>
   </p:cSld>
-  <p:clrMapOvr>
-    <a:masterClrMapping/>
-  </p:clrMapOvr>
 </p:sld>
 </file>
 
@@ -18515,14 +17717,14 @@
           </a:bodyPr>
           <a:lstStyle/>
           <a:p>
-            <a:pPr marL="0" lvl="0" indent="0">
-              <a:lnSpc>
-                <a:spcPct val="100000"/>
-              </a:lnSpc>
-              <a:buNone/>
-            </a:pPr>
-            <a:r>
-              <a:rPr lang="zh-CN" sz="3200" b="1" dirty="0">
+            <a:pPr marL="0" indent="0" lvl="0">
+              <a:lnSpc>
+                <a:spcPct val="100000"/>
+              </a:lnSpc>
+              <a:buNone/>
+            </a:pPr>
+            <a:r>
+              <a:rPr lang="zh-CN" sz="3200" dirty="0" b="1">
                 <a:solidFill>
                   <a:srgbClr val="1A1A18"/>
                 </a:solidFill>
@@ -18559,9 +17761,7 @@
         <p:txBody>
           <a:bodyPr/>
           <a:lstStyle/>
-          <a:p>
-            <a:endParaRPr/>
-          </a:p>
+          <a:p/>
         </p:txBody>
       </p:sp>
       <p:sp>
@@ -18595,7 +17795,7 @@
           </a:bodyPr>
           <a:lstStyle/>
           <a:p>
-            <a:pPr marL="0" lvl="0" indent="0">
+            <a:pPr marL="0" indent="0" lvl="0">
               <a:lnSpc>
                 <a:spcPct val="104000"/>
               </a:lnSpc>
@@ -18637,7 +17837,7 @@
           </a:bodyPr>
           <a:lstStyle/>
           <a:p>
-            <a:pPr marL="270000" lvl="0" indent="-230000">
+            <a:pPr marL="270000" indent="-230000" lvl="0">
               <a:lnSpc>
                 <a:spcPct val="100000"/>
               </a:lnSpc>
@@ -18663,7 +17863,7 @@
             </a:r>
           </a:p>
           <a:p>
-            <a:pPr marL="270000" lvl="0" indent="-230000">
+            <a:pPr marL="270000" indent="-230000" lvl="0">
               <a:lnSpc>
                 <a:spcPct val="100000"/>
               </a:lnSpc>
@@ -18688,7 +17888,7 @@
               <a:t>把基数排序改成从</a:t>
             </a:r>
             <a:r>
-              <a:rPr lang="zh-CN" sz="2340" b="1" dirty="0">
+              <a:rPr lang="zh-CN" sz="2340" dirty="0" b="1">
                 <a:solidFill>
                   <a:srgbClr val="8A4B2A"/>
                 </a:solidFill>
@@ -18711,7 +17911,7 @@
             </a:r>
           </a:p>
           <a:p>
-            <a:pPr marL="270000" lvl="0" indent="-230000">
+            <a:pPr marL="270000" indent="-230000" lvl="0">
               <a:lnSpc>
                 <a:spcPct val="100000"/>
               </a:lnSpc>
@@ -18762,9 +17962,7 @@
         <p:txBody>
           <a:bodyPr/>
           <a:lstStyle/>
-          <a:p>
-            <a:endParaRPr/>
-          </a:p>
+          <a:p/>
         </p:txBody>
       </p:sp>
       <p:sp>
@@ -18789,7 +17987,7 @@
           </a:bodyPr>
           <a:lstStyle/>
           <a:p>
-            <a:pPr marL="0" lvl="0" indent="0">
+            <a:pPr marL="0" indent="0" lvl="0">
               <a:lnSpc>
                 <a:spcPct val="100000"/>
               </a:lnSpc>
@@ -18807,7 +18005,7 @@
               <a:t>测试里所有排序算法</a:t>
             </a:r>
             <a:r>
-              <a:rPr lang="zh-CN" sz="2145" b="1" dirty="0">
+              <a:rPr lang="zh-CN" sz="2145" dirty="0" b="1">
                 <a:solidFill>
                   <a:srgbClr val="8A4B2A"/>
                 </a:solidFill>
@@ -18853,7 +18051,7 @@
           </a:bodyPr>
           <a:lstStyle/>
           <a:p>
-            <a:pPr marL="0" lvl="0" indent="0">
+            <a:pPr marL="0" indent="0" lvl="0">
               <a:lnSpc>
                 <a:spcPct val="100000"/>
               </a:lnSpc>
@@ -18895,7 +18093,7 @@
           </a:bodyPr>
           <a:lstStyle/>
           <a:p>
-            <a:pPr marL="0" lvl="0" indent="0" algn="r">
+            <a:pPr marL="0" indent="0" lvl="0" algn="r">
               <a:lnSpc>
                 <a:spcPct val="100000"/>
               </a:lnSpc>
@@ -18917,9 +18115,6 @@
       </p:sp>
     </p:spTree>
   </p:cSld>
-  <p:clrMapOvr>
-    <a:masterClrMapping/>
-  </p:clrMapOvr>
 </p:sld>
 </file>
 
@@ -18962,22 +18157,22 @@
           </a:bodyPr>
           <a:lstStyle/>
           <a:p>
-            <a:pPr marL="0" lvl="0" indent="0">
-              <a:lnSpc>
-                <a:spcPct val="100000"/>
-              </a:lnSpc>
-              <a:buNone/>
-            </a:pPr>
-            <a:r>
-              <a:rPr lang="zh-CN" sz="3200" b="1" dirty="0">
-                <a:solidFill>
-                  <a:srgbClr val="1A1A18"/>
-                </a:solidFill>
-                <a:latin typeface="Segoe UI"/>
-                <a:ea typeface="Noto Sans CJK SC"/>
-                <a:cs typeface="Segoe UI"/>
-              </a:rPr>
-              <a:t>8.2 插入排序</a:t>
+            <a:pPr marL="0" indent="0" lvl="0">
+              <a:lnSpc>
+                <a:spcPct val="100000"/>
+              </a:lnSpc>
+              <a:buNone/>
+            </a:pPr>
+            <a:r>
+              <a:rPr lang="zh-CN" sz="3200" dirty="0" b="1">
+                <a:solidFill>
+                  <a:srgbClr val="1A1A18"/>
+                </a:solidFill>
+                <a:latin typeface="Segoe UI"/>
+                <a:ea typeface="Noto Sans CJK SC"/>
+                <a:cs typeface="Segoe UI"/>
+              </a:rPr>
+              <a:t>8.2 插入排序（续）</a:t>
             </a:r>
           </a:p>
         </p:txBody>
@@ -19006,9 +18201,7 @@
         <p:txBody>
           <a:bodyPr/>
           <a:lstStyle/>
-          <a:p>
-            <a:endParaRPr/>
-          </a:p>
+          <a:p/>
         </p:txBody>
       </p:sp>
       <p:sp>
@@ -19042,7 +18235,7 @@
           </a:bodyPr>
           <a:lstStyle/>
           <a:p>
-            <a:pPr marL="0" lvl="0" indent="0">
+            <a:pPr marL="0" indent="0" lvl="0">
               <a:lnSpc>
                 <a:spcPct val="100000"/>
               </a:lnSpc>
@@ -19061,7 +18254,7 @@
             </a:r>
           </a:p>
           <a:p>
-            <a:pPr marL="0" lvl="0" indent="0">
+            <a:pPr marL="0" indent="0" lvl="0">
               <a:lnSpc>
                 <a:spcPct val="104000"/>
               </a:lnSpc>
@@ -19080,7 +18273,7 @@
             </a:r>
           </a:p>
           <a:p>
-            <a:pPr marL="0" lvl="0" indent="0">
+            <a:pPr marL="0" indent="0" lvl="0">
               <a:lnSpc>
                 <a:spcPct val="104000"/>
               </a:lnSpc>
@@ -19154,7 +18347,7 @@
             </a:r>
           </a:p>
           <a:p>
-            <a:pPr marL="0" lvl="0" indent="0">
+            <a:pPr marL="0" indent="0" lvl="0">
               <a:lnSpc>
                 <a:spcPct val="104000"/>
               </a:lnSpc>
@@ -19239,7 +18432,7 @@
             </a:r>
           </a:p>
           <a:p>
-            <a:pPr marL="0" lvl="0" indent="0">
+            <a:pPr marL="0" indent="0" lvl="0">
               <a:lnSpc>
                 <a:spcPct val="104000"/>
               </a:lnSpc>
@@ -19302,7 +18495,7 @@
             </a:r>
           </a:p>
           <a:p>
-            <a:pPr marL="0" lvl="0" indent="0">
+            <a:pPr marL="0" indent="0" lvl="0">
               <a:lnSpc>
                 <a:spcPct val="104000"/>
               </a:lnSpc>
@@ -19343,7 +18536,7 @@
             </a:r>
           </a:p>
           <a:p>
-            <a:pPr marL="0" lvl="0" indent="0">
+            <a:pPr marL="0" indent="0" lvl="0">
               <a:lnSpc>
                 <a:spcPct val="104000"/>
               </a:lnSpc>
@@ -19428,7 +18621,7 @@
             </a:r>
           </a:p>
           <a:p>
-            <a:pPr marL="0" lvl="0" indent="0">
+            <a:pPr marL="0" indent="0" lvl="0">
               <a:lnSpc>
                 <a:spcPct val="104000"/>
               </a:lnSpc>
@@ -19469,7 +18662,7 @@
             </a:r>
           </a:p>
           <a:p>
-            <a:pPr marL="0" lvl="0" indent="0">
+            <a:pPr marL="0" indent="0" lvl="0">
               <a:lnSpc>
                 <a:spcPct val="104000"/>
               </a:lnSpc>
@@ -19488,7 +18681,7 @@
             </a:r>
           </a:p>
           <a:p>
-            <a:pPr marL="0" lvl="0" indent="0">
+            <a:pPr marL="0" indent="0" lvl="0">
               <a:lnSpc>
                 <a:spcPct val="104000"/>
               </a:lnSpc>
@@ -19507,7 +18700,7 @@
             </a:r>
           </a:p>
           <a:p>
-            <a:pPr marL="0" lvl="0" indent="0">
+            <a:pPr marL="0" indent="0" lvl="0">
               <a:lnSpc>
                 <a:spcPct val="104000"/>
               </a:lnSpc>
@@ -19526,7 +18719,7 @@
             </a:r>
           </a:p>
           <a:p>
-            <a:pPr marL="0" lvl="0" indent="0">
+            <a:pPr marL="0" indent="0" lvl="0">
               <a:lnSpc>
                 <a:spcPct val="104000"/>
               </a:lnSpc>
@@ -19545,7 +18738,7 @@
             </a:r>
           </a:p>
           <a:p>
-            <a:pPr marL="0" lvl="0" indent="0">
+            <a:pPr marL="0" indent="0" lvl="0">
               <a:lnSpc>
                 <a:spcPct val="104000"/>
               </a:lnSpc>
@@ -19587,7 +18780,7 @@
           </a:bodyPr>
           <a:lstStyle/>
           <a:p>
-            <a:pPr marL="0" lvl="0" indent="0">
+            <a:pPr marL="0" indent="0" lvl="0">
               <a:lnSpc>
                 <a:spcPct val="100000"/>
               </a:lnSpc>
@@ -19629,7 +18822,7 @@
           </a:bodyPr>
           <a:lstStyle/>
           <a:p>
-            <a:pPr marL="0" lvl="0" indent="0" algn="r">
+            <a:pPr marL="0" indent="0" lvl="0" algn="r">
               <a:lnSpc>
                 <a:spcPct val="100000"/>
               </a:lnSpc>
@@ -19651,9 +18844,6 @@
       </p:sp>
     </p:spTree>
   </p:cSld>
-  <p:clrMapOvr>
-    <a:masterClrMapping/>
-  </p:clrMapOvr>
 </p:sld>
 </file>
 
@@ -19696,14 +18886,14 @@
           </a:bodyPr>
           <a:lstStyle/>
           <a:p>
-            <a:pPr marL="0" lvl="0" indent="0">
-              <a:lnSpc>
-                <a:spcPct val="100000"/>
-              </a:lnSpc>
-              <a:buNone/>
-            </a:pPr>
-            <a:r>
-              <a:rPr lang="zh-CN" sz="3200" b="1" dirty="0">
+            <a:pPr marL="0" indent="0" lvl="0">
+              <a:lnSpc>
+                <a:spcPct val="100000"/>
+              </a:lnSpc>
+              <a:buNone/>
+            </a:pPr>
+            <a:r>
+              <a:rPr lang="zh-CN" sz="3200" dirty="0" b="1">
                 <a:solidFill>
                   <a:srgbClr val="1A1A18"/>
                 </a:solidFill>
@@ -19740,9 +18930,7 @@
         <p:txBody>
           <a:bodyPr/>
           <a:lstStyle/>
-          <a:p>
-            <a:endParaRPr/>
-          </a:p>
+          <a:p/>
         </p:txBody>
       </p:sp>
       <p:sp>
@@ -19767,7 +18955,7 @@
           </a:bodyPr>
           <a:lstStyle/>
           <a:p>
-            <a:pPr marL="270000" lvl="0" indent="-230000">
+            <a:pPr marL="270000" indent="-230000" lvl="0">
               <a:lnSpc>
                 <a:spcPct val="100000"/>
               </a:lnSpc>
@@ -19781,7 +18969,7 @@
               <a:buChar char="●"/>
             </a:pPr>
             <a:r>
-              <a:rPr lang="zh-CN" sz="2340" b="1" dirty="0">
+              <a:rPr lang="zh-CN" sz="2340" dirty="0" b="1">
                 <a:solidFill>
                   <a:srgbClr val="8A4B2A"/>
                 </a:solidFill>
@@ -19804,7 +18992,7 @@
             </a:r>
           </a:p>
           <a:p>
-            <a:pPr marL="270000" lvl="0" indent="-230000">
+            <a:pPr marL="270000" indent="-230000" lvl="0">
               <a:lnSpc>
                 <a:spcPct val="100000"/>
               </a:lnSpc>
@@ -19818,7 +19006,7 @@
               <a:buChar char="●"/>
             </a:pPr>
             <a:r>
-              <a:rPr lang="zh-CN" sz="2340" b="1" dirty="0">
+              <a:rPr lang="zh-CN" sz="2340" dirty="0" b="1">
                 <a:solidFill>
                   <a:srgbClr val="8A4B2A"/>
                 </a:solidFill>
@@ -19840,7 +19028,7 @@
               <a:t>：</a:t>
             </a:r>
             <a:r>
-              <a:rPr lang="zh-CN" sz="2340" i="1" dirty="0">
+              <a:rPr lang="zh-CN" sz="2340" dirty="0" i="1">
                 <a:solidFill>
                   <a:srgbClr val="1A1A18"/>
                 </a:solidFill>
@@ -19886,7 +19074,7 @@
           </a:bodyPr>
           <a:lstStyle/>
           <a:p>
-            <a:pPr marL="0" lvl="0" indent="0">
+            <a:pPr marL="0" indent="0" lvl="0">
               <a:lnSpc>
                 <a:spcPct val="100000"/>
               </a:lnSpc>
@@ -19904,7 +19092,7 @@
               <a:t>所以它常被用作</a:t>
             </a:r>
             <a:r>
-              <a:rPr lang="zh-CN" sz="2340" b="1" dirty="0">
+              <a:rPr lang="zh-CN" sz="2340" dirty="0" b="1">
                 <a:solidFill>
                   <a:srgbClr val="8A4B2A"/>
                 </a:solidFill>
@@ -19950,14 +19138,14 @@
           </a:bodyPr>
           <a:lstStyle/>
           <a:p>
-            <a:pPr marL="0" lvl="0" indent="0">
-              <a:lnSpc>
-                <a:spcPct val="100000"/>
-              </a:lnSpc>
-              <a:buNone/>
-            </a:pPr>
-            <a:r>
-              <a:rPr lang="zh-CN" sz="2340" b="1" dirty="0">
+            <a:pPr marL="0" indent="0" lvl="0">
+              <a:lnSpc>
+                <a:spcPct val="100000"/>
+              </a:lnSpc>
+              <a:buNone/>
+            </a:pPr>
+            <a:r>
+              <a:rPr lang="zh-CN" sz="2340" dirty="0" b="1">
                 <a:solidFill>
                   <a:srgbClr val="8A4B2A"/>
                 </a:solidFill>
@@ -19968,7 +19156,7 @@
               <a:t>n 小的时候 </a:t>
             </a:r>
             <a:r>
-              <a:rPr lang="zh-CN" sz="2340" b="1" i="1" dirty="0">
+              <a:rPr lang="zh-CN" sz="2340" dirty="0" b="1" i="1">
                 <a:solidFill>
                   <a:srgbClr val="8A4B2A"/>
                 </a:solidFill>
@@ -19979,7 +19167,7 @@
               <a:t>O(n²)</a:t>
             </a:r>
             <a:r>
-              <a:rPr lang="zh-CN" sz="2340" b="1" dirty="0">
+              <a:rPr lang="zh-CN" sz="2340" dirty="0" b="1">
                 <a:solidFill>
                   <a:srgbClr val="8A4B2A"/>
                 </a:solidFill>
@@ -19990,7 +19178,7 @@
               <a:t> 完全可能比 </a:t>
             </a:r>
             <a:r>
-              <a:rPr lang="zh-CN" sz="2340" b="1" i="1" dirty="0">
+              <a:rPr lang="zh-CN" sz="2340" dirty="0" b="1" i="1">
                 <a:solidFill>
                   <a:srgbClr val="8A4B2A"/>
                 </a:solidFill>
@@ -20001,7 +19189,7 @@
               <a:t>O(n log n)</a:t>
             </a:r>
             <a:r>
-              <a:rPr lang="zh-CN" sz="2340" b="1" dirty="0">
+              <a:rPr lang="zh-CN" sz="2340" dirty="0" b="1">
                 <a:solidFill>
                   <a:srgbClr val="8A4B2A"/>
                 </a:solidFill>
@@ -20047,7 +19235,7 @@
           </a:bodyPr>
           <a:lstStyle/>
           <a:p>
-            <a:pPr marL="0" lvl="0" indent="0">
+            <a:pPr marL="0" indent="0" lvl="0">
               <a:lnSpc>
                 <a:spcPct val="100000"/>
               </a:lnSpc>
@@ -20089,7 +19277,7 @@
           </a:bodyPr>
           <a:lstStyle/>
           <a:p>
-            <a:pPr marL="0" lvl="0" indent="0" algn="r">
+            <a:pPr marL="0" indent="0" lvl="0" algn="r">
               <a:lnSpc>
                 <a:spcPct val="100000"/>
               </a:lnSpc>
@@ -20111,9 +19299,6 @@
       </p:sp>
     </p:spTree>
   </p:cSld>
-  <p:clrMapOvr>
-    <a:masterClrMapping/>
-  </p:clrMapOvr>
 </p:sld>
 </file>
 
@@ -20156,14 +19341,14 @@
           </a:bodyPr>
           <a:lstStyle/>
           <a:p>
-            <a:pPr marL="0" lvl="0" indent="0">
-              <a:lnSpc>
-                <a:spcPct val="100000"/>
-              </a:lnSpc>
-              <a:buNone/>
-            </a:pPr>
-            <a:r>
-              <a:rPr lang="zh-CN" sz="3200" b="1" dirty="0">
+            <a:pPr marL="0" indent="0" lvl="0">
+              <a:lnSpc>
+                <a:spcPct val="100000"/>
+              </a:lnSpc>
+              <a:buNone/>
+            </a:pPr>
+            <a:r>
+              <a:rPr lang="zh-CN" sz="3200" dirty="0" b="1">
                 <a:solidFill>
                   <a:srgbClr val="1A1A18"/>
                 </a:solidFill>
@@ -20200,9 +19385,7 @@
         <p:txBody>
           <a:bodyPr/>
           <a:lstStyle/>
-          <a:p>
-            <a:endParaRPr/>
-          </a:p>
+          <a:p/>
         </p:txBody>
       </p:sp>
       <p:pic>
@@ -20214,7 +19397,7 @@
           <p:nvPr/>
         </p:nvPicPr>
         <p:blipFill>
-          <a:blip r:embed="rId2"/>
+          <a:blip r:embed="rId100"/>
           <a:stretch>
             <a:fillRect/>
           </a:stretch>
@@ -20251,7 +19434,7 @@
           </a:bodyPr>
           <a:lstStyle/>
           <a:p>
-            <a:pPr marL="0" lvl="0" indent="0" algn="ctr">
+            <a:pPr marL="0" indent="0" lvl="0" algn="ctr">
               <a:lnSpc>
                 <a:spcPct val="100000"/>
               </a:lnSpc>
@@ -20293,7 +19476,7 @@
           </a:bodyPr>
           <a:lstStyle/>
           <a:p>
-            <a:pPr marL="0" lvl="0" indent="0">
+            <a:pPr marL="0" indent="0" lvl="0">
               <a:lnSpc>
                 <a:spcPct val="100000"/>
               </a:lnSpc>
@@ -20311,7 +19494,7 @@
               <a:t>先按</a:t>
             </a:r>
             <a:r>
-              <a:rPr lang="zh-CN" sz="1368" b="1" dirty="0">
+              <a:rPr lang="zh-CN" sz="1368" dirty="0" b="1">
                 <a:solidFill>
                   <a:srgbClr val="8A4B2A"/>
                 </a:solidFill>
@@ -20357,14 +19540,14 @@
           </a:bodyPr>
           <a:lstStyle/>
           <a:p>
-            <a:pPr marL="0" lvl="0" indent="0">
-              <a:lnSpc>
-                <a:spcPct val="100000"/>
-              </a:lnSpc>
-              <a:buNone/>
-            </a:pPr>
-            <a:r>
-              <a:rPr lang="zh-CN" sz="1368" b="1" dirty="0">
+            <a:pPr marL="0" indent="0" lvl="0">
+              <a:lnSpc>
+                <a:spcPct val="100000"/>
+              </a:lnSpc>
+              <a:buNone/>
+            </a:pPr>
+            <a:r>
+              <a:rPr lang="zh-CN" sz="1368" dirty="0" b="1">
                 <a:solidFill>
                   <a:srgbClr val="8A4B2A"/>
                 </a:solidFill>
@@ -20410,7 +19593,7 @@
           </a:bodyPr>
           <a:lstStyle/>
           <a:p>
-            <a:pPr marL="0" lvl="0" indent="0">
+            <a:pPr marL="0" indent="0" lvl="0">
               <a:lnSpc>
                 <a:spcPct val="100000"/>
               </a:lnSpc>
@@ -20428,7 +19611,7 @@
               <a:t>代价与增量序列有关，「每次除以 2」约 </a:t>
             </a:r>
             <a:r>
-              <a:rPr lang="zh-CN" sz="1368" i="1" dirty="0">
+              <a:rPr lang="zh-CN" sz="1368" dirty="0" i="1">
                 <a:solidFill>
                   <a:srgbClr val="1A1A18"/>
                 </a:solidFill>
@@ -20450,7 +19633,7 @@
               <a:t>。</a:t>
             </a:r>
             <a:r>
-              <a:rPr lang="zh-CN" sz="1368" b="1" dirty="0">
+              <a:rPr lang="zh-CN" sz="1368" dirty="0" b="1">
                 <a:solidFill>
                   <a:srgbClr val="8A4B2A"/>
                 </a:solidFill>
@@ -20496,7 +19679,7 @@
           </a:bodyPr>
           <a:lstStyle/>
           <a:p>
-            <a:pPr marL="0" lvl="0" indent="0">
+            <a:pPr marL="0" indent="0" lvl="0">
               <a:lnSpc>
                 <a:spcPct val="100000"/>
               </a:lnSpc>
@@ -20538,7 +19721,7 @@
           </a:bodyPr>
           <a:lstStyle/>
           <a:p>
-            <a:pPr marL="0" lvl="0" indent="0" algn="r">
+            <a:pPr marL="0" indent="0" lvl="0" algn="r">
               <a:lnSpc>
                 <a:spcPct val="100000"/>
               </a:lnSpc>
@@ -20560,9 +19743,6 @@
       </p:sp>
     </p:spTree>
   </p:cSld>
-  <p:clrMapOvr>
-    <a:masterClrMapping/>
-  </p:clrMapOvr>
 </p:sld>
 </file>
 
@@ -20605,14 +19785,14 @@
           </a:bodyPr>
           <a:lstStyle/>
           <a:p>
-            <a:pPr marL="0" lvl="0" indent="0">
-              <a:lnSpc>
-                <a:spcPct val="100000"/>
-              </a:lnSpc>
-              <a:buNone/>
-            </a:pPr>
-            <a:r>
-              <a:rPr lang="zh-CN" sz="3200" b="1" dirty="0">
+            <a:pPr marL="0" indent="0" lvl="0">
+              <a:lnSpc>
+                <a:spcPct val="100000"/>
+              </a:lnSpc>
+              <a:buNone/>
+            </a:pPr>
+            <a:r>
+              <a:rPr lang="zh-CN" sz="3200" dirty="0" b="1">
                 <a:solidFill>
                   <a:srgbClr val="1A1A18"/>
                 </a:solidFill>
@@ -20649,9 +19829,7 @@
         <p:txBody>
           <a:bodyPr/>
           <a:lstStyle/>
-          <a:p>
-            <a:endParaRPr/>
-          </a:p>
+          <a:p/>
         </p:txBody>
       </p:sp>
       <p:sp>
@@ -20676,7 +19854,7 @@
           </a:bodyPr>
           <a:lstStyle/>
           <a:p>
-            <a:pPr marL="0" lvl="0" indent="0">
+            <a:pPr marL="0" indent="0" lvl="0">
               <a:lnSpc>
                 <a:spcPct val="100000"/>
               </a:lnSpc>
@@ -20694,7 +19872,7 @@
               <a:t>第 </a:t>
             </a:r>
             <a:r>
-              <a:rPr lang="zh-CN" sz="2340" i="1" dirty="0">
+              <a:rPr lang="zh-CN" sz="2340" dirty="0" i="1">
                 <a:solidFill>
                   <a:srgbClr val="1A1A18"/>
                 </a:solidFill>
@@ -20738,7 +19916,7 @@
               <a:t> 扫出最小值，与位置 </a:t>
             </a:r>
             <a:r>
-              <a:rPr lang="zh-CN" sz="2340" i="1" dirty="0">
+              <a:rPr lang="zh-CN" sz="2340" dirty="0" i="1">
                 <a:solidFill>
                   <a:srgbClr val="1A1A18"/>
                 </a:solidFill>
@@ -20793,7 +19971,7 @@
           </a:bodyPr>
           <a:lstStyle/>
           <a:p>
-            <a:pPr marL="0" lvl="0" indent="0">
+            <a:pPr marL="0" indent="0" lvl="0">
               <a:lnSpc>
                 <a:spcPct val="104000"/>
               </a:lnSpc>
@@ -20812,7 +19990,7 @@
             </a:r>
           </a:p>
           <a:p>
-            <a:pPr marL="0" lvl="0" indent="0">
+            <a:pPr marL="0" indent="0" lvl="0">
               <a:lnSpc>
                 <a:spcPct val="104000"/>
               </a:lnSpc>
@@ -20831,7 +20009,7 @@
             </a:r>
           </a:p>
           <a:p>
-            <a:pPr marL="0" lvl="0" indent="0">
+            <a:pPr marL="0" indent="0" lvl="0">
               <a:lnSpc>
                 <a:spcPct val="104000"/>
               </a:lnSpc>
@@ -20850,7 +20028,7 @@
             </a:r>
           </a:p>
           <a:p>
-            <a:pPr marL="0" lvl="0" indent="0">
+            <a:pPr marL="0" indent="0" lvl="0">
               <a:lnSpc>
                 <a:spcPct val="104000"/>
               </a:lnSpc>
@@ -20892,7 +20070,7 @@
           </a:bodyPr>
           <a:lstStyle/>
           <a:p>
-            <a:pPr marL="270000" lvl="0" indent="-230000">
+            <a:pPr marL="270000" indent="-230000" lvl="0">
               <a:lnSpc>
                 <a:spcPct val="100000"/>
               </a:lnSpc>
@@ -20917,7 +20095,7 @@
               <a:t>无论输入是否有序，比较次数都是 </a:t>
             </a:r>
             <a:r>
-              <a:rPr lang="zh-CN" sz="2340" i="1" dirty="0">
+              <a:rPr lang="zh-CN" sz="2340" dirty="0" i="1">
                 <a:solidFill>
                   <a:srgbClr val="1A1A18"/>
                 </a:solidFill>
@@ -20929,7 +20107,7 @@
             </a:r>
           </a:p>
           <a:p>
-            <a:pPr marL="270000" lvl="0" indent="-230000">
+            <a:pPr marL="270000" indent="-230000" lvl="0">
               <a:lnSpc>
                 <a:spcPct val="100000"/>
               </a:lnSpc>
@@ -20954,7 +20132,7 @@
               <a:t>只做至多 </a:t>
             </a:r>
             <a:r>
-              <a:rPr lang="zh-CN" sz="2340" i="1" dirty="0">
+              <a:rPr lang="zh-CN" sz="2340" dirty="0" i="1">
                 <a:solidFill>
                   <a:srgbClr val="1A1A18"/>
                 </a:solidFill>
@@ -20976,7 +20154,7 @@
               <a:t> 次交换，额外空间 </a:t>
             </a:r>
             <a:r>
-              <a:rPr lang="zh-CN" sz="2340" i="1" dirty="0">
+              <a:rPr lang="zh-CN" sz="2340" dirty="0" i="1">
                 <a:solidFill>
                   <a:srgbClr val="1A1A18"/>
                 </a:solidFill>
@@ -20988,7 +20166,7 @@
             </a:r>
           </a:p>
           <a:p>
-            <a:pPr marL="270000" lvl="0" indent="-230000">
+            <a:pPr marL="270000" indent="-230000" lvl="0">
               <a:lnSpc>
                 <a:spcPct val="100000"/>
               </a:lnSpc>
@@ -21002,7 +20180,7 @@
               <a:buChar char="●"/>
             </a:pPr>
             <a:r>
-              <a:rPr lang="zh-CN" sz="2340" b="1" dirty="0">
+              <a:rPr lang="zh-CN" sz="2340" dirty="0" b="1">
                 <a:solidFill>
                   <a:srgbClr val="8A4B2A"/>
                 </a:solidFill>
@@ -21048,7 +20226,7 @@
           </a:bodyPr>
           <a:lstStyle/>
           <a:p>
-            <a:pPr marL="0" lvl="0" indent="0">
+            <a:pPr marL="0" indent="0" lvl="0">
               <a:lnSpc>
                 <a:spcPct val="100000"/>
               </a:lnSpc>
@@ -21090,7 +20268,7 @@
           </a:bodyPr>
           <a:lstStyle/>
           <a:p>
-            <a:pPr marL="0" lvl="0" indent="0">
+            <a:pPr marL="0" indent="0" lvl="0">
               <a:lnSpc>
                 <a:spcPct val="100000"/>
               </a:lnSpc>
@@ -21132,7 +20310,7 @@
           </a:bodyPr>
           <a:lstStyle/>
           <a:p>
-            <a:pPr marL="0" lvl="0" indent="0" algn="r">
+            <a:pPr marL="0" indent="0" lvl="0" algn="r">
               <a:lnSpc>
                 <a:spcPct val="100000"/>
               </a:lnSpc>
@@ -21154,9 +20332,6 @@
       </p:sp>
     </p:spTree>
   </p:cSld>
-  <p:clrMapOvr>
-    <a:masterClrMapping/>
-  </p:clrMapOvr>
 </p:sld>
 </file>
 
@@ -21199,14 +20374,14 @@
           </a:bodyPr>
           <a:lstStyle/>
           <a:p>
-            <a:pPr marL="0" lvl="0" indent="0">
-              <a:lnSpc>
-                <a:spcPct val="100000"/>
-              </a:lnSpc>
-              <a:buNone/>
-            </a:pPr>
-            <a:r>
-              <a:rPr lang="zh-CN" sz="3200" b="1" dirty="0">
+            <a:pPr marL="0" indent="0" lvl="0">
+              <a:lnSpc>
+                <a:spcPct val="100000"/>
+              </a:lnSpc>
+              <a:buNone/>
+            </a:pPr>
+            <a:r>
+              <a:rPr lang="zh-CN" sz="3200" dirty="0" b="1">
                 <a:solidFill>
                   <a:srgbClr val="1A1A18"/>
                 </a:solidFill>
@@ -21243,9 +20418,7 @@
         <p:txBody>
           <a:bodyPr/>
           <a:lstStyle/>
-          <a:p>
-            <a:endParaRPr/>
-          </a:p>
+          <a:p/>
         </p:txBody>
       </p:sp>
       <p:pic>
@@ -21257,7 +20430,7 @@
           <p:nvPr/>
         </p:nvPicPr>
         <p:blipFill>
-          <a:blip r:embed="rId2"/>
+          <a:blip r:embed="rId100"/>
           <a:stretch>
             <a:fillRect/>
           </a:stretch>
@@ -21294,7 +20467,7 @@
           </a:bodyPr>
           <a:lstStyle/>
           <a:p>
-            <a:pPr marL="0" lvl="0" indent="0" algn="ctr">
+            <a:pPr marL="0" indent="0" lvl="0" algn="ctr">
               <a:lnSpc>
                 <a:spcPct val="100000"/>
               </a:lnSpc>
@@ -21336,7 +20509,7 @@
           </a:bodyPr>
           <a:lstStyle/>
           <a:p>
-            <a:pPr marL="0" lvl="0" indent="0">
+            <a:pPr marL="0" indent="0" lvl="0">
               <a:lnSpc>
                 <a:spcPct val="100000"/>
               </a:lnSpc>
@@ -21378,7 +20551,7 @@
           </a:bodyPr>
           <a:lstStyle/>
           <a:p>
-            <a:pPr marL="0" lvl="0" indent="0" algn="r">
+            <a:pPr marL="0" indent="0" lvl="0" algn="r">
               <a:lnSpc>
                 <a:spcPct val="100000"/>
               </a:lnSpc>
@@ -21400,9 +20573,6 @@
       </p:sp>
     </p:spTree>
   </p:cSld>
-  <p:clrMapOvr>
-    <a:masterClrMapping/>
-  </p:clrMapOvr>
 </p:sld>
 </file>
 
@@ -21445,22 +20615,22 @@
           </a:bodyPr>
           <a:lstStyle/>
           <a:p>
-            <a:pPr marL="0" lvl="0" indent="0">
-              <a:lnSpc>
-                <a:spcPct val="100000"/>
-              </a:lnSpc>
-              <a:buNone/>
-            </a:pPr>
-            <a:r>
-              <a:rPr lang="zh-CN" sz="3200" b="1" dirty="0">
-                <a:solidFill>
-                  <a:srgbClr val="1A1A18"/>
-                </a:solidFill>
-                <a:latin typeface="Segoe UI"/>
-                <a:ea typeface="Noto Sans CJK SC"/>
-                <a:cs typeface="Segoe UI"/>
-              </a:rPr>
-              <a:t>8.3.2 堆排序</a:t>
+            <a:pPr marL="0" indent="0" lvl="0">
+              <a:lnSpc>
+                <a:spcPct val="100000"/>
+              </a:lnSpc>
+              <a:buNone/>
+            </a:pPr>
+            <a:r>
+              <a:rPr lang="zh-CN" sz="3200" dirty="0" b="1">
+                <a:solidFill>
+                  <a:srgbClr val="1A1A18"/>
+                </a:solidFill>
+                <a:latin typeface="Segoe UI"/>
+                <a:ea typeface="Noto Sans CJK SC"/>
+                <a:cs typeface="Segoe UI"/>
+              </a:rPr>
+              <a:t>8.3.2 堆排序（续）</a:t>
             </a:r>
           </a:p>
         </p:txBody>
@@ -21489,9 +20659,7 @@
         <p:txBody>
           <a:bodyPr/>
           <a:lstStyle/>
-          <a:p>
-            <a:endParaRPr/>
-          </a:p>
+          <a:p/>
         </p:txBody>
       </p:sp>
       <p:sp>
@@ -21525,7 +20693,7 @@
           </a:bodyPr>
           <a:lstStyle/>
           <a:p>
-            <a:pPr marL="0" lvl="0" indent="0">
+            <a:pPr marL="0" indent="0" lvl="0">
               <a:lnSpc>
                 <a:spcPct val="100000"/>
               </a:lnSpc>
@@ -21544,7 +20712,7 @@
             </a:r>
           </a:p>
           <a:p>
-            <a:pPr marL="0" lvl="0" indent="0">
+            <a:pPr marL="0" indent="0" lvl="0">
               <a:lnSpc>
                 <a:spcPct val="104000"/>
               </a:lnSpc>
@@ -21563,7 +20731,7 @@
             </a:r>
           </a:p>
           <a:p>
-            <a:pPr marL="0" lvl="0" indent="0">
+            <a:pPr marL="0" indent="0" lvl="0">
               <a:lnSpc>
                 <a:spcPct val="104000"/>
               </a:lnSpc>
@@ -21681,7 +20849,7 @@
             </a:r>
           </a:p>
           <a:p>
-            <a:pPr marL="0" lvl="0" indent="0">
+            <a:pPr marL="0" indent="0" lvl="0">
               <a:lnSpc>
                 <a:spcPct val="104000"/>
               </a:lnSpc>
@@ -21766,7 +20934,7 @@
             </a:r>
           </a:p>
           <a:p>
-            <a:pPr marL="0" lvl="0" indent="0">
+            <a:pPr marL="0" indent="0" lvl="0">
               <a:lnSpc>
                 <a:spcPct val="104000"/>
               </a:lnSpc>
@@ -21851,7 +21019,7 @@
             </a:r>
           </a:p>
           <a:p>
-            <a:pPr marL="0" lvl="0" indent="0">
+            <a:pPr marL="0" indent="0" lvl="0">
               <a:lnSpc>
                 <a:spcPct val="104000"/>
               </a:lnSpc>
@@ -21936,7 +21104,7 @@
             </a:r>
           </a:p>
           <a:p>
-            <a:pPr marL="0" lvl="0" indent="0">
+            <a:pPr marL="0" indent="0" lvl="0">
               <a:lnSpc>
                 <a:spcPct val="104000"/>
               </a:lnSpc>
@@ -21999,7 +21167,7 @@
             </a:r>
           </a:p>
           <a:p>
-            <a:pPr marL="0" lvl="0" indent="0">
+            <a:pPr marL="0" indent="0" lvl="0">
               <a:lnSpc>
                 <a:spcPct val="104000"/>
               </a:lnSpc>
@@ -22040,7 +21208,7 @@
             </a:r>
           </a:p>
           <a:p>
-            <a:pPr marL="0" lvl="0" indent="0">
+            <a:pPr marL="0" indent="0" lvl="0">
               <a:lnSpc>
                 <a:spcPct val="104000"/>
               </a:lnSpc>
@@ -22059,7 +21227,7 @@
             </a:r>
           </a:p>
           <a:p>
-            <a:pPr marL="0" lvl="0" indent="0">
+            <a:pPr marL="0" indent="0" lvl="0">
               <a:lnSpc>
                 <a:spcPct val="104000"/>
               </a:lnSpc>
@@ -22078,7 +21246,7 @@
             </a:r>
           </a:p>
           <a:p>
-            <a:pPr marL="0" lvl="0" indent="0">
+            <a:pPr marL="0" indent="0" lvl="0">
               <a:lnSpc>
                 <a:spcPct val="104000"/>
               </a:lnSpc>
@@ -22097,7 +21265,7 @@
             </a:r>
           </a:p>
           <a:p>
-            <a:pPr marL="0" lvl="0" indent="0">
+            <a:pPr marL="0" indent="0" lvl="0">
               <a:lnSpc>
                 <a:spcPct val="104000"/>
               </a:lnSpc>
@@ -22116,7 +21284,7 @@
             </a:r>
           </a:p>
           <a:p>
-            <a:pPr marL="0" lvl="0" indent="0">
+            <a:pPr marL="0" indent="0" lvl="0">
               <a:lnSpc>
                 <a:spcPct val="104000"/>
               </a:lnSpc>
@@ -22135,7 +21303,7 @@
             </a:r>
           </a:p>
           <a:p>
-            <a:pPr marL="0" lvl="0" indent="0">
+            <a:pPr marL="0" indent="0" lvl="0">
               <a:lnSpc>
                 <a:spcPct val="104000"/>
               </a:lnSpc>
@@ -22209,7 +21377,7 @@
             </a:r>
           </a:p>
           <a:p>
-            <a:pPr marL="0" lvl="0" indent="0">
+            <a:pPr marL="0" indent="0" lvl="0">
               <a:lnSpc>
                 <a:spcPct val="104000"/>
               </a:lnSpc>
@@ -22316,7 +21484,7 @@
             </a:r>
           </a:p>
           <a:p>
-            <a:pPr marL="0" lvl="0" indent="0">
+            <a:pPr marL="0" indent="0" lvl="0">
               <a:lnSpc>
                 <a:spcPct val="104000"/>
               </a:lnSpc>
@@ -22357,7 +21525,7 @@
             </a:r>
           </a:p>
           <a:p>
-            <a:pPr marL="0" lvl="0" indent="0">
+            <a:pPr marL="0" indent="0" lvl="0">
               <a:lnSpc>
                 <a:spcPct val="104000"/>
               </a:lnSpc>
@@ -22376,7 +21544,7 @@
             </a:r>
           </a:p>
           <a:p>
-            <a:pPr marL="0" lvl="0" indent="0">
+            <a:pPr marL="0" indent="0" lvl="0">
               <a:lnSpc>
                 <a:spcPct val="104000"/>
               </a:lnSpc>
@@ -22461,7 +21629,7 @@
             </a:r>
           </a:p>
           <a:p>
-            <a:pPr marL="0" lvl="0" indent="0">
+            <a:pPr marL="0" indent="0" lvl="0">
               <a:lnSpc>
                 <a:spcPct val="104000"/>
               </a:lnSpc>
@@ -22502,7 +21670,7 @@
             </a:r>
           </a:p>
           <a:p>
-            <a:pPr marL="0" lvl="0" indent="0">
+            <a:pPr marL="0" indent="0" lvl="0">
               <a:lnSpc>
                 <a:spcPct val="104000"/>
               </a:lnSpc>
@@ -22565,7 +21733,7 @@
             </a:r>
           </a:p>
           <a:p>
-            <a:pPr marL="0" lvl="0" indent="0">
+            <a:pPr marL="0" indent="0" lvl="0">
               <a:lnSpc>
                 <a:spcPct val="104000"/>
               </a:lnSpc>
@@ -22628,7 +21796,7 @@
             </a:r>
           </a:p>
           <a:p>
-            <a:pPr marL="0" lvl="0" indent="0">
+            <a:pPr marL="0" indent="0" lvl="0">
               <a:lnSpc>
                 <a:spcPct val="104000"/>
               </a:lnSpc>
@@ -22647,7 +21815,7 @@
             </a:r>
           </a:p>
           <a:p>
-            <a:pPr marL="0" lvl="0" indent="0">
+            <a:pPr marL="0" indent="0" lvl="0">
               <a:lnSpc>
                 <a:spcPct val="104000"/>
               </a:lnSpc>
@@ -22689,7 +21857,7 @@
           </a:bodyPr>
           <a:lstStyle/>
           <a:p>
-            <a:pPr marL="0" lvl="0" indent="0">
+            <a:pPr marL="0" indent="0" lvl="0">
               <a:lnSpc>
                 <a:spcPct val="100000"/>
               </a:lnSpc>
@@ -22731,7 +21899,7 @@
           </a:bodyPr>
           <a:lstStyle/>
           <a:p>
-            <a:pPr marL="0" lvl="0" indent="0" algn="r">
+            <a:pPr marL="0" indent="0" lvl="0" algn="r">
               <a:lnSpc>
                 <a:spcPct val="100000"/>
               </a:lnSpc>
@@ -22753,9 +21921,6 @@
       </p:sp>
     </p:spTree>
   </p:cSld>
-  <p:clrMapOvr>
-    <a:masterClrMapping/>
-  </p:clrMapOvr>
 </p:sld>
 </file>
 
@@ -22868,322 +22033,5 @@
       </a:bgFillStyleLst>
     </a:fmtScheme>
   </a:themeElements>
-  <a:objectDefaults/>
-  <a:extraClrSchemeLst/>
-</a:theme>
-</file>
-
-<file path=ppt/theme/theme2.xml><?xml version="1.0" encoding="utf-8"?>
-<a:theme xmlns:a="http://schemas.openxmlformats.org/drawingml/2006/main" name="Office Theme">
-  <a:themeElements>
-    <a:clrScheme name="Office">
-      <a:dk1>
-        <a:sysClr val="windowText" lastClr="000000"/>
-      </a:dk1>
-      <a:lt1>
-        <a:sysClr val="window" lastClr="FFFFFF"/>
-      </a:lt1>
-      <a:dk2>
-        <a:srgbClr val="0E2841"/>
-      </a:dk2>
-      <a:lt2>
-        <a:srgbClr val="E8E8E8"/>
-      </a:lt2>
-      <a:accent1>
-        <a:srgbClr val="156082"/>
-      </a:accent1>
-      <a:accent2>
-        <a:srgbClr val="E97132"/>
-      </a:accent2>
-      <a:accent3>
-        <a:srgbClr val="196B24"/>
-      </a:accent3>
-      <a:accent4>
-        <a:srgbClr val="0F9ED5"/>
-      </a:accent4>
-      <a:accent5>
-        <a:srgbClr val="A02B93"/>
-      </a:accent5>
-      <a:accent6>
-        <a:srgbClr val="4EA72E"/>
-      </a:accent6>
-      <a:hlink>
-        <a:srgbClr val="467886"/>
-      </a:hlink>
-      <a:folHlink>
-        <a:srgbClr val="96607D"/>
-      </a:folHlink>
-    </a:clrScheme>
-    <a:fontScheme name="Office">
-      <a:majorFont>
-        <a:latin typeface="Aptos Display" panose="02110004020202020204"/>
-        <a:ea typeface=""/>
-        <a:cs typeface=""/>
-        <a:font script="Jpan" typeface="游ゴシック Light"/>
-        <a:font script="Hang" typeface="맑은 고딕"/>
-        <a:font script="Hans" typeface="等线 Light"/>
-        <a:font script="Hant" typeface="新細明體"/>
-        <a:font script="Arab" typeface="Times New Roman"/>
-        <a:font script="Hebr" typeface="Times New Roman"/>
-        <a:font script="Thai" typeface="Angsana New"/>
-        <a:font script="Ethi" typeface="Nyala"/>
-        <a:font script="Beng" typeface="Vrinda"/>
-        <a:font script="Gujr" typeface="Shruti"/>
-        <a:font script="Khmr" typeface="MoolBoran"/>
-        <a:font script="Knda" typeface="Tunga"/>
-        <a:font script="Guru" typeface="Raavi"/>
-        <a:font script="Cans" typeface="Euphemia"/>
-        <a:font script="Cher" typeface="Plantagenet Cherokee"/>
-        <a:font script="Yiii" typeface="Microsoft Yi Baiti"/>
-        <a:font script="Tibt" typeface="Microsoft Himalaya"/>
-        <a:font script="Thaa" typeface="MV Boli"/>
-        <a:font script="Deva" typeface="Mangal"/>
-        <a:font script="Telu" typeface="Gautami"/>
-        <a:font script="Taml" typeface="Latha"/>
-        <a:font script="Syrc" typeface="Estrangelo Edessa"/>
-        <a:font script="Orya" typeface="Kalinga"/>
-        <a:font script="Mlym" typeface="Kartika"/>
-        <a:font script="Laoo" typeface="DokChampa"/>
-        <a:font script="Sinh" typeface="Iskoola Pota"/>
-        <a:font script="Mong" typeface="Mongolian Baiti"/>
-        <a:font script="Viet" typeface="Times New Roman"/>
-        <a:font script="Uigh" typeface="Microsoft Uighur"/>
-        <a:font script="Geor" typeface="Sylfaen"/>
-        <a:font script="Armn" typeface="Arial"/>
-        <a:font script="Bugi" typeface="Leelawadee UI"/>
-        <a:font script="Bopo" typeface="Microsoft JhengHei"/>
-        <a:font script="Java" typeface="Javanese Text"/>
-        <a:font script="Lisu" typeface="Segoe UI"/>
-        <a:font script="Mymr" typeface="Myanmar Text"/>
-        <a:font script="Nkoo" typeface="Ebrima"/>
-        <a:font script="Olck" typeface="Nirmala UI"/>
-        <a:font script="Osma" typeface="Ebrima"/>
-        <a:font script="Phag" typeface="Phagspa"/>
-        <a:font script="Syrn" typeface="Estrangelo Edessa"/>
-        <a:font script="Syrj" typeface="Estrangelo Edessa"/>
-        <a:font script="Syre" typeface="Estrangelo Edessa"/>
-        <a:font script="Sora" typeface="Nirmala UI"/>
-        <a:font script="Tale" typeface="Microsoft Tai Le"/>
-        <a:font script="Talu" typeface="Microsoft New Tai Lue"/>
-        <a:font script="Tfng" typeface="Ebrima"/>
-      </a:majorFont>
-      <a:minorFont>
-        <a:latin typeface="Aptos" panose="02110004020202020204"/>
-        <a:ea typeface=""/>
-        <a:cs typeface=""/>
-        <a:font script="Jpan" typeface="游ゴシック"/>
-        <a:font script="Hang" typeface="맑은 고딕"/>
-        <a:font script="Hans" typeface="等线"/>
-        <a:font script="Hant" typeface="新細明體"/>
-        <a:font script="Arab" typeface="Arial"/>
-        <a:font script="Hebr" typeface="Arial"/>
-        <a:font script="Thai" typeface="Cordia New"/>
-        <a:font script="Ethi" typeface="Nyala"/>
-        <a:font script="Beng" typeface="Vrinda"/>
-        <a:font script="Gujr" typeface="Shruti"/>
-        <a:font script="Khmr" typeface="DaunPenh"/>
-        <a:font script="Knda" typeface="Tunga"/>
-        <a:font script="Guru" typeface="Raavi"/>
-        <a:font script="Cans" typeface="Euphemia"/>
-        <a:font script="Cher" typeface="Plantagenet Cherokee"/>
-        <a:font script="Yiii" typeface="Microsoft Yi Baiti"/>
-        <a:font script="Tibt" typeface="Microsoft Himalaya"/>
-        <a:font script="Thaa" typeface="MV Boli"/>
-        <a:font script="Deva" typeface="Mangal"/>
-        <a:font script="Telu" typeface="Gautami"/>
-        <a:font script="Taml" typeface="Latha"/>
-        <a:font script="Syrc" typeface="Estrangelo Edessa"/>
-        <a:font script="Orya" typeface="Kalinga"/>
-        <a:font script="Mlym" typeface="Kartika"/>
-        <a:font script="Laoo" typeface="DokChampa"/>
-        <a:font script="Sinh" typeface="Iskoola Pota"/>
-        <a:font script="Mong" typeface="Mongolian Baiti"/>
-        <a:font script="Viet" typeface="Arial"/>
-        <a:font script="Uigh" typeface="Microsoft Uighur"/>
-        <a:font script="Geor" typeface="Sylfaen"/>
-        <a:font script="Armn" typeface="Arial"/>
-        <a:font script="Bugi" typeface="Leelawadee UI"/>
-        <a:font script="Bopo" typeface="Microsoft JhengHei"/>
-        <a:font script="Java" typeface="Javanese Text"/>
-        <a:font script="Lisu" typeface="Segoe UI"/>
-        <a:font script="Mymr" typeface="Myanmar Text"/>
-        <a:font script="Nkoo" typeface="Ebrima"/>
-        <a:font script="Olck" typeface="Nirmala UI"/>
-        <a:font script="Osma" typeface="Ebrima"/>
-        <a:font script="Phag" typeface="Phagspa"/>
-        <a:font script="Syrn" typeface="Estrangelo Edessa"/>
-        <a:font script="Syrj" typeface="Estrangelo Edessa"/>
-        <a:font script="Syre" typeface="Estrangelo Edessa"/>
-        <a:font script="Sora" typeface="Nirmala UI"/>
-        <a:font script="Tale" typeface="Microsoft Tai Le"/>
-        <a:font script="Talu" typeface="Microsoft New Tai Lue"/>
-        <a:font script="Tfng" typeface="Ebrima"/>
-      </a:minorFont>
-    </a:fontScheme>
-    <a:fmtScheme name="Office">
-      <a:fillStyleLst>
-        <a:solidFill>
-          <a:schemeClr val="phClr"/>
-        </a:solidFill>
-        <a:gradFill rotWithShape="1">
-          <a:gsLst>
-            <a:gs pos="0">
-              <a:schemeClr val="phClr">
-                <a:lumMod val="110000"/>
-                <a:satMod val="105000"/>
-                <a:tint val="67000"/>
-              </a:schemeClr>
-            </a:gs>
-            <a:gs pos="50000">
-              <a:schemeClr val="phClr">
-                <a:lumMod val="105000"/>
-                <a:satMod val="103000"/>
-                <a:tint val="73000"/>
-              </a:schemeClr>
-            </a:gs>
-            <a:gs pos="100000">
-              <a:schemeClr val="phClr">
-                <a:lumMod val="105000"/>
-                <a:satMod val="109000"/>
-                <a:tint val="81000"/>
-              </a:schemeClr>
-            </a:gs>
-          </a:gsLst>
-          <a:lin ang="5400000" scaled="0"/>
-        </a:gradFill>
-        <a:gradFill rotWithShape="1">
-          <a:gsLst>
-            <a:gs pos="0">
-              <a:schemeClr val="phClr">
-                <a:satMod val="103000"/>
-                <a:lumMod val="102000"/>
-                <a:tint val="94000"/>
-              </a:schemeClr>
-            </a:gs>
-            <a:gs pos="50000">
-              <a:schemeClr val="phClr">
-                <a:satMod val="110000"/>
-                <a:lumMod val="100000"/>
-                <a:shade val="100000"/>
-              </a:schemeClr>
-            </a:gs>
-            <a:gs pos="100000">
-              <a:schemeClr val="phClr">
-                <a:lumMod val="99000"/>
-                <a:satMod val="120000"/>
-                <a:shade val="78000"/>
-              </a:schemeClr>
-            </a:gs>
-          </a:gsLst>
-          <a:lin ang="5400000" scaled="0"/>
-        </a:gradFill>
-      </a:fillStyleLst>
-      <a:lnStyleLst>
-        <a:ln w="12700" cap="flat" cmpd="sng" algn="ctr">
-          <a:solidFill>
-            <a:schemeClr val="phClr"/>
-          </a:solidFill>
-          <a:prstDash val="solid"/>
-          <a:miter lim="800000"/>
-        </a:ln>
-        <a:ln w="19050" cap="flat" cmpd="sng" algn="ctr">
-          <a:solidFill>
-            <a:schemeClr val="phClr"/>
-          </a:solidFill>
-          <a:prstDash val="solid"/>
-          <a:miter lim="800000"/>
-        </a:ln>
-        <a:ln w="25400" cap="flat" cmpd="sng" algn="ctr">
-          <a:solidFill>
-            <a:schemeClr val="phClr"/>
-          </a:solidFill>
-          <a:prstDash val="solid"/>
-          <a:miter lim="800000"/>
-        </a:ln>
-      </a:lnStyleLst>
-      <a:effectStyleLst>
-        <a:effectStyle>
-          <a:effectLst/>
-        </a:effectStyle>
-        <a:effectStyle>
-          <a:effectLst/>
-        </a:effectStyle>
-        <a:effectStyle>
-          <a:effectLst>
-            <a:outerShdw blurRad="57150" dist="19050" dir="5400000" algn="ctr" rotWithShape="0">
-              <a:srgbClr val="000000">
-                <a:alpha val="63000"/>
-              </a:srgbClr>
-            </a:outerShdw>
-          </a:effectLst>
-        </a:effectStyle>
-      </a:effectStyleLst>
-      <a:bgFillStyleLst>
-        <a:solidFill>
-          <a:schemeClr val="phClr"/>
-        </a:solidFill>
-        <a:solidFill>
-          <a:schemeClr val="phClr">
-            <a:tint val="95000"/>
-            <a:satMod val="170000"/>
-          </a:schemeClr>
-        </a:solidFill>
-        <a:gradFill rotWithShape="1">
-          <a:gsLst>
-            <a:gs pos="0">
-              <a:schemeClr val="phClr">
-                <a:tint val="93000"/>
-                <a:satMod val="150000"/>
-                <a:shade val="98000"/>
-                <a:lumMod val="102000"/>
-              </a:schemeClr>
-            </a:gs>
-            <a:gs pos="50000">
-              <a:schemeClr val="phClr">
-                <a:tint val="98000"/>
-                <a:satMod val="130000"/>
-                <a:shade val="90000"/>
-                <a:lumMod val="103000"/>
-              </a:schemeClr>
-            </a:gs>
-            <a:gs pos="100000">
-              <a:schemeClr val="phClr">
-                <a:shade val="63000"/>
-                <a:satMod val="120000"/>
-              </a:schemeClr>
-            </a:gs>
-          </a:gsLst>
-          <a:lin ang="5400000" scaled="0"/>
-        </a:gradFill>
-      </a:bgFillStyleLst>
-    </a:fmtScheme>
-  </a:themeElements>
-  <a:objectDefaults>
-    <a:lnDef>
-      <a:spPr/>
-      <a:bodyPr/>
-      <a:lstStyle/>
-      <a:style>
-        <a:lnRef idx="2">
-          <a:schemeClr val="accent1"/>
-        </a:lnRef>
-        <a:fillRef idx="0">
-          <a:schemeClr val="accent1"/>
-        </a:fillRef>
-        <a:effectRef idx="1">
-          <a:schemeClr val="accent1"/>
-        </a:effectRef>
-        <a:fontRef idx="minor">
-          <a:schemeClr val="tx1"/>
-        </a:fontRef>
-      </a:style>
-    </a:lnDef>
-  </a:objectDefaults>
-  <a:extraClrSchemeLst/>
-  <a:extLst>
-    <a:ext uri="{05A4C25C-085E-4340-85A3-A5531E510DB2}">
-      <thm15:themeFamily xmlns:thm15="http://schemas.microsoft.com/office/thememl/2012/main" name="Office Theme" id="{2E142A2C-CD16-42D6-873A-C26D2A0506FA}" vid="{1BDDFF52-6CD6-40A5-AB3C-68EB2F1E4D0A}"/>
-    </a:ext>
-  </a:extLst>
 </a:theme>
 </file>